--- a/Introduccion a la Ingenieria/Clases/Clase 2 - Historia y evolucion de la Ingenieria/Presentacion.pptx
+++ b/Introduccion a la Ingenieria/Clases/Clase 2 - Historia y evolucion de la Ingenieria/Presentacion.pptx
@@ -18,6 +18,16 @@
     <p:sldId id="266" r:id="rId17"/>
     <p:sldId id="267" r:id="rId18"/>
     <p:sldId id="268" r:id="rId19"/>
+    <p:sldId id="269" r:id="rId20"/>
+    <p:sldId id="270" r:id="rId21"/>
+    <p:sldId id="271" r:id="rId22"/>
+    <p:sldId id="272" r:id="rId23"/>
+    <p:sldId id="273" r:id="rId24"/>
+    <p:sldId id="274" r:id="rId25"/>
+    <p:sldId id="275" r:id="rId26"/>
+    <p:sldId id="276" r:id="rId27"/>
+    <p:sldId id="277" r:id="rId28"/>
+    <p:sldId id="278" r:id="rId29"/>
   </p:sldIdLst>
   <p:sldSz cx="12191695" cy="6858000" type="screen4x3"/>
   <p:notesSz cx="6858000" cy="9144000"/>
@@ -3512,7 +3522,7 @@
         <p:spPr>
           <a:xfrm>
             <a:off x="0" y="0"/>
-            <a:ext cx="12191695" cy="1170432"/>
+            <a:ext cx="12191695" cy="960120"/>
           </a:xfrm>
           <a:prstGeom prst="rect">
             <a:avLst/>
@@ -3554,7 +3564,7 @@
         </p:nvSpPr>
         <p:spPr>
           <a:xfrm>
-            <a:off x="0" y="1170432"/>
+            <a:off x="0" y="960120"/>
             <a:ext cx="12191695" cy="41148"/>
           </a:xfrm>
           <a:prstGeom prst="rect">
@@ -3598,7 +3608,7 @@
         <p:spPr>
           <a:xfrm>
             <a:off x="457200" y="164592"/>
-            <a:ext cx="11277295" cy="384048"/>
+            <a:ext cx="11277295" cy="502920"/>
           </a:xfrm>
           <a:prstGeom prst="rect">
             <a:avLst/>
@@ -3618,7 +3628,7 @@
                 </a:solidFill>
                 <a:latin typeface="Calibri"/>
               </a:rPr>
-              <a:t>Taller de hoy: Línea de tiempo del periodo</a:t>
+              <a:t>La pregunta de entrada y para qué sirve incomodar con una fecha</a:t>
             </a:r>
           </a:p>
         </p:txBody>
@@ -3631,8 +3641,8 @@
         </p:nvSpPr>
         <p:spPr>
           <a:xfrm>
-            <a:off x="457200" y="566928"/>
-            <a:ext cx="11277295" cy="411480"/>
+            <a:off x="457200" y="1170432"/>
+            <a:ext cx="11277295" cy="5230368"/>
           </a:xfrm>
           <a:prstGeom prst="rect">
             <a:avLst/>
@@ -3645,909 +3655,122 @@
           </a:bodyPr>
           <a:lstStyle/>
           <a:p>
-            <a:r>
-              <a:rPr sz="1400" b="0" i="0">
-                <a:solidFill>
-                  <a:srgbClr val="B8D8EE"/>
-                </a:solidFill>
-                <a:latin typeface="Calibri"/>
-              </a:rPr>
-              <a:t>17 min en equipos · un periodo por equipo, asignado en orden histórico · línea de tiempo de 4 hitos en draw.io</a:t>
-            </a:r>
-          </a:p>
-        </p:txBody>
-      </p:sp>
-      <p:sp>
-        <p:nvSpPr>
-          <p:cNvPr id="6" name="Rounded Rectangle 5"/>
-          <p:cNvSpPr/>
-          <p:nvPr/>
-        </p:nvSpPr>
-        <p:spPr>
-          <a:xfrm>
-            <a:off x="457200" y="1472184"/>
-            <a:ext cx="11277295" cy="566928"/>
-          </a:xfrm>
-          <a:prstGeom prst="roundRect">
-            <a:avLst>
-              <a:gd name="adj" fmla="val 12000"/>
-            </a:avLst>
-          </a:prstGeom>
-          <a:solidFill>
-            <a:srgbClr val="F2F2F2"/>
-          </a:solidFill>
-          <a:ln>
-            <a:noFill/>
-          </a:ln>
-        </p:spPr>
-        <p:style>
-          <a:lnRef idx="1">
-            <a:schemeClr val="accent1"/>
-          </a:lnRef>
-          <a:fillRef idx="3">
-            <a:schemeClr val="accent1"/>
-          </a:fillRef>
-          <a:effectRef idx="2">
-            <a:schemeClr val="accent1"/>
-          </a:effectRef>
-          <a:fontRef idx="minor">
-            <a:schemeClr val="lt1"/>
-          </a:fontRef>
-        </p:style>
-        <p:txBody>
-          <a:bodyPr rtlCol="0" anchor="ctr"/>
-          <a:lstStyle/>
-          <a:p>
-            <a:pPr algn="ctr"/>
-          </a:p>
-        </p:txBody>
-      </p:sp>
-      <p:sp>
-        <p:nvSpPr>
-          <p:cNvPr id="7" name="Rectangle 6"/>
-          <p:cNvSpPr/>
-          <p:nvPr/>
-        </p:nvSpPr>
-        <p:spPr>
-          <a:xfrm>
-            <a:off x="640080" y="1618487"/>
-            <a:ext cx="274320" cy="274320"/>
-          </a:xfrm>
-          <a:prstGeom prst="rect">
-            <a:avLst/>
-          </a:prstGeom>
-          <a:solidFill>
-            <a:srgbClr val="FFFFFF"/>
-          </a:solidFill>
-          <a:ln>
-            <a:solidFill>
-              <a:srgbClr val="333333"/>
-            </a:solidFill>
-          </a:ln>
-        </p:spPr>
-        <p:style>
-          <a:lnRef idx="1">
-            <a:schemeClr val="accent1"/>
-          </a:lnRef>
-          <a:fillRef idx="3">
-            <a:schemeClr val="accent1"/>
-          </a:fillRef>
-          <a:effectRef idx="2">
-            <a:schemeClr val="accent1"/>
-          </a:effectRef>
-          <a:fontRef idx="minor">
-            <a:schemeClr val="lt1"/>
-          </a:fontRef>
-        </p:style>
-        <p:txBody>
-          <a:bodyPr rtlCol="0" anchor="ctr"/>
-          <a:lstStyle/>
-          <a:p>
-            <a:pPr algn="ctr"/>
-          </a:p>
-        </p:txBody>
-      </p:sp>
-      <p:sp>
-        <p:nvSpPr>
-          <p:cNvPr id="8" name="Rectangle 7"/>
-          <p:cNvSpPr/>
-          <p:nvPr/>
-        </p:nvSpPr>
-        <p:spPr>
-          <a:xfrm>
-            <a:off x="640080" y="1618487"/>
-            <a:ext cx="73152" cy="274320"/>
-          </a:xfrm>
-          <a:prstGeom prst="rect">
-            <a:avLst/>
-          </a:prstGeom>
-          <a:solidFill>
-            <a:srgbClr val="269CCB"/>
-          </a:solidFill>
-          <a:ln>
-            <a:noFill/>
-          </a:ln>
-        </p:spPr>
-        <p:style>
-          <a:lnRef idx="1">
-            <a:schemeClr val="accent1"/>
-          </a:lnRef>
-          <a:fillRef idx="3">
-            <a:schemeClr val="accent1"/>
-          </a:fillRef>
-          <a:effectRef idx="2">
-            <a:schemeClr val="accent1"/>
-          </a:effectRef>
-          <a:fontRef idx="minor">
-            <a:schemeClr val="lt1"/>
-          </a:fontRef>
-        </p:style>
-        <p:txBody>
-          <a:bodyPr rtlCol="0" anchor="ctr"/>
-          <a:lstStyle/>
-          <a:p>
-            <a:pPr algn="ctr"/>
-          </a:p>
-        </p:txBody>
-      </p:sp>
-      <p:sp>
-        <p:nvSpPr>
-          <p:cNvPr id="9" name="TextBox 8"/>
-          <p:cNvSpPr txBox="1"/>
-          <p:nvPr/>
-        </p:nvSpPr>
-        <p:spPr>
-          <a:xfrm>
-            <a:off x="1097280" y="1563624"/>
-            <a:ext cx="10362895" cy="402336"/>
-          </a:xfrm>
-          <a:prstGeom prst="rect">
-            <a:avLst/>
-          </a:prstGeom>
-          <a:noFill/>
-        </p:spPr>
-        <p:txBody>
-          <a:bodyPr wrap="square" anchor="ctr"/>
-          <a:lstStyle/>
-          <a:p>
-            <a:r>
-              <a:rPr sz="1500" b="1" i="0">
-                <a:solidFill>
-                  <a:srgbClr val="333333"/>
-                </a:solidFill>
-                <a:latin typeface="Calibri"/>
-              </a:rPr>
-              <a:t>LOS CUATRO HITOS</a:t>
-            </a:r>
-            <a:r>
-              <a:rPr sz="1500" b="0" i="0">
-                <a:solidFill>
-                  <a:srgbClr val="333333"/>
-                </a:solidFill>
-                <a:latin typeface="Calibri"/>
-              </a:rPr>
-              <a:t> — Cuatro hechos de su periodo, con año, puestos en orden en la línea de tiempo.</a:t>
-            </a:r>
-          </a:p>
-        </p:txBody>
-      </p:sp>
-      <p:sp>
-        <p:nvSpPr>
-          <p:cNvPr id="10" name="Rounded Rectangle 9"/>
-          <p:cNvSpPr/>
-          <p:nvPr/>
-        </p:nvSpPr>
-        <p:spPr>
-          <a:xfrm>
-            <a:off x="457200" y="2148839"/>
-            <a:ext cx="11277295" cy="566928"/>
-          </a:xfrm>
-          <a:prstGeom prst="roundRect">
-            <a:avLst>
-              <a:gd name="adj" fmla="val 12000"/>
-            </a:avLst>
-          </a:prstGeom>
-          <a:solidFill>
-            <a:srgbClr val="F2F2F2"/>
-          </a:solidFill>
-          <a:ln>
-            <a:noFill/>
-          </a:ln>
-        </p:spPr>
-        <p:style>
-          <a:lnRef idx="1">
-            <a:schemeClr val="accent1"/>
-          </a:lnRef>
-          <a:fillRef idx="3">
-            <a:schemeClr val="accent1"/>
-          </a:fillRef>
-          <a:effectRef idx="2">
-            <a:schemeClr val="accent1"/>
-          </a:effectRef>
-          <a:fontRef idx="minor">
-            <a:schemeClr val="lt1"/>
-          </a:fontRef>
-        </p:style>
-        <p:txBody>
-          <a:bodyPr rtlCol="0" anchor="ctr"/>
-          <a:lstStyle/>
-          <a:p>
-            <a:pPr algn="ctr"/>
-          </a:p>
-        </p:txBody>
-      </p:sp>
-      <p:sp>
-        <p:nvSpPr>
-          <p:cNvPr id="11" name="Rectangle 10"/>
-          <p:cNvSpPr/>
-          <p:nvPr/>
-        </p:nvSpPr>
-        <p:spPr>
-          <a:xfrm>
-            <a:off x="640080" y="2295144"/>
-            <a:ext cx="274320" cy="274320"/>
-          </a:xfrm>
-          <a:prstGeom prst="rect">
-            <a:avLst/>
-          </a:prstGeom>
-          <a:solidFill>
-            <a:srgbClr val="FFFFFF"/>
-          </a:solidFill>
-          <a:ln>
-            <a:solidFill>
-              <a:srgbClr val="333333"/>
-            </a:solidFill>
-          </a:ln>
-        </p:spPr>
-        <p:style>
-          <a:lnRef idx="1">
-            <a:schemeClr val="accent1"/>
-          </a:lnRef>
-          <a:fillRef idx="3">
-            <a:schemeClr val="accent1"/>
-          </a:fillRef>
-          <a:effectRef idx="2">
-            <a:schemeClr val="accent1"/>
-          </a:effectRef>
-          <a:fontRef idx="minor">
-            <a:schemeClr val="lt1"/>
-          </a:fontRef>
-        </p:style>
-        <p:txBody>
-          <a:bodyPr rtlCol="0" anchor="ctr"/>
-          <a:lstStyle/>
-          <a:p>
-            <a:pPr algn="ctr"/>
-          </a:p>
-        </p:txBody>
-      </p:sp>
-      <p:sp>
-        <p:nvSpPr>
-          <p:cNvPr id="12" name="Rectangle 11"/>
-          <p:cNvSpPr/>
-          <p:nvPr/>
-        </p:nvSpPr>
-        <p:spPr>
-          <a:xfrm>
-            <a:off x="640080" y="2295144"/>
-            <a:ext cx="73152" cy="274320"/>
-          </a:xfrm>
-          <a:prstGeom prst="rect">
-            <a:avLst/>
-          </a:prstGeom>
-          <a:solidFill>
-            <a:srgbClr val="269CCB"/>
-          </a:solidFill>
-          <a:ln>
-            <a:noFill/>
-          </a:ln>
-        </p:spPr>
-        <p:style>
-          <a:lnRef idx="1">
-            <a:schemeClr val="accent1"/>
-          </a:lnRef>
-          <a:fillRef idx="3">
-            <a:schemeClr val="accent1"/>
-          </a:fillRef>
-          <a:effectRef idx="2">
-            <a:schemeClr val="accent1"/>
-          </a:effectRef>
-          <a:fontRef idx="minor">
-            <a:schemeClr val="lt1"/>
-          </a:fontRef>
-        </p:style>
-        <p:txBody>
-          <a:bodyPr rtlCol="0" anchor="ctr"/>
-          <a:lstStyle/>
-          <a:p>
-            <a:pPr algn="ctr"/>
-          </a:p>
-        </p:txBody>
-      </p:sp>
-      <p:sp>
-        <p:nvSpPr>
-          <p:cNvPr id="13" name="TextBox 12"/>
-          <p:cNvSpPr txBox="1"/>
-          <p:nvPr/>
-        </p:nvSpPr>
-        <p:spPr>
-          <a:xfrm>
-            <a:off x="1097280" y="2240279"/>
-            <a:ext cx="10362895" cy="402336"/>
-          </a:xfrm>
-          <a:prstGeom prst="rect">
-            <a:avLst/>
-          </a:prstGeom>
-          <a:noFill/>
-        </p:spPr>
-        <p:txBody>
-          <a:bodyPr wrap="square" anchor="ctr"/>
-          <a:lstStyle/>
-          <a:p>
-            <a:r>
-              <a:rPr sz="1500" b="1" i="0">
-                <a:solidFill>
-                  <a:srgbClr val="333333"/>
-                </a:solidFill>
-                <a:latin typeface="Calibri"/>
-              </a:rPr>
-              <a:t>QUÉ DOLÍA ANTES</a:t>
-            </a:r>
-            <a:r>
-              <a:rPr sz="1500" b="0" i="0">
-                <a:solidFill>
-                  <a:srgbClr val="333333"/>
-                </a:solidFill>
-                <a:latin typeface="Calibri"/>
-              </a:rPr>
-              <a:t> — Para cada hito: el problema concreto que existía antes y a quién le pasaba.</a:t>
-            </a:r>
-          </a:p>
-        </p:txBody>
-      </p:sp>
-      <p:sp>
-        <p:nvSpPr>
-          <p:cNvPr id="14" name="Rounded Rectangle 13"/>
-          <p:cNvSpPr/>
-          <p:nvPr/>
-        </p:nvSpPr>
-        <p:spPr>
-          <a:xfrm>
-            <a:off x="457200" y="2825496"/>
-            <a:ext cx="11277295" cy="566928"/>
-          </a:xfrm>
-          <a:prstGeom prst="roundRect">
-            <a:avLst>
-              <a:gd name="adj" fmla="val 12000"/>
-            </a:avLst>
-          </a:prstGeom>
-          <a:solidFill>
-            <a:srgbClr val="F2F2F2"/>
-          </a:solidFill>
-          <a:ln>
-            <a:noFill/>
-          </a:ln>
-        </p:spPr>
-        <p:style>
-          <a:lnRef idx="1">
-            <a:schemeClr val="accent1"/>
-          </a:lnRef>
-          <a:fillRef idx="3">
-            <a:schemeClr val="accent1"/>
-          </a:fillRef>
-          <a:effectRef idx="2">
-            <a:schemeClr val="accent1"/>
-          </a:effectRef>
-          <a:fontRef idx="minor">
-            <a:schemeClr val="lt1"/>
-          </a:fontRef>
-        </p:style>
-        <p:txBody>
-          <a:bodyPr rtlCol="0" anchor="ctr"/>
-          <a:lstStyle/>
-          <a:p>
-            <a:pPr algn="ctr"/>
-          </a:p>
-        </p:txBody>
-      </p:sp>
-      <p:sp>
-        <p:nvSpPr>
-          <p:cNvPr id="15" name="Rectangle 14"/>
-          <p:cNvSpPr/>
-          <p:nvPr/>
-        </p:nvSpPr>
-        <p:spPr>
-          <a:xfrm>
-            <a:off x="640080" y="2971800"/>
-            <a:ext cx="274320" cy="274320"/>
-          </a:xfrm>
-          <a:prstGeom prst="rect">
-            <a:avLst/>
-          </a:prstGeom>
-          <a:solidFill>
-            <a:srgbClr val="FFFFFF"/>
-          </a:solidFill>
-          <a:ln>
-            <a:solidFill>
-              <a:srgbClr val="333333"/>
-            </a:solidFill>
-          </a:ln>
-        </p:spPr>
-        <p:style>
-          <a:lnRef idx="1">
-            <a:schemeClr val="accent1"/>
-          </a:lnRef>
-          <a:fillRef idx="3">
-            <a:schemeClr val="accent1"/>
-          </a:fillRef>
-          <a:effectRef idx="2">
-            <a:schemeClr val="accent1"/>
-          </a:effectRef>
-          <a:fontRef idx="minor">
-            <a:schemeClr val="lt1"/>
-          </a:fontRef>
-        </p:style>
-        <p:txBody>
-          <a:bodyPr rtlCol="0" anchor="ctr"/>
-          <a:lstStyle/>
-          <a:p>
-            <a:pPr algn="ctr"/>
-          </a:p>
-        </p:txBody>
-      </p:sp>
-      <p:sp>
-        <p:nvSpPr>
-          <p:cNvPr id="16" name="Rectangle 15"/>
-          <p:cNvSpPr/>
-          <p:nvPr/>
-        </p:nvSpPr>
-        <p:spPr>
-          <a:xfrm>
-            <a:off x="640080" y="2971800"/>
-            <a:ext cx="73152" cy="274320"/>
-          </a:xfrm>
-          <a:prstGeom prst="rect">
-            <a:avLst/>
-          </a:prstGeom>
-          <a:solidFill>
-            <a:srgbClr val="269CCB"/>
-          </a:solidFill>
-          <a:ln>
-            <a:noFill/>
-          </a:ln>
-        </p:spPr>
-        <p:style>
-          <a:lnRef idx="1">
-            <a:schemeClr val="accent1"/>
-          </a:lnRef>
-          <a:fillRef idx="3">
-            <a:schemeClr val="accent1"/>
-          </a:fillRef>
-          <a:effectRef idx="2">
-            <a:schemeClr val="accent1"/>
-          </a:effectRef>
-          <a:fontRef idx="minor">
-            <a:schemeClr val="lt1"/>
-          </a:fontRef>
-        </p:style>
-        <p:txBody>
-          <a:bodyPr rtlCol="0" anchor="ctr"/>
-          <a:lstStyle/>
-          <a:p>
-            <a:pPr algn="ctr"/>
-          </a:p>
-        </p:txBody>
-      </p:sp>
-      <p:sp>
-        <p:nvSpPr>
-          <p:cNvPr id="17" name="TextBox 16"/>
-          <p:cNvSpPr txBox="1"/>
-          <p:nvPr/>
-        </p:nvSpPr>
-        <p:spPr>
-          <a:xfrm>
-            <a:off x="1097280" y="2916936"/>
-            <a:ext cx="10362895" cy="402336"/>
-          </a:xfrm>
-          <a:prstGeom prst="rect">
-            <a:avLst/>
-          </a:prstGeom>
-          <a:noFill/>
-        </p:spPr>
-        <p:txBody>
-          <a:bodyPr wrap="square" anchor="ctr"/>
-          <a:lstStyle/>
-          <a:p>
-            <a:r>
-              <a:rPr sz="1500" b="1" i="0">
-                <a:solidFill>
-                  <a:srgbClr val="333333"/>
-                </a:solidFill>
-                <a:latin typeface="Calibri"/>
-              </a:rPr>
-              <a:t>QUÉ PROPUSO</a:t>
-            </a:r>
-            <a:r>
-              <a:rPr sz="1500" b="0" i="0">
-                <a:solidFill>
-                  <a:srgbClr val="333333"/>
-                </a:solidFill>
-                <a:latin typeface="Calibri"/>
-              </a:rPr>
-              <a:t> — Para cada hito: la idea, el método o la herramienta, en una frase que ustedes puedan explicar.</a:t>
-            </a:r>
-          </a:p>
-        </p:txBody>
-      </p:sp>
-      <p:sp>
-        <p:nvSpPr>
-          <p:cNvPr id="18" name="Rounded Rectangle 17"/>
-          <p:cNvSpPr/>
-          <p:nvPr/>
-        </p:nvSpPr>
-        <p:spPr>
-          <a:xfrm>
-            <a:off x="457200" y="3502152"/>
-            <a:ext cx="11277295" cy="566928"/>
-          </a:xfrm>
-          <a:prstGeom prst="roundRect">
-            <a:avLst>
-              <a:gd name="adj" fmla="val 12000"/>
-            </a:avLst>
-          </a:prstGeom>
-          <a:solidFill>
-            <a:srgbClr val="F2F2F2"/>
-          </a:solidFill>
-          <a:ln>
-            <a:noFill/>
-          </a:ln>
-        </p:spPr>
-        <p:style>
-          <a:lnRef idx="1">
-            <a:schemeClr val="accent1"/>
-          </a:lnRef>
-          <a:fillRef idx="3">
-            <a:schemeClr val="accent1"/>
-          </a:fillRef>
-          <a:effectRef idx="2">
-            <a:schemeClr val="accent1"/>
-          </a:effectRef>
-          <a:fontRef idx="minor">
-            <a:schemeClr val="lt1"/>
-          </a:fontRef>
-        </p:style>
-        <p:txBody>
-          <a:bodyPr rtlCol="0" anchor="ctr"/>
-          <a:lstStyle/>
-          <a:p>
-            <a:pPr algn="ctr"/>
-          </a:p>
-        </p:txBody>
-      </p:sp>
-      <p:sp>
-        <p:nvSpPr>
-          <p:cNvPr id="19" name="Rectangle 18"/>
-          <p:cNvSpPr/>
-          <p:nvPr/>
-        </p:nvSpPr>
-        <p:spPr>
-          <a:xfrm>
-            <a:off x="640080" y="3648456"/>
-            <a:ext cx="274320" cy="274320"/>
-          </a:xfrm>
-          <a:prstGeom prst="rect">
-            <a:avLst/>
-          </a:prstGeom>
-          <a:solidFill>
-            <a:srgbClr val="FFFFFF"/>
-          </a:solidFill>
-          <a:ln>
-            <a:solidFill>
-              <a:srgbClr val="333333"/>
-            </a:solidFill>
-          </a:ln>
-        </p:spPr>
-        <p:style>
-          <a:lnRef idx="1">
-            <a:schemeClr val="accent1"/>
-          </a:lnRef>
-          <a:fillRef idx="3">
-            <a:schemeClr val="accent1"/>
-          </a:fillRef>
-          <a:effectRef idx="2">
-            <a:schemeClr val="accent1"/>
-          </a:effectRef>
-          <a:fontRef idx="minor">
-            <a:schemeClr val="lt1"/>
-          </a:fontRef>
-        </p:style>
-        <p:txBody>
-          <a:bodyPr rtlCol="0" anchor="ctr"/>
-          <a:lstStyle/>
-          <a:p>
-            <a:pPr algn="ctr"/>
-          </a:p>
-        </p:txBody>
-      </p:sp>
-      <p:sp>
-        <p:nvSpPr>
-          <p:cNvPr id="20" name="Rectangle 19"/>
-          <p:cNvSpPr/>
-          <p:nvPr/>
-        </p:nvSpPr>
-        <p:spPr>
-          <a:xfrm>
-            <a:off x="640080" y="3648456"/>
-            <a:ext cx="73152" cy="274320"/>
-          </a:xfrm>
-          <a:prstGeom prst="rect">
-            <a:avLst/>
-          </a:prstGeom>
-          <a:solidFill>
-            <a:srgbClr val="269CCB"/>
-          </a:solidFill>
-          <a:ln>
-            <a:noFill/>
-          </a:ln>
-        </p:spPr>
-        <p:style>
-          <a:lnRef idx="1">
-            <a:schemeClr val="accent1"/>
-          </a:lnRef>
-          <a:fillRef idx="3">
-            <a:schemeClr val="accent1"/>
-          </a:fillRef>
-          <a:effectRef idx="2">
-            <a:schemeClr val="accent1"/>
-          </a:effectRef>
-          <a:fontRef idx="minor">
-            <a:schemeClr val="lt1"/>
-          </a:fontRef>
-        </p:style>
-        <p:txBody>
-          <a:bodyPr rtlCol="0" anchor="ctr"/>
-          <a:lstStyle/>
-          <a:p>
-            <a:pPr algn="ctr"/>
-          </a:p>
-        </p:txBody>
-      </p:sp>
-      <p:sp>
-        <p:nvSpPr>
-          <p:cNvPr id="21" name="TextBox 20"/>
-          <p:cNvSpPr txBox="1"/>
-          <p:nvPr/>
-        </p:nvSpPr>
-        <p:spPr>
-          <a:xfrm>
-            <a:off x="1097280" y="3593592"/>
-            <a:ext cx="10362895" cy="402336"/>
-          </a:xfrm>
-          <a:prstGeom prst="rect">
-            <a:avLst/>
-          </a:prstGeom>
-          <a:noFill/>
-        </p:spPr>
-        <p:txBody>
-          <a:bodyPr wrap="square" anchor="ctr"/>
-          <a:lstStyle/>
-          <a:p>
-            <a:r>
-              <a:rPr sz="1500" b="1" i="0">
-                <a:solidFill>
-                  <a:srgbClr val="333333"/>
-                </a:solidFill>
-                <a:latin typeface="Calibri"/>
-              </a:rPr>
-              <a:t>QUÉ SIGUE VIVO HOY</a:t>
-            </a:r>
-            <a:r>
-              <a:rPr sz="1500" b="0" i="0">
-                <a:solidFill>
-                  <a:srgbClr val="333333"/>
-                </a:solidFill>
-                <a:latin typeface="Calibri"/>
-              </a:rPr>
-              <a:t> — Para </a:t>
-            </a:r>
-            <a:r>
-              <a:rPr sz="1500" b="1" i="0">
-                <a:solidFill>
-                  <a:srgbClr val="333333"/>
-                </a:solidFill>
-                <a:latin typeface="Calibri"/>
-              </a:rPr>
-              <a:t>al menos dos</a:t>
-            </a:r>
-            <a:r>
-              <a:rPr sz="1500" b="0" i="0">
-                <a:solidFill>
-                  <a:srgbClr val="333333"/>
-                </a:solidFill>
-                <a:latin typeface="Calibri"/>
-              </a:rPr>
-              <a:t> de los cuatro hitos: qué parte de ese problema todavía no está resuelta, con un ejemplo de algo que ustedes hayan visto.</a:t>
-            </a:r>
-          </a:p>
-        </p:txBody>
-      </p:sp>
-      <p:sp>
-        <p:nvSpPr>
-          <p:cNvPr id="22" name="Rounded Rectangle 21"/>
-          <p:cNvSpPr/>
-          <p:nvPr/>
-        </p:nvSpPr>
-        <p:spPr>
-          <a:xfrm>
-            <a:off x="457200" y="4178808"/>
-            <a:ext cx="11277295" cy="566928"/>
-          </a:xfrm>
-          <a:prstGeom prst="roundRect">
-            <a:avLst>
-              <a:gd name="adj" fmla="val 12000"/>
-            </a:avLst>
-          </a:prstGeom>
-          <a:solidFill>
-            <a:srgbClr val="F2F2F2"/>
-          </a:solidFill>
-          <a:ln>
-            <a:noFill/>
-          </a:ln>
-        </p:spPr>
-        <p:style>
-          <a:lnRef idx="1">
-            <a:schemeClr val="accent1"/>
-          </a:lnRef>
-          <a:fillRef idx="3">
-            <a:schemeClr val="accent1"/>
-          </a:fillRef>
-          <a:effectRef idx="2">
-            <a:schemeClr val="accent1"/>
-          </a:effectRef>
-          <a:fontRef idx="minor">
-            <a:schemeClr val="lt1"/>
-          </a:fontRef>
-        </p:style>
-        <p:txBody>
-          <a:bodyPr rtlCol="0" anchor="ctr"/>
-          <a:lstStyle/>
-          <a:p>
-            <a:pPr algn="ctr"/>
-          </a:p>
-        </p:txBody>
-      </p:sp>
-      <p:sp>
-        <p:nvSpPr>
-          <p:cNvPr id="23" name="Rectangle 22"/>
-          <p:cNvSpPr/>
-          <p:nvPr/>
-        </p:nvSpPr>
-        <p:spPr>
-          <a:xfrm>
-            <a:off x="640080" y="4325112"/>
-            <a:ext cx="274320" cy="274320"/>
-          </a:xfrm>
-          <a:prstGeom prst="rect">
-            <a:avLst/>
-          </a:prstGeom>
-          <a:solidFill>
-            <a:srgbClr val="FFFFFF"/>
-          </a:solidFill>
-          <a:ln>
-            <a:solidFill>
-              <a:srgbClr val="333333"/>
-            </a:solidFill>
-          </a:ln>
-        </p:spPr>
-        <p:style>
-          <a:lnRef idx="1">
-            <a:schemeClr val="accent1"/>
-          </a:lnRef>
-          <a:fillRef idx="3">
-            <a:schemeClr val="accent1"/>
-          </a:fillRef>
-          <a:effectRef idx="2">
-            <a:schemeClr val="accent1"/>
-          </a:effectRef>
-          <a:fontRef idx="minor">
-            <a:schemeClr val="lt1"/>
-          </a:fontRef>
-        </p:style>
-        <p:txBody>
-          <a:bodyPr rtlCol="0" anchor="ctr"/>
-          <a:lstStyle/>
-          <a:p>
-            <a:pPr algn="ctr"/>
-          </a:p>
-        </p:txBody>
-      </p:sp>
-      <p:sp>
-        <p:nvSpPr>
-          <p:cNvPr id="24" name="Rectangle 23"/>
-          <p:cNvSpPr/>
-          <p:nvPr/>
-        </p:nvSpPr>
-        <p:spPr>
-          <a:xfrm>
-            <a:off x="640080" y="4325112"/>
-            <a:ext cx="73152" cy="274320"/>
-          </a:xfrm>
-          <a:prstGeom prst="rect">
-            <a:avLst/>
-          </a:prstGeom>
-          <a:solidFill>
-            <a:srgbClr val="269CCB"/>
-          </a:solidFill>
-          <a:ln>
-            <a:noFill/>
-          </a:ln>
-        </p:spPr>
-        <p:style>
-          <a:lnRef idx="1">
-            <a:schemeClr val="accent1"/>
-          </a:lnRef>
-          <a:fillRef idx="3">
-            <a:schemeClr val="accent1"/>
-          </a:fillRef>
-          <a:effectRef idx="2">
-            <a:schemeClr val="accent1"/>
-          </a:effectRef>
-          <a:fontRef idx="minor">
-            <a:schemeClr val="lt1"/>
-          </a:fontRef>
-        </p:style>
-        <p:txBody>
-          <a:bodyPr rtlCol="0" anchor="ctr"/>
-          <a:lstStyle/>
-          <a:p>
-            <a:pPr algn="ctr"/>
-          </a:p>
-        </p:txBody>
-      </p:sp>
-      <p:sp>
-        <p:nvSpPr>
-          <p:cNvPr id="25" name="TextBox 24"/>
-          <p:cNvSpPr txBox="1"/>
-          <p:nvPr/>
-        </p:nvSpPr>
-        <p:spPr>
-          <a:xfrm>
-            <a:off x="1097280" y="4270248"/>
-            <a:ext cx="10362895" cy="402336"/>
-          </a:xfrm>
-          <a:prstGeom prst="rect">
-            <a:avLst/>
-          </a:prstGeom>
-          <a:noFill/>
-        </p:spPr>
-        <p:txBody>
-          <a:bodyPr wrap="square" anchor="ctr"/>
-          <a:lstStyle/>
-          <a:p>
-            <a:r>
-              <a:rPr sz="1500" b="1" i="0">
-                <a:solidFill>
-                  <a:srgbClr val="333333"/>
-                </a:solidFill>
-                <a:latin typeface="Calibri"/>
-              </a:rPr>
-              <a:t>LA FUENTE</a:t>
-            </a:r>
-            <a:r>
-              <a:rPr sz="1500" b="0" i="0">
-                <a:solidFill>
-                  <a:srgbClr val="333333"/>
-                </a:solidFill>
-                <a:latin typeface="Calibri"/>
-              </a:rPr>
-              <a:t> — De dónde sacaron cada dato: autor o institución, y año. Si usaron una cifra («el 70 % de los proyectos…»), la fuente es obligatoria.</a:t>
-            </a:r>
-          </a:p>
-        </p:txBody>
-      </p:sp>
-      <p:sp>
-        <p:nvSpPr>
-          <p:cNvPr id="26" name="TextBox 25"/>
+            <a:pPr>
+              <a:spcAft>
+                <a:spcPts val="800"/>
+              </a:spcAft>
+            </a:pPr>
+            <a:r>
+              <a:rPr sz="2000" b="0" i="0">
+                <a:solidFill>
+                  <a:srgbClr val="333333"/>
+                </a:solidFill>
+                <a:latin typeface="Calibri"/>
+              </a:rPr>
+              <a:t>–   La pregunta de apertura —«un proyecto de software se pasa del plazo y del presupuesto, ¿es un problema de 2026 o de 1968?»— está formulada para producir una respuesta equivocada.</a:t>
+            </a:r>
+          </a:p>
+          <a:p>
+            <a:pPr>
+              <a:spcAft>
+                <a:spcPts val="800"/>
+              </a:spcAft>
+            </a:pPr>
+            <a:r>
+              <a:rPr sz="2000" b="0" i="0">
+                <a:solidFill>
+                  <a:srgbClr val="333333"/>
+                </a:solidFill>
+                <a:latin typeface="Calibri"/>
+              </a:rPr>
+              <a:t>–   Casi todo el grupo va a decir que es de 2026, porque la intuición de un estudiante de primer semestre es que la historia de la tecnología es una escalera: cada década resuelve los problemas de la anterior.</a:t>
+            </a:r>
+          </a:p>
+          <a:p>
+            <a:pPr>
+              <a:spcAft>
+                <a:spcPts val="800"/>
+              </a:spcAft>
+            </a:pPr>
+            <a:r>
+              <a:rPr sz="2000" b="0" i="0">
+                <a:solidFill>
+                  <a:srgbClr val="333333"/>
+                </a:solidFill>
+                <a:latin typeface="Calibri"/>
+              </a:rPr>
+              <a:t>–   Esa intuición es la que hay que romper hoy, porque de ella se deriva una creencia más dañina: que basta con aprender la herramienta nueva.</a:t>
+            </a:r>
+          </a:p>
+          <a:p>
+            <a:pPr>
+              <a:spcAft>
+                <a:spcPts val="800"/>
+              </a:spcAft>
+            </a:pPr>
+            <a:r>
+              <a:rPr sz="2000" b="0" i="0">
+                <a:solidFill>
+                  <a:srgbClr val="333333"/>
+                </a:solidFill>
+                <a:latin typeface="Calibri"/>
+              </a:rPr>
+              <a:t>–   Los primeros diez minutos, mientras se conectan, sirven para recoger esas respuestas en el muro.</a:t>
+            </a:r>
+          </a:p>
+          <a:p>
+            <a:pPr>
+              <a:spcAft>
+                <a:spcPts val="800"/>
+              </a:spcAft>
+            </a:pPr>
+            <a:r>
+              <a:rPr sz="2000" b="0" i="0">
+                <a:solidFill>
+                  <a:srgbClr val="333333"/>
+                </a:solidFill>
+                <a:latin typeface="Calibri"/>
+              </a:rPr>
+              <a:t>–   No hay que corregir ninguna.</a:t>
+            </a:r>
+          </a:p>
+          <a:p>
+            <a:pPr>
+              <a:spcAft>
+                <a:spcPts val="800"/>
+              </a:spcAft>
+            </a:pPr>
+            <a:r>
+              <a:rPr sz="2000" b="0" i="0">
+                <a:solidFill>
+                  <a:srgbClr val="333333"/>
+                </a:solidFill>
+                <a:latin typeface="Calibri"/>
+              </a:rPr>
+              <a:t>–   En el minuto 25, cuando ya esté contada la conferencia de Garmisch de 1968, se vuelve al muro y se lee en voz alta lo que escribieron.</a:t>
+            </a:r>
+          </a:p>
+          <a:p>
+            <a:pPr>
+              <a:spcAft>
+                <a:spcPts val="800"/>
+              </a:spcAft>
+            </a:pPr>
+            <a:r>
+              <a:rPr sz="2000" b="0" i="0">
+                <a:solidFill>
+                  <a:srgbClr val="333333"/>
+                </a:solidFill>
+                <a:latin typeface="Calibri"/>
+              </a:rPr>
+              <a:t>–   El contraste hace el trabajo solo: el problema que el grupo cree contemporáneo tiene casi sesenta años y un nombre propio.</a:t>
+            </a:r>
+          </a:p>
+        </p:txBody>
+      </p:sp>
+      <p:sp>
+        <p:nvSpPr>
+          <p:cNvPr id="6" name="TextBox 5"/>
           <p:cNvSpPr txBox="1"/>
           <p:nvPr/>
         </p:nvSpPr>
@@ -4615,7 +3838,7 @@
         <p:spPr>
           <a:xfrm>
             <a:off x="0" y="0"/>
-            <a:ext cx="12191695" cy="1170432"/>
+            <a:ext cx="12191695" cy="960120"/>
           </a:xfrm>
           <a:prstGeom prst="rect">
             <a:avLst/>
@@ -4657,7 +3880,7 @@
         </p:nvSpPr>
         <p:spPr>
           <a:xfrm>
-            <a:off x="0" y="1170432"/>
+            <a:off x="0" y="960120"/>
             <a:ext cx="12191695" cy="41148"/>
           </a:xfrm>
           <a:prstGeom prst="rect">
@@ -4701,7 +3924,7 @@
         <p:spPr>
           <a:xfrm>
             <a:off x="457200" y="164592"/>
-            <a:ext cx="11277295" cy="384048"/>
+            <a:ext cx="11277295" cy="502920"/>
           </a:xfrm>
           <a:prstGeom prst="rect">
             <a:avLst/>
@@ -4721,7 +3944,7 @@
                 </a:solidFill>
                 <a:latin typeface="Calibri"/>
               </a:rPr>
-              <a:t>Cómo se expone en 3 minutos</a:t>
+              <a:t>Por qué la disciplina nace de un fracaso y no de un invento (1/2)</a:t>
             </a:r>
           </a:p>
         </p:txBody>
@@ -4734,8 +3957,8 @@
         </p:nvSpPr>
         <p:spPr>
           <a:xfrm>
-            <a:off x="457200" y="566928"/>
-            <a:ext cx="11277295" cy="411480"/>
+            <a:off x="457200" y="1170432"/>
+            <a:ext cx="11277295" cy="5230368"/>
           </a:xfrm>
           <a:prstGeom prst="rect">
             <a:avLst/>
@@ -4748,705 +3971,156 @@
           </a:bodyPr>
           <a:lstStyle/>
           <a:p>
-            <a:r>
-              <a:rPr sz="1400" b="0" i="0">
-                <a:solidFill>
-                  <a:srgbClr val="B8D8EE"/>
-                </a:solidFill>
-                <a:latin typeface="Calibri"/>
-              </a:rPr>
-              <a:t>Habla el vocero con la pantalla ya compartida · cronómetro en pantalla · se corta al llegar a cero</a:t>
-            </a:r>
-          </a:p>
-        </p:txBody>
-      </p:sp>
-      <p:sp>
-        <p:nvSpPr>
-          <p:cNvPr id="6" name="Rounded Rectangle 5"/>
-          <p:cNvSpPr/>
-          <p:nvPr/>
-        </p:nvSpPr>
-        <p:spPr>
-          <a:xfrm>
-            <a:off x="457200" y="1659636"/>
-            <a:ext cx="11277295" cy="1051560"/>
-          </a:xfrm>
-          <a:prstGeom prst="roundRect">
-            <a:avLst>
-              <a:gd name="adj" fmla="val 12000"/>
-            </a:avLst>
-          </a:prstGeom>
-          <a:solidFill>
-            <a:srgbClr val="F2F2F2"/>
-          </a:solidFill>
-          <a:ln>
-            <a:noFill/>
-          </a:ln>
-        </p:spPr>
-        <p:style>
-          <a:lnRef idx="1">
-            <a:schemeClr val="accent1"/>
-          </a:lnRef>
-          <a:fillRef idx="3">
-            <a:schemeClr val="accent1"/>
-          </a:fillRef>
-          <a:effectRef idx="2">
-            <a:schemeClr val="accent1"/>
-          </a:effectRef>
-          <a:fontRef idx="minor">
-            <a:schemeClr val="lt1"/>
-          </a:fontRef>
-        </p:style>
-        <p:txBody>
-          <a:bodyPr rtlCol="0" anchor="ctr"/>
-          <a:lstStyle/>
-          <a:p>
-            <a:pPr algn="ctr"/>
-          </a:p>
-        </p:txBody>
-      </p:sp>
-      <p:sp>
-        <p:nvSpPr>
-          <p:cNvPr id="7" name="Rounded Rectangle 6"/>
-          <p:cNvSpPr/>
-          <p:nvPr/>
-        </p:nvSpPr>
-        <p:spPr>
-          <a:xfrm>
-            <a:off x="594360" y="1965960"/>
-            <a:ext cx="438912" cy="438912"/>
-          </a:xfrm>
-          <a:prstGeom prst="roundRect">
-            <a:avLst>
-              <a:gd name="adj" fmla="val 12000"/>
-            </a:avLst>
-          </a:prstGeom>
-          <a:solidFill>
-            <a:srgbClr val="095292"/>
-          </a:solidFill>
-          <a:ln>
-            <a:noFill/>
-          </a:ln>
-        </p:spPr>
-        <p:style>
-          <a:lnRef idx="1">
-            <a:schemeClr val="accent1"/>
-          </a:lnRef>
-          <a:fillRef idx="3">
-            <a:schemeClr val="accent1"/>
-          </a:fillRef>
-          <a:effectRef idx="2">
-            <a:schemeClr val="accent1"/>
-          </a:effectRef>
-          <a:fontRef idx="minor">
-            <a:schemeClr val="lt1"/>
-          </a:fontRef>
-        </p:style>
-        <p:txBody>
-          <a:bodyPr rtlCol="0" anchor="ctr"/>
-          <a:lstStyle/>
-          <a:p>
-            <a:pPr algn="ctr"/>
-          </a:p>
-        </p:txBody>
-      </p:sp>
-      <p:sp>
-        <p:nvSpPr>
-          <p:cNvPr id="8" name="TextBox 7"/>
-          <p:cNvSpPr txBox="1"/>
-          <p:nvPr/>
-        </p:nvSpPr>
-        <p:spPr>
-          <a:xfrm>
-            <a:off x="594360" y="1965960"/>
-            <a:ext cx="438912" cy="438912"/>
-          </a:xfrm>
-          <a:prstGeom prst="rect">
-            <a:avLst/>
-          </a:prstGeom>
-          <a:noFill/>
-        </p:spPr>
-        <p:txBody>
-          <a:bodyPr wrap="square" anchor="ctr"/>
-          <a:lstStyle/>
-          <a:p>
-            <a:pPr algn="ctr"/>
-            <a:r>
-              <a:rPr sz="1600" b="1" i="0">
-                <a:solidFill>
-                  <a:srgbClr val="FFFFFF"/>
-                </a:solidFill>
-                <a:latin typeface="Calibri"/>
-              </a:rPr>
-              <a:t>1</a:t>
-            </a:r>
-          </a:p>
-        </p:txBody>
-      </p:sp>
-      <p:sp>
-        <p:nvSpPr>
-          <p:cNvPr id="9" name="TextBox 8"/>
-          <p:cNvSpPr txBox="1"/>
-          <p:nvPr/>
-        </p:nvSpPr>
-        <p:spPr>
-          <a:xfrm>
-            <a:off x="1188720" y="1751076"/>
-            <a:ext cx="10271455" cy="886968"/>
-          </a:xfrm>
-          <a:prstGeom prst="rect">
-            <a:avLst/>
-          </a:prstGeom>
-          <a:noFill/>
-        </p:spPr>
-        <p:txBody>
-          <a:bodyPr wrap="square" anchor="ctr"/>
-          <a:lstStyle/>
-          <a:p>
-            <a:r>
-              <a:rPr sz="1500" b="1" i="0">
-                <a:solidFill>
-                  <a:srgbClr val="095292"/>
-                </a:solidFill>
-                <a:latin typeface="Calibri"/>
-              </a:rPr>
-              <a:t>45 s · El periodo y qué dolía</a:t>
-            </a:r>
-          </a:p>
-          <a:p>
             <a:pPr>
-              <a:spcBef>
-                <a:spcPts val="200"/>
-              </a:spcBef>
+              <a:spcAft>
+                <a:spcPts val="800"/>
+              </a:spcAft>
             </a:pPr>
             <a:r>
-              <a:rPr sz="1300" b="0" i="0">
-                <a:solidFill>
-                  <a:srgbClr val="333333"/>
-                </a:solidFill>
-                <a:latin typeface="Calibri"/>
-              </a:rPr>
-              <a:t>Qué años les tocaron y cuál era el problema de la época.</a:t>
-            </a:r>
-          </a:p>
-        </p:txBody>
-      </p:sp>
-      <p:sp>
-        <p:nvSpPr>
-          <p:cNvPr id="10" name="Rounded Rectangle 9"/>
-          <p:cNvSpPr/>
-          <p:nvPr/>
-        </p:nvSpPr>
-        <p:spPr>
-          <a:xfrm>
-            <a:off x="457200" y="2802636"/>
-            <a:ext cx="11277295" cy="1051560"/>
-          </a:xfrm>
-          <a:prstGeom prst="roundRect">
-            <a:avLst>
-              <a:gd name="adj" fmla="val 12000"/>
-            </a:avLst>
-          </a:prstGeom>
-          <a:solidFill>
-            <a:srgbClr val="E8F4FA"/>
-          </a:solidFill>
-          <a:ln>
-            <a:noFill/>
-          </a:ln>
-        </p:spPr>
-        <p:style>
-          <a:lnRef idx="1">
-            <a:schemeClr val="accent1"/>
-          </a:lnRef>
-          <a:fillRef idx="3">
-            <a:schemeClr val="accent1"/>
-          </a:fillRef>
-          <a:effectRef idx="2">
-            <a:schemeClr val="accent1"/>
-          </a:effectRef>
-          <a:fontRef idx="minor">
-            <a:schemeClr val="lt1"/>
-          </a:fontRef>
-        </p:style>
-        <p:txBody>
-          <a:bodyPr rtlCol="0" anchor="ctr"/>
-          <a:lstStyle/>
-          <a:p>
-            <a:pPr algn="ctr"/>
-          </a:p>
-        </p:txBody>
-      </p:sp>
-      <p:sp>
-        <p:nvSpPr>
-          <p:cNvPr id="11" name="Rounded Rectangle 10"/>
-          <p:cNvSpPr/>
-          <p:nvPr/>
-        </p:nvSpPr>
-        <p:spPr>
-          <a:xfrm>
-            <a:off x="594360" y="3108960"/>
-            <a:ext cx="438912" cy="438912"/>
-          </a:xfrm>
-          <a:prstGeom prst="roundRect">
-            <a:avLst>
-              <a:gd name="adj" fmla="val 12000"/>
-            </a:avLst>
-          </a:prstGeom>
-          <a:solidFill>
-            <a:srgbClr val="095292"/>
-          </a:solidFill>
-          <a:ln>
-            <a:noFill/>
-          </a:ln>
-        </p:spPr>
-        <p:style>
-          <a:lnRef idx="1">
-            <a:schemeClr val="accent1"/>
-          </a:lnRef>
-          <a:fillRef idx="3">
-            <a:schemeClr val="accent1"/>
-          </a:fillRef>
-          <a:effectRef idx="2">
-            <a:schemeClr val="accent1"/>
-          </a:effectRef>
-          <a:fontRef idx="minor">
-            <a:schemeClr val="lt1"/>
-          </a:fontRef>
-        </p:style>
-        <p:txBody>
-          <a:bodyPr rtlCol="0" anchor="ctr"/>
-          <a:lstStyle/>
-          <a:p>
-            <a:pPr algn="ctr"/>
-          </a:p>
-        </p:txBody>
-      </p:sp>
-      <p:sp>
-        <p:nvSpPr>
-          <p:cNvPr id="12" name="TextBox 11"/>
-          <p:cNvSpPr txBox="1"/>
-          <p:nvPr/>
-        </p:nvSpPr>
-        <p:spPr>
-          <a:xfrm>
-            <a:off x="594360" y="3108960"/>
-            <a:ext cx="438912" cy="438912"/>
-          </a:xfrm>
-          <a:prstGeom prst="rect">
-            <a:avLst/>
-          </a:prstGeom>
-          <a:noFill/>
-        </p:spPr>
-        <p:txBody>
-          <a:bodyPr wrap="square" anchor="ctr"/>
-          <a:lstStyle/>
-          <a:p>
-            <a:pPr algn="ctr"/>
-            <a:r>
-              <a:rPr sz="1600" b="1" i="0">
-                <a:solidFill>
-                  <a:srgbClr val="FFFFFF"/>
-                </a:solidFill>
-                <a:latin typeface="Calibri"/>
-              </a:rPr>
-              <a:t>2</a:t>
-            </a:r>
-          </a:p>
-        </p:txBody>
-      </p:sp>
-      <p:sp>
-        <p:nvSpPr>
-          <p:cNvPr id="13" name="TextBox 12"/>
-          <p:cNvSpPr txBox="1"/>
-          <p:nvPr/>
-        </p:nvSpPr>
-        <p:spPr>
-          <a:xfrm>
-            <a:off x="1188720" y="2894076"/>
-            <a:ext cx="10271455" cy="886968"/>
-          </a:xfrm>
-          <a:prstGeom prst="rect">
-            <a:avLst/>
-          </a:prstGeom>
-          <a:noFill/>
-        </p:spPr>
-        <p:txBody>
-          <a:bodyPr wrap="square" anchor="ctr"/>
-          <a:lstStyle/>
-          <a:p>
-            <a:r>
-              <a:rPr sz="1500" b="1" i="0">
-                <a:solidFill>
-                  <a:srgbClr val="095292"/>
-                </a:solidFill>
-                <a:latin typeface="Calibri"/>
-              </a:rPr>
-              <a:t>60 s · Los cuatro hitos</a:t>
+              <a:rPr sz="2000" b="0" i="0">
+                <a:solidFill>
+                  <a:srgbClr val="333333"/>
+                </a:solidFill>
+                <a:latin typeface="Calibri"/>
+              </a:rPr>
+              <a:t>–   Hay una diferencia grande entre contar la historia de la informática y contar la historia de la ingeniería de sistemas.</a:t>
             </a:r>
           </a:p>
           <a:p>
             <a:pPr>
-              <a:spcBef>
-                <a:spcPts val="200"/>
-              </a:spcBef>
+              <a:spcAft>
+                <a:spcPts val="800"/>
+              </a:spcAft>
             </a:pPr>
             <a:r>
-              <a:rPr sz="1300" b="0" i="0">
-                <a:solidFill>
-                  <a:srgbClr val="333333"/>
-                </a:solidFill>
-                <a:latin typeface="Calibri"/>
-              </a:rPr>
-              <a:t>En orden, con año. Una frase por hito, sin leer la pantalla.</a:t>
-            </a:r>
-          </a:p>
-        </p:txBody>
-      </p:sp>
-      <p:sp>
-        <p:nvSpPr>
-          <p:cNvPr id="14" name="Rounded Rectangle 13"/>
-          <p:cNvSpPr/>
-          <p:nvPr/>
-        </p:nvSpPr>
-        <p:spPr>
-          <a:xfrm>
-            <a:off x="457200" y="3945636"/>
-            <a:ext cx="11277295" cy="1051560"/>
-          </a:xfrm>
-          <a:prstGeom prst="roundRect">
-            <a:avLst>
-              <a:gd name="adj" fmla="val 12000"/>
-            </a:avLst>
-          </a:prstGeom>
-          <a:solidFill>
-            <a:srgbClr val="F2F2F2"/>
-          </a:solidFill>
-          <a:ln>
-            <a:noFill/>
-          </a:ln>
-        </p:spPr>
-        <p:style>
-          <a:lnRef idx="1">
-            <a:schemeClr val="accent1"/>
-          </a:lnRef>
-          <a:fillRef idx="3">
-            <a:schemeClr val="accent1"/>
-          </a:fillRef>
-          <a:effectRef idx="2">
-            <a:schemeClr val="accent1"/>
-          </a:effectRef>
-          <a:fontRef idx="minor">
-            <a:schemeClr val="lt1"/>
-          </a:fontRef>
-        </p:style>
-        <p:txBody>
-          <a:bodyPr rtlCol="0" anchor="ctr"/>
-          <a:lstStyle/>
-          <a:p>
-            <a:pPr algn="ctr"/>
-          </a:p>
-        </p:txBody>
-      </p:sp>
-      <p:sp>
-        <p:nvSpPr>
-          <p:cNvPr id="15" name="Rounded Rectangle 14"/>
-          <p:cNvSpPr/>
-          <p:nvPr/>
-        </p:nvSpPr>
-        <p:spPr>
-          <a:xfrm>
-            <a:off x="594360" y="4251960"/>
-            <a:ext cx="438912" cy="438912"/>
-          </a:xfrm>
-          <a:prstGeom prst="roundRect">
-            <a:avLst>
-              <a:gd name="adj" fmla="val 12000"/>
-            </a:avLst>
-          </a:prstGeom>
-          <a:solidFill>
-            <a:srgbClr val="095292"/>
-          </a:solidFill>
-          <a:ln>
-            <a:noFill/>
-          </a:ln>
-        </p:spPr>
-        <p:style>
-          <a:lnRef idx="1">
-            <a:schemeClr val="accent1"/>
-          </a:lnRef>
-          <a:fillRef idx="3">
-            <a:schemeClr val="accent1"/>
-          </a:fillRef>
-          <a:effectRef idx="2">
-            <a:schemeClr val="accent1"/>
-          </a:effectRef>
-          <a:fontRef idx="minor">
-            <a:schemeClr val="lt1"/>
-          </a:fontRef>
-        </p:style>
-        <p:txBody>
-          <a:bodyPr rtlCol="0" anchor="ctr"/>
-          <a:lstStyle/>
-          <a:p>
-            <a:pPr algn="ctr"/>
-          </a:p>
-        </p:txBody>
-      </p:sp>
-      <p:sp>
-        <p:nvSpPr>
-          <p:cNvPr id="16" name="TextBox 15"/>
-          <p:cNvSpPr txBox="1"/>
-          <p:nvPr/>
-        </p:nvSpPr>
-        <p:spPr>
-          <a:xfrm>
-            <a:off x="594360" y="4251960"/>
-            <a:ext cx="438912" cy="438912"/>
-          </a:xfrm>
-          <a:prstGeom prst="rect">
-            <a:avLst/>
-          </a:prstGeom>
-          <a:noFill/>
-        </p:spPr>
-        <p:txBody>
-          <a:bodyPr wrap="square" anchor="ctr"/>
-          <a:lstStyle/>
-          <a:p>
-            <a:pPr algn="ctr"/>
-            <a:r>
-              <a:rPr sz="1600" b="1" i="0">
-                <a:solidFill>
-                  <a:srgbClr val="FFFFFF"/>
-                </a:solidFill>
-                <a:latin typeface="Calibri"/>
-              </a:rPr>
-              <a:t>3</a:t>
-            </a:r>
-          </a:p>
-        </p:txBody>
-      </p:sp>
-      <p:sp>
-        <p:nvSpPr>
-          <p:cNvPr id="17" name="TextBox 16"/>
-          <p:cNvSpPr txBox="1"/>
-          <p:nvPr/>
-        </p:nvSpPr>
-        <p:spPr>
-          <a:xfrm>
-            <a:off x="1188720" y="4037076"/>
-            <a:ext cx="10271455" cy="886968"/>
-          </a:xfrm>
-          <a:prstGeom prst="rect">
-            <a:avLst/>
-          </a:prstGeom>
-          <a:noFill/>
-        </p:spPr>
-        <p:txBody>
-          <a:bodyPr wrap="square" anchor="ctr"/>
-          <a:lstStyle/>
-          <a:p>
-            <a:r>
-              <a:rPr sz="1500" b="1" i="0">
-                <a:solidFill>
-                  <a:srgbClr val="095292"/>
-                </a:solidFill>
-                <a:latin typeface="Calibri"/>
-              </a:rPr>
-              <a:t>60 s · Qué sigue vivo</a:t>
+              <a:rPr sz="2000" b="0" i="0">
+                <a:solidFill>
+                  <a:srgbClr val="333333"/>
+                </a:solidFill>
+                <a:latin typeface="Calibri"/>
+              </a:rPr>
+              <a:t>–   La primera es una historia de máquinas: válvulas, transistores, circuitos integrados, microprocesadores.</a:t>
             </a:r>
           </a:p>
           <a:p>
             <a:pPr>
-              <a:spcBef>
-                <a:spcPts val="200"/>
-              </a:spcBef>
+              <a:spcAft>
+                <a:spcPts val="800"/>
+              </a:spcAft>
             </a:pPr>
             <a:r>
-              <a:rPr sz="1300" b="0" i="0">
-                <a:solidFill>
-                  <a:srgbClr val="333333"/>
-                </a:solidFill>
-                <a:latin typeface="Calibri"/>
-              </a:rPr>
-              <a:t>Los dos hitos cuyo problema no está cerrado, con su ejemplo propio. Es lo que más pesa.</a:t>
-            </a:r>
-          </a:p>
-        </p:txBody>
-      </p:sp>
-      <p:sp>
-        <p:nvSpPr>
-          <p:cNvPr id="18" name="Rounded Rectangle 17"/>
-          <p:cNvSpPr/>
-          <p:nvPr/>
-        </p:nvSpPr>
-        <p:spPr>
-          <a:xfrm>
-            <a:off x="457200" y="5088636"/>
-            <a:ext cx="11277295" cy="1051560"/>
-          </a:xfrm>
-          <a:prstGeom prst="roundRect">
-            <a:avLst>
-              <a:gd name="adj" fmla="val 12000"/>
-            </a:avLst>
-          </a:prstGeom>
-          <a:solidFill>
-            <a:srgbClr val="E8F4FA"/>
-          </a:solidFill>
-          <a:ln>
-            <a:noFill/>
-          </a:ln>
-        </p:spPr>
-        <p:style>
-          <a:lnRef idx="1">
-            <a:schemeClr val="accent1"/>
-          </a:lnRef>
-          <a:fillRef idx="3">
-            <a:schemeClr val="accent1"/>
-          </a:fillRef>
-          <a:effectRef idx="2">
-            <a:schemeClr val="accent1"/>
-          </a:effectRef>
-          <a:fontRef idx="minor">
-            <a:schemeClr val="lt1"/>
-          </a:fontRef>
-        </p:style>
-        <p:txBody>
-          <a:bodyPr rtlCol="0" anchor="ctr"/>
-          <a:lstStyle/>
-          <a:p>
-            <a:pPr algn="ctr"/>
-          </a:p>
-        </p:txBody>
-      </p:sp>
-      <p:sp>
-        <p:nvSpPr>
-          <p:cNvPr id="19" name="Rounded Rectangle 18"/>
-          <p:cNvSpPr/>
-          <p:nvPr/>
-        </p:nvSpPr>
-        <p:spPr>
-          <a:xfrm>
-            <a:off x="594360" y="5394960"/>
-            <a:ext cx="438912" cy="438912"/>
-          </a:xfrm>
-          <a:prstGeom prst="roundRect">
-            <a:avLst>
-              <a:gd name="adj" fmla="val 12000"/>
-            </a:avLst>
-          </a:prstGeom>
-          <a:solidFill>
-            <a:srgbClr val="095292"/>
-          </a:solidFill>
-          <a:ln>
-            <a:noFill/>
-          </a:ln>
-        </p:spPr>
-        <p:style>
-          <a:lnRef idx="1">
-            <a:schemeClr val="accent1"/>
-          </a:lnRef>
-          <a:fillRef idx="3">
-            <a:schemeClr val="accent1"/>
-          </a:fillRef>
-          <a:effectRef idx="2">
-            <a:schemeClr val="accent1"/>
-          </a:effectRef>
-          <a:fontRef idx="minor">
-            <a:schemeClr val="lt1"/>
-          </a:fontRef>
-        </p:style>
-        <p:txBody>
-          <a:bodyPr rtlCol="0" anchor="ctr"/>
-          <a:lstStyle/>
-          <a:p>
-            <a:pPr algn="ctr"/>
-          </a:p>
-        </p:txBody>
-      </p:sp>
-      <p:sp>
-        <p:nvSpPr>
-          <p:cNvPr id="20" name="TextBox 19"/>
-          <p:cNvSpPr txBox="1"/>
-          <p:nvPr/>
-        </p:nvSpPr>
-        <p:spPr>
-          <a:xfrm>
-            <a:off x="594360" y="5394960"/>
-            <a:ext cx="438912" cy="438912"/>
-          </a:xfrm>
-          <a:prstGeom prst="rect">
-            <a:avLst/>
-          </a:prstGeom>
-          <a:noFill/>
-        </p:spPr>
-        <p:txBody>
-          <a:bodyPr wrap="square" anchor="ctr"/>
-          <a:lstStyle/>
-          <a:p>
-            <a:pPr algn="ctr"/>
-            <a:r>
-              <a:rPr sz="1600" b="1" i="0">
-                <a:solidFill>
-                  <a:srgbClr val="FFFFFF"/>
-                </a:solidFill>
-                <a:latin typeface="Calibri"/>
-              </a:rPr>
-              <a:t>4</a:t>
-            </a:r>
-          </a:p>
-        </p:txBody>
-      </p:sp>
-      <p:sp>
-        <p:nvSpPr>
-          <p:cNvPr id="21" name="TextBox 20"/>
-          <p:cNvSpPr txBox="1"/>
-          <p:nvPr/>
-        </p:nvSpPr>
-        <p:spPr>
-          <a:xfrm>
-            <a:off x="1188720" y="5180076"/>
-            <a:ext cx="10271455" cy="886968"/>
-          </a:xfrm>
-          <a:prstGeom prst="rect">
-            <a:avLst/>
-          </a:prstGeom>
-          <a:noFill/>
-        </p:spPr>
-        <p:txBody>
-          <a:bodyPr wrap="square" anchor="ctr"/>
-          <a:lstStyle/>
-          <a:p>
-            <a:r>
-              <a:rPr sz="1500" b="1" i="0">
-                <a:solidFill>
-                  <a:srgbClr val="095292"/>
-                </a:solidFill>
-                <a:latin typeface="Calibri"/>
-              </a:rPr>
-              <a:t>15 s · Las fuentes</a:t>
+              <a:rPr sz="2000" b="0" i="0">
+                <a:solidFill>
+                  <a:srgbClr val="333333"/>
+                </a:solidFill>
+                <a:latin typeface="Calibri"/>
+              </a:rPr>
+              <a:t>–   Es la que el estudiante espera y es la menos útil, porque sugiere que el progreso viene del hardware.</a:t>
             </a:r>
           </a:p>
           <a:p>
             <a:pPr>
-              <a:spcBef>
-                <a:spcPts val="200"/>
-              </a:spcBef>
+              <a:spcAft>
+                <a:spcPts val="800"/>
+              </a:spcAft>
             </a:pPr>
             <a:r>
-              <a:rPr sz="1300" b="0" i="0">
-                <a:solidFill>
-                  <a:srgbClr val="333333"/>
-                </a:solidFill>
-                <a:latin typeface="Calibri"/>
-              </a:rPr>
-              <a:t>De dónde salió lo que dijeron.</a:t>
-            </a:r>
-          </a:p>
-        </p:txBody>
-      </p:sp>
-      <p:sp>
-        <p:nvSpPr>
-          <p:cNvPr id="22" name="TextBox 21"/>
+              <a:rPr sz="2000" b="0" i="0">
+                <a:solidFill>
+                  <a:srgbClr val="333333"/>
+                </a:solidFill>
+                <a:latin typeface="Calibri"/>
+              </a:rPr>
+              <a:t>–   La segunda es una historia de </a:t>
+            </a:r>
+            <a:r>
+              <a:rPr sz="2000" b="1" i="0">
+                <a:solidFill>
+                  <a:srgbClr val="333333"/>
+                </a:solidFill>
+                <a:latin typeface="Calibri"/>
+              </a:rPr>
+              <a:t>fracasos de organización</a:t>
+            </a:r>
+            <a:r>
+              <a:rPr sz="2000" b="0" i="0">
+                <a:solidFill>
+                  <a:srgbClr val="333333"/>
+                </a:solidFill>
+                <a:latin typeface="Calibri"/>
+              </a:rPr>
+              <a:t>, y es la que explica por qué existe la carrera que el estudiante está empezando.</a:t>
+            </a:r>
+          </a:p>
+          <a:p>
+            <a:pPr>
+              <a:spcAft>
+                <a:spcPts val="800"/>
+              </a:spcAft>
+            </a:pPr>
+            <a:r>
+              <a:rPr sz="2000" b="0" i="0">
+                <a:solidFill>
+                  <a:srgbClr val="333333"/>
+                </a:solidFill>
+                <a:latin typeface="Calibri"/>
+              </a:rPr>
+              <a:t>–   En los años cuarenta y cincuenta el cuello de botella era la máquina.</a:t>
+            </a:r>
+          </a:p>
+          <a:p>
+            <a:pPr>
+              <a:spcAft>
+                <a:spcPts val="800"/>
+              </a:spcAft>
+            </a:pPr>
+            <a:r>
+              <a:rPr sz="2000" b="0" i="0">
+                <a:solidFill>
+                  <a:srgbClr val="333333"/>
+                </a:solidFill>
+                <a:latin typeface="Calibri"/>
+              </a:rPr>
+              <a:t>–   Programar el ENIAC significaba reconfigurar cables físicamente; escribir en lenguaje de máquina era lento porque la máquina era lo escaso y lo caro.</a:t>
+            </a:r>
+          </a:p>
+          <a:p>
+            <a:pPr>
+              <a:spcAft>
+                <a:spcPts val="800"/>
+              </a:spcAft>
+            </a:pPr>
+            <a:r>
+              <a:rPr sz="2000" b="0" i="0">
+                <a:solidFill>
+                  <a:srgbClr val="333333"/>
+                </a:solidFill>
+                <a:latin typeface="Calibri"/>
+              </a:rPr>
+              <a:t>–   Fortran (1957) y COBOL (1959) atacan exactamente ese problema: permitir decirle algo a la máquina sin hablar su idioma.</a:t>
+            </a:r>
+          </a:p>
+          <a:p>
+            <a:pPr>
+              <a:spcAft>
+                <a:spcPts val="800"/>
+              </a:spcAft>
+            </a:pPr>
+            <a:r>
+              <a:rPr sz="2000" b="0" i="0">
+                <a:solidFill>
+                  <a:srgbClr val="333333"/>
+                </a:solidFill>
+                <a:latin typeface="Calibri"/>
+              </a:rPr>
+              <a:t>–   Hasta aquí el trabajo lo hace una persona o un puñado de personas, y el método no importa mucho porque el problema cabe en una cabeza.</a:t>
+            </a:r>
+          </a:p>
+        </p:txBody>
+      </p:sp>
+      <p:sp>
+        <p:nvSpPr>
+          <p:cNvPr id="6" name="TextBox 5"/>
           <p:cNvSpPr txBox="1"/>
           <p:nvPr/>
         </p:nvSpPr>
@@ -5620,7 +4294,7 @@
                 </a:solidFill>
                 <a:latin typeface="Calibri"/>
               </a:rPr>
-              <a:t>Para la Clase 3</a:t>
+              <a:t>Por qué la disciplina nace de un fracaso y no de un invento (2/2)</a:t>
             </a:r>
           </a:p>
         </p:txBody>
@@ -5659,25 +4333,7 @@
                 </a:solidFill>
                 <a:latin typeface="Calibri"/>
               </a:rPr>
-              <a:t>–   </a:t>
-            </a:r>
-            <a:r>
-              <a:rPr sz="2000" b="1" i="0">
-                <a:solidFill>
-                  <a:srgbClr val="333333"/>
-                </a:solidFill>
-                <a:latin typeface="Calibri"/>
-              </a:rPr>
-              <a:t>Trabajo dirigido:</a:t>
-            </a:r>
-            <a:r>
-              <a:rPr sz="2000" b="0" i="0">
-                <a:solidFill>
-                  <a:srgbClr val="333333"/>
-                </a:solidFill>
-                <a:latin typeface="Calibri"/>
-              </a:rPr>
-              <a:t> Investigación sobre hitos históricos — cada equipo completa la línea de tiempo del curso juntando los cinco tramos expuestos hoy, en la carpeta del equipo.</a:t>
+              <a:t>–   En los años sesenta pasa algo que cambia la naturaleza del problema: el hardware se abarata y se vuelve más capaz, y entonces se vuelven pensables sistemas que antes no lo eran.</a:t>
             </a:r>
           </a:p>
           <a:p>
@@ -5693,25 +4349,7 @@
                 </a:solidFill>
                 <a:latin typeface="Calibri"/>
               </a:rPr>
-              <a:t>–   </a:t>
-            </a:r>
-            <a:r>
-              <a:rPr sz="2000" b="1" i="0">
-                <a:solidFill>
-                  <a:srgbClr val="333333"/>
-                </a:solidFill>
-                <a:latin typeface="Calibri"/>
-              </a:rPr>
-              <a:t>Trabajo independiente:</a:t>
-            </a:r>
-            <a:r>
-              <a:rPr sz="2000" b="0" i="0">
-                <a:solidFill>
-                  <a:srgbClr val="333333"/>
-                </a:solidFill>
-                <a:latin typeface="Calibri"/>
-              </a:rPr>
-              <a:t> Elaboración de línea de tiempo: la versión completa (los cinco periodos), con al menos un «qué sigue vivo hoy» por periodo.</a:t>
+              <a:t>–   El sistema de reservas aéreas SABRE, el software de navegación del programa Apollo, el sistema operativo OS/360 de IBM.</a:t>
             </a:r>
           </a:p>
           <a:p>
@@ -5727,25 +4365,7 @@
                 </a:solidFill>
                 <a:latin typeface="Calibri"/>
               </a:rPr>
-              <a:t>–   </a:t>
-            </a:r>
-            <a:r>
-              <a:rPr sz="2000" b="1" i="0">
-                <a:solidFill>
-                  <a:srgbClr val="333333"/>
-                </a:solidFill>
-                <a:latin typeface="Calibri"/>
-              </a:rPr>
-              <a:t>Clase 3 · Fundamentos básicos de la Ingeniería de Sistemas</a:t>
-            </a:r>
-            <a:r>
-              <a:rPr sz="2000" b="0" i="0">
-                <a:solidFill>
-                  <a:srgbClr val="333333"/>
-                </a:solidFill>
-                <a:latin typeface="Calibri"/>
-              </a:rPr>
-              <a:t> — qué es un sistema y por qué el software es solo una parte de él. Se trabaja con un asistente de IA, y hay que declarar el prompt usado.</a:t>
+              <a:t>–   Son proyectos de cientos y hasta miles de personas y de varios años.</a:t>
             </a:r>
           </a:p>
           <a:p>
@@ -5761,7 +4381,7 @@
                 </a:solidFill>
                 <a:latin typeface="Calibri"/>
               </a:rPr>
-              <a:t>–   </a:t>
+              <a:t>–   Y fracasan de forma espectacular en plazo y en costo, no porque las máquinas fueran lentas, sino porque </a:t>
             </a:r>
             <a:r>
               <a:rPr sz="2000" b="1" i="0">
@@ -5770,7 +4390,7 @@
                 </a:solidFill>
                 <a:latin typeface="Calibri"/>
               </a:rPr>
-              <a:t>Aviso:</a:t>
+              <a:t>nadie sabía cómo coordinar a mil personas construyendo una sola cosa que nadie puede ver ni tocar</a:t>
             </a:r>
             <a:r>
               <a:rPr sz="2000" b="0" i="0">
@@ -5779,7 +4399,7 @@
                 </a:solidFill>
                 <a:latin typeface="Calibri"/>
               </a:rPr>
-              <a:t> Traigan la línea de tiempo completa en la carpeta del equipo. En la sesión 3 se descompone un sistema del entorno y la línea de tiempo es el punto de partida.</a:t>
+              <a:t>.</a:t>
             </a:r>
           </a:p>
           <a:p>
@@ -5795,17 +4415,15 @@
                 </a:solidFill>
                 <a:latin typeface="Calibri"/>
               </a:rPr>
-              <a:t>–   </a:t>
-            </a:r>
-            <a:r>
-              <a:rPr sz="2000" b="1" i="0">
-                <a:solidFill>
-                  <a:srgbClr val="333333"/>
-                </a:solidFill>
-                <a:latin typeface="Calibri"/>
-              </a:rPr>
-              <a:t>Antes de salir:</a:t>
-            </a:r>
+              <a:t>–   Fred Brooks, que dirigió el OS/360, escribió después el libro que explica por qué.</a:t>
+            </a:r>
+          </a:p>
+          <a:p>
+            <a:pPr>
+              <a:spcAft>
+                <a:spcPts val="800"/>
+              </a:spcAft>
+            </a:pPr>
             <a:r>
               <a:rPr sz="2000" b="0" i="0">
                 <a:solidFill>
@@ -5813,7 +4431,23 @@
                 </a:solidFill>
                 <a:latin typeface="Calibri"/>
               </a:rPr>
-              <a:t> el enlace del documento del equipo en el chat, con permiso de lectura para el docente, y el nombre del vocero de hoy.</a:t>
+              <a:t>–   En 1968 la OTAN convoca una conferencia en Garmisch para hablar del asunto, y ahí se populariza el término «ingeniería de software».</a:t>
+            </a:r>
+          </a:p>
+          <a:p>
+            <a:pPr>
+              <a:spcAft>
+                <a:spcPts val="800"/>
+              </a:spcAft>
+            </a:pPr>
+            <a:r>
+              <a:rPr sz="2000" b="0" i="0">
+                <a:solidFill>
+                  <a:srgbClr val="333333"/>
+                </a:solidFill>
+                <a:latin typeface="Calibri"/>
+              </a:rPr>
+              <a:t>–   Ese es el momento fundacional que el estudiante tiene que recordar: la disciplina no nace de una máquina nueva, nace del reconocimiento público de que se estaba trabajando mal.</a:t>
             </a:r>
           </a:p>
         </p:txBody>
@@ -5888,13 +4522,13 @@
         <p:spPr>
           <a:xfrm>
             <a:off x="0" y="0"/>
-            <a:ext cx="12191695" cy="164592"/>
+            <a:ext cx="12191695" cy="960120"/>
           </a:xfrm>
           <a:prstGeom prst="rect">
             <a:avLst/>
           </a:prstGeom>
           <a:solidFill>
-            <a:srgbClr val="269CCB"/>
+            <a:srgbClr val="095292"/>
           </a:solidFill>
           <a:ln>
             <a:noFill/>
@@ -5922,30 +4556,49 @@
           </a:p>
         </p:txBody>
       </p:sp>
-      <p:pic>
-        <p:nvPicPr>
-          <p:cNvPr id="3" name="Picture 2" descr="logo_uniajc_color.png"/>
-          <p:cNvPicPr>
-            <a:picLocks noChangeAspect="1"/>
-          </p:cNvPicPr>
-          <p:nvPr/>
-        </p:nvPicPr>
-        <p:blipFill>
-          <a:blip r:embed="rId2"/>
-          <a:stretch>
-            <a:fillRect/>
-          </a:stretch>
-        </p:blipFill>
-        <p:spPr>
-          <a:xfrm>
-            <a:off x="10271455" y="5998464"/>
-            <a:ext cx="1463040" cy="643233"/>
-          </a:xfrm>
-          <a:prstGeom prst="rect">
-            <a:avLst/>
-          </a:prstGeom>
-        </p:spPr>
-      </p:pic>
+      <p:sp>
+        <p:nvSpPr>
+          <p:cNvPr id="3" name="Rectangle 2"/>
+          <p:cNvSpPr/>
+          <p:nvPr/>
+        </p:nvSpPr>
+        <p:spPr>
+          <a:xfrm>
+            <a:off x="0" y="960120"/>
+            <a:ext cx="12191695" cy="41148"/>
+          </a:xfrm>
+          <a:prstGeom prst="rect">
+            <a:avLst/>
+          </a:prstGeom>
+          <a:solidFill>
+            <a:srgbClr val="FFD000"/>
+          </a:solidFill>
+          <a:ln>
+            <a:noFill/>
+          </a:ln>
+        </p:spPr>
+        <p:style>
+          <a:lnRef idx="1">
+            <a:schemeClr val="accent1"/>
+          </a:lnRef>
+          <a:fillRef idx="3">
+            <a:schemeClr val="accent1"/>
+          </a:fillRef>
+          <a:effectRef idx="2">
+            <a:schemeClr val="accent1"/>
+          </a:effectRef>
+          <a:fontRef idx="minor">
+            <a:schemeClr val="lt1"/>
+          </a:fontRef>
+        </p:style>
+        <p:txBody>
+          <a:bodyPr rtlCol="0" anchor="ctr"/>
+          <a:lstStyle/>
+          <a:p>
+            <a:pPr algn="ctr"/>
+          </a:p>
+        </p:txBody>
+      </p:sp>
       <p:sp>
         <p:nvSpPr>
           <p:cNvPr id="4" name="TextBox 3"/>
@@ -5954,41 +4607,8 @@
         </p:nvSpPr>
         <p:spPr>
           <a:xfrm>
-            <a:off x="457200" y="1737360"/>
-            <a:ext cx="11277295" cy="1097280"/>
-          </a:xfrm>
-          <a:prstGeom prst="rect">
-            <a:avLst/>
-          </a:prstGeom>
-          <a:noFill/>
-        </p:spPr>
-        <p:txBody>
-          <a:bodyPr wrap="square" anchor="ctr"/>
-          <a:lstStyle/>
-          <a:p>
-            <a:pPr algn="ctr"/>
-            <a:r>
-              <a:rPr sz="3400" b="1" i="0">
-                <a:solidFill>
-                  <a:srgbClr val="095292"/>
-                </a:solidFill>
-                <a:latin typeface="Calibri"/>
-              </a:rPr>
-              <a:t>Nos vemos en la sesión 3</a:t>
-            </a:r>
-          </a:p>
-        </p:txBody>
-      </p:sp>
-      <p:sp>
-        <p:nvSpPr>
-          <p:cNvPr id="5" name="TextBox 4"/>
-          <p:cNvSpPr txBox="1"/>
-          <p:nvPr/>
-        </p:nvSpPr>
-        <p:spPr>
-          <a:xfrm>
-            <a:off x="457200" y="3017520"/>
-            <a:ext cx="11277295" cy="1645920"/>
+            <a:off x="457200" y="164592"/>
+            <a:ext cx="11277295" cy="502920"/>
           </a:xfrm>
           <a:prstGeom prst="rect">
             <a:avLst/>
@@ -6001,49 +4621,28 @@
           </a:bodyPr>
           <a:lstStyle/>
           <a:p>
-            <a:pPr algn="ctr">
-              <a:spcAft>
-                <a:spcPts val="600"/>
-              </a:spcAft>
-            </a:pPr>
-            <a:r>
-              <a:rPr sz="1600" b="0" i="0">
-                <a:solidFill>
-                  <a:srgbClr val="333333"/>
-                </a:solidFill>
-                <a:latin typeface="Calibri"/>
-              </a:rPr>
-              <a:t>Historia y evolución de la Ingeniería · Clase 2</a:t>
-            </a:r>
-          </a:p>
-          <a:p>
-            <a:pPr algn="ctr">
-              <a:spcAft>
-                <a:spcPts val="600"/>
-              </a:spcAft>
-            </a:pPr>
-            <a:r>
-              <a:rPr sz="1600" b="0" i="0">
-                <a:solidFill>
-                  <a:srgbClr val="333333"/>
-                </a:solidFill>
-                <a:latin typeface="Calibri"/>
-              </a:rPr>
-              <a:t>FI300101 · UNIAJC · Ingeniería de Sistemas</a:t>
-            </a:r>
-          </a:p>
-        </p:txBody>
-      </p:sp>
-      <p:sp>
-        <p:nvSpPr>
-          <p:cNvPr id="6" name="TextBox 5"/>
+            <a:r>
+              <a:rPr sz="2600" b="1" i="0">
+                <a:solidFill>
+                  <a:srgbClr val="FFFFFF"/>
+                </a:solidFill>
+                <a:latin typeface="Calibri"/>
+              </a:rPr>
+              <a:t>Los seis hitos: qué decir de cada uno en dos minutos (1/3)</a:t>
+            </a:r>
+          </a:p>
+        </p:txBody>
+      </p:sp>
+      <p:sp>
+        <p:nvSpPr>
+          <p:cNvPr id="5" name="TextBox 4"/>
           <p:cNvSpPr txBox="1"/>
           <p:nvPr/>
         </p:nvSpPr>
         <p:spPr>
           <a:xfrm>
-            <a:off x="457200" y="4754880"/>
-            <a:ext cx="11277295" cy="640080"/>
+            <a:off x="457200" y="1170432"/>
+            <a:ext cx="11277295" cy="5230368"/>
           </a:xfrm>
           <a:prstGeom prst="rect">
             <a:avLst/>
@@ -6056,15 +4655,1982 @@
           </a:bodyPr>
           <a:lstStyle/>
           <a:p>
+            <a:pPr>
+              <a:spcAft>
+                <a:spcPts val="800"/>
+              </a:spcAft>
+            </a:pPr>
+            <a:r>
+              <a:rPr sz="2000" b="0" i="0">
+                <a:solidFill>
+                  <a:srgbClr val="333333"/>
+                </a:solidFill>
+                <a:latin typeface="Calibri"/>
+              </a:rPr>
+              <a:t>–   La tarjeta de 1945–1957 se cuenta rápido: arquitectura de von Neumann (programa y datos en la misma memoria, que es la razón por la que un computador puede cargar cualquier programa) y los primeros lenguajes de alto nivel.</a:t>
+            </a:r>
+          </a:p>
+          <a:p>
+            <a:pPr>
+              <a:spcAft>
+                <a:spcPts val="800"/>
+              </a:spcAft>
+            </a:pPr>
+            <a:r>
+              <a:rPr sz="2000" b="0" i="0">
+                <a:solidFill>
+                  <a:srgbClr val="333333"/>
+                </a:solidFill>
+                <a:latin typeface="Calibri"/>
+              </a:rPr>
+              <a:t>–   El punto no es memorizar nombres, es entender que el problema de la época era </a:t>
+            </a:r>
+            <a:r>
+              <a:rPr sz="2000" b="1" i="0">
+                <a:solidFill>
+                  <a:srgbClr val="333333"/>
+                </a:solidFill>
+                <a:latin typeface="Calibri"/>
+              </a:rPr>
+              <a:t>traducir</a:t>
+            </a:r>
+            <a:r>
+              <a:rPr sz="2000" b="0" i="0">
+                <a:solidFill>
+                  <a:srgbClr val="333333"/>
+                </a:solidFill>
+                <a:latin typeface="Calibri"/>
+              </a:rPr>
+              <a:t>. 1968 es el hito central de la clase y merece la mitad del tiempo.</a:t>
+            </a:r>
+          </a:p>
+          <a:p>
+            <a:pPr>
+              <a:spcAft>
+                <a:spcPts val="800"/>
+              </a:spcAft>
+            </a:pPr>
+            <a:r>
+              <a:rPr sz="2000" b="0" i="0">
+                <a:solidFill>
+                  <a:srgbClr val="333333"/>
+                </a:solidFill>
+                <a:latin typeface="Calibri"/>
+              </a:rPr>
+              <a:t>–   Se cuenta como está arriba: los tres proyectos que fracasaron, la conferencia, el término.</a:t>
+            </a:r>
+          </a:p>
+          <a:p>
+            <a:pPr>
+              <a:spcAft>
+                <a:spcPts val="800"/>
+              </a:spcAft>
+            </a:pPr>
+            <a:r>
+              <a:rPr sz="2000" b="0" i="0">
+                <a:solidFill>
+                  <a:srgbClr val="333333"/>
+                </a:solidFill>
+                <a:latin typeface="Calibri"/>
+              </a:rPr>
+              <a:t>–   Si el docente solo alcanza a contar un hito bien, que sea este. 1970 es Winston Royce y el esquema que el mundo llamó «cascada».</a:t>
+            </a:r>
+          </a:p>
+          <a:p>
+            <a:pPr>
+              <a:spcAft>
+                <a:spcPts val="800"/>
+              </a:spcAft>
+            </a:pPr>
+            <a:r>
+              <a:rPr sz="2000" b="0" i="0">
+                <a:solidFill>
+                  <a:srgbClr val="333333"/>
+                </a:solidFill>
+                <a:latin typeface="Calibri"/>
+              </a:rPr>
+              <a:t>–   Aquí hay que ser preciso porque es el error histórico más repetido en las clases de ingeniería: Royce dibujó el esquema lineal para decir que </a:t>
+            </a:r>
+            <a:r>
+              <a:rPr sz="2000" b="1" i="0">
+                <a:solidFill>
+                  <a:srgbClr val="333333"/>
+                </a:solidFill>
+                <a:latin typeface="Calibri"/>
+              </a:rPr>
+              <a:t>así no se debe hacer</a:t>
+            </a:r>
+            <a:r>
+              <a:rPr sz="2000" b="0" i="0">
+                <a:solidFill>
+                  <a:srgbClr val="333333"/>
+                </a:solidFill>
+                <a:latin typeface="Calibri"/>
+              </a:rPr>
+              <a:t>, y propuso hacerlo dos veces, con prototipo y retroalimentación.</a:t>
+            </a:r>
+          </a:p>
+        </p:txBody>
+      </p:sp>
+      <p:sp>
+        <p:nvSpPr>
+          <p:cNvPr id="6" name="TextBox 5"/>
+          <p:cNvSpPr txBox="1"/>
+          <p:nvPr/>
+        </p:nvSpPr>
+        <p:spPr>
+          <a:xfrm>
+            <a:off x="11185855" y="6473952"/>
+            <a:ext cx="640080" cy="274320"/>
+          </a:xfrm>
+          <a:prstGeom prst="rect">
+            <a:avLst/>
+          </a:prstGeom>
+          <a:noFill/>
+        </p:spPr>
+        <p:txBody>
+          <a:bodyPr wrap="square">
+            <a:spAutoFit/>
+          </a:bodyPr>
+          <a:lstStyle/>
+          <a:p>
+            <a:pPr algn="r"/>
+            <a:r>
+              <a:rPr sz="1100" b="0" i="0">
+                <a:solidFill>
+                  <a:srgbClr val="666666"/>
+                </a:solidFill>
+                <a:latin typeface="Calibri"/>
+              </a:rPr>
+              <a:t>13</a:t>
+            </a:r>
+          </a:p>
+        </p:txBody>
+      </p:sp>
+    </p:spTree>
+  </p:cSld>
+  <p:clrMapOvr>
+    <a:masterClrMapping/>
+  </p:clrMapOvr>
+</p:sld>
+</file>
+
+<file path=ppt/slides/slide14.xml><?xml version="1.0" encoding="utf-8"?>
+<p:sld xmlns:a="http://schemas.openxmlformats.org/drawingml/2006/main" xmlns:p="http://schemas.openxmlformats.org/presentationml/2006/main" xmlns:r="http://schemas.openxmlformats.org/officeDocument/2006/relationships">
+  <p:cSld>
+    <p:bg>
+      <p:bgPr>
+        <a:solidFill>
+          <a:srgbClr val="FFFFFF"/>
+        </a:solidFill>
+        <a:effectLst/>
+      </p:bgPr>
+    </p:bg>
+    <p:spTree>
+      <p:nvGrpSpPr>
+        <p:cNvPr id="1" name=""/>
+        <p:cNvGrpSpPr/>
+        <p:nvPr/>
+      </p:nvGrpSpPr>
+      <p:grpSpPr/>
+      <p:sp>
+        <p:nvSpPr>
+          <p:cNvPr id="2" name="Rectangle 1"/>
+          <p:cNvSpPr/>
+          <p:nvPr/>
+        </p:nvSpPr>
+        <p:spPr>
+          <a:xfrm>
+            <a:off x="0" y="0"/>
+            <a:ext cx="12191695" cy="960120"/>
+          </a:xfrm>
+          <a:prstGeom prst="rect">
+            <a:avLst/>
+          </a:prstGeom>
+          <a:solidFill>
+            <a:srgbClr val="095292"/>
+          </a:solidFill>
+          <a:ln>
+            <a:noFill/>
+          </a:ln>
+        </p:spPr>
+        <p:style>
+          <a:lnRef idx="1">
+            <a:schemeClr val="accent1"/>
+          </a:lnRef>
+          <a:fillRef idx="3">
+            <a:schemeClr val="accent1"/>
+          </a:fillRef>
+          <a:effectRef idx="2">
+            <a:schemeClr val="accent1"/>
+          </a:effectRef>
+          <a:fontRef idx="minor">
+            <a:schemeClr val="lt1"/>
+          </a:fontRef>
+        </p:style>
+        <p:txBody>
+          <a:bodyPr rtlCol="0" anchor="ctr"/>
+          <a:lstStyle/>
+          <a:p>
             <a:pPr algn="ctr"/>
+          </a:p>
+        </p:txBody>
+      </p:sp>
+      <p:sp>
+        <p:nvSpPr>
+          <p:cNvPr id="3" name="Rectangle 2"/>
+          <p:cNvSpPr/>
+          <p:nvPr/>
+        </p:nvSpPr>
+        <p:spPr>
+          <a:xfrm>
+            <a:off x="0" y="960120"/>
+            <a:ext cx="12191695" cy="41148"/>
+          </a:xfrm>
+          <a:prstGeom prst="rect">
+            <a:avLst/>
+          </a:prstGeom>
+          <a:solidFill>
+            <a:srgbClr val="FFD000"/>
+          </a:solidFill>
+          <a:ln>
+            <a:noFill/>
+          </a:ln>
+        </p:spPr>
+        <p:style>
+          <a:lnRef idx="1">
+            <a:schemeClr val="accent1"/>
+          </a:lnRef>
+          <a:fillRef idx="3">
+            <a:schemeClr val="accent1"/>
+          </a:fillRef>
+          <a:effectRef idx="2">
+            <a:schemeClr val="accent1"/>
+          </a:effectRef>
+          <a:fontRef idx="minor">
+            <a:schemeClr val="lt1"/>
+          </a:fontRef>
+        </p:style>
+        <p:txBody>
+          <a:bodyPr rtlCol="0" anchor="ctr"/>
+          <a:lstStyle/>
+          <a:p>
+            <a:pPr algn="ctr"/>
+          </a:p>
+        </p:txBody>
+      </p:sp>
+      <p:sp>
+        <p:nvSpPr>
+          <p:cNvPr id="4" name="TextBox 3"/>
+          <p:cNvSpPr txBox="1"/>
+          <p:nvPr/>
+        </p:nvSpPr>
+        <p:spPr>
+          <a:xfrm>
+            <a:off x="457200" y="164592"/>
+            <a:ext cx="11277295" cy="502920"/>
+          </a:xfrm>
+          <a:prstGeom prst="rect">
+            <a:avLst/>
+          </a:prstGeom>
+          <a:noFill/>
+        </p:spPr>
+        <p:txBody>
+          <a:bodyPr wrap="square">
+            <a:spAutoFit/>
+          </a:bodyPr>
+          <a:lstStyle/>
+          <a:p>
+            <a:r>
+              <a:rPr sz="2600" b="1" i="0">
+                <a:solidFill>
+                  <a:srgbClr val="FFFFFF"/>
+                </a:solidFill>
+                <a:latin typeface="Calibri"/>
+              </a:rPr>
+              <a:t>Los seis hitos: qué decir de cada uno en dos minutos (2/3)</a:t>
+            </a:r>
+          </a:p>
+        </p:txBody>
+      </p:sp>
+      <p:sp>
+        <p:nvSpPr>
+          <p:cNvPr id="5" name="TextBox 4"/>
+          <p:cNvSpPr txBox="1"/>
+          <p:nvPr/>
+        </p:nvSpPr>
+        <p:spPr>
+          <a:xfrm>
+            <a:off x="457200" y="1170432"/>
+            <a:ext cx="11277295" cy="5230368"/>
+          </a:xfrm>
+          <a:prstGeom prst="rect">
+            <a:avLst/>
+          </a:prstGeom>
+          <a:noFill/>
+        </p:spPr>
+        <p:txBody>
+          <a:bodyPr wrap="square">
+            <a:spAutoFit/>
+          </a:bodyPr>
+          <a:lstStyle/>
+          <a:p>
+            <a:pPr>
+              <a:spcAft>
+                <a:spcPts val="800"/>
+              </a:spcAft>
+            </a:pPr>
+            <a:r>
+              <a:rPr sz="2000" b="0" i="0">
+                <a:solidFill>
+                  <a:srgbClr val="333333"/>
+                </a:solidFill>
+                <a:latin typeface="Calibri"/>
+              </a:rPr>
+              <a:t>–   La industria se quedó con el dibujo y tiró la advertencia.</a:t>
+            </a:r>
+          </a:p>
+          <a:p>
+            <a:pPr>
+              <a:spcAft>
+                <a:spcPts val="800"/>
+              </a:spcAft>
+            </a:pPr>
+            <a:r>
+              <a:rPr sz="2000" b="0" i="0">
+                <a:solidFill>
+                  <a:srgbClr val="333333"/>
+                </a:solidFill>
+                <a:latin typeface="Calibri"/>
+              </a:rPr>
+              <a:t>–   La lección para el estudiante es doble: sobre el ciclo de vida (que se ve en la sesión 7) y sobre cómo se deforman las ideas cuando se citan de segunda mano. 1975 es Brooks y «The Mythical Man-Month».</a:t>
+            </a:r>
+          </a:p>
+          <a:p>
+            <a:pPr>
+              <a:spcAft>
+                <a:spcPts val="800"/>
+              </a:spcAft>
+            </a:pPr>
+            <a:r>
+              <a:rPr sz="2000" b="0" i="0">
+                <a:solidFill>
+                  <a:srgbClr val="333333"/>
+                </a:solidFill>
+                <a:latin typeface="Calibri"/>
+              </a:rPr>
+              <a:t>–   La idea que hay que dejar es contraintuitiva y utilísima para un curso donde se trabaja en equipos de cinco: </a:t>
+            </a:r>
             <a:r>
               <a:rPr sz="2000" b="1" i="0">
                 <a:solidFill>
-                  <a:srgbClr val="269CCB"/>
-                </a:solidFill>
-                <a:latin typeface="Calibri"/>
-              </a:rPr>
-              <a:t>La disciplina nació de un fracaso de organización, no de un invento</a:t>
+                  <a:srgbClr val="333333"/>
+                </a:solidFill>
+                <a:latin typeface="Calibri"/>
+              </a:rPr>
+              <a:t>agregar gente a un proyecto atrasado lo atrasa más</a:t>
+            </a:r>
+            <a:r>
+              <a:rPr sz="2000" b="0" i="0">
+                <a:solidFill>
+                  <a:srgbClr val="333333"/>
+                </a:solidFill>
+                <a:latin typeface="Calibri"/>
+              </a:rPr>
+              <a:t>, porque los canales de comunicación crecen mucho más rápido que las personas.</a:t>
+            </a:r>
+          </a:p>
+          <a:p>
+            <a:pPr>
+              <a:spcAft>
+                <a:spcPts val="800"/>
+              </a:spcAft>
+            </a:pPr>
+            <a:r>
+              <a:rPr sz="2000" b="0" i="0">
+                <a:solidFill>
+                  <a:srgbClr val="333333"/>
+                </a:solidFill>
+                <a:latin typeface="Calibri"/>
+              </a:rPr>
+              <a:t>–   Con 5 personas hay 10 parejas que se tienen que entender; con 10 personas hay 45.</a:t>
+            </a:r>
+          </a:p>
+          <a:p>
+            <a:pPr>
+              <a:spcAft>
+                <a:spcPts val="800"/>
+              </a:spcAft>
+            </a:pPr>
+            <a:r>
+              <a:rPr sz="2000" b="0" i="0">
+                <a:solidFill>
+                  <a:srgbClr val="333333"/>
+                </a:solidFill>
+                <a:latin typeface="Calibri"/>
+              </a:rPr>
+              <a:t>–   Es un dato verificable con una fórmula de bachillerato y explica por qué en este curso los equipos son de cinco y no de diez. 1991–2001 junta software libre (Linux</a:t>
+            </a:r>
+          </a:p>
+          <a:p>
+            <a:pPr>
+              <a:spcAft>
+                <a:spcPts val="800"/>
+              </a:spcAft>
+            </a:pPr>
+            <a:r>
+              <a:rPr sz="2000" b="0" i="0">
+                <a:solidFill>
+                  <a:srgbClr val="333333"/>
+                </a:solidFill>
+                <a:latin typeface="Calibri"/>
+              </a:rPr>
+              <a:t>–   Y con él la idea de que miles de personas que no se conocen pueden construir algo serio si el proceso es público) y el Manifiesto Ágil de 2001.</a:t>
+            </a:r>
+          </a:p>
+        </p:txBody>
+      </p:sp>
+      <p:sp>
+        <p:nvSpPr>
+          <p:cNvPr id="6" name="TextBox 5"/>
+          <p:cNvSpPr txBox="1"/>
+          <p:nvPr/>
+        </p:nvSpPr>
+        <p:spPr>
+          <a:xfrm>
+            <a:off x="11185855" y="6473952"/>
+            <a:ext cx="640080" cy="274320"/>
+          </a:xfrm>
+          <a:prstGeom prst="rect">
+            <a:avLst/>
+          </a:prstGeom>
+          <a:noFill/>
+        </p:spPr>
+        <p:txBody>
+          <a:bodyPr wrap="square">
+            <a:spAutoFit/>
+          </a:bodyPr>
+          <a:lstStyle/>
+          <a:p>
+            <a:pPr algn="r"/>
+            <a:r>
+              <a:rPr sz="1100" b="0" i="0">
+                <a:solidFill>
+                  <a:srgbClr val="666666"/>
+                </a:solidFill>
+                <a:latin typeface="Calibri"/>
+              </a:rPr>
+              <a:t>14</a:t>
+            </a:r>
+          </a:p>
+        </p:txBody>
+      </p:sp>
+    </p:spTree>
+  </p:cSld>
+  <p:clrMapOvr>
+    <a:masterClrMapping/>
+  </p:clrMapOvr>
+</p:sld>
+</file>
+
+<file path=ppt/slides/slide15.xml><?xml version="1.0" encoding="utf-8"?>
+<p:sld xmlns:a="http://schemas.openxmlformats.org/drawingml/2006/main" xmlns:p="http://schemas.openxmlformats.org/presentationml/2006/main" xmlns:r="http://schemas.openxmlformats.org/officeDocument/2006/relationships">
+  <p:cSld>
+    <p:bg>
+      <p:bgPr>
+        <a:solidFill>
+          <a:srgbClr val="FFFFFF"/>
+        </a:solidFill>
+        <a:effectLst/>
+      </p:bgPr>
+    </p:bg>
+    <p:spTree>
+      <p:nvGrpSpPr>
+        <p:cNvPr id="1" name=""/>
+        <p:cNvGrpSpPr/>
+        <p:nvPr/>
+      </p:nvGrpSpPr>
+      <p:grpSpPr/>
+      <p:sp>
+        <p:nvSpPr>
+          <p:cNvPr id="2" name="Rectangle 1"/>
+          <p:cNvSpPr/>
+          <p:nvPr/>
+        </p:nvSpPr>
+        <p:spPr>
+          <a:xfrm>
+            <a:off x="0" y="0"/>
+            <a:ext cx="12191695" cy="960120"/>
+          </a:xfrm>
+          <a:prstGeom prst="rect">
+            <a:avLst/>
+          </a:prstGeom>
+          <a:solidFill>
+            <a:srgbClr val="095292"/>
+          </a:solidFill>
+          <a:ln>
+            <a:noFill/>
+          </a:ln>
+        </p:spPr>
+        <p:style>
+          <a:lnRef idx="1">
+            <a:schemeClr val="accent1"/>
+          </a:lnRef>
+          <a:fillRef idx="3">
+            <a:schemeClr val="accent1"/>
+          </a:fillRef>
+          <a:effectRef idx="2">
+            <a:schemeClr val="accent1"/>
+          </a:effectRef>
+          <a:fontRef idx="minor">
+            <a:schemeClr val="lt1"/>
+          </a:fontRef>
+        </p:style>
+        <p:txBody>
+          <a:bodyPr rtlCol="0" anchor="ctr"/>
+          <a:lstStyle/>
+          <a:p>
+            <a:pPr algn="ctr"/>
+          </a:p>
+        </p:txBody>
+      </p:sp>
+      <p:sp>
+        <p:nvSpPr>
+          <p:cNvPr id="3" name="Rectangle 2"/>
+          <p:cNvSpPr/>
+          <p:nvPr/>
+        </p:nvSpPr>
+        <p:spPr>
+          <a:xfrm>
+            <a:off x="0" y="960120"/>
+            <a:ext cx="12191695" cy="41148"/>
+          </a:xfrm>
+          <a:prstGeom prst="rect">
+            <a:avLst/>
+          </a:prstGeom>
+          <a:solidFill>
+            <a:srgbClr val="FFD000"/>
+          </a:solidFill>
+          <a:ln>
+            <a:noFill/>
+          </a:ln>
+        </p:spPr>
+        <p:style>
+          <a:lnRef idx="1">
+            <a:schemeClr val="accent1"/>
+          </a:lnRef>
+          <a:fillRef idx="3">
+            <a:schemeClr val="accent1"/>
+          </a:fillRef>
+          <a:effectRef idx="2">
+            <a:schemeClr val="accent1"/>
+          </a:effectRef>
+          <a:fontRef idx="minor">
+            <a:schemeClr val="lt1"/>
+          </a:fontRef>
+        </p:style>
+        <p:txBody>
+          <a:bodyPr rtlCol="0" anchor="ctr"/>
+          <a:lstStyle/>
+          <a:p>
+            <a:pPr algn="ctr"/>
+          </a:p>
+        </p:txBody>
+      </p:sp>
+      <p:sp>
+        <p:nvSpPr>
+          <p:cNvPr id="4" name="TextBox 3"/>
+          <p:cNvSpPr txBox="1"/>
+          <p:nvPr/>
+        </p:nvSpPr>
+        <p:spPr>
+          <a:xfrm>
+            <a:off x="457200" y="164592"/>
+            <a:ext cx="11277295" cy="502920"/>
+          </a:xfrm>
+          <a:prstGeom prst="rect">
+            <a:avLst/>
+          </a:prstGeom>
+          <a:noFill/>
+        </p:spPr>
+        <p:txBody>
+          <a:bodyPr wrap="square">
+            <a:spAutoFit/>
+          </a:bodyPr>
+          <a:lstStyle/>
+          <a:p>
+            <a:r>
+              <a:rPr sz="2600" b="1" i="0">
+                <a:solidFill>
+                  <a:srgbClr val="FFFFFF"/>
+                </a:solidFill>
+                <a:latin typeface="Calibri"/>
+              </a:rPr>
+              <a:t>Los seis hitos: qué decir de cada uno en dos minutos (3/3)</a:t>
+            </a:r>
+          </a:p>
+        </p:txBody>
+      </p:sp>
+      <p:sp>
+        <p:nvSpPr>
+          <p:cNvPr id="5" name="TextBox 4"/>
+          <p:cNvSpPr txBox="1"/>
+          <p:nvPr/>
+        </p:nvSpPr>
+        <p:spPr>
+          <a:xfrm>
+            <a:off x="457200" y="1170432"/>
+            <a:ext cx="11277295" cy="5230368"/>
+          </a:xfrm>
+          <a:prstGeom prst="rect">
+            <a:avLst/>
+          </a:prstGeom>
+          <a:noFill/>
+        </p:spPr>
+        <p:txBody>
+          <a:bodyPr wrap="square">
+            <a:spAutoFit/>
+          </a:bodyPr>
+          <a:lstStyle/>
+          <a:p>
+            <a:pPr>
+              <a:spcAft>
+                <a:spcPts val="800"/>
+              </a:spcAft>
+            </a:pPr>
+            <a:r>
+              <a:rPr sz="2000" b="0" i="0">
+                <a:solidFill>
+                  <a:srgbClr val="333333"/>
+                </a:solidFill>
+                <a:latin typeface="Calibri"/>
+              </a:rPr>
+              <a:t>–   El problema que atacan es el mismo: </a:t>
+            </a:r>
+            <a:r>
+              <a:rPr sz="2000" b="1" i="0">
+                <a:solidFill>
+                  <a:srgbClr val="333333"/>
+                </a:solidFill>
+                <a:latin typeface="Calibri"/>
+              </a:rPr>
+              <a:t>los requisitos cambian mientras se construye</a:t>
+            </a:r>
+            <a:r>
+              <a:rPr sz="2000" b="0" i="0">
+                <a:solidFill>
+                  <a:srgbClr val="333333"/>
+                </a:solidFill>
+                <a:latin typeface="Calibri"/>
+              </a:rPr>
+              <a:t>, y un plan de dos años escrito el primer día es una obra de ficción.</a:t>
+            </a:r>
+          </a:p>
+          <a:p>
+            <a:pPr>
+              <a:spcAft>
+                <a:spcPts val="800"/>
+              </a:spcAft>
+            </a:pPr>
+            <a:r>
+              <a:rPr sz="2000" b="0" i="0">
+                <a:solidFill>
+                  <a:srgbClr val="333333"/>
+                </a:solidFill>
+                <a:latin typeface="Calibri"/>
+              </a:rPr>
+              <a:t>–   Ágil no elimina las fases, cambia su tamaño. 2006 en adelante es la nube y los datos.</a:t>
+            </a:r>
+          </a:p>
+          <a:p>
+            <a:pPr>
+              <a:spcAft>
+                <a:spcPts val="800"/>
+              </a:spcAft>
+            </a:pPr>
+            <a:r>
+              <a:rPr sz="2000" b="0" i="0">
+                <a:solidFill>
+                  <a:srgbClr val="333333"/>
+                </a:solidFill>
+                <a:latin typeface="Calibri"/>
+              </a:rPr>
+              <a:t>–   Aquí el problema muda otra vez y es importante que el estudiante lo note</a:t>
+            </a:r>
+          </a:p>
+          <a:p>
+            <a:pPr>
+              <a:spcAft>
+                <a:spcPts val="800"/>
+              </a:spcAft>
+            </a:pPr>
+            <a:r>
+              <a:rPr sz="2000" b="0" i="0">
+                <a:solidFill>
+                  <a:srgbClr val="333333"/>
+                </a:solidFill>
+                <a:latin typeface="Calibri"/>
+              </a:rPr>
+              <a:t>–   Porque es el problema de su generación: cuando alquilar mil servidores por hora cuesta poco y una biblioteca de IA se instala en un comando, la pregunta técnica «¿se puede construir?» deja de ser la difícil.</a:t>
+            </a:r>
+          </a:p>
+          <a:p>
+            <a:pPr>
+              <a:spcAft>
+                <a:spcPts val="800"/>
+              </a:spcAft>
+            </a:pPr>
+            <a:r>
+              <a:rPr sz="2000" b="0" i="0">
+                <a:solidFill>
+                  <a:srgbClr val="333333"/>
+                </a:solidFill>
+                <a:latin typeface="Calibri"/>
+              </a:rPr>
+              <a:t>–   La difícil es </a:t>
+            </a:r>
+            <a:r>
+              <a:rPr sz="2000" b="1" i="0">
+                <a:solidFill>
+                  <a:srgbClr val="333333"/>
+                </a:solidFill>
+                <a:latin typeface="Calibri"/>
+              </a:rPr>
+              <a:t>«¿se debe construir, a quién afecta y quién responde?»</a:t>
+            </a:r>
+            <a:r>
+              <a:rPr sz="2000" b="0" i="0">
+                <a:solidFill>
+                  <a:srgbClr val="333333"/>
+                </a:solidFill>
+                <a:latin typeface="Calibri"/>
+              </a:rPr>
+              <a:t>.</a:t>
+            </a:r>
+          </a:p>
+          <a:p>
+            <a:pPr>
+              <a:spcAft>
+                <a:spcPts val="800"/>
+              </a:spcAft>
+            </a:pPr>
+            <a:r>
+              <a:rPr sz="2000" b="0" i="0">
+                <a:solidFill>
+                  <a:srgbClr val="333333"/>
+                </a:solidFill>
+                <a:latin typeface="Calibri"/>
+              </a:rPr>
+              <a:t>–   Esa pregunta es el hilo de las Clases 4, 5 y 13.</a:t>
+            </a:r>
+          </a:p>
+        </p:txBody>
+      </p:sp>
+      <p:sp>
+        <p:nvSpPr>
+          <p:cNvPr id="6" name="TextBox 5"/>
+          <p:cNvSpPr txBox="1"/>
+          <p:nvPr/>
+        </p:nvSpPr>
+        <p:spPr>
+          <a:xfrm>
+            <a:off x="11185855" y="6473952"/>
+            <a:ext cx="640080" cy="274320"/>
+          </a:xfrm>
+          <a:prstGeom prst="rect">
+            <a:avLst/>
+          </a:prstGeom>
+          <a:noFill/>
+        </p:spPr>
+        <p:txBody>
+          <a:bodyPr wrap="square">
+            <a:spAutoFit/>
+          </a:bodyPr>
+          <a:lstStyle/>
+          <a:p>
+            <a:pPr algn="r"/>
+            <a:r>
+              <a:rPr sz="1100" b="0" i="0">
+                <a:solidFill>
+                  <a:srgbClr val="666666"/>
+                </a:solidFill>
+                <a:latin typeface="Calibri"/>
+              </a:rPr>
+              <a:t>15</a:t>
+            </a:r>
+          </a:p>
+        </p:txBody>
+      </p:sp>
+    </p:spTree>
+  </p:cSld>
+  <p:clrMapOvr>
+    <a:masterClrMapping/>
+  </p:clrMapOvr>
+</p:sld>
+</file>
+
+<file path=ppt/slides/slide16.xml><?xml version="1.0" encoding="utf-8"?>
+<p:sld xmlns:a="http://schemas.openxmlformats.org/drawingml/2006/main" xmlns:p="http://schemas.openxmlformats.org/presentationml/2006/main" xmlns:r="http://schemas.openxmlformats.org/officeDocument/2006/relationships">
+  <p:cSld>
+    <p:bg>
+      <p:bgPr>
+        <a:solidFill>
+          <a:srgbClr val="FFFFFF"/>
+        </a:solidFill>
+        <a:effectLst/>
+      </p:bgPr>
+    </p:bg>
+    <p:spTree>
+      <p:nvGrpSpPr>
+        <p:cNvPr id="1" name=""/>
+        <p:cNvGrpSpPr/>
+        <p:nvPr/>
+      </p:nvGrpSpPr>
+      <p:grpSpPr/>
+      <p:sp>
+        <p:nvSpPr>
+          <p:cNvPr id="2" name="Rectangle 1"/>
+          <p:cNvSpPr/>
+          <p:nvPr/>
+        </p:nvSpPr>
+        <p:spPr>
+          <a:xfrm>
+            <a:off x="0" y="0"/>
+            <a:ext cx="12191695" cy="960120"/>
+          </a:xfrm>
+          <a:prstGeom prst="rect">
+            <a:avLst/>
+          </a:prstGeom>
+          <a:solidFill>
+            <a:srgbClr val="095292"/>
+          </a:solidFill>
+          <a:ln>
+            <a:noFill/>
+          </a:ln>
+        </p:spPr>
+        <p:style>
+          <a:lnRef idx="1">
+            <a:schemeClr val="accent1"/>
+          </a:lnRef>
+          <a:fillRef idx="3">
+            <a:schemeClr val="accent1"/>
+          </a:fillRef>
+          <a:effectRef idx="2">
+            <a:schemeClr val="accent1"/>
+          </a:effectRef>
+          <a:fontRef idx="minor">
+            <a:schemeClr val="lt1"/>
+          </a:fontRef>
+        </p:style>
+        <p:txBody>
+          <a:bodyPr rtlCol="0" anchor="ctr"/>
+          <a:lstStyle/>
+          <a:p>
+            <a:pPr algn="ctr"/>
+          </a:p>
+        </p:txBody>
+      </p:sp>
+      <p:sp>
+        <p:nvSpPr>
+          <p:cNvPr id="3" name="Rectangle 2"/>
+          <p:cNvSpPr/>
+          <p:nvPr/>
+        </p:nvSpPr>
+        <p:spPr>
+          <a:xfrm>
+            <a:off x="0" y="960120"/>
+            <a:ext cx="12191695" cy="41148"/>
+          </a:xfrm>
+          <a:prstGeom prst="rect">
+            <a:avLst/>
+          </a:prstGeom>
+          <a:solidFill>
+            <a:srgbClr val="FFD000"/>
+          </a:solidFill>
+          <a:ln>
+            <a:noFill/>
+          </a:ln>
+        </p:spPr>
+        <p:style>
+          <a:lnRef idx="1">
+            <a:schemeClr val="accent1"/>
+          </a:lnRef>
+          <a:fillRef idx="3">
+            <a:schemeClr val="accent1"/>
+          </a:fillRef>
+          <a:effectRef idx="2">
+            <a:schemeClr val="accent1"/>
+          </a:effectRef>
+          <a:fontRef idx="minor">
+            <a:schemeClr val="lt1"/>
+          </a:fontRef>
+        </p:style>
+        <p:txBody>
+          <a:bodyPr rtlCol="0" anchor="ctr"/>
+          <a:lstStyle/>
+          <a:p>
+            <a:pPr algn="ctr"/>
+          </a:p>
+        </p:txBody>
+      </p:sp>
+      <p:sp>
+        <p:nvSpPr>
+          <p:cNvPr id="4" name="TextBox 3"/>
+          <p:cNvSpPr txBox="1"/>
+          <p:nvPr/>
+        </p:nvSpPr>
+        <p:spPr>
+          <a:xfrm>
+            <a:off x="457200" y="164592"/>
+            <a:ext cx="11277295" cy="502920"/>
+          </a:xfrm>
+          <a:prstGeom prst="rect">
+            <a:avLst/>
+          </a:prstGeom>
+          <a:noFill/>
+        </p:spPr>
+        <p:txBody>
+          <a:bodyPr wrap="square">
+            <a:spAutoFit/>
+          </a:bodyPr>
+          <a:lstStyle/>
+          <a:p>
+            <a:r>
+              <a:rPr sz="2600" b="1" i="0">
+                <a:solidFill>
+                  <a:srgbClr val="FFFFFF"/>
+                </a:solidFill>
+                <a:latin typeface="Calibri"/>
+              </a:rPr>
+              <a:t>El método de lectura de un hito y por qué la cuarta pregunta es la que se califica (1/2)</a:t>
+            </a:r>
+          </a:p>
+        </p:txBody>
+      </p:sp>
+      <p:sp>
+        <p:nvSpPr>
+          <p:cNvPr id="5" name="TextBox 4"/>
+          <p:cNvSpPr txBox="1"/>
+          <p:nvPr/>
+        </p:nvSpPr>
+        <p:spPr>
+          <a:xfrm>
+            <a:off x="457200" y="1170432"/>
+            <a:ext cx="11277295" cy="5230368"/>
+          </a:xfrm>
+          <a:prstGeom prst="rect">
+            <a:avLst/>
+          </a:prstGeom>
+          <a:noFill/>
+        </p:spPr>
+        <p:txBody>
+          <a:bodyPr wrap="square">
+            <a:spAutoFit/>
+          </a:bodyPr>
+          <a:lstStyle/>
+          <a:p>
+            <a:pPr>
+              <a:spcAft>
+                <a:spcPts val="800"/>
+              </a:spcAft>
+            </a:pPr>
+            <a:r>
+              <a:rPr sz="2000" b="0" i="0">
+                <a:solidFill>
+                  <a:srgbClr val="333333"/>
+                </a:solidFill>
+                <a:latin typeface="Calibri"/>
+              </a:rPr>
+              <a:t>–   Las cuatro preguntas (qué dolía, qué propuso, qué resolvió, qué sigue vivo) son el método de trabajo del taller y conviene dictarlas como método, no como curiosidad.</a:t>
+            </a:r>
+          </a:p>
+          <a:p>
+            <a:pPr>
+              <a:spcAft>
+                <a:spcPts val="800"/>
+              </a:spcAft>
+            </a:pPr>
+            <a:r>
+              <a:rPr sz="2000" b="0" i="0">
+                <a:solidFill>
+                  <a:srgbClr val="333333"/>
+                </a:solidFill>
+                <a:latin typeface="Calibri"/>
+              </a:rPr>
+              <a:t>–   Las tres primeras se pueden buscar; la cuarta exige pensar, y por eso es la que más pesa en la rúbrica.</a:t>
+            </a:r>
+          </a:p>
+          <a:p>
+            <a:pPr>
+              <a:spcAft>
+                <a:spcPts val="800"/>
+              </a:spcAft>
+            </a:pPr>
+            <a:r>
+              <a:rPr sz="2000" b="0" i="0">
+                <a:solidFill>
+                  <a:srgbClr val="333333"/>
+                </a:solidFill>
+                <a:latin typeface="Calibri"/>
+              </a:rPr>
+              <a:t>–   Un equipo puede escribir «1975: Brooks dijo que agregar gente atrasa el proyecto» y estar en lo correcto sin haber entendido nada.</a:t>
+            </a:r>
+          </a:p>
+          <a:p>
+            <a:pPr>
+              <a:spcAft>
+                <a:spcPts val="800"/>
+              </a:spcAft>
+            </a:pPr>
+            <a:r>
+              <a:rPr sz="2000" b="0" i="0">
+                <a:solidFill>
+                  <a:srgbClr val="333333"/>
+                </a:solidFill>
+                <a:latin typeface="Calibri"/>
+              </a:rPr>
+              <a:t>–   La cuarta pregunta obliga a decir algo como «sigue vivo porque cuando nuestro equipo se atrasó en el taller de la sesión anterior, la reacción natural fue pedir ayuda a otro equipo, y eso nos costó veinte minutos de explicar el contexto».</a:t>
+            </a:r>
+          </a:p>
+          <a:p>
+            <a:pPr>
+              <a:spcAft>
+                <a:spcPts val="800"/>
+              </a:spcAft>
+            </a:pPr>
+            <a:r>
+              <a:rPr sz="2000" b="0" i="0">
+                <a:solidFill>
+                  <a:srgbClr val="333333"/>
+                </a:solidFill>
+                <a:latin typeface="Calibri"/>
+              </a:rPr>
+              <a:t>–   Las tres aclaraciones de la última diapositiva de teoría hay que decirlas en voz alta aunque parezcan detalles, porque son las tres cosas que el estudiante va a encontrar mal contadas en el primer video o resumen que busque en internet.</a:t>
+            </a:r>
+          </a:p>
+        </p:txBody>
+      </p:sp>
+      <p:sp>
+        <p:nvSpPr>
+          <p:cNvPr id="6" name="TextBox 5"/>
+          <p:cNvSpPr txBox="1"/>
+          <p:nvPr/>
+        </p:nvSpPr>
+        <p:spPr>
+          <a:xfrm>
+            <a:off x="11185855" y="6473952"/>
+            <a:ext cx="640080" cy="274320"/>
+          </a:xfrm>
+          <a:prstGeom prst="rect">
+            <a:avLst/>
+          </a:prstGeom>
+          <a:noFill/>
+        </p:spPr>
+        <p:txBody>
+          <a:bodyPr wrap="square">
+            <a:spAutoFit/>
+          </a:bodyPr>
+          <a:lstStyle/>
+          <a:p>
+            <a:pPr algn="r"/>
+            <a:r>
+              <a:rPr sz="1100" b="0" i="0">
+                <a:solidFill>
+                  <a:srgbClr val="666666"/>
+                </a:solidFill>
+                <a:latin typeface="Calibri"/>
+              </a:rPr>
+              <a:t>16</a:t>
+            </a:r>
+          </a:p>
+        </p:txBody>
+      </p:sp>
+    </p:spTree>
+  </p:cSld>
+  <p:clrMapOvr>
+    <a:masterClrMapping/>
+  </p:clrMapOvr>
+</p:sld>
+</file>
+
+<file path=ppt/slides/slide17.xml><?xml version="1.0" encoding="utf-8"?>
+<p:sld xmlns:a="http://schemas.openxmlformats.org/drawingml/2006/main" xmlns:p="http://schemas.openxmlformats.org/presentationml/2006/main" xmlns:r="http://schemas.openxmlformats.org/officeDocument/2006/relationships">
+  <p:cSld>
+    <p:bg>
+      <p:bgPr>
+        <a:solidFill>
+          <a:srgbClr val="FFFFFF"/>
+        </a:solidFill>
+        <a:effectLst/>
+      </p:bgPr>
+    </p:bg>
+    <p:spTree>
+      <p:nvGrpSpPr>
+        <p:cNvPr id="1" name=""/>
+        <p:cNvGrpSpPr/>
+        <p:nvPr/>
+      </p:nvGrpSpPr>
+      <p:grpSpPr/>
+      <p:sp>
+        <p:nvSpPr>
+          <p:cNvPr id="2" name="Rectangle 1"/>
+          <p:cNvSpPr/>
+          <p:nvPr/>
+        </p:nvSpPr>
+        <p:spPr>
+          <a:xfrm>
+            <a:off x="0" y="0"/>
+            <a:ext cx="12191695" cy="960120"/>
+          </a:xfrm>
+          <a:prstGeom prst="rect">
+            <a:avLst/>
+          </a:prstGeom>
+          <a:solidFill>
+            <a:srgbClr val="095292"/>
+          </a:solidFill>
+          <a:ln>
+            <a:noFill/>
+          </a:ln>
+        </p:spPr>
+        <p:style>
+          <a:lnRef idx="1">
+            <a:schemeClr val="accent1"/>
+          </a:lnRef>
+          <a:fillRef idx="3">
+            <a:schemeClr val="accent1"/>
+          </a:fillRef>
+          <a:effectRef idx="2">
+            <a:schemeClr val="accent1"/>
+          </a:effectRef>
+          <a:fontRef idx="minor">
+            <a:schemeClr val="lt1"/>
+          </a:fontRef>
+        </p:style>
+        <p:txBody>
+          <a:bodyPr rtlCol="0" anchor="ctr"/>
+          <a:lstStyle/>
+          <a:p>
+            <a:pPr algn="ctr"/>
+          </a:p>
+        </p:txBody>
+      </p:sp>
+      <p:sp>
+        <p:nvSpPr>
+          <p:cNvPr id="3" name="Rectangle 2"/>
+          <p:cNvSpPr/>
+          <p:nvPr/>
+        </p:nvSpPr>
+        <p:spPr>
+          <a:xfrm>
+            <a:off x="0" y="960120"/>
+            <a:ext cx="12191695" cy="41148"/>
+          </a:xfrm>
+          <a:prstGeom prst="rect">
+            <a:avLst/>
+          </a:prstGeom>
+          <a:solidFill>
+            <a:srgbClr val="FFD000"/>
+          </a:solidFill>
+          <a:ln>
+            <a:noFill/>
+          </a:ln>
+        </p:spPr>
+        <p:style>
+          <a:lnRef idx="1">
+            <a:schemeClr val="accent1"/>
+          </a:lnRef>
+          <a:fillRef idx="3">
+            <a:schemeClr val="accent1"/>
+          </a:fillRef>
+          <a:effectRef idx="2">
+            <a:schemeClr val="accent1"/>
+          </a:effectRef>
+          <a:fontRef idx="minor">
+            <a:schemeClr val="lt1"/>
+          </a:fontRef>
+        </p:style>
+        <p:txBody>
+          <a:bodyPr rtlCol="0" anchor="ctr"/>
+          <a:lstStyle/>
+          <a:p>
+            <a:pPr algn="ctr"/>
+          </a:p>
+        </p:txBody>
+      </p:sp>
+      <p:sp>
+        <p:nvSpPr>
+          <p:cNvPr id="4" name="TextBox 3"/>
+          <p:cNvSpPr txBox="1"/>
+          <p:nvPr/>
+        </p:nvSpPr>
+        <p:spPr>
+          <a:xfrm>
+            <a:off x="457200" y="164592"/>
+            <a:ext cx="11277295" cy="502920"/>
+          </a:xfrm>
+          <a:prstGeom prst="rect">
+            <a:avLst/>
+          </a:prstGeom>
+          <a:noFill/>
+        </p:spPr>
+        <p:txBody>
+          <a:bodyPr wrap="square">
+            <a:spAutoFit/>
+          </a:bodyPr>
+          <a:lstStyle/>
+          <a:p>
+            <a:r>
+              <a:rPr sz="2600" b="1" i="0">
+                <a:solidFill>
+                  <a:srgbClr val="FFFFFF"/>
+                </a:solidFill>
+                <a:latin typeface="Calibri"/>
+              </a:rPr>
+              <a:t>El método de lectura de un hito y por qué la cuarta pregunta es la que se califica (2/2)</a:t>
+            </a:r>
+          </a:p>
+        </p:txBody>
+      </p:sp>
+      <p:sp>
+        <p:nvSpPr>
+          <p:cNvPr id="5" name="TextBox 4"/>
+          <p:cNvSpPr txBox="1"/>
+          <p:nvPr/>
+        </p:nvSpPr>
+        <p:spPr>
+          <a:xfrm>
+            <a:off x="457200" y="1170432"/>
+            <a:ext cx="11277295" cy="5230368"/>
+          </a:xfrm>
+          <a:prstGeom prst="rect">
+            <a:avLst/>
+          </a:prstGeom>
+          <a:noFill/>
+        </p:spPr>
+        <p:txBody>
+          <a:bodyPr wrap="square">
+            <a:spAutoFit/>
+          </a:bodyPr>
+          <a:lstStyle/>
+          <a:p>
+            <a:pPr>
+              <a:spcAft>
+                <a:spcPts val="800"/>
+              </a:spcAft>
+            </a:pPr>
+            <a:r>
+              <a:rPr sz="2000" b="0" i="0">
+                <a:solidFill>
+                  <a:srgbClr val="333333"/>
+                </a:solidFill>
+                <a:latin typeface="Calibri"/>
+              </a:rPr>
+              <a:t>–   Advertirlas hoy le da una herramienta que sirve para todo el curso: </a:t>
+            </a:r>
+            <a:r>
+              <a:rPr sz="2000" b="1" i="0">
+                <a:solidFill>
+                  <a:srgbClr val="333333"/>
+                </a:solidFill>
+                <a:latin typeface="Calibri"/>
+              </a:rPr>
+              <a:t>cuando una fuente cuenta una idea histórica sin decir quién la dijo y contra qué discutía, conviene desconfiar</a:t>
+            </a:r>
+            <a:r>
+              <a:rPr sz="2000" b="0" i="0">
+                <a:solidFill>
+                  <a:srgbClr val="333333"/>
+                </a:solidFill>
+                <a:latin typeface="Calibri"/>
+              </a:rPr>
+              <a:t>.</a:t>
+            </a:r>
+          </a:p>
+          <a:p>
+            <a:pPr>
+              <a:spcAft>
+                <a:spcPts val="800"/>
+              </a:spcAft>
+            </a:pPr>
+            <a:r>
+              <a:rPr sz="2000" b="0" i="0">
+                <a:solidFill>
+                  <a:srgbClr val="333333"/>
+                </a:solidFill>
+                <a:latin typeface="Calibri"/>
+              </a:rPr>
+              <a:t>–   Sobre la tercera aclaración conviene ser honesto en el aula y no inflarla.</a:t>
+            </a:r>
+          </a:p>
+          <a:p>
+            <a:pPr>
+              <a:spcAft>
+                <a:spcPts val="800"/>
+              </a:spcAft>
+            </a:pPr>
+            <a:r>
+              <a:rPr sz="2000" b="0" i="0">
+                <a:solidFill>
+                  <a:srgbClr val="333333"/>
+                </a:solidFill>
+                <a:latin typeface="Calibri"/>
+              </a:rPr>
+              <a:t>–   Los informes de la industria sobre fracaso de proyectos usan definiciones distintas de «fracaso» y sus cifras varían mucho entre ediciones y entre fuentes.</a:t>
+            </a:r>
+          </a:p>
+          <a:p>
+            <a:pPr>
+              <a:spcAft>
+                <a:spcPts val="800"/>
+              </a:spcAft>
+            </a:pPr>
+            <a:r>
+              <a:rPr sz="2000" b="0" i="0">
+                <a:solidFill>
+                  <a:srgbClr val="333333"/>
+                </a:solidFill>
+                <a:latin typeface="Calibri"/>
+              </a:rPr>
+              <a:t>–   Lo que sí se puede afirmar sin exagerar es que </a:t>
+            </a:r>
+            <a:r>
+              <a:rPr sz="2000" b="1" i="0">
+                <a:solidFill>
+                  <a:srgbClr val="333333"/>
+                </a:solidFill>
+                <a:latin typeface="Calibri"/>
+              </a:rPr>
+              <a:t>el fracaso por plazo, costo y alcance sigue siendo un problema reportado sistemáticamente</a:t>
+            </a:r>
+            <a:r>
+              <a:rPr sz="2000" b="0" i="0">
+                <a:solidFill>
+                  <a:srgbClr val="333333"/>
+                </a:solidFill>
+                <a:latin typeface="Calibri"/>
+              </a:rPr>
+              <a:t>, y que ninguna metodología ha declarado el problema cerrado.</a:t>
+            </a:r>
+          </a:p>
+          <a:p>
+            <a:pPr>
+              <a:spcAft>
+                <a:spcPts val="800"/>
+              </a:spcAft>
+            </a:pPr>
+            <a:r>
+              <a:rPr sz="2000" b="0" i="0">
+                <a:solidFill>
+                  <a:srgbClr val="333333"/>
+                </a:solidFill>
+                <a:latin typeface="Calibri"/>
+              </a:rPr>
+              <a:t>–   Si un equipo trae una cifra de internet, se le pide la fuente y el año: es el primer ejercicio de rigor bibliográfico del curso.</a:t>
+            </a:r>
+          </a:p>
+        </p:txBody>
+      </p:sp>
+      <p:sp>
+        <p:nvSpPr>
+          <p:cNvPr id="6" name="TextBox 5"/>
+          <p:cNvSpPr txBox="1"/>
+          <p:nvPr/>
+        </p:nvSpPr>
+        <p:spPr>
+          <a:xfrm>
+            <a:off x="11185855" y="6473952"/>
+            <a:ext cx="640080" cy="274320"/>
+          </a:xfrm>
+          <a:prstGeom prst="rect">
+            <a:avLst/>
+          </a:prstGeom>
+          <a:noFill/>
+        </p:spPr>
+        <p:txBody>
+          <a:bodyPr wrap="square">
+            <a:spAutoFit/>
+          </a:bodyPr>
+          <a:lstStyle/>
+          <a:p>
+            <a:pPr algn="r"/>
+            <a:r>
+              <a:rPr sz="1100" b="0" i="0">
+                <a:solidFill>
+                  <a:srgbClr val="666666"/>
+                </a:solidFill>
+                <a:latin typeface="Calibri"/>
+              </a:rPr>
+              <a:t>17</a:t>
+            </a:r>
+          </a:p>
+        </p:txBody>
+      </p:sp>
+    </p:spTree>
+  </p:cSld>
+  <p:clrMapOvr>
+    <a:masterClrMapping/>
+  </p:clrMapOvr>
+</p:sld>
+</file>
+
+<file path=ppt/slides/slide18.xml><?xml version="1.0" encoding="utf-8"?>
+<p:sld xmlns:a="http://schemas.openxmlformats.org/drawingml/2006/main" xmlns:p="http://schemas.openxmlformats.org/presentationml/2006/main" xmlns:r="http://schemas.openxmlformats.org/officeDocument/2006/relationships">
+  <p:cSld>
+    <p:bg>
+      <p:bgPr>
+        <a:solidFill>
+          <a:srgbClr val="FFFFFF"/>
+        </a:solidFill>
+        <a:effectLst/>
+      </p:bgPr>
+    </p:bg>
+    <p:spTree>
+      <p:nvGrpSpPr>
+        <p:cNvPr id="1" name=""/>
+        <p:cNvGrpSpPr/>
+        <p:nvPr/>
+      </p:nvGrpSpPr>
+      <p:grpSpPr/>
+      <p:sp>
+        <p:nvSpPr>
+          <p:cNvPr id="2" name="Rectangle 1"/>
+          <p:cNvSpPr/>
+          <p:nvPr/>
+        </p:nvSpPr>
+        <p:spPr>
+          <a:xfrm>
+            <a:off x="0" y="0"/>
+            <a:ext cx="12191695" cy="960120"/>
+          </a:xfrm>
+          <a:prstGeom prst="rect">
+            <a:avLst/>
+          </a:prstGeom>
+          <a:solidFill>
+            <a:srgbClr val="095292"/>
+          </a:solidFill>
+          <a:ln>
+            <a:noFill/>
+          </a:ln>
+        </p:spPr>
+        <p:style>
+          <a:lnRef idx="1">
+            <a:schemeClr val="accent1"/>
+          </a:lnRef>
+          <a:fillRef idx="3">
+            <a:schemeClr val="accent1"/>
+          </a:fillRef>
+          <a:effectRef idx="2">
+            <a:schemeClr val="accent1"/>
+          </a:effectRef>
+          <a:fontRef idx="minor">
+            <a:schemeClr val="lt1"/>
+          </a:fontRef>
+        </p:style>
+        <p:txBody>
+          <a:bodyPr rtlCol="0" anchor="ctr"/>
+          <a:lstStyle/>
+          <a:p>
+            <a:pPr algn="ctr"/>
+          </a:p>
+        </p:txBody>
+      </p:sp>
+      <p:sp>
+        <p:nvSpPr>
+          <p:cNvPr id="3" name="Rectangle 2"/>
+          <p:cNvSpPr/>
+          <p:nvPr/>
+        </p:nvSpPr>
+        <p:spPr>
+          <a:xfrm>
+            <a:off x="0" y="960120"/>
+            <a:ext cx="12191695" cy="41148"/>
+          </a:xfrm>
+          <a:prstGeom prst="rect">
+            <a:avLst/>
+          </a:prstGeom>
+          <a:solidFill>
+            <a:srgbClr val="FFD000"/>
+          </a:solidFill>
+          <a:ln>
+            <a:noFill/>
+          </a:ln>
+        </p:spPr>
+        <p:style>
+          <a:lnRef idx="1">
+            <a:schemeClr val="accent1"/>
+          </a:lnRef>
+          <a:fillRef idx="3">
+            <a:schemeClr val="accent1"/>
+          </a:fillRef>
+          <a:effectRef idx="2">
+            <a:schemeClr val="accent1"/>
+          </a:effectRef>
+          <a:fontRef idx="minor">
+            <a:schemeClr val="lt1"/>
+          </a:fontRef>
+        </p:style>
+        <p:txBody>
+          <a:bodyPr rtlCol="0" anchor="ctr"/>
+          <a:lstStyle/>
+          <a:p>
+            <a:pPr algn="ctr"/>
+          </a:p>
+        </p:txBody>
+      </p:sp>
+      <p:sp>
+        <p:nvSpPr>
+          <p:cNvPr id="4" name="TextBox 3"/>
+          <p:cNvSpPr txBox="1"/>
+          <p:nvPr/>
+        </p:nvSpPr>
+        <p:spPr>
+          <a:xfrm>
+            <a:off x="457200" y="164592"/>
+            <a:ext cx="11277295" cy="502920"/>
+          </a:xfrm>
+          <a:prstGeom prst="rect">
+            <a:avLst/>
+          </a:prstGeom>
+          <a:noFill/>
+        </p:spPr>
+        <p:txBody>
+          <a:bodyPr wrap="square">
+            <a:spAutoFit/>
+          </a:bodyPr>
+          <a:lstStyle/>
+          <a:p>
+            <a:r>
+              <a:rPr sz="2600" b="1" i="0">
+                <a:solidFill>
+                  <a:srgbClr val="FFFFFF"/>
+                </a:solidFill>
+                <a:latin typeface="Calibri"/>
+              </a:rPr>
+              <a:t>El taller, la exposición y por qué las cinco líneas de tiempo se suman (1/2)</a:t>
+            </a:r>
+          </a:p>
+        </p:txBody>
+      </p:sp>
+      <p:sp>
+        <p:nvSpPr>
+          <p:cNvPr id="5" name="TextBox 4"/>
+          <p:cNvSpPr txBox="1"/>
+          <p:nvPr/>
+        </p:nvSpPr>
+        <p:spPr>
+          <a:xfrm>
+            <a:off x="457200" y="1170432"/>
+            <a:ext cx="11277295" cy="5230368"/>
+          </a:xfrm>
+          <a:prstGeom prst="rect">
+            <a:avLst/>
+          </a:prstGeom>
+          <a:noFill/>
+        </p:spPr>
+        <p:txBody>
+          <a:bodyPr wrap="square">
+            <a:spAutoFit/>
+          </a:bodyPr>
+          <a:lstStyle/>
+          <a:p>
+            <a:pPr>
+              <a:spcAft>
+                <a:spcPts val="800"/>
+              </a:spcAft>
+            </a:pPr>
+            <a:r>
+              <a:rPr sz="2000" b="0" i="0">
+                <a:solidFill>
+                  <a:srgbClr val="333333"/>
+                </a:solidFill>
+                <a:latin typeface="Calibri"/>
+              </a:rPr>
+              <a:t>–   Cada equipo recibe un periodo distinto y arma su tramo de línea de tiempo.</a:t>
+            </a:r>
+          </a:p>
+          <a:p>
+            <a:pPr>
+              <a:spcAft>
+                <a:spcPts val="800"/>
+              </a:spcAft>
+            </a:pPr>
+            <a:r>
+              <a:rPr sz="2000" b="0" i="0">
+                <a:solidFill>
+                  <a:srgbClr val="333333"/>
+                </a:solidFill>
+                <a:latin typeface="Calibri"/>
+              </a:rPr>
+              <a:t>–   La consecuencia es que las cinco exposiciones, puestas en orden histórico, producen la línea de tiempo completa de la disciplina, que es justo el trabajo independiente de la semana.</a:t>
+            </a:r>
+          </a:p>
+          <a:p>
+            <a:pPr>
+              <a:spcAft>
+                <a:spcPts val="800"/>
+              </a:spcAft>
+            </a:pPr>
+            <a:r>
+              <a:rPr sz="2000" b="0" i="0">
+                <a:solidFill>
+                  <a:srgbClr val="333333"/>
+                </a:solidFill>
+                <a:latin typeface="Calibri"/>
+              </a:rPr>
+              <a:t>–   Esto hay que decírselo al grupo antes de empezar: no están haciendo cinco trabajos que compiten, están armando un solo mapa por pedazos, y el pedazo de cada uno le sirve a los otros cuatro.</a:t>
+            </a:r>
+          </a:p>
+          <a:p>
+            <a:pPr>
+              <a:spcAft>
+                <a:spcPts val="800"/>
+              </a:spcAft>
+            </a:pPr>
+            <a:r>
+              <a:rPr sz="2000" b="0" i="0">
+                <a:solidFill>
+                  <a:srgbClr val="333333"/>
+                </a:solidFill>
+                <a:latin typeface="Calibri"/>
+              </a:rPr>
+              <a:t>–   Por eso las exposiciones van </a:t>
+            </a:r>
+            <a:r>
+              <a:rPr sz="2000" b="1" i="0">
+                <a:solidFill>
+                  <a:srgbClr val="333333"/>
+                </a:solidFill>
+                <a:latin typeface="Calibri"/>
+              </a:rPr>
+              <a:t>en orden histórico y no por sorteo</a:t>
+            </a:r>
+            <a:r>
+              <a:rPr sz="2000" b="0" i="0">
+                <a:solidFill>
+                  <a:srgbClr val="333333"/>
+                </a:solidFill>
+                <a:latin typeface="Calibri"/>
+              </a:rPr>
+              <a:t>: el equipo del periodo 1945–1957 abre y el de 2006–hoy cierra.</a:t>
+            </a:r>
+          </a:p>
+        </p:txBody>
+      </p:sp>
+      <p:sp>
+        <p:nvSpPr>
+          <p:cNvPr id="6" name="TextBox 5"/>
+          <p:cNvSpPr txBox="1"/>
+          <p:nvPr/>
+        </p:nvSpPr>
+        <p:spPr>
+          <a:xfrm>
+            <a:off x="11185855" y="6473952"/>
+            <a:ext cx="640080" cy="274320"/>
+          </a:xfrm>
+          <a:prstGeom prst="rect">
+            <a:avLst/>
+          </a:prstGeom>
+          <a:noFill/>
+        </p:spPr>
+        <p:txBody>
+          <a:bodyPr wrap="square">
+            <a:spAutoFit/>
+          </a:bodyPr>
+          <a:lstStyle/>
+          <a:p>
+            <a:pPr algn="r"/>
+            <a:r>
+              <a:rPr sz="1100" b="0" i="0">
+                <a:solidFill>
+                  <a:srgbClr val="666666"/>
+                </a:solidFill>
+                <a:latin typeface="Calibri"/>
+              </a:rPr>
+              <a:t>18</a:t>
+            </a:r>
+          </a:p>
+        </p:txBody>
+      </p:sp>
+    </p:spTree>
+  </p:cSld>
+  <p:clrMapOvr>
+    <a:masterClrMapping/>
+  </p:clrMapOvr>
+</p:sld>
+</file>
+
+<file path=ppt/slides/slide19.xml><?xml version="1.0" encoding="utf-8"?>
+<p:sld xmlns:a="http://schemas.openxmlformats.org/drawingml/2006/main" xmlns:p="http://schemas.openxmlformats.org/presentationml/2006/main" xmlns:r="http://schemas.openxmlformats.org/officeDocument/2006/relationships">
+  <p:cSld>
+    <p:bg>
+      <p:bgPr>
+        <a:solidFill>
+          <a:srgbClr val="FFFFFF"/>
+        </a:solidFill>
+        <a:effectLst/>
+      </p:bgPr>
+    </p:bg>
+    <p:spTree>
+      <p:nvGrpSpPr>
+        <p:cNvPr id="1" name=""/>
+        <p:cNvGrpSpPr/>
+        <p:nvPr/>
+      </p:nvGrpSpPr>
+      <p:grpSpPr/>
+      <p:sp>
+        <p:nvSpPr>
+          <p:cNvPr id="2" name="Rectangle 1"/>
+          <p:cNvSpPr/>
+          <p:nvPr/>
+        </p:nvSpPr>
+        <p:spPr>
+          <a:xfrm>
+            <a:off x="0" y="0"/>
+            <a:ext cx="12191695" cy="960120"/>
+          </a:xfrm>
+          <a:prstGeom prst="rect">
+            <a:avLst/>
+          </a:prstGeom>
+          <a:solidFill>
+            <a:srgbClr val="095292"/>
+          </a:solidFill>
+          <a:ln>
+            <a:noFill/>
+          </a:ln>
+        </p:spPr>
+        <p:style>
+          <a:lnRef idx="1">
+            <a:schemeClr val="accent1"/>
+          </a:lnRef>
+          <a:fillRef idx="3">
+            <a:schemeClr val="accent1"/>
+          </a:fillRef>
+          <a:effectRef idx="2">
+            <a:schemeClr val="accent1"/>
+          </a:effectRef>
+          <a:fontRef idx="minor">
+            <a:schemeClr val="lt1"/>
+          </a:fontRef>
+        </p:style>
+        <p:txBody>
+          <a:bodyPr rtlCol="0" anchor="ctr"/>
+          <a:lstStyle/>
+          <a:p>
+            <a:pPr algn="ctr"/>
+          </a:p>
+        </p:txBody>
+      </p:sp>
+      <p:sp>
+        <p:nvSpPr>
+          <p:cNvPr id="3" name="Rectangle 2"/>
+          <p:cNvSpPr/>
+          <p:nvPr/>
+        </p:nvSpPr>
+        <p:spPr>
+          <a:xfrm>
+            <a:off x="0" y="960120"/>
+            <a:ext cx="12191695" cy="41148"/>
+          </a:xfrm>
+          <a:prstGeom prst="rect">
+            <a:avLst/>
+          </a:prstGeom>
+          <a:solidFill>
+            <a:srgbClr val="FFD000"/>
+          </a:solidFill>
+          <a:ln>
+            <a:noFill/>
+          </a:ln>
+        </p:spPr>
+        <p:style>
+          <a:lnRef idx="1">
+            <a:schemeClr val="accent1"/>
+          </a:lnRef>
+          <a:fillRef idx="3">
+            <a:schemeClr val="accent1"/>
+          </a:fillRef>
+          <a:effectRef idx="2">
+            <a:schemeClr val="accent1"/>
+          </a:effectRef>
+          <a:fontRef idx="minor">
+            <a:schemeClr val="lt1"/>
+          </a:fontRef>
+        </p:style>
+        <p:txBody>
+          <a:bodyPr rtlCol="0" anchor="ctr"/>
+          <a:lstStyle/>
+          <a:p>
+            <a:pPr algn="ctr"/>
+          </a:p>
+        </p:txBody>
+      </p:sp>
+      <p:sp>
+        <p:nvSpPr>
+          <p:cNvPr id="4" name="TextBox 3"/>
+          <p:cNvSpPr txBox="1"/>
+          <p:nvPr/>
+        </p:nvSpPr>
+        <p:spPr>
+          <a:xfrm>
+            <a:off x="457200" y="164592"/>
+            <a:ext cx="11277295" cy="502920"/>
+          </a:xfrm>
+          <a:prstGeom prst="rect">
+            <a:avLst/>
+          </a:prstGeom>
+          <a:noFill/>
+        </p:spPr>
+        <p:txBody>
+          <a:bodyPr wrap="square">
+            <a:spAutoFit/>
+          </a:bodyPr>
+          <a:lstStyle/>
+          <a:p>
+            <a:r>
+              <a:rPr sz="2600" b="1" i="0">
+                <a:solidFill>
+                  <a:srgbClr val="FFFFFF"/>
+                </a:solidFill>
+                <a:latin typeface="Calibri"/>
+              </a:rPr>
+              <a:t>El taller, la exposición y por qué las cinco líneas de tiempo se suman (2/2)</a:t>
+            </a:r>
+          </a:p>
+        </p:txBody>
+      </p:sp>
+      <p:sp>
+        <p:nvSpPr>
+          <p:cNvPr id="5" name="TextBox 4"/>
+          <p:cNvSpPr txBox="1"/>
+          <p:nvPr/>
+        </p:nvSpPr>
+        <p:spPr>
+          <a:xfrm>
+            <a:off x="457200" y="1170432"/>
+            <a:ext cx="11277295" cy="5230368"/>
+          </a:xfrm>
+          <a:prstGeom prst="rect">
+            <a:avLst/>
+          </a:prstGeom>
+          <a:noFill/>
+        </p:spPr>
+        <p:txBody>
+          <a:bodyPr wrap="square">
+            <a:spAutoFit/>
+          </a:bodyPr>
+          <a:lstStyle/>
+          <a:p>
+            <a:pPr>
+              <a:spcAft>
+                <a:spcPts val="800"/>
+              </a:spcAft>
+            </a:pPr>
+            <a:r>
+              <a:rPr sz="2000" b="0" i="0">
+                <a:solidFill>
+                  <a:srgbClr val="333333"/>
+                </a:solidFill>
+                <a:latin typeface="Calibri"/>
+              </a:rPr>
+              <a:t>–   Cuesta lo mismo y el grupo se lleva una narración en vez de cinco fragmentos.</a:t>
+            </a:r>
+          </a:p>
+          <a:p>
+            <a:pPr>
+              <a:spcAft>
+                <a:spcPts val="800"/>
+              </a:spcAft>
+            </a:pPr>
+            <a:r>
+              <a:rPr sz="2000" b="0" i="0">
+                <a:solidFill>
+                  <a:srgbClr val="333333"/>
+                </a:solidFill>
+                <a:latin typeface="Calibri"/>
+              </a:rPr>
+              <a:t>–   El docente escribe el orden en el chat antes de que empiecen.</a:t>
+            </a:r>
+          </a:p>
+          <a:p>
+            <a:pPr>
+              <a:spcAft>
+                <a:spcPts val="800"/>
+              </a:spcAft>
+            </a:pPr>
+            <a:r>
+              <a:rPr sz="2000" b="0" i="0">
+                <a:solidFill>
+                  <a:srgbClr val="333333"/>
+                </a:solidFill>
+                <a:latin typeface="Calibri"/>
+              </a:rPr>
+              <a:t>–   El taller pide cuatro hitos por periodo, no más.</a:t>
+            </a:r>
+          </a:p>
+          <a:p>
+            <a:pPr>
+              <a:spcAft>
+                <a:spcPts val="800"/>
+              </a:spcAft>
+            </a:pPr>
+            <a:r>
+              <a:rPr sz="2000" b="0" i="0">
+                <a:solidFill>
+                  <a:srgbClr val="333333"/>
+                </a:solidFill>
+                <a:latin typeface="Calibri"/>
+              </a:rPr>
+              <a:t>–   La tentación del equipo será meter diez fechas para verse completo, y el resultado es una línea de tiempo que nadie puede exponer en tres minutos.</a:t>
+            </a:r>
+          </a:p>
+          <a:p>
+            <a:pPr>
+              <a:spcAft>
+                <a:spcPts val="800"/>
+              </a:spcAft>
+            </a:pPr>
+            <a:r>
+              <a:rPr sz="2000" b="0" i="0">
+                <a:solidFill>
+                  <a:srgbClr val="333333"/>
+                </a:solidFill>
+                <a:latin typeface="Calibri"/>
+              </a:rPr>
+              <a:t>–   Cuatro hitos bien leídos, con su «qué sigue vivo», valen mucho más y es lo que la rúbrica premia.</a:t>
+            </a:r>
+          </a:p>
+        </p:txBody>
+      </p:sp>
+      <p:sp>
+        <p:nvSpPr>
+          <p:cNvPr id="6" name="TextBox 5"/>
+          <p:cNvSpPr txBox="1"/>
+          <p:nvPr/>
+        </p:nvSpPr>
+        <p:spPr>
+          <a:xfrm>
+            <a:off x="11185855" y="6473952"/>
+            <a:ext cx="640080" cy="274320"/>
+          </a:xfrm>
+          <a:prstGeom prst="rect">
+            <a:avLst/>
+          </a:prstGeom>
+          <a:noFill/>
+        </p:spPr>
+        <p:txBody>
+          <a:bodyPr wrap="square">
+            <a:spAutoFit/>
+          </a:bodyPr>
+          <a:lstStyle/>
+          <a:p>
+            <a:pPr algn="r"/>
+            <a:r>
+              <a:rPr sz="1100" b="0" i="0">
+                <a:solidFill>
+                  <a:srgbClr val="666666"/>
+                </a:solidFill>
+                <a:latin typeface="Calibri"/>
+              </a:rPr>
+              <a:t>19</a:t>
             </a:r>
           </a:p>
         </p:txBody>
@@ -6951,6 +7517,2598 @@
                 <a:latin typeface="Calibri"/>
               </a:rPr>
               <a:t>2</a:t>
+            </a:r>
+          </a:p>
+        </p:txBody>
+      </p:sp>
+    </p:spTree>
+  </p:cSld>
+  <p:clrMapOvr>
+    <a:masterClrMapping/>
+  </p:clrMapOvr>
+</p:sld>
+</file>
+
+<file path=ppt/slides/slide20.xml><?xml version="1.0" encoding="utf-8"?>
+<p:sld xmlns:a="http://schemas.openxmlformats.org/drawingml/2006/main" xmlns:p="http://schemas.openxmlformats.org/presentationml/2006/main" xmlns:r="http://schemas.openxmlformats.org/officeDocument/2006/relationships">
+  <p:cSld>
+    <p:bg>
+      <p:bgPr>
+        <a:solidFill>
+          <a:srgbClr val="FFFFFF"/>
+        </a:solidFill>
+        <a:effectLst/>
+      </p:bgPr>
+    </p:bg>
+    <p:spTree>
+      <p:nvGrpSpPr>
+        <p:cNvPr id="1" name=""/>
+        <p:cNvGrpSpPr/>
+        <p:nvPr/>
+      </p:nvGrpSpPr>
+      <p:grpSpPr/>
+      <p:sp>
+        <p:nvSpPr>
+          <p:cNvPr id="2" name="Rectangle 1"/>
+          <p:cNvSpPr/>
+          <p:nvPr/>
+        </p:nvSpPr>
+        <p:spPr>
+          <a:xfrm>
+            <a:off x="0" y="0"/>
+            <a:ext cx="12191695" cy="1170432"/>
+          </a:xfrm>
+          <a:prstGeom prst="rect">
+            <a:avLst/>
+          </a:prstGeom>
+          <a:solidFill>
+            <a:srgbClr val="095292"/>
+          </a:solidFill>
+          <a:ln>
+            <a:noFill/>
+          </a:ln>
+        </p:spPr>
+        <p:style>
+          <a:lnRef idx="1">
+            <a:schemeClr val="accent1"/>
+          </a:lnRef>
+          <a:fillRef idx="3">
+            <a:schemeClr val="accent1"/>
+          </a:fillRef>
+          <a:effectRef idx="2">
+            <a:schemeClr val="accent1"/>
+          </a:effectRef>
+          <a:fontRef idx="minor">
+            <a:schemeClr val="lt1"/>
+          </a:fontRef>
+        </p:style>
+        <p:txBody>
+          <a:bodyPr rtlCol="0" anchor="ctr"/>
+          <a:lstStyle/>
+          <a:p>
+            <a:pPr algn="ctr"/>
+          </a:p>
+        </p:txBody>
+      </p:sp>
+      <p:sp>
+        <p:nvSpPr>
+          <p:cNvPr id="3" name="Rectangle 2"/>
+          <p:cNvSpPr/>
+          <p:nvPr/>
+        </p:nvSpPr>
+        <p:spPr>
+          <a:xfrm>
+            <a:off x="0" y="1170432"/>
+            <a:ext cx="12191695" cy="41148"/>
+          </a:xfrm>
+          <a:prstGeom prst="rect">
+            <a:avLst/>
+          </a:prstGeom>
+          <a:solidFill>
+            <a:srgbClr val="FFD000"/>
+          </a:solidFill>
+          <a:ln>
+            <a:noFill/>
+          </a:ln>
+        </p:spPr>
+        <p:style>
+          <a:lnRef idx="1">
+            <a:schemeClr val="accent1"/>
+          </a:lnRef>
+          <a:fillRef idx="3">
+            <a:schemeClr val="accent1"/>
+          </a:fillRef>
+          <a:effectRef idx="2">
+            <a:schemeClr val="accent1"/>
+          </a:effectRef>
+          <a:fontRef idx="minor">
+            <a:schemeClr val="lt1"/>
+          </a:fontRef>
+        </p:style>
+        <p:txBody>
+          <a:bodyPr rtlCol="0" anchor="ctr"/>
+          <a:lstStyle/>
+          <a:p>
+            <a:pPr algn="ctr"/>
+          </a:p>
+        </p:txBody>
+      </p:sp>
+      <p:sp>
+        <p:nvSpPr>
+          <p:cNvPr id="4" name="TextBox 3"/>
+          <p:cNvSpPr txBox="1"/>
+          <p:nvPr/>
+        </p:nvSpPr>
+        <p:spPr>
+          <a:xfrm>
+            <a:off x="457200" y="164592"/>
+            <a:ext cx="11277295" cy="384048"/>
+          </a:xfrm>
+          <a:prstGeom prst="rect">
+            <a:avLst/>
+          </a:prstGeom>
+          <a:noFill/>
+        </p:spPr>
+        <p:txBody>
+          <a:bodyPr wrap="square">
+            <a:spAutoFit/>
+          </a:bodyPr>
+          <a:lstStyle/>
+          <a:p>
+            <a:r>
+              <a:rPr sz="2600" b="1" i="0">
+                <a:solidFill>
+                  <a:srgbClr val="FFFFFF"/>
+                </a:solidFill>
+                <a:latin typeface="Calibri"/>
+              </a:rPr>
+              <a:t>Taller de hoy: Línea de tiempo del periodo</a:t>
+            </a:r>
+          </a:p>
+        </p:txBody>
+      </p:sp>
+      <p:sp>
+        <p:nvSpPr>
+          <p:cNvPr id="5" name="TextBox 4"/>
+          <p:cNvSpPr txBox="1"/>
+          <p:nvPr/>
+        </p:nvSpPr>
+        <p:spPr>
+          <a:xfrm>
+            <a:off x="457200" y="566928"/>
+            <a:ext cx="11277295" cy="411480"/>
+          </a:xfrm>
+          <a:prstGeom prst="rect">
+            <a:avLst/>
+          </a:prstGeom>
+          <a:noFill/>
+        </p:spPr>
+        <p:txBody>
+          <a:bodyPr wrap="square">
+            <a:spAutoFit/>
+          </a:bodyPr>
+          <a:lstStyle/>
+          <a:p>
+            <a:r>
+              <a:rPr sz="1400" b="0" i="0">
+                <a:solidFill>
+                  <a:srgbClr val="B8D8EE"/>
+                </a:solidFill>
+                <a:latin typeface="Calibri"/>
+              </a:rPr>
+              <a:t>17 min en equipos · un periodo por equipo, asignado en orden histórico · línea de tiempo de 4 hitos en draw.io</a:t>
+            </a:r>
+          </a:p>
+        </p:txBody>
+      </p:sp>
+      <p:sp>
+        <p:nvSpPr>
+          <p:cNvPr id="6" name="Rounded Rectangle 5"/>
+          <p:cNvSpPr/>
+          <p:nvPr/>
+        </p:nvSpPr>
+        <p:spPr>
+          <a:xfrm>
+            <a:off x="457200" y="1472184"/>
+            <a:ext cx="11277295" cy="566928"/>
+          </a:xfrm>
+          <a:prstGeom prst="roundRect">
+            <a:avLst>
+              <a:gd name="adj" fmla="val 12000"/>
+            </a:avLst>
+          </a:prstGeom>
+          <a:solidFill>
+            <a:srgbClr val="F2F2F2"/>
+          </a:solidFill>
+          <a:ln>
+            <a:noFill/>
+          </a:ln>
+        </p:spPr>
+        <p:style>
+          <a:lnRef idx="1">
+            <a:schemeClr val="accent1"/>
+          </a:lnRef>
+          <a:fillRef idx="3">
+            <a:schemeClr val="accent1"/>
+          </a:fillRef>
+          <a:effectRef idx="2">
+            <a:schemeClr val="accent1"/>
+          </a:effectRef>
+          <a:fontRef idx="minor">
+            <a:schemeClr val="lt1"/>
+          </a:fontRef>
+        </p:style>
+        <p:txBody>
+          <a:bodyPr rtlCol="0" anchor="ctr"/>
+          <a:lstStyle/>
+          <a:p>
+            <a:pPr algn="ctr"/>
+          </a:p>
+        </p:txBody>
+      </p:sp>
+      <p:sp>
+        <p:nvSpPr>
+          <p:cNvPr id="7" name="Rectangle 6"/>
+          <p:cNvSpPr/>
+          <p:nvPr/>
+        </p:nvSpPr>
+        <p:spPr>
+          <a:xfrm>
+            <a:off x="640080" y="1618487"/>
+            <a:ext cx="274320" cy="274320"/>
+          </a:xfrm>
+          <a:prstGeom prst="rect">
+            <a:avLst/>
+          </a:prstGeom>
+          <a:solidFill>
+            <a:srgbClr val="FFFFFF"/>
+          </a:solidFill>
+          <a:ln>
+            <a:solidFill>
+              <a:srgbClr val="333333"/>
+            </a:solidFill>
+          </a:ln>
+        </p:spPr>
+        <p:style>
+          <a:lnRef idx="1">
+            <a:schemeClr val="accent1"/>
+          </a:lnRef>
+          <a:fillRef idx="3">
+            <a:schemeClr val="accent1"/>
+          </a:fillRef>
+          <a:effectRef idx="2">
+            <a:schemeClr val="accent1"/>
+          </a:effectRef>
+          <a:fontRef idx="minor">
+            <a:schemeClr val="lt1"/>
+          </a:fontRef>
+        </p:style>
+        <p:txBody>
+          <a:bodyPr rtlCol="0" anchor="ctr"/>
+          <a:lstStyle/>
+          <a:p>
+            <a:pPr algn="ctr"/>
+          </a:p>
+        </p:txBody>
+      </p:sp>
+      <p:sp>
+        <p:nvSpPr>
+          <p:cNvPr id="8" name="Rectangle 7"/>
+          <p:cNvSpPr/>
+          <p:nvPr/>
+        </p:nvSpPr>
+        <p:spPr>
+          <a:xfrm>
+            <a:off x="640080" y="1618487"/>
+            <a:ext cx="73152" cy="274320"/>
+          </a:xfrm>
+          <a:prstGeom prst="rect">
+            <a:avLst/>
+          </a:prstGeom>
+          <a:solidFill>
+            <a:srgbClr val="269CCB"/>
+          </a:solidFill>
+          <a:ln>
+            <a:noFill/>
+          </a:ln>
+        </p:spPr>
+        <p:style>
+          <a:lnRef idx="1">
+            <a:schemeClr val="accent1"/>
+          </a:lnRef>
+          <a:fillRef idx="3">
+            <a:schemeClr val="accent1"/>
+          </a:fillRef>
+          <a:effectRef idx="2">
+            <a:schemeClr val="accent1"/>
+          </a:effectRef>
+          <a:fontRef idx="minor">
+            <a:schemeClr val="lt1"/>
+          </a:fontRef>
+        </p:style>
+        <p:txBody>
+          <a:bodyPr rtlCol="0" anchor="ctr"/>
+          <a:lstStyle/>
+          <a:p>
+            <a:pPr algn="ctr"/>
+          </a:p>
+        </p:txBody>
+      </p:sp>
+      <p:sp>
+        <p:nvSpPr>
+          <p:cNvPr id="9" name="TextBox 8"/>
+          <p:cNvSpPr txBox="1"/>
+          <p:nvPr/>
+        </p:nvSpPr>
+        <p:spPr>
+          <a:xfrm>
+            <a:off x="1097280" y="1563624"/>
+            <a:ext cx="10362895" cy="402336"/>
+          </a:xfrm>
+          <a:prstGeom prst="rect">
+            <a:avLst/>
+          </a:prstGeom>
+          <a:noFill/>
+        </p:spPr>
+        <p:txBody>
+          <a:bodyPr wrap="square" anchor="ctr"/>
+          <a:lstStyle/>
+          <a:p>
+            <a:r>
+              <a:rPr sz="1500" b="1" i="0">
+                <a:solidFill>
+                  <a:srgbClr val="333333"/>
+                </a:solidFill>
+                <a:latin typeface="Calibri"/>
+              </a:rPr>
+              <a:t>LOS CUATRO HITOS</a:t>
+            </a:r>
+            <a:r>
+              <a:rPr sz="1500" b="0" i="0">
+                <a:solidFill>
+                  <a:srgbClr val="333333"/>
+                </a:solidFill>
+                <a:latin typeface="Calibri"/>
+              </a:rPr>
+              <a:t> — Cuatro hechos de su periodo, con año, puestos en orden en la línea de tiempo.</a:t>
+            </a:r>
+          </a:p>
+        </p:txBody>
+      </p:sp>
+      <p:sp>
+        <p:nvSpPr>
+          <p:cNvPr id="10" name="Rounded Rectangle 9"/>
+          <p:cNvSpPr/>
+          <p:nvPr/>
+        </p:nvSpPr>
+        <p:spPr>
+          <a:xfrm>
+            <a:off x="457200" y="2148839"/>
+            <a:ext cx="11277295" cy="566928"/>
+          </a:xfrm>
+          <a:prstGeom prst="roundRect">
+            <a:avLst>
+              <a:gd name="adj" fmla="val 12000"/>
+            </a:avLst>
+          </a:prstGeom>
+          <a:solidFill>
+            <a:srgbClr val="F2F2F2"/>
+          </a:solidFill>
+          <a:ln>
+            <a:noFill/>
+          </a:ln>
+        </p:spPr>
+        <p:style>
+          <a:lnRef idx="1">
+            <a:schemeClr val="accent1"/>
+          </a:lnRef>
+          <a:fillRef idx="3">
+            <a:schemeClr val="accent1"/>
+          </a:fillRef>
+          <a:effectRef idx="2">
+            <a:schemeClr val="accent1"/>
+          </a:effectRef>
+          <a:fontRef idx="minor">
+            <a:schemeClr val="lt1"/>
+          </a:fontRef>
+        </p:style>
+        <p:txBody>
+          <a:bodyPr rtlCol="0" anchor="ctr"/>
+          <a:lstStyle/>
+          <a:p>
+            <a:pPr algn="ctr"/>
+          </a:p>
+        </p:txBody>
+      </p:sp>
+      <p:sp>
+        <p:nvSpPr>
+          <p:cNvPr id="11" name="Rectangle 10"/>
+          <p:cNvSpPr/>
+          <p:nvPr/>
+        </p:nvSpPr>
+        <p:spPr>
+          <a:xfrm>
+            <a:off x="640080" y="2295144"/>
+            <a:ext cx="274320" cy="274320"/>
+          </a:xfrm>
+          <a:prstGeom prst="rect">
+            <a:avLst/>
+          </a:prstGeom>
+          <a:solidFill>
+            <a:srgbClr val="FFFFFF"/>
+          </a:solidFill>
+          <a:ln>
+            <a:solidFill>
+              <a:srgbClr val="333333"/>
+            </a:solidFill>
+          </a:ln>
+        </p:spPr>
+        <p:style>
+          <a:lnRef idx="1">
+            <a:schemeClr val="accent1"/>
+          </a:lnRef>
+          <a:fillRef idx="3">
+            <a:schemeClr val="accent1"/>
+          </a:fillRef>
+          <a:effectRef idx="2">
+            <a:schemeClr val="accent1"/>
+          </a:effectRef>
+          <a:fontRef idx="minor">
+            <a:schemeClr val="lt1"/>
+          </a:fontRef>
+        </p:style>
+        <p:txBody>
+          <a:bodyPr rtlCol="0" anchor="ctr"/>
+          <a:lstStyle/>
+          <a:p>
+            <a:pPr algn="ctr"/>
+          </a:p>
+        </p:txBody>
+      </p:sp>
+      <p:sp>
+        <p:nvSpPr>
+          <p:cNvPr id="12" name="Rectangle 11"/>
+          <p:cNvSpPr/>
+          <p:nvPr/>
+        </p:nvSpPr>
+        <p:spPr>
+          <a:xfrm>
+            <a:off x="640080" y="2295144"/>
+            <a:ext cx="73152" cy="274320"/>
+          </a:xfrm>
+          <a:prstGeom prst="rect">
+            <a:avLst/>
+          </a:prstGeom>
+          <a:solidFill>
+            <a:srgbClr val="269CCB"/>
+          </a:solidFill>
+          <a:ln>
+            <a:noFill/>
+          </a:ln>
+        </p:spPr>
+        <p:style>
+          <a:lnRef idx="1">
+            <a:schemeClr val="accent1"/>
+          </a:lnRef>
+          <a:fillRef idx="3">
+            <a:schemeClr val="accent1"/>
+          </a:fillRef>
+          <a:effectRef idx="2">
+            <a:schemeClr val="accent1"/>
+          </a:effectRef>
+          <a:fontRef idx="minor">
+            <a:schemeClr val="lt1"/>
+          </a:fontRef>
+        </p:style>
+        <p:txBody>
+          <a:bodyPr rtlCol="0" anchor="ctr"/>
+          <a:lstStyle/>
+          <a:p>
+            <a:pPr algn="ctr"/>
+          </a:p>
+        </p:txBody>
+      </p:sp>
+      <p:sp>
+        <p:nvSpPr>
+          <p:cNvPr id="13" name="TextBox 12"/>
+          <p:cNvSpPr txBox="1"/>
+          <p:nvPr/>
+        </p:nvSpPr>
+        <p:spPr>
+          <a:xfrm>
+            <a:off x="1097280" y="2240279"/>
+            <a:ext cx="10362895" cy="402336"/>
+          </a:xfrm>
+          <a:prstGeom prst="rect">
+            <a:avLst/>
+          </a:prstGeom>
+          <a:noFill/>
+        </p:spPr>
+        <p:txBody>
+          <a:bodyPr wrap="square" anchor="ctr"/>
+          <a:lstStyle/>
+          <a:p>
+            <a:r>
+              <a:rPr sz="1500" b="1" i="0">
+                <a:solidFill>
+                  <a:srgbClr val="333333"/>
+                </a:solidFill>
+                <a:latin typeface="Calibri"/>
+              </a:rPr>
+              <a:t>QUÉ DOLÍA ANTES</a:t>
+            </a:r>
+            <a:r>
+              <a:rPr sz="1500" b="0" i="0">
+                <a:solidFill>
+                  <a:srgbClr val="333333"/>
+                </a:solidFill>
+                <a:latin typeface="Calibri"/>
+              </a:rPr>
+              <a:t> — Para cada hito: el problema concreto que existía antes y a quién le pasaba.</a:t>
+            </a:r>
+          </a:p>
+        </p:txBody>
+      </p:sp>
+      <p:sp>
+        <p:nvSpPr>
+          <p:cNvPr id="14" name="Rounded Rectangle 13"/>
+          <p:cNvSpPr/>
+          <p:nvPr/>
+        </p:nvSpPr>
+        <p:spPr>
+          <a:xfrm>
+            <a:off x="457200" y="2825496"/>
+            <a:ext cx="11277295" cy="566928"/>
+          </a:xfrm>
+          <a:prstGeom prst="roundRect">
+            <a:avLst>
+              <a:gd name="adj" fmla="val 12000"/>
+            </a:avLst>
+          </a:prstGeom>
+          <a:solidFill>
+            <a:srgbClr val="F2F2F2"/>
+          </a:solidFill>
+          <a:ln>
+            <a:noFill/>
+          </a:ln>
+        </p:spPr>
+        <p:style>
+          <a:lnRef idx="1">
+            <a:schemeClr val="accent1"/>
+          </a:lnRef>
+          <a:fillRef idx="3">
+            <a:schemeClr val="accent1"/>
+          </a:fillRef>
+          <a:effectRef idx="2">
+            <a:schemeClr val="accent1"/>
+          </a:effectRef>
+          <a:fontRef idx="minor">
+            <a:schemeClr val="lt1"/>
+          </a:fontRef>
+        </p:style>
+        <p:txBody>
+          <a:bodyPr rtlCol="0" anchor="ctr"/>
+          <a:lstStyle/>
+          <a:p>
+            <a:pPr algn="ctr"/>
+          </a:p>
+        </p:txBody>
+      </p:sp>
+      <p:sp>
+        <p:nvSpPr>
+          <p:cNvPr id="15" name="Rectangle 14"/>
+          <p:cNvSpPr/>
+          <p:nvPr/>
+        </p:nvSpPr>
+        <p:spPr>
+          <a:xfrm>
+            <a:off x="640080" y="2971800"/>
+            <a:ext cx="274320" cy="274320"/>
+          </a:xfrm>
+          <a:prstGeom prst="rect">
+            <a:avLst/>
+          </a:prstGeom>
+          <a:solidFill>
+            <a:srgbClr val="FFFFFF"/>
+          </a:solidFill>
+          <a:ln>
+            <a:solidFill>
+              <a:srgbClr val="333333"/>
+            </a:solidFill>
+          </a:ln>
+        </p:spPr>
+        <p:style>
+          <a:lnRef idx="1">
+            <a:schemeClr val="accent1"/>
+          </a:lnRef>
+          <a:fillRef idx="3">
+            <a:schemeClr val="accent1"/>
+          </a:fillRef>
+          <a:effectRef idx="2">
+            <a:schemeClr val="accent1"/>
+          </a:effectRef>
+          <a:fontRef idx="minor">
+            <a:schemeClr val="lt1"/>
+          </a:fontRef>
+        </p:style>
+        <p:txBody>
+          <a:bodyPr rtlCol="0" anchor="ctr"/>
+          <a:lstStyle/>
+          <a:p>
+            <a:pPr algn="ctr"/>
+          </a:p>
+        </p:txBody>
+      </p:sp>
+      <p:sp>
+        <p:nvSpPr>
+          <p:cNvPr id="16" name="Rectangle 15"/>
+          <p:cNvSpPr/>
+          <p:nvPr/>
+        </p:nvSpPr>
+        <p:spPr>
+          <a:xfrm>
+            <a:off x="640080" y="2971800"/>
+            <a:ext cx="73152" cy="274320"/>
+          </a:xfrm>
+          <a:prstGeom prst="rect">
+            <a:avLst/>
+          </a:prstGeom>
+          <a:solidFill>
+            <a:srgbClr val="269CCB"/>
+          </a:solidFill>
+          <a:ln>
+            <a:noFill/>
+          </a:ln>
+        </p:spPr>
+        <p:style>
+          <a:lnRef idx="1">
+            <a:schemeClr val="accent1"/>
+          </a:lnRef>
+          <a:fillRef idx="3">
+            <a:schemeClr val="accent1"/>
+          </a:fillRef>
+          <a:effectRef idx="2">
+            <a:schemeClr val="accent1"/>
+          </a:effectRef>
+          <a:fontRef idx="minor">
+            <a:schemeClr val="lt1"/>
+          </a:fontRef>
+        </p:style>
+        <p:txBody>
+          <a:bodyPr rtlCol="0" anchor="ctr"/>
+          <a:lstStyle/>
+          <a:p>
+            <a:pPr algn="ctr"/>
+          </a:p>
+        </p:txBody>
+      </p:sp>
+      <p:sp>
+        <p:nvSpPr>
+          <p:cNvPr id="17" name="TextBox 16"/>
+          <p:cNvSpPr txBox="1"/>
+          <p:nvPr/>
+        </p:nvSpPr>
+        <p:spPr>
+          <a:xfrm>
+            <a:off x="1097280" y="2916936"/>
+            <a:ext cx="10362895" cy="402336"/>
+          </a:xfrm>
+          <a:prstGeom prst="rect">
+            <a:avLst/>
+          </a:prstGeom>
+          <a:noFill/>
+        </p:spPr>
+        <p:txBody>
+          <a:bodyPr wrap="square" anchor="ctr"/>
+          <a:lstStyle/>
+          <a:p>
+            <a:r>
+              <a:rPr sz="1500" b="1" i="0">
+                <a:solidFill>
+                  <a:srgbClr val="333333"/>
+                </a:solidFill>
+                <a:latin typeface="Calibri"/>
+              </a:rPr>
+              <a:t>QUÉ PROPUSO</a:t>
+            </a:r>
+            <a:r>
+              <a:rPr sz="1500" b="0" i="0">
+                <a:solidFill>
+                  <a:srgbClr val="333333"/>
+                </a:solidFill>
+                <a:latin typeface="Calibri"/>
+              </a:rPr>
+              <a:t> — Para cada hito: la idea, el método o la herramienta, en una frase que ustedes puedan explicar.</a:t>
+            </a:r>
+          </a:p>
+        </p:txBody>
+      </p:sp>
+      <p:sp>
+        <p:nvSpPr>
+          <p:cNvPr id="18" name="Rounded Rectangle 17"/>
+          <p:cNvSpPr/>
+          <p:nvPr/>
+        </p:nvSpPr>
+        <p:spPr>
+          <a:xfrm>
+            <a:off x="457200" y="3502152"/>
+            <a:ext cx="11277295" cy="566928"/>
+          </a:xfrm>
+          <a:prstGeom prst="roundRect">
+            <a:avLst>
+              <a:gd name="adj" fmla="val 12000"/>
+            </a:avLst>
+          </a:prstGeom>
+          <a:solidFill>
+            <a:srgbClr val="F2F2F2"/>
+          </a:solidFill>
+          <a:ln>
+            <a:noFill/>
+          </a:ln>
+        </p:spPr>
+        <p:style>
+          <a:lnRef idx="1">
+            <a:schemeClr val="accent1"/>
+          </a:lnRef>
+          <a:fillRef idx="3">
+            <a:schemeClr val="accent1"/>
+          </a:fillRef>
+          <a:effectRef idx="2">
+            <a:schemeClr val="accent1"/>
+          </a:effectRef>
+          <a:fontRef idx="minor">
+            <a:schemeClr val="lt1"/>
+          </a:fontRef>
+        </p:style>
+        <p:txBody>
+          <a:bodyPr rtlCol="0" anchor="ctr"/>
+          <a:lstStyle/>
+          <a:p>
+            <a:pPr algn="ctr"/>
+          </a:p>
+        </p:txBody>
+      </p:sp>
+      <p:sp>
+        <p:nvSpPr>
+          <p:cNvPr id="19" name="Rectangle 18"/>
+          <p:cNvSpPr/>
+          <p:nvPr/>
+        </p:nvSpPr>
+        <p:spPr>
+          <a:xfrm>
+            <a:off x="640080" y="3648456"/>
+            <a:ext cx="274320" cy="274320"/>
+          </a:xfrm>
+          <a:prstGeom prst="rect">
+            <a:avLst/>
+          </a:prstGeom>
+          <a:solidFill>
+            <a:srgbClr val="FFFFFF"/>
+          </a:solidFill>
+          <a:ln>
+            <a:solidFill>
+              <a:srgbClr val="333333"/>
+            </a:solidFill>
+          </a:ln>
+        </p:spPr>
+        <p:style>
+          <a:lnRef idx="1">
+            <a:schemeClr val="accent1"/>
+          </a:lnRef>
+          <a:fillRef idx="3">
+            <a:schemeClr val="accent1"/>
+          </a:fillRef>
+          <a:effectRef idx="2">
+            <a:schemeClr val="accent1"/>
+          </a:effectRef>
+          <a:fontRef idx="minor">
+            <a:schemeClr val="lt1"/>
+          </a:fontRef>
+        </p:style>
+        <p:txBody>
+          <a:bodyPr rtlCol="0" anchor="ctr"/>
+          <a:lstStyle/>
+          <a:p>
+            <a:pPr algn="ctr"/>
+          </a:p>
+        </p:txBody>
+      </p:sp>
+      <p:sp>
+        <p:nvSpPr>
+          <p:cNvPr id="20" name="Rectangle 19"/>
+          <p:cNvSpPr/>
+          <p:nvPr/>
+        </p:nvSpPr>
+        <p:spPr>
+          <a:xfrm>
+            <a:off x="640080" y="3648456"/>
+            <a:ext cx="73152" cy="274320"/>
+          </a:xfrm>
+          <a:prstGeom prst="rect">
+            <a:avLst/>
+          </a:prstGeom>
+          <a:solidFill>
+            <a:srgbClr val="269CCB"/>
+          </a:solidFill>
+          <a:ln>
+            <a:noFill/>
+          </a:ln>
+        </p:spPr>
+        <p:style>
+          <a:lnRef idx="1">
+            <a:schemeClr val="accent1"/>
+          </a:lnRef>
+          <a:fillRef idx="3">
+            <a:schemeClr val="accent1"/>
+          </a:fillRef>
+          <a:effectRef idx="2">
+            <a:schemeClr val="accent1"/>
+          </a:effectRef>
+          <a:fontRef idx="minor">
+            <a:schemeClr val="lt1"/>
+          </a:fontRef>
+        </p:style>
+        <p:txBody>
+          <a:bodyPr rtlCol="0" anchor="ctr"/>
+          <a:lstStyle/>
+          <a:p>
+            <a:pPr algn="ctr"/>
+          </a:p>
+        </p:txBody>
+      </p:sp>
+      <p:sp>
+        <p:nvSpPr>
+          <p:cNvPr id="21" name="TextBox 20"/>
+          <p:cNvSpPr txBox="1"/>
+          <p:nvPr/>
+        </p:nvSpPr>
+        <p:spPr>
+          <a:xfrm>
+            <a:off x="1097280" y="3593592"/>
+            <a:ext cx="10362895" cy="402336"/>
+          </a:xfrm>
+          <a:prstGeom prst="rect">
+            <a:avLst/>
+          </a:prstGeom>
+          <a:noFill/>
+        </p:spPr>
+        <p:txBody>
+          <a:bodyPr wrap="square" anchor="ctr"/>
+          <a:lstStyle/>
+          <a:p>
+            <a:r>
+              <a:rPr sz="1500" b="1" i="0">
+                <a:solidFill>
+                  <a:srgbClr val="333333"/>
+                </a:solidFill>
+                <a:latin typeface="Calibri"/>
+              </a:rPr>
+              <a:t>QUÉ SIGUE VIVO HOY</a:t>
+            </a:r>
+            <a:r>
+              <a:rPr sz="1500" b="0" i="0">
+                <a:solidFill>
+                  <a:srgbClr val="333333"/>
+                </a:solidFill>
+                <a:latin typeface="Calibri"/>
+              </a:rPr>
+              <a:t> — Para </a:t>
+            </a:r>
+            <a:r>
+              <a:rPr sz="1500" b="1" i="0">
+                <a:solidFill>
+                  <a:srgbClr val="333333"/>
+                </a:solidFill>
+                <a:latin typeface="Calibri"/>
+              </a:rPr>
+              <a:t>al menos dos</a:t>
+            </a:r>
+            <a:r>
+              <a:rPr sz="1500" b="0" i="0">
+                <a:solidFill>
+                  <a:srgbClr val="333333"/>
+                </a:solidFill>
+                <a:latin typeface="Calibri"/>
+              </a:rPr>
+              <a:t> de los cuatro hitos: qué parte de ese problema todavía no está resuelta, con un ejemplo de algo que ustedes hayan visto.</a:t>
+            </a:r>
+          </a:p>
+        </p:txBody>
+      </p:sp>
+      <p:sp>
+        <p:nvSpPr>
+          <p:cNvPr id="22" name="Rounded Rectangle 21"/>
+          <p:cNvSpPr/>
+          <p:nvPr/>
+        </p:nvSpPr>
+        <p:spPr>
+          <a:xfrm>
+            <a:off x="457200" y="4178808"/>
+            <a:ext cx="11277295" cy="566928"/>
+          </a:xfrm>
+          <a:prstGeom prst="roundRect">
+            <a:avLst>
+              <a:gd name="adj" fmla="val 12000"/>
+            </a:avLst>
+          </a:prstGeom>
+          <a:solidFill>
+            <a:srgbClr val="F2F2F2"/>
+          </a:solidFill>
+          <a:ln>
+            <a:noFill/>
+          </a:ln>
+        </p:spPr>
+        <p:style>
+          <a:lnRef idx="1">
+            <a:schemeClr val="accent1"/>
+          </a:lnRef>
+          <a:fillRef idx="3">
+            <a:schemeClr val="accent1"/>
+          </a:fillRef>
+          <a:effectRef idx="2">
+            <a:schemeClr val="accent1"/>
+          </a:effectRef>
+          <a:fontRef idx="minor">
+            <a:schemeClr val="lt1"/>
+          </a:fontRef>
+        </p:style>
+        <p:txBody>
+          <a:bodyPr rtlCol="0" anchor="ctr"/>
+          <a:lstStyle/>
+          <a:p>
+            <a:pPr algn="ctr"/>
+          </a:p>
+        </p:txBody>
+      </p:sp>
+      <p:sp>
+        <p:nvSpPr>
+          <p:cNvPr id="23" name="Rectangle 22"/>
+          <p:cNvSpPr/>
+          <p:nvPr/>
+        </p:nvSpPr>
+        <p:spPr>
+          <a:xfrm>
+            <a:off x="640080" y="4325112"/>
+            <a:ext cx="274320" cy="274320"/>
+          </a:xfrm>
+          <a:prstGeom prst="rect">
+            <a:avLst/>
+          </a:prstGeom>
+          <a:solidFill>
+            <a:srgbClr val="FFFFFF"/>
+          </a:solidFill>
+          <a:ln>
+            <a:solidFill>
+              <a:srgbClr val="333333"/>
+            </a:solidFill>
+          </a:ln>
+        </p:spPr>
+        <p:style>
+          <a:lnRef idx="1">
+            <a:schemeClr val="accent1"/>
+          </a:lnRef>
+          <a:fillRef idx="3">
+            <a:schemeClr val="accent1"/>
+          </a:fillRef>
+          <a:effectRef idx="2">
+            <a:schemeClr val="accent1"/>
+          </a:effectRef>
+          <a:fontRef idx="minor">
+            <a:schemeClr val="lt1"/>
+          </a:fontRef>
+        </p:style>
+        <p:txBody>
+          <a:bodyPr rtlCol="0" anchor="ctr"/>
+          <a:lstStyle/>
+          <a:p>
+            <a:pPr algn="ctr"/>
+          </a:p>
+        </p:txBody>
+      </p:sp>
+      <p:sp>
+        <p:nvSpPr>
+          <p:cNvPr id="24" name="Rectangle 23"/>
+          <p:cNvSpPr/>
+          <p:nvPr/>
+        </p:nvSpPr>
+        <p:spPr>
+          <a:xfrm>
+            <a:off x="640080" y="4325112"/>
+            <a:ext cx="73152" cy="274320"/>
+          </a:xfrm>
+          <a:prstGeom prst="rect">
+            <a:avLst/>
+          </a:prstGeom>
+          <a:solidFill>
+            <a:srgbClr val="269CCB"/>
+          </a:solidFill>
+          <a:ln>
+            <a:noFill/>
+          </a:ln>
+        </p:spPr>
+        <p:style>
+          <a:lnRef idx="1">
+            <a:schemeClr val="accent1"/>
+          </a:lnRef>
+          <a:fillRef idx="3">
+            <a:schemeClr val="accent1"/>
+          </a:fillRef>
+          <a:effectRef idx="2">
+            <a:schemeClr val="accent1"/>
+          </a:effectRef>
+          <a:fontRef idx="minor">
+            <a:schemeClr val="lt1"/>
+          </a:fontRef>
+        </p:style>
+        <p:txBody>
+          <a:bodyPr rtlCol="0" anchor="ctr"/>
+          <a:lstStyle/>
+          <a:p>
+            <a:pPr algn="ctr"/>
+          </a:p>
+        </p:txBody>
+      </p:sp>
+      <p:sp>
+        <p:nvSpPr>
+          <p:cNvPr id="25" name="TextBox 24"/>
+          <p:cNvSpPr txBox="1"/>
+          <p:nvPr/>
+        </p:nvSpPr>
+        <p:spPr>
+          <a:xfrm>
+            <a:off x="1097280" y="4270248"/>
+            <a:ext cx="10362895" cy="402336"/>
+          </a:xfrm>
+          <a:prstGeom prst="rect">
+            <a:avLst/>
+          </a:prstGeom>
+          <a:noFill/>
+        </p:spPr>
+        <p:txBody>
+          <a:bodyPr wrap="square" anchor="ctr"/>
+          <a:lstStyle/>
+          <a:p>
+            <a:r>
+              <a:rPr sz="1500" b="1" i="0">
+                <a:solidFill>
+                  <a:srgbClr val="333333"/>
+                </a:solidFill>
+                <a:latin typeface="Calibri"/>
+              </a:rPr>
+              <a:t>LA FUENTE</a:t>
+            </a:r>
+            <a:r>
+              <a:rPr sz="1500" b="0" i="0">
+                <a:solidFill>
+                  <a:srgbClr val="333333"/>
+                </a:solidFill>
+                <a:latin typeface="Calibri"/>
+              </a:rPr>
+              <a:t> — De dónde sacaron cada dato: autor o institución, y año. Si usaron una cifra («el 70 % de los proyectos…»), la fuente es obligatoria.</a:t>
+            </a:r>
+          </a:p>
+        </p:txBody>
+      </p:sp>
+      <p:sp>
+        <p:nvSpPr>
+          <p:cNvPr id="26" name="TextBox 25"/>
+          <p:cNvSpPr txBox="1"/>
+          <p:nvPr/>
+        </p:nvSpPr>
+        <p:spPr>
+          <a:xfrm>
+            <a:off x="11185855" y="6473952"/>
+            <a:ext cx="640080" cy="274320"/>
+          </a:xfrm>
+          <a:prstGeom prst="rect">
+            <a:avLst/>
+          </a:prstGeom>
+          <a:noFill/>
+        </p:spPr>
+        <p:txBody>
+          <a:bodyPr wrap="square">
+            <a:spAutoFit/>
+          </a:bodyPr>
+          <a:lstStyle/>
+          <a:p>
+            <a:pPr algn="r"/>
+            <a:r>
+              <a:rPr sz="1100" b="0" i="0">
+                <a:solidFill>
+                  <a:srgbClr val="666666"/>
+                </a:solidFill>
+                <a:latin typeface="Calibri"/>
+              </a:rPr>
+              <a:t>20</a:t>
+            </a:r>
+          </a:p>
+        </p:txBody>
+      </p:sp>
+    </p:spTree>
+  </p:cSld>
+  <p:clrMapOvr>
+    <a:masterClrMapping/>
+  </p:clrMapOvr>
+</p:sld>
+</file>
+
+<file path=ppt/slides/slide21.xml><?xml version="1.0" encoding="utf-8"?>
+<p:sld xmlns:a="http://schemas.openxmlformats.org/drawingml/2006/main" xmlns:p="http://schemas.openxmlformats.org/presentationml/2006/main" xmlns:r="http://schemas.openxmlformats.org/officeDocument/2006/relationships">
+  <p:cSld>
+    <p:bg>
+      <p:bgPr>
+        <a:solidFill>
+          <a:srgbClr val="FFFFFF"/>
+        </a:solidFill>
+        <a:effectLst/>
+      </p:bgPr>
+    </p:bg>
+    <p:spTree>
+      <p:nvGrpSpPr>
+        <p:cNvPr id="1" name=""/>
+        <p:cNvGrpSpPr/>
+        <p:nvPr/>
+      </p:nvGrpSpPr>
+      <p:grpSpPr/>
+      <p:sp>
+        <p:nvSpPr>
+          <p:cNvPr id="2" name="Rectangle 1"/>
+          <p:cNvSpPr/>
+          <p:nvPr/>
+        </p:nvSpPr>
+        <p:spPr>
+          <a:xfrm>
+            <a:off x="0" y="0"/>
+            <a:ext cx="12191695" cy="1170432"/>
+          </a:xfrm>
+          <a:prstGeom prst="rect">
+            <a:avLst/>
+          </a:prstGeom>
+          <a:solidFill>
+            <a:srgbClr val="095292"/>
+          </a:solidFill>
+          <a:ln>
+            <a:noFill/>
+          </a:ln>
+        </p:spPr>
+        <p:style>
+          <a:lnRef idx="1">
+            <a:schemeClr val="accent1"/>
+          </a:lnRef>
+          <a:fillRef idx="3">
+            <a:schemeClr val="accent1"/>
+          </a:fillRef>
+          <a:effectRef idx="2">
+            <a:schemeClr val="accent1"/>
+          </a:effectRef>
+          <a:fontRef idx="minor">
+            <a:schemeClr val="lt1"/>
+          </a:fontRef>
+        </p:style>
+        <p:txBody>
+          <a:bodyPr rtlCol="0" anchor="ctr"/>
+          <a:lstStyle/>
+          <a:p>
+            <a:pPr algn="ctr"/>
+          </a:p>
+        </p:txBody>
+      </p:sp>
+      <p:sp>
+        <p:nvSpPr>
+          <p:cNvPr id="3" name="Rectangle 2"/>
+          <p:cNvSpPr/>
+          <p:nvPr/>
+        </p:nvSpPr>
+        <p:spPr>
+          <a:xfrm>
+            <a:off x="0" y="1170432"/>
+            <a:ext cx="12191695" cy="41148"/>
+          </a:xfrm>
+          <a:prstGeom prst="rect">
+            <a:avLst/>
+          </a:prstGeom>
+          <a:solidFill>
+            <a:srgbClr val="FFD000"/>
+          </a:solidFill>
+          <a:ln>
+            <a:noFill/>
+          </a:ln>
+        </p:spPr>
+        <p:style>
+          <a:lnRef idx="1">
+            <a:schemeClr val="accent1"/>
+          </a:lnRef>
+          <a:fillRef idx="3">
+            <a:schemeClr val="accent1"/>
+          </a:fillRef>
+          <a:effectRef idx="2">
+            <a:schemeClr val="accent1"/>
+          </a:effectRef>
+          <a:fontRef idx="minor">
+            <a:schemeClr val="lt1"/>
+          </a:fontRef>
+        </p:style>
+        <p:txBody>
+          <a:bodyPr rtlCol="0" anchor="ctr"/>
+          <a:lstStyle/>
+          <a:p>
+            <a:pPr algn="ctr"/>
+          </a:p>
+        </p:txBody>
+      </p:sp>
+      <p:sp>
+        <p:nvSpPr>
+          <p:cNvPr id="4" name="TextBox 3"/>
+          <p:cNvSpPr txBox="1"/>
+          <p:nvPr/>
+        </p:nvSpPr>
+        <p:spPr>
+          <a:xfrm>
+            <a:off x="457200" y="164592"/>
+            <a:ext cx="11277295" cy="384048"/>
+          </a:xfrm>
+          <a:prstGeom prst="rect">
+            <a:avLst/>
+          </a:prstGeom>
+          <a:noFill/>
+        </p:spPr>
+        <p:txBody>
+          <a:bodyPr wrap="square">
+            <a:spAutoFit/>
+          </a:bodyPr>
+          <a:lstStyle/>
+          <a:p>
+            <a:r>
+              <a:rPr sz="2600" b="1" i="0">
+                <a:solidFill>
+                  <a:srgbClr val="FFFFFF"/>
+                </a:solidFill>
+                <a:latin typeface="Calibri"/>
+              </a:rPr>
+              <a:t>Cómo se expone en 3 minutos</a:t>
+            </a:r>
+          </a:p>
+        </p:txBody>
+      </p:sp>
+      <p:sp>
+        <p:nvSpPr>
+          <p:cNvPr id="5" name="TextBox 4"/>
+          <p:cNvSpPr txBox="1"/>
+          <p:nvPr/>
+        </p:nvSpPr>
+        <p:spPr>
+          <a:xfrm>
+            <a:off x="457200" y="566928"/>
+            <a:ext cx="11277295" cy="411480"/>
+          </a:xfrm>
+          <a:prstGeom prst="rect">
+            <a:avLst/>
+          </a:prstGeom>
+          <a:noFill/>
+        </p:spPr>
+        <p:txBody>
+          <a:bodyPr wrap="square">
+            <a:spAutoFit/>
+          </a:bodyPr>
+          <a:lstStyle/>
+          <a:p>
+            <a:r>
+              <a:rPr sz="1400" b="0" i="0">
+                <a:solidFill>
+                  <a:srgbClr val="B8D8EE"/>
+                </a:solidFill>
+                <a:latin typeface="Calibri"/>
+              </a:rPr>
+              <a:t>Habla el vocero con la pantalla ya compartida · cronómetro en pantalla · se corta al llegar a cero</a:t>
+            </a:r>
+          </a:p>
+        </p:txBody>
+      </p:sp>
+      <p:sp>
+        <p:nvSpPr>
+          <p:cNvPr id="6" name="Rounded Rectangle 5"/>
+          <p:cNvSpPr/>
+          <p:nvPr/>
+        </p:nvSpPr>
+        <p:spPr>
+          <a:xfrm>
+            <a:off x="457200" y="1659636"/>
+            <a:ext cx="11277295" cy="1051560"/>
+          </a:xfrm>
+          <a:prstGeom prst="roundRect">
+            <a:avLst>
+              <a:gd name="adj" fmla="val 12000"/>
+            </a:avLst>
+          </a:prstGeom>
+          <a:solidFill>
+            <a:srgbClr val="F2F2F2"/>
+          </a:solidFill>
+          <a:ln>
+            <a:noFill/>
+          </a:ln>
+        </p:spPr>
+        <p:style>
+          <a:lnRef idx="1">
+            <a:schemeClr val="accent1"/>
+          </a:lnRef>
+          <a:fillRef idx="3">
+            <a:schemeClr val="accent1"/>
+          </a:fillRef>
+          <a:effectRef idx="2">
+            <a:schemeClr val="accent1"/>
+          </a:effectRef>
+          <a:fontRef idx="minor">
+            <a:schemeClr val="lt1"/>
+          </a:fontRef>
+        </p:style>
+        <p:txBody>
+          <a:bodyPr rtlCol="0" anchor="ctr"/>
+          <a:lstStyle/>
+          <a:p>
+            <a:pPr algn="ctr"/>
+          </a:p>
+        </p:txBody>
+      </p:sp>
+      <p:sp>
+        <p:nvSpPr>
+          <p:cNvPr id="7" name="Rounded Rectangle 6"/>
+          <p:cNvSpPr/>
+          <p:nvPr/>
+        </p:nvSpPr>
+        <p:spPr>
+          <a:xfrm>
+            <a:off x="594360" y="1965960"/>
+            <a:ext cx="438912" cy="438912"/>
+          </a:xfrm>
+          <a:prstGeom prst="roundRect">
+            <a:avLst>
+              <a:gd name="adj" fmla="val 12000"/>
+            </a:avLst>
+          </a:prstGeom>
+          <a:solidFill>
+            <a:srgbClr val="095292"/>
+          </a:solidFill>
+          <a:ln>
+            <a:noFill/>
+          </a:ln>
+        </p:spPr>
+        <p:style>
+          <a:lnRef idx="1">
+            <a:schemeClr val="accent1"/>
+          </a:lnRef>
+          <a:fillRef idx="3">
+            <a:schemeClr val="accent1"/>
+          </a:fillRef>
+          <a:effectRef idx="2">
+            <a:schemeClr val="accent1"/>
+          </a:effectRef>
+          <a:fontRef idx="minor">
+            <a:schemeClr val="lt1"/>
+          </a:fontRef>
+        </p:style>
+        <p:txBody>
+          <a:bodyPr rtlCol="0" anchor="ctr"/>
+          <a:lstStyle/>
+          <a:p>
+            <a:pPr algn="ctr"/>
+          </a:p>
+        </p:txBody>
+      </p:sp>
+      <p:sp>
+        <p:nvSpPr>
+          <p:cNvPr id="8" name="TextBox 7"/>
+          <p:cNvSpPr txBox="1"/>
+          <p:nvPr/>
+        </p:nvSpPr>
+        <p:spPr>
+          <a:xfrm>
+            <a:off x="594360" y="1965960"/>
+            <a:ext cx="438912" cy="438912"/>
+          </a:xfrm>
+          <a:prstGeom prst="rect">
+            <a:avLst/>
+          </a:prstGeom>
+          <a:noFill/>
+        </p:spPr>
+        <p:txBody>
+          <a:bodyPr wrap="square" anchor="ctr"/>
+          <a:lstStyle/>
+          <a:p>
+            <a:pPr algn="ctr"/>
+            <a:r>
+              <a:rPr sz="1600" b="1" i="0">
+                <a:solidFill>
+                  <a:srgbClr val="FFFFFF"/>
+                </a:solidFill>
+                <a:latin typeface="Calibri"/>
+              </a:rPr>
+              <a:t>1</a:t>
+            </a:r>
+          </a:p>
+        </p:txBody>
+      </p:sp>
+      <p:sp>
+        <p:nvSpPr>
+          <p:cNvPr id="9" name="TextBox 8"/>
+          <p:cNvSpPr txBox="1"/>
+          <p:nvPr/>
+        </p:nvSpPr>
+        <p:spPr>
+          <a:xfrm>
+            <a:off x="1188720" y="1751076"/>
+            <a:ext cx="10271455" cy="886968"/>
+          </a:xfrm>
+          <a:prstGeom prst="rect">
+            <a:avLst/>
+          </a:prstGeom>
+          <a:noFill/>
+        </p:spPr>
+        <p:txBody>
+          <a:bodyPr wrap="square" anchor="ctr"/>
+          <a:lstStyle/>
+          <a:p>
+            <a:r>
+              <a:rPr sz="1500" b="1" i="0">
+                <a:solidFill>
+                  <a:srgbClr val="095292"/>
+                </a:solidFill>
+                <a:latin typeface="Calibri"/>
+              </a:rPr>
+              <a:t>45 s · El periodo y qué dolía</a:t>
+            </a:r>
+          </a:p>
+          <a:p>
+            <a:pPr>
+              <a:spcBef>
+                <a:spcPts val="200"/>
+              </a:spcBef>
+            </a:pPr>
+            <a:r>
+              <a:rPr sz="1300" b="0" i="0">
+                <a:solidFill>
+                  <a:srgbClr val="333333"/>
+                </a:solidFill>
+                <a:latin typeface="Calibri"/>
+              </a:rPr>
+              <a:t>Qué años les tocaron y cuál era el problema de la época.</a:t>
+            </a:r>
+          </a:p>
+        </p:txBody>
+      </p:sp>
+      <p:sp>
+        <p:nvSpPr>
+          <p:cNvPr id="10" name="Rounded Rectangle 9"/>
+          <p:cNvSpPr/>
+          <p:nvPr/>
+        </p:nvSpPr>
+        <p:spPr>
+          <a:xfrm>
+            <a:off x="457200" y="2802636"/>
+            <a:ext cx="11277295" cy="1051560"/>
+          </a:xfrm>
+          <a:prstGeom prst="roundRect">
+            <a:avLst>
+              <a:gd name="adj" fmla="val 12000"/>
+            </a:avLst>
+          </a:prstGeom>
+          <a:solidFill>
+            <a:srgbClr val="E8F4FA"/>
+          </a:solidFill>
+          <a:ln>
+            <a:noFill/>
+          </a:ln>
+        </p:spPr>
+        <p:style>
+          <a:lnRef idx="1">
+            <a:schemeClr val="accent1"/>
+          </a:lnRef>
+          <a:fillRef idx="3">
+            <a:schemeClr val="accent1"/>
+          </a:fillRef>
+          <a:effectRef idx="2">
+            <a:schemeClr val="accent1"/>
+          </a:effectRef>
+          <a:fontRef idx="minor">
+            <a:schemeClr val="lt1"/>
+          </a:fontRef>
+        </p:style>
+        <p:txBody>
+          <a:bodyPr rtlCol="0" anchor="ctr"/>
+          <a:lstStyle/>
+          <a:p>
+            <a:pPr algn="ctr"/>
+          </a:p>
+        </p:txBody>
+      </p:sp>
+      <p:sp>
+        <p:nvSpPr>
+          <p:cNvPr id="11" name="Rounded Rectangle 10"/>
+          <p:cNvSpPr/>
+          <p:nvPr/>
+        </p:nvSpPr>
+        <p:spPr>
+          <a:xfrm>
+            <a:off x="594360" y="3108960"/>
+            <a:ext cx="438912" cy="438912"/>
+          </a:xfrm>
+          <a:prstGeom prst="roundRect">
+            <a:avLst>
+              <a:gd name="adj" fmla="val 12000"/>
+            </a:avLst>
+          </a:prstGeom>
+          <a:solidFill>
+            <a:srgbClr val="095292"/>
+          </a:solidFill>
+          <a:ln>
+            <a:noFill/>
+          </a:ln>
+        </p:spPr>
+        <p:style>
+          <a:lnRef idx="1">
+            <a:schemeClr val="accent1"/>
+          </a:lnRef>
+          <a:fillRef idx="3">
+            <a:schemeClr val="accent1"/>
+          </a:fillRef>
+          <a:effectRef idx="2">
+            <a:schemeClr val="accent1"/>
+          </a:effectRef>
+          <a:fontRef idx="minor">
+            <a:schemeClr val="lt1"/>
+          </a:fontRef>
+        </p:style>
+        <p:txBody>
+          <a:bodyPr rtlCol="0" anchor="ctr"/>
+          <a:lstStyle/>
+          <a:p>
+            <a:pPr algn="ctr"/>
+          </a:p>
+        </p:txBody>
+      </p:sp>
+      <p:sp>
+        <p:nvSpPr>
+          <p:cNvPr id="12" name="TextBox 11"/>
+          <p:cNvSpPr txBox="1"/>
+          <p:nvPr/>
+        </p:nvSpPr>
+        <p:spPr>
+          <a:xfrm>
+            <a:off x="594360" y="3108960"/>
+            <a:ext cx="438912" cy="438912"/>
+          </a:xfrm>
+          <a:prstGeom prst="rect">
+            <a:avLst/>
+          </a:prstGeom>
+          <a:noFill/>
+        </p:spPr>
+        <p:txBody>
+          <a:bodyPr wrap="square" anchor="ctr"/>
+          <a:lstStyle/>
+          <a:p>
+            <a:pPr algn="ctr"/>
+            <a:r>
+              <a:rPr sz="1600" b="1" i="0">
+                <a:solidFill>
+                  <a:srgbClr val="FFFFFF"/>
+                </a:solidFill>
+                <a:latin typeface="Calibri"/>
+              </a:rPr>
+              <a:t>2</a:t>
+            </a:r>
+          </a:p>
+        </p:txBody>
+      </p:sp>
+      <p:sp>
+        <p:nvSpPr>
+          <p:cNvPr id="13" name="TextBox 12"/>
+          <p:cNvSpPr txBox="1"/>
+          <p:nvPr/>
+        </p:nvSpPr>
+        <p:spPr>
+          <a:xfrm>
+            <a:off x="1188720" y="2894076"/>
+            <a:ext cx="10271455" cy="886968"/>
+          </a:xfrm>
+          <a:prstGeom prst="rect">
+            <a:avLst/>
+          </a:prstGeom>
+          <a:noFill/>
+        </p:spPr>
+        <p:txBody>
+          <a:bodyPr wrap="square" anchor="ctr"/>
+          <a:lstStyle/>
+          <a:p>
+            <a:r>
+              <a:rPr sz="1500" b="1" i="0">
+                <a:solidFill>
+                  <a:srgbClr val="095292"/>
+                </a:solidFill>
+                <a:latin typeface="Calibri"/>
+              </a:rPr>
+              <a:t>60 s · Los cuatro hitos</a:t>
+            </a:r>
+          </a:p>
+          <a:p>
+            <a:pPr>
+              <a:spcBef>
+                <a:spcPts val="200"/>
+              </a:spcBef>
+            </a:pPr>
+            <a:r>
+              <a:rPr sz="1300" b="0" i="0">
+                <a:solidFill>
+                  <a:srgbClr val="333333"/>
+                </a:solidFill>
+                <a:latin typeface="Calibri"/>
+              </a:rPr>
+              <a:t>En orden, con año. Una frase por hito, sin leer la pantalla.</a:t>
+            </a:r>
+          </a:p>
+        </p:txBody>
+      </p:sp>
+      <p:sp>
+        <p:nvSpPr>
+          <p:cNvPr id="14" name="Rounded Rectangle 13"/>
+          <p:cNvSpPr/>
+          <p:nvPr/>
+        </p:nvSpPr>
+        <p:spPr>
+          <a:xfrm>
+            <a:off x="457200" y="3945636"/>
+            <a:ext cx="11277295" cy="1051560"/>
+          </a:xfrm>
+          <a:prstGeom prst="roundRect">
+            <a:avLst>
+              <a:gd name="adj" fmla="val 12000"/>
+            </a:avLst>
+          </a:prstGeom>
+          <a:solidFill>
+            <a:srgbClr val="F2F2F2"/>
+          </a:solidFill>
+          <a:ln>
+            <a:noFill/>
+          </a:ln>
+        </p:spPr>
+        <p:style>
+          <a:lnRef idx="1">
+            <a:schemeClr val="accent1"/>
+          </a:lnRef>
+          <a:fillRef idx="3">
+            <a:schemeClr val="accent1"/>
+          </a:fillRef>
+          <a:effectRef idx="2">
+            <a:schemeClr val="accent1"/>
+          </a:effectRef>
+          <a:fontRef idx="minor">
+            <a:schemeClr val="lt1"/>
+          </a:fontRef>
+        </p:style>
+        <p:txBody>
+          <a:bodyPr rtlCol="0" anchor="ctr"/>
+          <a:lstStyle/>
+          <a:p>
+            <a:pPr algn="ctr"/>
+          </a:p>
+        </p:txBody>
+      </p:sp>
+      <p:sp>
+        <p:nvSpPr>
+          <p:cNvPr id="15" name="Rounded Rectangle 14"/>
+          <p:cNvSpPr/>
+          <p:nvPr/>
+        </p:nvSpPr>
+        <p:spPr>
+          <a:xfrm>
+            <a:off x="594360" y="4251960"/>
+            <a:ext cx="438912" cy="438912"/>
+          </a:xfrm>
+          <a:prstGeom prst="roundRect">
+            <a:avLst>
+              <a:gd name="adj" fmla="val 12000"/>
+            </a:avLst>
+          </a:prstGeom>
+          <a:solidFill>
+            <a:srgbClr val="095292"/>
+          </a:solidFill>
+          <a:ln>
+            <a:noFill/>
+          </a:ln>
+        </p:spPr>
+        <p:style>
+          <a:lnRef idx="1">
+            <a:schemeClr val="accent1"/>
+          </a:lnRef>
+          <a:fillRef idx="3">
+            <a:schemeClr val="accent1"/>
+          </a:fillRef>
+          <a:effectRef idx="2">
+            <a:schemeClr val="accent1"/>
+          </a:effectRef>
+          <a:fontRef idx="minor">
+            <a:schemeClr val="lt1"/>
+          </a:fontRef>
+        </p:style>
+        <p:txBody>
+          <a:bodyPr rtlCol="0" anchor="ctr"/>
+          <a:lstStyle/>
+          <a:p>
+            <a:pPr algn="ctr"/>
+          </a:p>
+        </p:txBody>
+      </p:sp>
+      <p:sp>
+        <p:nvSpPr>
+          <p:cNvPr id="16" name="TextBox 15"/>
+          <p:cNvSpPr txBox="1"/>
+          <p:nvPr/>
+        </p:nvSpPr>
+        <p:spPr>
+          <a:xfrm>
+            <a:off x="594360" y="4251960"/>
+            <a:ext cx="438912" cy="438912"/>
+          </a:xfrm>
+          <a:prstGeom prst="rect">
+            <a:avLst/>
+          </a:prstGeom>
+          <a:noFill/>
+        </p:spPr>
+        <p:txBody>
+          <a:bodyPr wrap="square" anchor="ctr"/>
+          <a:lstStyle/>
+          <a:p>
+            <a:pPr algn="ctr"/>
+            <a:r>
+              <a:rPr sz="1600" b="1" i="0">
+                <a:solidFill>
+                  <a:srgbClr val="FFFFFF"/>
+                </a:solidFill>
+                <a:latin typeface="Calibri"/>
+              </a:rPr>
+              <a:t>3</a:t>
+            </a:r>
+          </a:p>
+        </p:txBody>
+      </p:sp>
+      <p:sp>
+        <p:nvSpPr>
+          <p:cNvPr id="17" name="TextBox 16"/>
+          <p:cNvSpPr txBox="1"/>
+          <p:nvPr/>
+        </p:nvSpPr>
+        <p:spPr>
+          <a:xfrm>
+            <a:off x="1188720" y="4037076"/>
+            <a:ext cx="10271455" cy="886968"/>
+          </a:xfrm>
+          <a:prstGeom prst="rect">
+            <a:avLst/>
+          </a:prstGeom>
+          <a:noFill/>
+        </p:spPr>
+        <p:txBody>
+          <a:bodyPr wrap="square" anchor="ctr"/>
+          <a:lstStyle/>
+          <a:p>
+            <a:r>
+              <a:rPr sz="1500" b="1" i="0">
+                <a:solidFill>
+                  <a:srgbClr val="095292"/>
+                </a:solidFill>
+                <a:latin typeface="Calibri"/>
+              </a:rPr>
+              <a:t>60 s · Qué sigue vivo</a:t>
+            </a:r>
+          </a:p>
+          <a:p>
+            <a:pPr>
+              <a:spcBef>
+                <a:spcPts val="200"/>
+              </a:spcBef>
+            </a:pPr>
+            <a:r>
+              <a:rPr sz="1300" b="0" i="0">
+                <a:solidFill>
+                  <a:srgbClr val="333333"/>
+                </a:solidFill>
+                <a:latin typeface="Calibri"/>
+              </a:rPr>
+              <a:t>Los dos hitos cuyo problema no está cerrado, con su ejemplo propio. Es lo que más pesa.</a:t>
+            </a:r>
+          </a:p>
+        </p:txBody>
+      </p:sp>
+      <p:sp>
+        <p:nvSpPr>
+          <p:cNvPr id="18" name="Rounded Rectangle 17"/>
+          <p:cNvSpPr/>
+          <p:nvPr/>
+        </p:nvSpPr>
+        <p:spPr>
+          <a:xfrm>
+            <a:off x="457200" y="5088636"/>
+            <a:ext cx="11277295" cy="1051560"/>
+          </a:xfrm>
+          <a:prstGeom prst="roundRect">
+            <a:avLst>
+              <a:gd name="adj" fmla="val 12000"/>
+            </a:avLst>
+          </a:prstGeom>
+          <a:solidFill>
+            <a:srgbClr val="E8F4FA"/>
+          </a:solidFill>
+          <a:ln>
+            <a:noFill/>
+          </a:ln>
+        </p:spPr>
+        <p:style>
+          <a:lnRef idx="1">
+            <a:schemeClr val="accent1"/>
+          </a:lnRef>
+          <a:fillRef idx="3">
+            <a:schemeClr val="accent1"/>
+          </a:fillRef>
+          <a:effectRef idx="2">
+            <a:schemeClr val="accent1"/>
+          </a:effectRef>
+          <a:fontRef idx="minor">
+            <a:schemeClr val="lt1"/>
+          </a:fontRef>
+        </p:style>
+        <p:txBody>
+          <a:bodyPr rtlCol="0" anchor="ctr"/>
+          <a:lstStyle/>
+          <a:p>
+            <a:pPr algn="ctr"/>
+          </a:p>
+        </p:txBody>
+      </p:sp>
+      <p:sp>
+        <p:nvSpPr>
+          <p:cNvPr id="19" name="Rounded Rectangle 18"/>
+          <p:cNvSpPr/>
+          <p:nvPr/>
+        </p:nvSpPr>
+        <p:spPr>
+          <a:xfrm>
+            <a:off x="594360" y="5394960"/>
+            <a:ext cx="438912" cy="438912"/>
+          </a:xfrm>
+          <a:prstGeom prst="roundRect">
+            <a:avLst>
+              <a:gd name="adj" fmla="val 12000"/>
+            </a:avLst>
+          </a:prstGeom>
+          <a:solidFill>
+            <a:srgbClr val="095292"/>
+          </a:solidFill>
+          <a:ln>
+            <a:noFill/>
+          </a:ln>
+        </p:spPr>
+        <p:style>
+          <a:lnRef idx="1">
+            <a:schemeClr val="accent1"/>
+          </a:lnRef>
+          <a:fillRef idx="3">
+            <a:schemeClr val="accent1"/>
+          </a:fillRef>
+          <a:effectRef idx="2">
+            <a:schemeClr val="accent1"/>
+          </a:effectRef>
+          <a:fontRef idx="minor">
+            <a:schemeClr val="lt1"/>
+          </a:fontRef>
+        </p:style>
+        <p:txBody>
+          <a:bodyPr rtlCol="0" anchor="ctr"/>
+          <a:lstStyle/>
+          <a:p>
+            <a:pPr algn="ctr"/>
+          </a:p>
+        </p:txBody>
+      </p:sp>
+      <p:sp>
+        <p:nvSpPr>
+          <p:cNvPr id="20" name="TextBox 19"/>
+          <p:cNvSpPr txBox="1"/>
+          <p:nvPr/>
+        </p:nvSpPr>
+        <p:spPr>
+          <a:xfrm>
+            <a:off x="594360" y="5394960"/>
+            <a:ext cx="438912" cy="438912"/>
+          </a:xfrm>
+          <a:prstGeom prst="rect">
+            <a:avLst/>
+          </a:prstGeom>
+          <a:noFill/>
+        </p:spPr>
+        <p:txBody>
+          <a:bodyPr wrap="square" anchor="ctr"/>
+          <a:lstStyle/>
+          <a:p>
+            <a:pPr algn="ctr"/>
+            <a:r>
+              <a:rPr sz="1600" b="1" i="0">
+                <a:solidFill>
+                  <a:srgbClr val="FFFFFF"/>
+                </a:solidFill>
+                <a:latin typeface="Calibri"/>
+              </a:rPr>
+              <a:t>4</a:t>
+            </a:r>
+          </a:p>
+        </p:txBody>
+      </p:sp>
+      <p:sp>
+        <p:nvSpPr>
+          <p:cNvPr id="21" name="TextBox 20"/>
+          <p:cNvSpPr txBox="1"/>
+          <p:nvPr/>
+        </p:nvSpPr>
+        <p:spPr>
+          <a:xfrm>
+            <a:off x="1188720" y="5180076"/>
+            <a:ext cx="10271455" cy="886968"/>
+          </a:xfrm>
+          <a:prstGeom prst="rect">
+            <a:avLst/>
+          </a:prstGeom>
+          <a:noFill/>
+        </p:spPr>
+        <p:txBody>
+          <a:bodyPr wrap="square" anchor="ctr"/>
+          <a:lstStyle/>
+          <a:p>
+            <a:r>
+              <a:rPr sz="1500" b="1" i="0">
+                <a:solidFill>
+                  <a:srgbClr val="095292"/>
+                </a:solidFill>
+                <a:latin typeface="Calibri"/>
+              </a:rPr>
+              <a:t>15 s · Las fuentes</a:t>
+            </a:r>
+          </a:p>
+          <a:p>
+            <a:pPr>
+              <a:spcBef>
+                <a:spcPts val="200"/>
+              </a:spcBef>
+            </a:pPr>
+            <a:r>
+              <a:rPr sz="1300" b="0" i="0">
+                <a:solidFill>
+                  <a:srgbClr val="333333"/>
+                </a:solidFill>
+                <a:latin typeface="Calibri"/>
+              </a:rPr>
+              <a:t>De dónde salió lo que dijeron.</a:t>
+            </a:r>
+          </a:p>
+        </p:txBody>
+      </p:sp>
+      <p:sp>
+        <p:nvSpPr>
+          <p:cNvPr id="22" name="TextBox 21"/>
+          <p:cNvSpPr txBox="1"/>
+          <p:nvPr/>
+        </p:nvSpPr>
+        <p:spPr>
+          <a:xfrm>
+            <a:off x="11185855" y="6473952"/>
+            <a:ext cx="640080" cy="274320"/>
+          </a:xfrm>
+          <a:prstGeom prst="rect">
+            <a:avLst/>
+          </a:prstGeom>
+          <a:noFill/>
+        </p:spPr>
+        <p:txBody>
+          <a:bodyPr wrap="square">
+            <a:spAutoFit/>
+          </a:bodyPr>
+          <a:lstStyle/>
+          <a:p>
+            <a:pPr algn="r"/>
+            <a:r>
+              <a:rPr sz="1100" b="0" i="0">
+                <a:solidFill>
+                  <a:srgbClr val="666666"/>
+                </a:solidFill>
+                <a:latin typeface="Calibri"/>
+              </a:rPr>
+              <a:t>21</a:t>
+            </a:r>
+          </a:p>
+        </p:txBody>
+      </p:sp>
+    </p:spTree>
+  </p:cSld>
+  <p:clrMapOvr>
+    <a:masterClrMapping/>
+  </p:clrMapOvr>
+</p:sld>
+</file>
+
+<file path=ppt/slides/slide22.xml><?xml version="1.0" encoding="utf-8"?>
+<p:sld xmlns:a="http://schemas.openxmlformats.org/drawingml/2006/main" xmlns:p="http://schemas.openxmlformats.org/presentationml/2006/main" xmlns:r="http://schemas.openxmlformats.org/officeDocument/2006/relationships">
+  <p:cSld>
+    <p:bg>
+      <p:bgPr>
+        <a:solidFill>
+          <a:srgbClr val="FFFFFF"/>
+        </a:solidFill>
+        <a:effectLst/>
+      </p:bgPr>
+    </p:bg>
+    <p:spTree>
+      <p:nvGrpSpPr>
+        <p:cNvPr id="1" name=""/>
+        <p:cNvGrpSpPr/>
+        <p:nvPr/>
+      </p:nvGrpSpPr>
+      <p:grpSpPr/>
+      <p:sp>
+        <p:nvSpPr>
+          <p:cNvPr id="2" name="Rectangle 1"/>
+          <p:cNvSpPr/>
+          <p:nvPr/>
+        </p:nvSpPr>
+        <p:spPr>
+          <a:xfrm>
+            <a:off x="0" y="0"/>
+            <a:ext cx="12191695" cy="960120"/>
+          </a:xfrm>
+          <a:prstGeom prst="rect">
+            <a:avLst/>
+          </a:prstGeom>
+          <a:solidFill>
+            <a:srgbClr val="095292"/>
+          </a:solidFill>
+          <a:ln>
+            <a:noFill/>
+          </a:ln>
+        </p:spPr>
+        <p:style>
+          <a:lnRef idx="1">
+            <a:schemeClr val="accent1"/>
+          </a:lnRef>
+          <a:fillRef idx="3">
+            <a:schemeClr val="accent1"/>
+          </a:fillRef>
+          <a:effectRef idx="2">
+            <a:schemeClr val="accent1"/>
+          </a:effectRef>
+          <a:fontRef idx="minor">
+            <a:schemeClr val="lt1"/>
+          </a:fontRef>
+        </p:style>
+        <p:txBody>
+          <a:bodyPr rtlCol="0" anchor="ctr"/>
+          <a:lstStyle/>
+          <a:p>
+            <a:pPr algn="ctr"/>
+          </a:p>
+        </p:txBody>
+      </p:sp>
+      <p:sp>
+        <p:nvSpPr>
+          <p:cNvPr id="3" name="Rectangle 2"/>
+          <p:cNvSpPr/>
+          <p:nvPr/>
+        </p:nvSpPr>
+        <p:spPr>
+          <a:xfrm>
+            <a:off x="0" y="960120"/>
+            <a:ext cx="12191695" cy="41148"/>
+          </a:xfrm>
+          <a:prstGeom prst="rect">
+            <a:avLst/>
+          </a:prstGeom>
+          <a:solidFill>
+            <a:srgbClr val="FFD000"/>
+          </a:solidFill>
+          <a:ln>
+            <a:noFill/>
+          </a:ln>
+        </p:spPr>
+        <p:style>
+          <a:lnRef idx="1">
+            <a:schemeClr val="accent1"/>
+          </a:lnRef>
+          <a:fillRef idx="3">
+            <a:schemeClr val="accent1"/>
+          </a:fillRef>
+          <a:effectRef idx="2">
+            <a:schemeClr val="accent1"/>
+          </a:effectRef>
+          <a:fontRef idx="minor">
+            <a:schemeClr val="lt1"/>
+          </a:fontRef>
+        </p:style>
+        <p:txBody>
+          <a:bodyPr rtlCol="0" anchor="ctr"/>
+          <a:lstStyle/>
+          <a:p>
+            <a:pPr algn="ctr"/>
+          </a:p>
+        </p:txBody>
+      </p:sp>
+      <p:sp>
+        <p:nvSpPr>
+          <p:cNvPr id="4" name="TextBox 3"/>
+          <p:cNvSpPr txBox="1"/>
+          <p:nvPr/>
+        </p:nvSpPr>
+        <p:spPr>
+          <a:xfrm>
+            <a:off x="457200" y="164592"/>
+            <a:ext cx="11277295" cy="502920"/>
+          </a:xfrm>
+          <a:prstGeom prst="rect">
+            <a:avLst/>
+          </a:prstGeom>
+          <a:noFill/>
+        </p:spPr>
+        <p:txBody>
+          <a:bodyPr wrap="square">
+            <a:spAutoFit/>
+          </a:bodyPr>
+          <a:lstStyle/>
+          <a:p>
+            <a:r>
+              <a:rPr sz="2600" b="1" i="0">
+                <a:solidFill>
+                  <a:srgbClr val="FFFFFF"/>
+                </a:solidFill>
+                <a:latin typeface="Calibri"/>
+              </a:rPr>
+              <a:t>Para la Clase 3</a:t>
+            </a:r>
+          </a:p>
+        </p:txBody>
+      </p:sp>
+      <p:sp>
+        <p:nvSpPr>
+          <p:cNvPr id="5" name="TextBox 4"/>
+          <p:cNvSpPr txBox="1"/>
+          <p:nvPr/>
+        </p:nvSpPr>
+        <p:spPr>
+          <a:xfrm>
+            <a:off x="457200" y="1170432"/>
+            <a:ext cx="11277295" cy="5230368"/>
+          </a:xfrm>
+          <a:prstGeom prst="rect">
+            <a:avLst/>
+          </a:prstGeom>
+          <a:noFill/>
+        </p:spPr>
+        <p:txBody>
+          <a:bodyPr wrap="square">
+            <a:spAutoFit/>
+          </a:bodyPr>
+          <a:lstStyle/>
+          <a:p>
+            <a:pPr>
+              <a:spcAft>
+                <a:spcPts val="800"/>
+              </a:spcAft>
+            </a:pPr>
+            <a:r>
+              <a:rPr sz="2000" b="0" i="0">
+                <a:solidFill>
+                  <a:srgbClr val="333333"/>
+                </a:solidFill>
+                <a:latin typeface="Calibri"/>
+              </a:rPr>
+              <a:t>–   </a:t>
+            </a:r>
+            <a:r>
+              <a:rPr sz="2000" b="1" i="0">
+                <a:solidFill>
+                  <a:srgbClr val="333333"/>
+                </a:solidFill>
+                <a:latin typeface="Calibri"/>
+              </a:rPr>
+              <a:t>Trabajo dirigido:</a:t>
+            </a:r>
+            <a:r>
+              <a:rPr sz="2000" b="0" i="0">
+                <a:solidFill>
+                  <a:srgbClr val="333333"/>
+                </a:solidFill>
+                <a:latin typeface="Calibri"/>
+              </a:rPr>
+              <a:t> Investigación sobre hitos históricos — cada equipo completa la línea de tiempo del curso juntando los cinco tramos expuestos hoy, en la carpeta del equipo.</a:t>
+            </a:r>
+          </a:p>
+          <a:p>
+            <a:pPr>
+              <a:spcAft>
+                <a:spcPts val="800"/>
+              </a:spcAft>
+            </a:pPr>
+            <a:r>
+              <a:rPr sz="2000" b="0" i="0">
+                <a:solidFill>
+                  <a:srgbClr val="333333"/>
+                </a:solidFill>
+                <a:latin typeface="Calibri"/>
+              </a:rPr>
+              <a:t>–   </a:t>
+            </a:r>
+            <a:r>
+              <a:rPr sz="2000" b="1" i="0">
+                <a:solidFill>
+                  <a:srgbClr val="333333"/>
+                </a:solidFill>
+                <a:latin typeface="Calibri"/>
+              </a:rPr>
+              <a:t>Trabajo independiente:</a:t>
+            </a:r>
+            <a:r>
+              <a:rPr sz="2000" b="0" i="0">
+                <a:solidFill>
+                  <a:srgbClr val="333333"/>
+                </a:solidFill>
+                <a:latin typeface="Calibri"/>
+              </a:rPr>
+              <a:t> Elaboración de línea de tiempo: la versión completa (los cinco periodos), con al menos un «qué sigue vivo hoy» por periodo.</a:t>
+            </a:r>
+          </a:p>
+          <a:p>
+            <a:pPr>
+              <a:spcAft>
+                <a:spcPts val="800"/>
+              </a:spcAft>
+            </a:pPr>
+            <a:r>
+              <a:rPr sz="2000" b="0" i="0">
+                <a:solidFill>
+                  <a:srgbClr val="333333"/>
+                </a:solidFill>
+                <a:latin typeface="Calibri"/>
+              </a:rPr>
+              <a:t>–   </a:t>
+            </a:r>
+            <a:r>
+              <a:rPr sz="2000" b="1" i="0">
+                <a:solidFill>
+                  <a:srgbClr val="333333"/>
+                </a:solidFill>
+                <a:latin typeface="Calibri"/>
+              </a:rPr>
+              <a:t>Clase 3 · Fundamentos básicos de la Ingeniería de Sistemas</a:t>
+            </a:r>
+            <a:r>
+              <a:rPr sz="2000" b="0" i="0">
+                <a:solidFill>
+                  <a:srgbClr val="333333"/>
+                </a:solidFill>
+                <a:latin typeface="Calibri"/>
+              </a:rPr>
+              <a:t> — qué es un sistema y por qué el software es solo una parte de él. Se trabaja con un asistente de IA, y hay que declarar el prompt usado.</a:t>
+            </a:r>
+          </a:p>
+          <a:p>
+            <a:pPr>
+              <a:spcAft>
+                <a:spcPts val="800"/>
+              </a:spcAft>
+            </a:pPr>
+            <a:r>
+              <a:rPr sz="2000" b="0" i="0">
+                <a:solidFill>
+                  <a:srgbClr val="333333"/>
+                </a:solidFill>
+                <a:latin typeface="Calibri"/>
+              </a:rPr>
+              <a:t>–   </a:t>
+            </a:r>
+            <a:r>
+              <a:rPr sz="2000" b="1" i="0">
+                <a:solidFill>
+                  <a:srgbClr val="333333"/>
+                </a:solidFill>
+                <a:latin typeface="Calibri"/>
+              </a:rPr>
+              <a:t>Aviso:</a:t>
+            </a:r>
+            <a:r>
+              <a:rPr sz="2000" b="0" i="0">
+                <a:solidFill>
+                  <a:srgbClr val="333333"/>
+                </a:solidFill>
+                <a:latin typeface="Calibri"/>
+              </a:rPr>
+              <a:t> Traigan la línea de tiempo completa en la carpeta del equipo. En la sesión 3 se descompone un sistema del entorno y la línea de tiempo es el punto de partida.</a:t>
+            </a:r>
+          </a:p>
+          <a:p>
+            <a:pPr>
+              <a:spcAft>
+                <a:spcPts val="800"/>
+              </a:spcAft>
+            </a:pPr>
+            <a:r>
+              <a:rPr sz="2000" b="0" i="0">
+                <a:solidFill>
+                  <a:srgbClr val="333333"/>
+                </a:solidFill>
+                <a:latin typeface="Calibri"/>
+              </a:rPr>
+              <a:t>–   </a:t>
+            </a:r>
+            <a:r>
+              <a:rPr sz="2000" b="1" i="0">
+                <a:solidFill>
+                  <a:srgbClr val="333333"/>
+                </a:solidFill>
+                <a:latin typeface="Calibri"/>
+              </a:rPr>
+              <a:t>Antes de salir:</a:t>
+            </a:r>
+            <a:r>
+              <a:rPr sz="2000" b="0" i="0">
+                <a:solidFill>
+                  <a:srgbClr val="333333"/>
+                </a:solidFill>
+                <a:latin typeface="Calibri"/>
+              </a:rPr>
+              <a:t> el enlace del documento del equipo en el chat, con permiso de lectura para el docente, y el nombre del vocero de hoy.</a:t>
+            </a:r>
+          </a:p>
+        </p:txBody>
+      </p:sp>
+      <p:sp>
+        <p:nvSpPr>
+          <p:cNvPr id="6" name="TextBox 5"/>
+          <p:cNvSpPr txBox="1"/>
+          <p:nvPr/>
+        </p:nvSpPr>
+        <p:spPr>
+          <a:xfrm>
+            <a:off x="11185855" y="6473952"/>
+            <a:ext cx="640080" cy="274320"/>
+          </a:xfrm>
+          <a:prstGeom prst="rect">
+            <a:avLst/>
+          </a:prstGeom>
+          <a:noFill/>
+        </p:spPr>
+        <p:txBody>
+          <a:bodyPr wrap="square">
+            <a:spAutoFit/>
+          </a:bodyPr>
+          <a:lstStyle/>
+          <a:p>
+            <a:pPr algn="r"/>
+            <a:r>
+              <a:rPr sz="1100" b="0" i="0">
+                <a:solidFill>
+                  <a:srgbClr val="666666"/>
+                </a:solidFill>
+                <a:latin typeface="Calibri"/>
+              </a:rPr>
+              <a:t>22</a:t>
+            </a:r>
+          </a:p>
+        </p:txBody>
+      </p:sp>
+    </p:spTree>
+  </p:cSld>
+  <p:clrMapOvr>
+    <a:masterClrMapping/>
+  </p:clrMapOvr>
+</p:sld>
+</file>
+
+<file path=ppt/slides/slide23.xml><?xml version="1.0" encoding="utf-8"?>
+<p:sld xmlns:a="http://schemas.openxmlformats.org/drawingml/2006/main" xmlns:p="http://schemas.openxmlformats.org/presentationml/2006/main" xmlns:r="http://schemas.openxmlformats.org/officeDocument/2006/relationships">
+  <p:cSld>
+    <p:bg>
+      <p:bgPr>
+        <a:solidFill>
+          <a:srgbClr val="FFFFFF"/>
+        </a:solidFill>
+        <a:effectLst/>
+      </p:bgPr>
+    </p:bg>
+    <p:spTree>
+      <p:nvGrpSpPr>
+        <p:cNvPr id="1" name=""/>
+        <p:cNvGrpSpPr/>
+        <p:nvPr/>
+      </p:nvGrpSpPr>
+      <p:grpSpPr/>
+      <p:sp>
+        <p:nvSpPr>
+          <p:cNvPr id="2" name="Rectangle 1"/>
+          <p:cNvSpPr/>
+          <p:nvPr/>
+        </p:nvSpPr>
+        <p:spPr>
+          <a:xfrm>
+            <a:off x="0" y="0"/>
+            <a:ext cx="12191695" cy="164592"/>
+          </a:xfrm>
+          <a:prstGeom prst="rect">
+            <a:avLst/>
+          </a:prstGeom>
+          <a:solidFill>
+            <a:srgbClr val="269CCB"/>
+          </a:solidFill>
+          <a:ln>
+            <a:noFill/>
+          </a:ln>
+        </p:spPr>
+        <p:style>
+          <a:lnRef idx="1">
+            <a:schemeClr val="accent1"/>
+          </a:lnRef>
+          <a:fillRef idx="3">
+            <a:schemeClr val="accent1"/>
+          </a:fillRef>
+          <a:effectRef idx="2">
+            <a:schemeClr val="accent1"/>
+          </a:effectRef>
+          <a:fontRef idx="minor">
+            <a:schemeClr val="lt1"/>
+          </a:fontRef>
+        </p:style>
+        <p:txBody>
+          <a:bodyPr rtlCol="0" anchor="ctr"/>
+          <a:lstStyle/>
+          <a:p>
+            <a:pPr algn="ctr"/>
+          </a:p>
+        </p:txBody>
+      </p:sp>
+      <p:pic>
+        <p:nvPicPr>
+          <p:cNvPr id="3" name="Picture 2" descr="logo_uniajc_color.png"/>
+          <p:cNvPicPr>
+            <a:picLocks noChangeAspect="1"/>
+          </p:cNvPicPr>
+          <p:nvPr/>
+        </p:nvPicPr>
+        <p:blipFill>
+          <a:blip r:embed="rId2"/>
+          <a:stretch>
+            <a:fillRect/>
+          </a:stretch>
+        </p:blipFill>
+        <p:spPr>
+          <a:xfrm>
+            <a:off x="10271455" y="5998464"/>
+            <a:ext cx="1463040" cy="643233"/>
+          </a:xfrm>
+          <a:prstGeom prst="rect">
+            <a:avLst/>
+          </a:prstGeom>
+        </p:spPr>
+      </p:pic>
+      <p:sp>
+        <p:nvSpPr>
+          <p:cNvPr id="4" name="TextBox 3"/>
+          <p:cNvSpPr txBox="1"/>
+          <p:nvPr/>
+        </p:nvSpPr>
+        <p:spPr>
+          <a:xfrm>
+            <a:off x="457200" y="1737360"/>
+            <a:ext cx="11277295" cy="1097280"/>
+          </a:xfrm>
+          <a:prstGeom prst="rect">
+            <a:avLst/>
+          </a:prstGeom>
+          <a:noFill/>
+        </p:spPr>
+        <p:txBody>
+          <a:bodyPr wrap="square" anchor="ctr"/>
+          <a:lstStyle/>
+          <a:p>
+            <a:pPr algn="ctr"/>
+            <a:r>
+              <a:rPr sz="3400" b="1" i="0">
+                <a:solidFill>
+                  <a:srgbClr val="095292"/>
+                </a:solidFill>
+                <a:latin typeface="Calibri"/>
+              </a:rPr>
+              <a:t>Nos vemos en la sesión 3</a:t>
+            </a:r>
+          </a:p>
+        </p:txBody>
+      </p:sp>
+      <p:sp>
+        <p:nvSpPr>
+          <p:cNvPr id="5" name="TextBox 4"/>
+          <p:cNvSpPr txBox="1"/>
+          <p:nvPr/>
+        </p:nvSpPr>
+        <p:spPr>
+          <a:xfrm>
+            <a:off x="457200" y="3017520"/>
+            <a:ext cx="11277295" cy="1645920"/>
+          </a:xfrm>
+          <a:prstGeom prst="rect">
+            <a:avLst/>
+          </a:prstGeom>
+          <a:noFill/>
+        </p:spPr>
+        <p:txBody>
+          <a:bodyPr wrap="square">
+            <a:spAutoFit/>
+          </a:bodyPr>
+          <a:lstStyle/>
+          <a:p>
+            <a:pPr algn="ctr">
+              <a:spcAft>
+                <a:spcPts val="600"/>
+              </a:spcAft>
+            </a:pPr>
+            <a:r>
+              <a:rPr sz="1600" b="0" i="0">
+                <a:solidFill>
+                  <a:srgbClr val="333333"/>
+                </a:solidFill>
+                <a:latin typeface="Calibri"/>
+              </a:rPr>
+              <a:t>Historia y evolución de la Ingeniería · Clase 2</a:t>
+            </a:r>
+          </a:p>
+          <a:p>
+            <a:pPr algn="ctr">
+              <a:spcAft>
+                <a:spcPts val="600"/>
+              </a:spcAft>
+            </a:pPr>
+            <a:r>
+              <a:rPr sz="1600" b="0" i="0">
+                <a:solidFill>
+                  <a:srgbClr val="333333"/>
+                </a:solidFill>
+                <a:latin typeface="Calibri"/>
+              </a:rPr>
+              <a:t>FI300101 · UNIAJC · Ingeniería de Sistemas</a:t>
+            </a:r>
+          </a:p>
+        </p:txBody>
+      </p:sp>
+      <p:sp>
+        <p:nvSpPr>
+          <p:cNvPr id="6" name="TextBox 5"/>
+          <p:cNvSpPr txBox="1"/>
+          <p:nvPr/>
+        </p:nvSpPr>
+        <p:spPr>
+          <a:xfrm>
+            <a:off x="457200" y="4754880"/>
+            <a:ext cx="11277295" cy="640080"/>
+          </a:xfrm>
+          <a:prstGeom prst="rect">
+            <a:avLst/>
+          </a:prstGeom>
+          <a:noFill/>
+        </p:spPr>
+        <p:txBody>
+          <a:bodyPr wrap="square">
+            <a:spAutoFit/>
+          </a:bodyPr>
+          <a:lstStyle/>
+          <a:p>
+            <a:pPr algn="ctr"/>
+            <a:r>
+              <a:rPr sz="2000" b="1" i="0">
+                <a:solidFill>
+                  <a:srgbClr val="269CCB"/>
+                </a:solidFill>
+                <a:latin typeface="Calibri"/>
+              </a:rPr>
+              <a:t>La disciplina nació de un fracaso de organización, no de un invento</a:t>
             </a:r>
           </a:p>
         </p:txBody>

--- a/Introduccion a la Ingenieria/Clases/Clase 2 - Historia y evolucion de la Ingenieria/Presentacion.pptx
+++ b/Introduccion a la Ingenieria/Clases/Clase 2 - Historia y evolucion de la Ingenieria/Presentacion.pptx
@@ -27,7 +27,6 @@
     <p:sldId id="275" r:id="rId26"/>
     <p:sldId id="276" r:id="rId27"/>
     <p:sldId id="277" r:id="rId28"/>
-    <p:sldId id="278" r:id="rId29"/>
   </p:sldIdLst>
   <p:sldSz cx="12191695" cy="6858000" type="screen4x3"/>
   <p:notesSz cx="6858000" cy="9144000"/>
@@ -3699,38 +3698,6 @@
                 </a:solidFill>
                 <a:latin typeface="Calibri"/>
               </a:rPr>
-              <a:t>–   Esa intuición es la que hay que romper hoy, porque de ella se deriva una creencia más dañina: que basta con aprender la herramienta nueva.</a:t>
-            </a:r>
-          </a:p>
-          <a:p>
-            <a:pPr>
-              <a:spcAft>
-                <a:spcPts val="800"/>
-              </a:spcAft>
-            </a:pPr>
-            <a:r>
-              <a:rPr sz="2000" b="0" i="0">
-                <a:solidFill>
-                  <a:srgbClr val="333333"/>
-                </a:solidFill>
-                <a:latin typeface="Calibri"/>
-              </a:rPr>
-              <a:t>–   Los primeros diez minutos, mientras se conectan, sirven para recoger esas respuestas en el muro.</a:t>
-            </a:r>
-          </a:p>
-          <a:p>
-            <a:pPr>
-              <a:spcAft>
-                <a:spcPts val="800"/>
-              </a:spcAft>
-            </a:pPr>
-            <a:r>
-              <a:rPr sz="2000" b="0" i="0">
-                <a:solidFill>
-                  <a:srgbClr val="333333"/>
-                </a:solidFill>
-                <a:latin typeface="Calibri"/>
-              </a:rPr>
               <a:t>–   No hay que corregir ninguna.</a:t>
             </a:r>
           </a:p>
@@ -3983,7 +3950,7 @@
                 </a:solidFill>
                 <a:latin typeface="Calibri"/>
               </a:rPr>
-              <a:t>–   Hay una diferencia grande entre contar la historia de la informática y contar la historia de la ingeniería de sistemas.</a:t>
+              <a:t>–   La primera es una historia de máquinas: válvulas, transistores, circuitos integrados, microprocesadores.</a:t>
             </a:r>
           </a:p>
           <a:p>
@@ -3999,7 +3966,7 @@
                 </a:solidFill>
                 <a:latin typeface="Calibri"/>
               </a:rPr>
-              <a:t>–   La primera es una historia de máquinas: válvulas, transistores, circuitos integrados, microprocesadores.</a:t>
+              <a:t>–   Fortran (1957) y COBOL (1959) atacan exactamente ese problema: permitir decirle algo a la máquina sin hablar su idioma.</a:t>
             </a:r>
           </a:p>
           <a:p>
@@ -4015,7 +3982,7 @@
                 </a:solidFill>
                 <a:latin typeface="Calibri"/>
               </a:rPr>
-              <a:t>–   Es la que el estudiante espera y es la menos útil, porque sugiere que el progreso viene del hardware.</a:t>
+              <a:t>–   En los años sesenta pasa algo que cambia la naturaleza del problema: el hardware se abarata y se vuelve más capaz, y entonces se vuelven pensables sistemas que antes no lo eran.</a:t>
             </a:r>
           </a:p>
           <a:p>
@@ -4031,89 +3998,7 @@
                 </a:solidFill>
                 <a:latin typeface="Calibri"/>
               </a:rPr>
-              <a:t>–   La segunda es una historia de </a:t>
-            </a:r>
-            <a:r>
-              <a:rPr sz="2000" b="1" i="0">
-                <a:solidFill>
-                  <a:srgbClr val="333333"/>
-                </a:solidFill>
-                <a:latin typeface="Calibri"/>
-              </a:rPr>
-              <a:t>fracasos de organización</a:t>
-            </a:r>
-            <a:r>
-              <a:rPr sz="2000" b="0" i="0">
-                <a:solidFill>
-                  <a:srgbClr val="333333"/>
-                </a:solidFill>
-                <a:latin typeface="Calibri"/>
-              </a:rPr>
-              <a:t>, y es la que explica por qué existe la carrera que el estudiante está empezando.</a:t>
-            </a:r>
-          </a:p>
-          <a:p>
-            <a:pPr>
-              <a:spcAft>
-                <a:spcPts val="800"/>
-              </a:spcAft>
-            </a:pPr>
-            <a:r>
-              <a:rPr sz="2000" b="0" i="0">
-                <a:solidFill>
-                  <a:srgbClr val="333333"/>
-                </a:solidFill>
-                <a:latin typeface="Calibri"/>
-              </a:rPr>
-              <a:t>–   En los años cuarenta y cincuenta el cuello de botella era la máquina.</a:t>
-            </a:r>
-          </a:p>
-          <a:p>
-            <a:pPr>
-              <a:spcAft>
-                <a:spcPts val="800"/>
-              </a:spcAft>
-            </a:pPr>
-            <a:r>
-              <a:rPr sz="2000" b="0" i="0">
-                <a:solidFill>
-                  <a:srgbClr val="333333"/>
-                </a:solidFill>
-                <a:latin typeface="Calibri"/>
-              </a:rPr>
-              <a:t>–   Programar el ENIAC significaba reconfigurar cables físicamente; escribir en lenguaje de máquina era lento porque la máquina era lo escaso y lo caro.</a:t>
-            </a:r>
-          </a:p>
-          <a:p>
-            <a:pPr>
-              <a:spcAft>
-                <a:spcPts val="800"/>
-              </a:spcAft>
-            </a:pPr>
-            <a:r>
-              <a:rPr sz="2000" b="0" i="0">
-                <a:solidFill>
-                  <a:srgbClr val="333333"/>
-                </a:solidFill>
-                <a:latin typeface="Calibri"/>
-              </a:rPr>
-              <a:t>–   Fortran (1957) y COBOL (1959) atacan exactamente ese problema: permitir decirle algo a la máquina sin hablar su idioma.</a:t>
-            </a:r>
-          </a:p>
-          <a:p>
-            <a:pPr>
-              <a:spcAft>
-                <a:spcPts val="800"/>
-              </a:spcAft>
-            </a:pPr>
-            <a:r>
-              <a:rPr sz="2000" b="0" i="0">
-                <a:solidFill>
-                  <a:srgbClr val="333333"/>
-                </a:solidFill>
-                <a:latin typeface="Calibri"/>
-              </a:rPr>
-              <a:t>–   Hasta aquí el trabajo lo hace una persona o un puñado de personas, y el método no importa mucho porque el problema cabe en una cabeza.</a:t>
+              <a:t>–   El sistema de reservas aéreas SABRE, el software de navegación del programa Apollo, el sistema operativo OS/360 de IBM.</a:t>
             </a:r>
           </a:p>
         </p:txBody>
@@ -4333,73 +4218,7 @@
                 </a:solidFill>
                 <a:latin typeface="Calibri"/>
               </a:rPr>
-              <a:t>–   En los años sesenta pasa algo que cambia la naturaleza del problema: el hardware se abarata y se vuelve más capaz, y entonces se vuelven pensables sistemas que antes no lo eran.</a:t>
-            </a:r>
-          </a:p>
-          <a:p>
-            <a:pPr>
-              <a:spcAft>
-                <a:spcPts val="800"/>
-              </a:spcAft>
-            </a:pPr>
-            <a:r>
-              <a:rPr sz="2000" b="0" i="0">
-                <a:solidFill>
-                  <a:srgbClr val="333333"/>
-                </a:solidFill>
-                <a:latin typeface="Calibri"/>
-              </a:rPr>
-              <a:t>–   El sistema de reservas aéreas SABRE, el software de navegación del programa Apollo, el sistema operativo OS/360 de IBM.</a:t>
-            </a:r>
-          </a:p>
-          <a:p>
-            <a:pPr>
-              <a:spcAft>
-                <a:spcPts val="800"/>
-              </a:spcAft>
-            </a:pPr>
-            <a:r>
-              <a:rPr sz="2000" b="0" i="0">
-                <a:solidFill>
-                  <a:srgbClr val="333333"/>
-                </a:solidFill>
-                <a:latin typeface="Calibri"/>
-              </a:rPr>
               <a:t>–   Son proyectos de cientos y hasta miles de personas y de varios años.</a:t>
-            </a:r>
-          </a:p>
-          <a:p>
-            <a:pPr>
-              <a:spcAft>
-                <a:spcPts val="800"/>
-              </a:spcAft>
-            </a:pPr>
-            <a:r>
-              <a:rPr sz="2000" b="0" i="0">
-                <a:solidFill>
-                  <a:srgbClr val="333333"/>
-                </a:solidFill>
-                <a:latin typeface="Calibri"/>
-              </a:rPr>
-              <a:t>–   Y fracasan de forma espectacular en plazo y en costo, no porque las máquinas fueran lentas, sino porque </a:t>
-            </a:r>
-            <a:r>
-              <a:rPr sz="2000" b="1" i="0">
-                <a:solidFill>
-                  <a:srgbClr val="333333"/>
-                </a:solidFill>
-                <a:latin typeface="Calibri"/>
-              </a:rPr>
-              <a:t>nadie sabía cómo coordinar a mil personas construyendo una sola cosa que nadie puede ver ni tocar</a:t>
-            </a:r>
-            <a:r>
-              <a:rPr sz="2000" b="0" i="0">
-                <a:solidFill>
-                  <a:srgbClr val="333333"/>
-                </a:solidFill>
-                <a:latin typeface="Calibri"/>
-              </a:rPr>
-              <a:t>.</a:t>
             </a:r>
           </a:p>
           <a:p>
@@ -4987,22 +4806,6 @@
                 </a:solidFill>
                 <a:latin typeface="Calibri"/>
               </a:rPr>
-              <a:t>–   La industria se quedó con el dibujo y tiró la advertencia.</a:t>
-            </a:r>
-          </a:p>
-          <a:p>
-            <a:pPr>
-              <a:spcAft>
-                <a:spcPts val="800"/>
-              </a:spcAft>
-            </a:pPr>
-            <a:r>
-              <a:rPr sz="2000" b="0" i="0">
-                <a:solidFill>
-                  <a:srgbClr val="333333"/>
-                </a:solidFill>
-                <a:latin typeface="Calibri"/>
-              </a:rPr>
               <a:t>–   La lección para el estudiante es doble: sobre el ciclo de vida (que se ve en la sesión 7) y sobre cómo se deforman las ideas cuando se citan de segunda mano. 1975 es Brooks y «The Mythical Man-Month».</a:t>
             </a:r>
           </a:p>
@@ -5408,22 +5211,6 @@
               <a:t>.</a:t>
             </a:r>
           </a:p>
-          <a:p>
-            <a:pPr>
-              <a:spcAft>
-                <a:spcPts val="800"/>
-              </a:spcAft>
-            </a:pPr>
-            <a:r>
-              <a:rPr sz="2000" b="0" i="0">
-                <a:solidFill>
-                  <a:srgbClr val="333333"/>
-                </a:solidFill>
-                <a:latin typeface="Calibri"/>
-              </a:rPr>
-              <a:t>–   Esa pregunta es el hilo de las Clases 4, 5 y 13.</a:t>
-            </a:r>
-          </a:p>
         </p:txBody>
       </p:sp>
       <p:sp>
@@ -5657,39 +5444,7 @@
                 </a:solidFill>
                 <a:latin typeface="Calibri"/>
               </a:rPr>
-              <a:t>–   Las tres primeras se pueden buscar; la cuarta exige pensar, y por eso es la que más pesa en la rúbrica.</a:t>
-            </a:r>
-          </a:p>
-          <a:p>
-            <a:pPr>
-              <a:spcAft>
-                <a:spcPts val="800"/>
-              </a:spcAft>
-            </a:pPr>
-            <a:r>
-              <a:rPr sz="2000" b="0" i="0">
-                <a:solidFill>
-                  <a:srgbClr val="333333"/>
-                </a:solidFill>
-                <a:latin typeface="Calibri"/>
-              </a:rPr>
               <a:t>–   Un equipo puede escribir «1975: Brooks dijo que agregar gente atrasa el proyecto» y estar en lo correcto sin haber entendido nada.</a:t>
-            </a:r>
-          </a:p>
-          <a:p>
-            <a:pPr>
-              <a:spcAft>
-                <a:spcPts val="800"/>
-              </a:spcAft>
-            </a:pPr>
-            <a:r>
-              <a:rPr sz="2000" b="0" i="0">
-                <a:solidFill>
-                  <a:srgbClr val="333333"/>
-                </a:solidFill>
-                <a:latin typeface="Calibri"/>
-              </a:rPr>
-              <a:t>–   La cuarta pregunta obliga a decir algo como «sigue vivo porque cuando nuestro equipo se atrasó en el taller de la sesión anterior, la reacción natural fue pedir ayuda a otro equipo, y eso nos costó veinte minutos de explicar el contexto».</a:t>
             </a:r>
           </a:p>
           <a:p>
@@ -5959,72 +5714,6 @@
                 </a:solidFill>
                 <a:latin typeface="Calibri"/>
               </a:rPr>
-              <a:t>–   Sobre la tercera aclaración conviene ser honesto en el aula y no inflarla.</a:t>
-            </a:r>
-          </a:p>
-          <a:p>
-            <a:pPr>
-              <a:spcAft>
-                <a:spcPts val="800"/>
-              </a:spcAft>
-            </a:pPr>
-            <a:r>
-              <a:rPr sz="2000" b="0" i="0">
-                <a:solidFill>
-                  <a:srgbClr val="333333"/>
-                </a:solidFill>
-                <a:latin typeface="Calibri"/>
-              </a:rPr>
-              <a:t>–   Los informes de la industria sobre fracaso de proyectos usan definiciones distintas de «fracaso» y sus cifras varían mucho entre ediciones y entre fuentes.</a:t>
-            </a:r>
-          </a:p>
-          <a:p>
-            <a:pPr>
-              <a:spcAft>
-                <a:spcPts val="800"/>
-              </a:spcAft>
-            </a:pPr>
-            <a:r>
-              <a:rPr sz="2000" b="0" i="0">
-                <a:solidFill>
-                  <a:srgbClr val="333333"/>
-                </a:solidFill>
-                <a:latin typeface="Calibri"/>
-              </a:rPr>
-              <a:t>–   Lo que sí se puede afirmar sin exagerar es que </a:t>
-            </a:r>
-            <a:r>
-              <a:rPr sz="2000" b="1" i="0">
-                <a:solidFill>
-                  <a:srgbClr val="333333"/>
-                </a:solidFill>
-                <a:latin typeface="Calibri"/>
-              </a:rPr>
-              <a:t>el fracaso por plazo, costo y alcance sigue siendo un problema reportado sistemáticamente</a:t>
-            </a:r>
-            <a:r>
-              <a:rPr sz="2000" b="0" i="0">
-                <a:solidFill>
-                  <a:srgbClr val="333333"/>
-                </a:solidFill>
-                <a:latin typeface="Calibri"/>
-              </a:rPr>
-              <a:t>, y que ninguna metodología ha declarado el problema cerrado.</a:t>
-            </a:r>
-          </a:p>
-          <a:p>
-            <a:pPr>
-              <a:spcAft>
-                <a:spcPts val="800"/>
-              </a:spcAft>
-            </a:pPr>
-            <a:r>
-              <a:rPr sz="2000" b="0" i="0">
-                <a:solidFill>
-                  <a:srgbClr val="333333"/>
-                </a:solidFill>
-                <a:latin typeface="Calibri"/>
-              </a:rPr>
               <a:t>–   Si un equipo trae una cifra de internet, se le pide la fuente y el año: es el primer ejercicio de rigor bibliográfico del curso.</a:t>
             </a:r>
           </a:p>
@@ -6206,7 +5895,7 @@
                 </a:solidFill>
                 <a:latin typeface="Calibri"/>
               </a:rPr>
-              <a:t>El taller, la exposición y por qué las cinco líneas de tiempo se suman (1/2)</a:t>
+              <a:t>El taller, la exposición y por qué las cinco líneas de tiempo se suman</a:t>
             </a:r>
           </a:p>
         </p:txBody>
@@ -6245,7 +5934,7 @@
                 </a:solidFill>
                 <a:latin typeface="Calibri"/>
               </a:rPr>
-              <a:t>–   Cada equipo recibe un periodo distinto y arma su tramo de línea de tiempo.</a:t>
+              <a:t>–   La consecuencia es que las cinco exposiciones, puestas en orden histórico, producen la línea de tiempo completa de la disciplina, que es justo el trabajo independiente de la semana.</a:t>
             </a:r>
           </a:p>
           <a:p>
@@ -6261,7 +5950,7 @@
                 </a:solidFill>
                 <a:latin typeface="Calibri"/>
               </a:rPr>
-              <a:t>–   La consecuencia es que las cinco exposiciones, puestas en orden histórico, producen la línea de tiempo completa de la disciplina, que es justo el trabajo independiente de la semana.</a:t>
+              <a:t>–   Esto hay que decírselo al grupo antes de empezar: no están haciendo cinco trabajos que compiten, están armando un solo mapa por pedazos, y el pedazo de cada uno le sirve a los otros cuatro.</a:t>
             </a:r>
           </a:p>
           <a:p>
@@ -6277,7 +5966,7 @@
                 </a:solidFill>
                 <a:latin typeface="Calibri"/>
               </a:rPr>
-              <a:t>–   Esto hay que decírselo al grupo antes de empezar: no están haciendo cinco trabajos que compiten, están armando un solo mapa por pedazos, y el pedazo de cada uno le sirve a los otros cuatro.</a:t>
+              <a:t>–   La tentación del equipo será meter diez fechas para verse completo, y el resultado es una línea de tiempo que nadie puede exponer en tres minutos.</a:t>
             </a:r>
           </a:p>
           <a:p>
@@ -6293,25 +5982,7 @@
                 </a:solidFill>
                 <a:latin typeface="Calibri"/>
               </a:rPr>
-              <a:t>–   Por eso las exposiciones van </a:t>
-            </a:r>
-            <a:r>
-              <a:rPr sz="2000" b="1" i="0">
-                <a:solidFill>
-                  <a:srgbClr val="333333"/>
-                </a:solidFill>
-                <a:latin typeface="Calibri"/>
-              </a:rPr>
-              <a:t>en orden histórico y no por sorteo</a:t>
-            </a:r>
-            <a:r>
-              <a:rPr sz="2000" b="0" i="0">
-                <a:solidFill>
-                  <a:srgbClr val="333333"/>
-                </a:solidFill>
-                <a:latin typeface="Calibri"/>
-              </a:rPr>
-              <a:t>: el equipo del periodo 1945–1957 abre y el de 2006–hoy cierra.</a:t>
+              <a:t>–   Cuatro hitos bien leídos, con su «qué sigue vivo», valen mucho más y es lo que la rúbrica premia.</a:t>
             </a:r>
           </a:p>
         </p:txBody>
@@ -6386,7 +6057,7 @@
         <p:spPr>
           <a:xfrm>
             <a:off x="0" y="0"/>
-            <a:ext cx="12191695" cy="960120"/>
+            <a:ext cx="12191695" cy="1170432"/>
           </a:xfrm>
           <a:prstGeom prst="rect">
             <a:avLst/>
@@ -6428,7 +6099,7 @@
         </p:nvSpPr>
         <p:spPr>
           <a:xfrm>
-            <a:off x="0" y="960120"/>
+            <a:off x="0" y="1170432"/>
             <a:ext cx="12191695" cy="41148"/>
           </a:xfrm>
           <a:prstGeom prst="rect">
@@ -6472,7 +6143,7 @@
         <p:spPr>
           <a:xfrm>
             <a:off x="457200" y="164592"/>
-            <a:ext cx="11277295" cy="502920"/>
+            <a:ext cx="11277295" cy="384048"/>
           </a:xfrm>
           <a:prstGeom prst="rect">
             <a:avLst/>
@@ -6492,7 +6163,7 @@
                 </a:solidFill>
                 <a:latin typeface="Calibri"/>
               </a:rPr>
-              <a:t>El taller, la exposición y por qué las cinco líneas de tiempo se suman (2/2)</a:t>
+              <a:t>Taller de hoy: Línea de tiempo del periodo</a:t>
             </a:r>
           </a:p>
         </p:txBody>
@@ -6505,8 +6176,8 @@
         </p:nvSpPr>
         <p:spPr>
           <a:xfrm>
-            <a:off x="457200" y="1170432"/>
-            <a:ext cx="11277295" cy="5230368"/>
+            <a:off x="457200" y="566928"/>
+            <a:ext cx="11277295" cy="411480"/>
           </a:xfrm>
           <a:prstGeom prst="rect">
             <a:avLst/>
@@ -6519,90 +6190,909 @@
           </a:bodyPr>
           <a:lstStyle/>
           <a:p>
-            <a:pPr>
-              <a:spcAft>
-                <a:spcPts val="800"/>
-              </a:spcAft>
-            </a:pPr>
-            <a:r>
-              <a:rPr sz="2000" b="0" i="0">
-                <a:solidFill>
-                  <a:srgbClr val="333333"/>
-                </a:solidFill>
-                <a:latin typeface="Calibri"/>
-              </a:rPr>
-              <a:t>–   Cuesta lo mismo y el grupo se lleva una narración en vez de cinco fragmentos.</a:t>
-            </a:r>
-          </a:p>
-          <a:p>
-            <a:pPr>
-              <a:spcAft>
-                <a:spcPts val="800"/>
-              </a:spcAft>
-            </a:pPr>
-            <a:r>
-              <a:rPr sz="2000" b="0" i="0">
-                <a:solidFill>
-                  <a:srgbClr val="333333"/>
-                </a:solidFill>
-                <a:latin typeface="Calibri"/>
-              </a:rPr>
-              <a:t>–   El docente escribe el orden en el chat antes de que empiecen.</a:t>
-            </a:r>
-          </a:p>
-          <a:p>
-            <a:pPr>
-              <a:spcAft>
-                <a:spcPts val="800"/>
-              </a:spcAft>
-            </a:pPr>
-            <a:r>
-              <a:rPr sz="2000" b="0" i="0">
-                <a:solidFill>
-                  <a:srgbClr val="333333"/>
-                </a:solidFill>
-                <a:latin typeface="Calibri"/>
-              </a:rPr>
-              <a:t>–   El taller pide cuatro hitos por periodo, no más.</a:t>
-            </a:r>
-          </a:p>
-          <a:p>
-            <a:pPr>
-              <a:spcAft>
-                <a:spcPts val="800"/>
-              </a:spcAft>
-            </a:pPr>
-            <a:r>
-              <a:rPr sz="2000" b="0" i="0">
-                <a:solidFill>
-                  <a:srgbClr val="333333"/>
-                </a:solidFill>
-                <a:latin typeface="Calibri"/>
-              </a:rPr>
-              <a:t>–   La tentación del equipo será meter diez fechas para verse completo, y el resultado es una línea de tiempo que nadie puede exponer en tres minutos.</a:t>
-            </a:r>
-          </a:p>
-          <a:p>
-            <a:pPr>
-              <a:spcAft>
-                <a:spcPts val="800"/>
-              </a:spcAft>
-            </a:pPr>
-            <a:r>
-              <a:rPr sz="2000" b="0" i="0">
-                <a:solidFill>
-                  <a:srgbClr val="333333"/>
-                </a:solidFill>
-                <a:latin typeface="Calibri"/>
-              </a:rPr>
-              <a:t>–   Cuatro hitos bien leídos, con su «qué sigue vivo», valen mucho más y es lo que la rúbrica premia.</a:t>
-            </a:r>
-          </a:p>
-        </p:txBody>
-      </p:sp>
-      <p:sp>
-        <p:nvSpPr>
-          <p:cNvPr id="6" name="TextBox 5"/>
+            <a:r>
+              <a:rPr sz="1400" b="0" i="0">
+                <a:solidFill>
+                  <a:srgbClr val="B8D8EE"/>
+                </a:solidFill>
+                <a:latin typeface="Calibri"/>
+              </a:rPr>
+              <a:t>17 min en equipos · un periodo por equipo, asignado en orden histórico · línea de tiempo de 4 hitos en draw.io</a:t>
+            </a:r>
+          </a:p>
+        </p:txBody>
+      </p:sp>
+      <p:sp>
+        <p:nvSpPr>
+          <p:cNvPr id="6" name="Rounded Rectangle 5"/>
+          <p:cNvSpPr/>
+          <p:nvPr/>
+        </p:nvSpPr>
+        <p:spPr>
+          <a:xfrm>
+            <a:off x="457200" y="1472184"/>
+            <a:ext cx="11277295" cy="566928"/>
+          </a:xfrm>
+          <a:prstGeom prst="roundRect">
+            <a:avLst>
+              <a:gd name="adj" fmla="val 12000"/>
+            </a:avLst>
+          </a:prstGeom>
+          <a:solidFill>
+            <a:srgbClr val="F2F2F2"/>
+          </a:solidFill>
+          <a:ln>
+            <a:noFill/>
+          </a:ln>
+        </p:spPr>
+        <p:style>
+          <a:lnRef idx="1">
+            <a:schemeClr val="accent1"/>
+          </a:lnRef>
+          <a:fillRef idx="3">
+            <a:schemeClr val="accent1"/>
+          </a:fillRef>
+          <a:effectRef idx="2">
+            <a:schemeClr val="accent1"/>
+          </a:effectRef>
+          <a:fontRef idx="minor">
+            <a:schemeClr val="lt1"/>
+          </a:fontRef>
+        </p:style>
+        <p:txBody>
+          <a:bodyPr rtlCol="0" anchor="ctr"/>
+          <a:lstStyle/>
+          <a:p>
+            <a:pPr algn="ctr"/>
+          </a:p>
+        </p:txBody>
+      </p:sp>
+      <p:sp>
+        <p:nvSpPr>
+          <p:cNvPr id="7" name="Rectangle 6"/>
+          <p:cNvSpPr/>
+          <p:nvPr/>
+        </p:nvSpPr>
+        <p:spPr>
+          <a:xfrm>
+            <a:off x="640080" y="1618487"/>
+            <a:ext cx="274320" cy="274320"/>
+          </a:xfrm>
+          <a:prstGeom prst="rect">
+            <a:avLst/>
+          </a:prstGeom>
+          <a:solidFill>
+            <a:srgbClr val="FFFFFF"/>
+          </a:solidFill>
+          <a:ln>
+            <a:solidFill>
+              <a:srgbClr val="333333"/>
+            </a:solidFill>
+          </a:ln>
+        </p:spPr>
+        <p:style>
+          <a:lnRef idx="1">
+            <a:schemeClr val="accent1"/>
+          </a:lnRef>
+          <a:fillRef idx="3">
+            <a:schemeClr val="accent1"/>
+          </a:fillRef>
+          <a:effectRef idx="2">
+            <a:schemeClr val="accent1"/>
+          </a:effectRef>
+          <a:fontRef idx="minor">
+            <a:schemeClr val="lt1"/>
+          </a:fontRef>
+        </p:style>
+        <p:txBody>
+          <a:bodyPr rtlCol="0" anchor="ctr"/>
+          <a:lstStyle/>
+          <a:p>
+            <a:pPr algn="ctr"/>
+          </a:p>
+        </p:txBody>
+      </p:sp>
+      <p:sp>
+        <p:nvSpPr>
+          <p:cNvPr id="8" name="Rectangle 7"/>
+          <p:cNvSpPr/>
+          <p:nvPr/>
+        </p:nvSpPr>
+        <p:spPr>
+          <a:xfrm>
+            <a:off x="640080" y="1618487"/>
+            <a:ext cx="73152" cy="274320"/>
+          </a:xfrm>
+          <a:prstGeom prst="rect">
+            <a:avLst/>
+          </a:prstGeom>
+          <a:solidFill>
+            <a:srgbClr val="269CCB"/>
+          </a:solidFill>
+          <a:ln>
+            <a:noFill/>
+          </a:ln>
+        </p:spPr>
+        <p:style>
+          <a:lnRef idx="1">
+            <a:schemeClr val="accent1"/>
+          </a:lnRef>
+          <a:fillRef idx="3">
+            <a:schemeClr val="accent1"/>
+          </a:fillRef>
+          <a:effectRef idx="2">
+            <a:schemeClr val="accent1"/>
+          </a:effectRef>
+          <a:fontRef idx="minor">
+            <a:schemeClr val="lt1"/>
+          </a:fontRef>
+        </p:style>
+        <p:txBody>
+          <a:bodyPr rtlCol="0" anchor="ctr"/>
+          <a:lstStyle/>
+          <a:p>
+            <a:pPr algn="ctr"/>
+          </a:p>
+        </p:txBody>
+      </p:sp>
+      <p:sp>
+        <p:nvSpPr>
+          <p:cNvPr id="9" name="TextBox 8"/>
+          <p:cNvSpPr txBox="1"/>
+          <p:nvPr/>
+        </p:nvSpPr>
+        <p:spPr>
+          <a:xfrm>
+            <a:off x="1097280" y="1563624"/>
+            <a:ext cx="10362895" cy="402336"/>
+          </a:xfrm>
+          <a:prstGeom prst="rect">
+            <a:avLst/>
+          </a:prstGeom>
+          <a:noFill/>
+        </p:spPr>
+        <p:txBody>
+          <a:bodyPr wrap="square" anchor="ctr"/>
+          <a:lstStyle/>
+          <a:p>
+            <a:r>
+              <a:rPr sz="1500" b="1" i="0">
+                <a:solidFill>
+                  <a:srgbClr val="333333"/>
+                </a:solidFill>
+                <a:latin typeface="Calibri"/>
+              </a:rPr>
+              <a:t>LOS CUATRO HITOS</a:t>
+            </a:r>
+            <a:r>
+              <a:rPr sz="1500" b="0" i="0">
+                <a:solidFill>
+                  <a:srgbClr val="333333"/>
+                </a:solidFill>
+                <a:latin typeface="Calibri"/>
+              </a:rPr>
+              <a:t> — Cuatro hechos de su periodo, con año, puestos en orden en la línea de tiempo.</a:t>
+            </a:r>
+          </a:p>
+        </p:txBody>
+      </p:sp>
+      <p:sp>
+        <p:nvSpPr>
+          <p:cNvPr id="10" name="Rounded Rectangle 9"/>
+          <p:cNvSpPr/>
+          <p:nvPr/>
+        </p:nvSpPr>
+        <p:spPr>
+          <a:xfrm>
+            <a:off x="457200" y="2148839"/>
+            <a:ext cx="11277295" cy="566928"/>
+          </a:xfrm>
+          <a:prstGeom prst="roundRect">
+            <a:avLst>
+              <a:gd name="adj" fmla="val 12000"/>
+            </a:avLst>
+          </a:prstGeom>
+          <a:solidFill>
+            <a:srgbClr val="F2F2F2"/>
+          </a:solidFill>
+          <a:ln>
+            <a:noFill/>
+          </a:ln>
+        </p:spPr>
+        <p:style>
+          <a:lnRef idx="1">
+            <a:schemeClr val="accent1"/>
+          </a:lnRef>
+          <a:fillRef idx="3">
+            <a:schemeClr val="accent1"/>
+          </a:fillRef>
+          <a:effectRef idx="2">
+            <a:schemeClr val="accent1"/>
+          </a:effectRef>
+          <a:fontRef idx="minor">
+            <a:schemeClr val="lt1"/>
+          </a:fontRef>
+        </p:style>
+        <p:txBody>
+          <a:bodyPr rtlCol="0" anchor="ctr"/>
+          <a:lstStyle/>
+          <a:p>
+            <a:pPr algn="ctr"/>
+          </a:p>
+        </p:txBody>
+      </p:sp>
+      <p:sp>
+        <p:nvSpPr>
+          <p:cNvPr id="11" name="Rectangle 10"/>
+          <p:cNvSpPr/>
+          <p:nvPr/>
+        </p:nvSpPr>
+        <p:spPr>
+          <a:xfrm>
+            <a:off x="640080" y="2295144"/>
+            <a:ext cx="274320" cy="274320"/>
+          </a:xfrm>
+          <a:prstGeom prst="rect">
+            <a:avLst/>
+          </a:prstGeom>
+          <a:solidFill>
+            <a:srgbClr val="FFFFFF"/>
+          </a:solidFill>
+          <a:ln>
+            <a:solidFill>
+              <a:srgbClr val="333333"/>
+            </a:solidFill>
+          </a:ln>
+        </p:spPr>
+        <p:style>
+          <a:lnRef idx="1">
+            <a:schemeClr val="accent1"/>
+          </a:lnRef>
+          <a:fillRef idx="3">
+            <a:schemeClr val="accent1"/>
+          </a:fillRef>
+          <a:effectRef idx="2">
+            <a:schemeClr val="accent1"/>
+          </a:effectRef>
+          <a:fontRef idx="minor">
+            <a:schemeClr val="lt1"/>
+          </a:fontRef>
+        </p:style>
+        <p:txBody>
+          <a:bodyPr rtlCol="0" anchor="ctr"/>
+          <a:lstStyle/>
+          <a:p>
+            <a:pPr algn="ctr"/>
+          </a:p>
+        </p:txBody>
+      </p:sp>
+      <p:sp>
+        <p:nvSpPr>
+          <p:cNvPr id="12" name="Rectangle 11"/>
+          <p:cNvSpPr/>
+          <p:nvPr/>
+        </p:nvSpPr>
+        <p:spPr>
+          <a:xfrm>
+            <a:off x="640080" y="2295144"/>
+            <a:ext cx="73152" cy="274320"/>
+          </a:xfrm>
+          <a:prstGeom prst="rect">
+            <a:avLst/>
+          </a:prstGeom>
+          <a:solidFill>
+            <a:srgbClr val="269CCB"/>
+          </a:solidFill>
+          <a:ln>
+            <a:noFill/>
+          </a:ln>
+        </p:spPr>
+        <p:style>
+          <a:lnRef idx="1">
+            <a:schemeClr val="accent1"/>
+          </a:lnRef>
+          <a:fillRef idx="3">
+            <a:schemeClr val="accent1"/>
+          </a:fillRef>
+          <a:effectRef idx="2">
+            <a:schemeClr val="accent1"/>
+          </a:effectRef>
+          <a:fontRef idx="minor">
+            <a:schemeClr val="lt1"/>
+          </a:fontRef>
+        </p:style>
+        <p:txBody>
+          <a:bodyPr rtlCol="0" anchor="ctr"/>
+          <a:lstStyle/>
+          <a:p>
+            <a:pPr algn="ctr"/>
+          </a:p>
+        </p:txBody>
+      </p:sp>
+      <p:sp>
+        <p:nvSpPr>
+          <p:cNvPr id="13" name="TextBox 12"/>
+          <p:cNvSpPr txBox="1"/>
+          <p:nvPr/>
+        </p:nvSpPr>
+        <p:spPr>
+          <a:xfrm>
+            <a:off x="1097280" y="2240279"/>
+            <a:ext cx="10362895" cy="402336"/>
+          </a:xfrm>
+          <a:prstGeom prst="rect">
+            <a:avLst/>
+          </a:prstGeom>
+          <a:noFill/>
+        </p:spPr>
+        <p:txBody>
+          <a:bodyPr wrap="square" anchor="ctr"/>
+          <a:lstStyle/>
+          <a:p>
+            <a:r>
+              <a:rPr sz="1500" b="1" i="0">
+                <a:solidFill>
+                  <a:srgbClr val="333333"/>
+                </a:solidFill>
+                <a:latin typeface="Calibri"/>
+              </a:rPr>
+              <a:t>QUÉ DOLÍA ANTES</a:t>
+            </a:r>
+            <a:r>
+              <a:rPr sz="1500" b="0" i="0">
+                <a:solidFill>
+                  <a:srgbClr val="333333"/>
+                </a:solidFill>
+                <a:latin typeface="Calibri"/>
+              </a:rPr>
+              <a:t> — Para cada hito: el problema concreto que existía antes y a quién le pasaba.</a:t>
+            </a:r>
+          </a:p>
+        </p:txBody>
+      </p:sp>
+      <p:sp>
+        <p:nvSpPr>
+          <p:cNvPr id="14" name="Rounded Rectangle 13"/>
+          <p:cNvSpPr/>
+          <p:nvPr/>
+        </p:nvSpPr>
+        <p:spPr>
+          <a:xfrm>
+            <a:off x="457200" y="2825496"/>
+            <a:ext cx="11277295" cy="566928"/>
+          </a:xfrm>
+          <a:prstGeom prst="roundRect">
+            <a:avLst>
+              <a:gd name="adj" fmla="val 12000"/>
+            </a:avLst>
+          </a:prstGeom>
+          <a:solidFill>
+            <a:srgbClr val="F2F2F2"/>
+          </a:solidFill>
+          <a:ln>
+            <a:noFill/>
+          </a:ln>
+        </p:spPr>
+        <p:style>
+          <a:lnRef idx="1">
+            <a:schemeClr val="accent1"/>
+          </a:lnRef>
+          <a:fillRef idx="3">
+            <a:schemeClr val="accent1"/>
+          </a:fillRef>
+          <a:effectRef idx="2">
+            <a:schemeClr val="accent1"/>
+          </a:effectRef>
+          <a:fontRef idx="minor">
+            <a:schemeClr val="lt1"/>
+          </a:fontRef>
+        </p:style>
+        <p:txBody>
+          <a:bodyPr rtlCol="0" anchor="ctr"/>
+          <a:lstStyle/>
+          <a:p>
+            <a:pPr algn="ctr"/>
+          </a:p>
+        </p:txBody>
+      </p:sp>
+      <p:sp>
+        <p:nvSpPr>
+          <p:cNvPr id="15" name="Rectangle 14"/>
+          <p:cNvSpPr/>
+          <p:nvPr/>
+        </p:nvSpPr>
+        <p:spPr>
+          <a:xfrm>
+            <a:off x="640080" y="2971800"/>
+            <a:ext cx="274320" cy="274320"/>
+          </a:xfrm>
+          <a:prstGeom prst="rect">
+            <a:avLst/>
+          </a:prstGeom>
+          <a:solidFill>
+            <a:srgbClr val="FFFFFF"/>
+          </a:solidFill>
+          <a:ln>
+            <a:solidFill>
+              <a:srgbClr val="333333"/>
+            </a:solidFill>
+          </a:ln>
+        </p:spPr>
+        <p:style>
+          <a:lnRef idx="1">
+            <a:schemeClr val="accent1"/>
+          </a:lnRef>
+          <a:fillRef idx="3">
+            <a:schemeClr val="accent1"/>
+          </a:fillRef>
+          <a:effectRef idx="2">
+            <a:schemeClr val="accent1"/>
+          </a:effectRef>
+          <a:fontRef idx="minor">
+            <a:schemeClr val="lt1"/>
+          </a:fontRef>
+        </p:style>
+        <p:txBody>
+          <a:bodyPr rtlCol="0" anchor="ctr"/>
+          <a:lstStyle/>
+          <a:p>
+            <a:pPr algn="ctr"/>
+          </a:p>
+        </p:txBody>
+      </p:sp>
+      <p:sp>
+        <p:nvSpPr>
+          <p:cNvPr id="16" name="Rectangle 15"/>
+          <p:cNvSpPr/>
+          <p:nvPr/>
+        </p:nvSpPr>
+        <p:spPr>
+          <a:xfrm>
+            <a:off x="640080" y="2971800"/>
+            <a:ext cx="73152" cy="274320"/>
+          </a:xfrm>
+          <a:prstGeom prst="rect">
+            <a:avLst/>
+          </a:prstGeom>
+          <a:solidFill>
+            <a:srgbClr val="269CCB"/>
+          </a:solidFill>
+          <a:ln>
+            <a:noFill/>
+          </a:ln>
+        </p:spPr>
+        <p:style>
+          <a:lnRef idx="1">
+            <a:schemeClr val="accent1"/>
+          </a:lnRef>
+          <a:fillRef idx="3">
+            <a:schemeClr val="accent1"/>
+          </a:fillRef>
+          <a:effectRef idx="2">
+            <a:schemeClr val="accent1"/>
+          </a:effectRef>
+          <a:fontRef idx="minor">
+            <a:schemeClr val="lt1"/>
+          </a:fontRef>
+        </p:style>
+        <p:txBody>
+          <a:bodyPr rtlCol="0" anchor="ctr"/>
+          <a:lstStyle/>
+          <a:p>
+            <a:pPr algn="ctr"/>
+          </a:p>
+        </p:txBody>
+      </p:sp>
+      <p:sp>
+        <p:nvSpPr>
+          <p:cNvPr id="17" name="TextBox 16"/>
+          <p:cNvSpPr txBox="1"/>
+          <p:nvPr/>
+        </p:nvSpPr>
+        <p:spPr>
+          <a:xfrm>
+            <a:off x="1097280" y="2916936"/>
+            <a:ext cx="10362895" cy="402336"/>
+          </a:xfrm>
+          <a:prstGeom prst="rect">
+            <a:avLst/>
+          </a:prstGeom>
+          <a:noFill/>
+        </p:spPr>
+        <p:txBody>
+          <a:bodyPr wrap="square" anchor="ctr"/>
+          <a:lstStyle/>
+          <a:p>
+            <a:r>
+              <a:rPr sz="1500" b="1" i="0">
+                <a:solidFill>
+                  <a:srgbClr val="333333"/>
+                </a:solidFill>
+                <a:latin typeface="Calibri"/>
+              </a:rPr>
+              <a:t>QUÉ PROPUSO</a:t>
+            </a:r>
+            <a:r>
+              <a:rPr sz="1500" b="0" i="0">
+                <a:solidFill>
+                  <a:srgbClr val="333333"/>
+                </a:solidFill>
+                <a:latin typeface="Calibri"/>
+              </a:rPr>
+              <a:t> — Para cada hito: la idea, el método o la herramienta, en una frase que ustedes puedan explicar.</a:t>
+            </a:r>
+          </a:p>
+        </p:txBody>
+      </p:sp>
+      <p:sp>
+        <p:nvSpPr>
+          <p:cNvPr id="18" name="Rounded Rectangle 17"/>
+          <p:cNvSpPr/>
+          <p:nvPr/>
+        </p:nvSpPr>
+        <p:spPr>
+          <a:xfrm>
+            <a:off x="457200" y="3502152"/>
+            <a:ext cx="11277295" cy="566928"/>
+          </a:xfrm>
+          <a:prstGeom prst="roundRect">
+            <a:avLst>
+              <a:gd name="adj" fmla="val 12000"/>
+            </a:avLst>
+          </a:prstGeom>
+          <a:solidFill>
+            <a:srgbClr val="F2F2F2"/>
+          </a:solidFill>
+          <a:ln>
+            <a:noFill/>
+          </a:ln>
+        </p:spPr>
+        <p:style>
+          <a:lnRef idx="1">
+            <a:schemeClr val="accent1"/>
+          </a:lnRef>
+          <a:fillRef idx="3">
+            <a:schemeClr val="accent1"/>
+          </a:fillRef>
+          <a:effectRef idx="2">
+            <a:schemeClr val="accent1"/>
+          </a:effectRef>
+          <a:fontRef idx="minor">
+            <a:schemeClr val="lt1"/>
+          </a:fontRef>
+        </p:style>
+        <p:txBody>
+          <a:bodyPr rtlCol="0" anchor="ctr"/>
+          <a:lstStyle/>
+          <a:p>
+            <a:pPr algn="ctr"/>
+          </a:p>
+        </p:txBody>
+      </p:sp>
+      <p:sp>
+        <p:nvSpPr>
+          <p:cNvPr id="19" name="Rectangle 18"/>
+          <p:cNvSpPr/>
+          <p:nvPr/>
+        </p:nvSpPr>
+        <p:spPr>
+          <a:xfrm>
+            <a:off x="640080" y="3648456"/>
+            <a:ext cx="274320" cy="274320"/>
+          </a:xfrm>
+          <a:prstGeom prst="rect">
+            <a:avLst/>
+          </a:prstGeom>
+          <a:solidFill>
+            <a:srgbClr val="FFFFFF"/>
+          </a:solidFill>
+          <a:ln>
+            <a:solidFill>
+              <a:srgbClr val="333333"/>
+            </a:solidFill>
+          </a:ln>
+        </p:spPr>
+        <p:style>
+          <a:lnRef idx="1">
+            <a:schemeClr val="accent1"/>
+          </a:lnRef>
+          <a:fillRef idx="3">
+            <a:schemeClr val="accent1"/>
+          </a:fillRef>
+          <a:effectRef idx="2">
+            <a:schemeClr val="accent1"/>
+          </a:effectRef>
+          <a:fontRef idx="minor">
+            <a:schemeClr val="lt1"/>
+          </a:fontRef>
+        </p:style>
+        <p:txBody>
+          <a:bodyPr rtlCol="0" anchor="ctr"/>
+          <a:lstStyle/>
+          <a:p>
+            <a:pPr algn="ctr"/>
+          </a:p>
+        </p:txBody>
+      </p:sp>
+      <p:sp>
+        <p:nvSpPr>
+          <p:cNvPr id="20" name="Rectangle 19"/>
+          <p:cNvSpPr/>
+          <p:nvPr/>
+        </p:nvSpPr>
+        <p:spPr>
+          <a:xfrm>
+            <a:off x="640080" y="3648456"/>
+            <a:ext cx="73152" cy="274320"/>
+          </a:xfrm>
+          <a:prstGeom prst="rect">
+            <a:avLst/>
+          </a:prstGeom>
+          <a:solidFill>
+            <a:srgbClr val="269CCB"/>
+          </a:solidFill>
+          <a:ln>
+            <a:noFill/>
+          </a:ln>
+        </p:spPr>
+        <p:style>
+          <a:lnRef idx="1">
+            <a:schemeClr val="accent1"/>
+          </a:lnRef>
+          <a:fillRef idx="3">
+            <a:schemeClr val="accent1"/>
+          </a:fillRef>
+          <a:effectRef idx="2">
+            <a:schemeClr val="accent1"/>
+          </a:effectRef>
+          <a:fontRef idx="minor">
+            <a:schemeClr val="lt1"/>
+          </a:fontRef>
+        </p:style>
+        <p:txBody>
+          <a:bodyPr rtlCol="0" anchor="ctr"/>
+          <a:lstStyle/>
+          <a:p>
+            <a:pPr algn="ctr"/>
+          </a:p>
+        </p:txBody>
+      </p:sp>
+      <p:sp>
+        <p:nvSpPr>
+          <p:cNvPr id="21" name="TextBox 20"/>
+          <p:cNvSpPr txBox="1"/>
+          <p:nvPr/>
+        </p:nvSpPr>
+        <p:spPr>
+          <a:xfrm>
+            <a:off x="1097280" y="3593592"/>
+            <a:ext cx="10362895" cy="402336"/>
+          </a:xfrm>
+          <a:prstGeom prst="rect">
+            <a:avLst/>
+          </a:prstGeom>
+          <a:noFill/>
+        </p:spPr>
+        <p:txBody>
+          <a:bodyPr wrap="square" anchor="ctr"/>
+          <a:lstStyle/>
+          <a:p>
+            <a:r>
+              <a:rPr sz="1500" b="1" i="0">
+                <a:solidFill>
+                  <a:srgbClr val="333333"/>
+                </a:solidFill>
+                <a:latin typeface="Calibri"/>
+              </a:rPr>
+              <a:t>QUÉ SIGUE VIVO HOY</a:t>
+            </a:r>
+            <a:r>
+              <a:rPr sz="1500" b="0" i="0">
+                <a:solidFill>
+                  <a:srgbClr val="333333"/>
+                </a:solidFill>
+                <a:latin typeface="Calibri"/>
+              </a:rPr>
+              <a:t> — Para </a:t>
+            </a:r>
+            <a:r>
+              <a:rPr sz="1500" b="1" i="0">
+                <a:solidFill>
+                  <a:srgbClr val="333333"/>
+                </a:solidFill>
+                <a:latin typeface="Calibri"/>
+              </a:rPr>
+              <a:t>al menos dos</a:t>
+            </a:r>
+            <a:r>
+              <a:rPr sz="1500" b="0" i="0">
+                <a:solidFill>
+                  <a:srgbClr val="333333"/>
+                </a:solidFill>
+                <a:latin typeface="Calibri"/>
+              </a:rPr>
+              <a:t> de los cuatro hitos: qué parte de ese problema todavía no está resuelta, con un ejemplo de algo que ustedes hayan visto.</a:t>
+            </a:r>
+          </a:p>
+        </p:txBody>
+      </p:sp>
+      <p:sp>
+        <p:nvSpPr>
+          <p:cNvPr id="22" name="Rounded Rectangle 21"/>
+          <p:cNvSpPr/>
+          <p:nvPr/>
+        </p:nvSpPr>
+        <p:spPr>
+          <a:xfrm>
+            <a:off x="457200" y="4178808"/>
+            <a:ext cx="11277295" cy="566928"/>
+          </a:xfrm>
+          <a:prstGeom prst="roundRect">
+            <a:avLst>
+              <a:gd name="adj" fmla="val 12000"/>
+            </a:avLst>
+          </a:prstGeom>
+          <a:solidFill>
+            <a:srgbClr val="F2F2F2"/>
+          </a:solidFill>
+          <a:ln>
+            <a:noFill/>
+          </a:ln>
+        </p:spPr>
+        <p:style>
+          <a:lnRef idx="1">
+            <a:schemeClr val="accent1"/>
+          </a:lnRef>
+          <a:fillRef idx="3">
+            <a:schemeClr val="accent1"/>
+          </a:fillRef>
+          <a:effectRef idx="2">
+            <a:schemeClr val="accent1"/>
+          </a:effectRef>
+          <a:fontRef idx="minor">
+            <a:schemeClr val="lt1"/>
+          </a:fontRef>
+        </p:style>
+        <p:txBody>
+          <a:bodyPr rtlCol="0" anchor="ctr"/>
+          <a:lstStyle/>
+          <a:p>
+            <a:pPr algn="ctr"/>
+          </a:p>
+        </p:txBody>
+      </p:sp>
+      <p:sp>
+        <p:nvSpPr>
+          <p:cNvPr id="23" name="Rectangle 22"/>
+          <p:cNvSpPr/>
+          <p:nvPr/>
+        </p:nvSpPr>
+        <p:spPr>
+          <a:xfrm>
+            <a:off x="640080" y="4325112"/>
+            <a:ext cx="274320" cy="274320"/>
+          </a:xfrm>
+          <a:prstGeom prst="rect">
+            <a:avLst/>
+          </a:prstGeom>
+          <a:solidFill>
+            <a:srgbClr val="FFFFFF"/>
+          </a:solidFill>
+          <a:ln>
+            <a:solidFill>
+              <a:srgbClr val="333333"/>
+            </a:solidFill>
+          </a:ln>
+        </p:spPr>
+        <p:style>
+          <a:lnRef idx="1">
+            <a:schemeClr val="accent1"/>
+          </a:lnRef>
+          <a:fillRef idx="3">
+            <a:schemeClr val="accent1"/>
+          </a:fillRef>
+          <a:effectRef idx="2">
+            <a:schemeClr val="accent1"/>
+          </a:effectRef>
+          <a:fontRef idx="minor">
+            <a:schemeClr val="lt1"/>
+          </a:fontRef>
+        </p:style>
+        <p:txBody>
+          <a:bodyPr rtlCol="0" anchor="ctr"/>
+          <a:lstStyle/>
+          <a:p>
+            <a:pPr algn="ctr"/>
+          </a:p>
+        </p:txBody>
+      </p:sp>
+      <p:sp>
+        <p:nvSpPr>
+          <p:cNvPr id="24" name="Rectangle 23"/>
+          <p:cNvSpPr/>
+          <p:nvPr/>
+        </p:nvSpPr>
+        <p:spPr>
+          <a:xfrm>
+            <a:off x="640080" y="4325112"/>
+            <a:ext cx="73152" cy="274320"/>
+          </a:xfrm>
+          <a:prstGeom prst="rect">
+            <a:avLst/>
+          </a:prstGeom>
+          <a:solidFill>
+            <a:srgbClr val="269CCB"/>
+          </a:solidFill>
+          <a:ln>
+            <a:noFill/>
+          </a:ln>
+        </p:spPr>
+        <p:style>
+          <a:lnRef idx="1">
+            <a:schemeClr val="accent1"/>
+          </a:lnRef>
+          <a:fillRef idx="3">
+            <a:schemeClr val="accent1"/>
+          </a:fillRef>
+          <a:effectRef idx="2">
+            <a:schemeClr val="accent1"/>
+          </a:effectRef>
+          <a:fontRef idx="minor">
+            <a:schemeClr val="lt1"/>
+          </a:fontRef>
+        </p:style>
+        <p:txBody>
+          <a:bodyPr rtlCol="0" anchor="ctr"/>
+          <a:lstStyle/>
+          <a:p>
+            <a:pPr algn="ctr"/>
+          </a:p>
+        </p:txBody>
+      </p:sp>
+      <p:sp>
+        <p:nvSpPr>
+          <p:cNvPr id="25" name="TextBox 24"/>
+          <p:cNvSpPr txBox="1"/>
+          <p:nvPr/>
+        </p:nvSpPr>
+        <p:spPr>
+          <a:xfrm>
+            <a:off x="1097280" y="4270248"/>
+            <a:ext cx="10362895" cy="402336"/>
+          </a:xfrm>
+          <a:prstGeom prst="rect">
+            <a:avLst/>
+          </a:prstGeom>
+          <a:noFill/>
+        </p:spPr>
+        <p:txBody>
+          <a:bodyPr wrap="square" anchor="ctr"/>
+          <a:lstStyle/>
+          <a:p>
+            <a:r>
+              <a:rPr sz="1500" b="1" i="0">
+                <a:solidFill>
+                  <a:srgbClr val="333333"/>
+                </a:solidFill>
+                <a:latin typeface="Calibri"/>
+              </a:rPr>
+              <a:t>LA FUENTE</a:t>
+            </a:r>
+            <a:r>
+              <a:rPr sz="1500" b="0" i="0">
+                <a:solidFill>
+                  <a:srgbClr val="333333"/>
+                </a:solidFill>
+                <a:latin typeface="Calibri"/>
+              </a:rPr>
+              <a:t> — De dónde sacaron cada dato: autor o institución, y año. Si usaron una cifra («el 70 % de los proyectos…»), la fuente es obligatoria.</a:t>
+            </a:r>
+          </a:p>
+        </p:txBody>
+      </p:sp>
+      <p:sp>
+        <p:nvSpPr>
+          <p:cNvPr id="26" name="TextBox 25"/>
           <p:cNvSpPr txBox="1"/>
           <p:nvPr/>
         </p:nvSpPr>
@@ -7662,7 +8152,7 @@
                 </a:solidFill>
                 <a:latin typeface="Calibri"/>
               </a:rPr>
-              <a:t>Taller de hoy: Línea de tiempo del periodo</a:t>
+              <a:t>Cómo se expone en 3 minutos</a:t>
             </a:r>
           </a:p>
         </p:txBody>
@@ -7696,7 +8186,7 @@
                 </a:solidFill>
                 <a:latin typeface="Calibri"/>
               </a:rPr>
-              <a:t>17 min en equipos · un periodo por equipo, asignado en orden histórico · línea de tiempo de 4 hitos en draw.io</a:t>
+              <a:t>Habla el vocero con la pantalla ya compartida · cronómetro en pantalla · se corta al llegar a cero</a:t>
             </a:r>
           </a:p>
         </p:txBody>
@@ -7709,8 +8199,8 @@
         </p:nvSpPr>
         <p:spPr>
           <a:xfrm>
-            <a:off x="457200" y="1472184"/>
-            <a:ext cx="11277295" cy="566928"/>
+            <a:off x="457200" y="1659636"/>
+            <a:ext cx="11277295" cy="1051560"/>
           </a:xfrm>
           <a:prstGeom prst="roundRect">
             <a:avLst>
@@ -7748,25 +8238,25 @@
       </p:sp>
       <p:sp>
         <p:nvSpPr>
-          <p:cNvPr id="7" name="Rectangle 6"/>
+          <p:cNvPr id="7" name="Rounded Rectangle 6"/>
           <p:cNvSpPr/>
           <p:nvPr/>
         </p:nvSpPr>
         <p:spPr>
           <a:xfrm>
-            <a:off x="640080" y="1618487"/>
-            <a:ext cx="274320" cy="274320"/>
-          </a:xfrm>
-          <a:prstGeom prst="rect">
-            <a:avLst/>
+            <a:off x="594360" y="1965960"/>
+            <a:ext cx="438912" cy="438912"/>
+          </a:xfrm>
+          <a:prstGeom prst="roundRect">
+            <a:avLst>
+              <a:gd name="adj" fmla="val 12000"/>
+            </a:avLst>
           </a:prstGeom>
           <a:solidFill>
-            <a:srgbClr val="FFFFFF"/>
+            <a:srgbClr val="095292"/>
           </a:solidFill>
           <a:ln>
-            <a:solidFill>
-              <a:srgbClr val="333333"/>
-            </a:solidFill>
+            <a:noFill/>
           </a:ln>
         </p:spPr>
         <p:style>
@@ -7793,20 +8283,103 @@
       </p:sp>
       <p:sp>
         <p:nvSpPr>
-          <p:cNvPr id="8" name="Rectangle 7"/>
+          <p:cNvPr id="8" name="TextBox 7"/>
+          <p:cNvSpPr txBox="1"/>
+          <p:nvPr/>
+        </p:nvSpPr>
+        <p:spPr>
+          <a:xfrm>
+            <a:off x="594360" y="1965960"/>
+            <a:ext cx="438912" cy="438912"/>
+          </a:xfrm>
+          <a:prstGeom prst="rect">
+            <a:avLst/>
+          </a:prstGeom>
+          <a:noFill/>
+        </p:spPr>
+        <p:txBody>
+          <a:bodyPr wrap="square" anchor="ctr"/>
+          <a:lstStyle/>
+          <a:p>
+            <a:pPr algn="ctr"/>
+            <a:r>
+              <a:rPr sz="1600" b="1" i="0">
+                <a:solidFill>
+                  <a:srgbClr val="FFFFFF"/>
+                </a:solidFill>
+                <a:latin typeface="Calibri"/>
+              </a:rPr>
+              <a:t>1</a:t>
+            </a:r>
+          </a:p>
+        </p:txBody>
+      </p:sp>
+      <p:sp>
+        <p:nvSpPr>
+          <p:cNvPr id="9" name="TextBox 8"/>
+          <p:cNvSpPr txBox="1"/>
+          <p:nvPr/>
+        </p:nvSpPr>
+        <p:spPr>
+          <a:xfrm>
+            <a:off x="1188720" y="1751076"/>
+            <a:ext cx="10271455" cy="886968"/>
+          </a:xfrm>
+          <a:prstGeom prst="rect">
+            <a:avLst/>
+          </a:prstGeom>
+          <a:noFill/>
+        </p:spPr>
+        <p:txBody>
+          <a:bodyPr wrap="square" anchor="ctr"/>
+          <a:lstStyle/>
+          <a:p>
+            <a:r>
+              <a:rPr sz="1500" b="1" i="0">
+                <a:solidFill>
+                  <a:srgbClr val="095292"/>
+                </a:solidFill>
+                <a:latin typeface="Calibri"/>
+              </a:rPr>
+              <a:t>45 s · El periodo y qué dolía</a:t>
+            </a:r>
+          </a:p>
+          <a:p>
+            <a:pPr>
+              <a:spcBef>
+                <a:spcPts val="200"/>
+              </a:spcBef>
+            </a:pPr>
+            <a:r>
+              <a:rPr sz="1300" b="0" i="0">
+                <a:solidFill>
+                  <a:srgbClr val="333333"/>
+                </a:solidFill>
+                <a:latin typeface="Calibri"/>
+              </a:rPr>
+              <a:t>Qué años les tocaron y cuál era el problema de la época.</a:t>
+            </a:r>
+          </a:p>
+        </p:txBody>
+      </p:sp>
+      <p:sp>
+        <p:nvSpPr>
+          <p:cNvPr id="10" name="Rounded Rectangle 9"/>
           <p:cNvSpPr/>
           <p:nvPr/>
         </p:nvSpPr>
         <p:spPr>
           <a:xfrm>
-            <a:off x="640080" y="1618487"/>
-            <a:ext cx="73152" cy="274320"/>
-          </a:xfrm>
-          <a:prstGeom prst="rect">
-            <a:avLst/>
+            <a:off x="457200" y="2802636"/>
+            <a:ext cx="11277295" cy="1051560"/>
+          </a:xfrm>
+          <a:prstGeom prst="roundRect">
+            <a:avLst>
+              <a:gd name="adj" fmla="val 12000"/>
+            </a:avLst>
           </a:prstGeom>
           <a:solidFill>
-            <a:srgbClr val="269CCB"/>
+            <a:srgbClr val="E8F4FA"/>
           </a:solidFill>
           <a:ln>
             <a:noFill/>
@@ -7836,14 +8409,59 @@
       </p:sp>
       <p:sp>
         <p:nvSpPr>
-          <p:cNvPr id="9" name="TextBox 8"/>
+          <p:cNvPr id="11" name="Rounded Rectangle 10"/>
+          <p:cNvSpPr/>
+          <p:nvPr/>
+        </p:nvSpPr>
+        <p:spPr>
+          <a:xfrm>
+            <a:off x="594360" y="3108960"/>
+            <a:ext cx="438912" cy="438912"/>
+          </a:xfrm>
+          <a:prstGeom prst="roundRect">
+            <a:avLst>
+              <a:gd name="adj" fmla="val 12000"/>
+            </a:avLst>
+          </a:prstGeom>
+          <a:solidFill>
+            <a:srgbClr val="095292"/>
+          </a:solidFill>
+          <a:ln>
+            <a:noFill/>
+          </a:ln>
+        </p:spPr>
+        <p:style>
+          <a:lnRef idx="1">
+            <a:schemeClr val="accent1"/>
+          </a:lnRef>
+          <a:fillRef idx="3">
+            <a:schemeClr val="accent1"/>
+          </a:fillRef>
+          <a:effectRef idx="2">
+            <a:schemeClr val="accent1"/>
+          </a:effectRef>
+          <a:fontRef idx="minor">
+            <a:schemeClr val="lt1"/>
+          </a:fontRef>
+        </p:style>
+        <p:txBody>
+          <a:bodyPr rtlCol="0" anchor="ctr"/>
+          <a:lstStyle/>
+          <a:p>
+            <a:pPr algn="ctr"/>
+          </a:p>
+        </p:txBody>
+      </p:sp>
+      <p:sp>
+        <p:nvSpPr>
+          <p:cNvPr id="12" name="TextBox 11"/>
           <p:cNvSpPr txBox="1"/>
           <p:nvPr/>
         </p:nvSpPr>
         <p:spPr>
           <a:xfrm>
-            <a:off x="1097280" y="1563624"/>
-            <a:ext cx="10362895" cy="402336"/>
+            <a:off x="594360" y="3108960"/>
+            <a:ext cx="438912" cy="438912"/>
           </a:xfrm>
           <a:prstGeom prst="rect">
             <a:avLst/>
@@ -7854,37 +8472,77 @@
           <a:bodyPr wrap="square" anchor="ctr"/>
           <a:lstStyle/>
           <a:p>
+            <a:pPr algn="ctr"/>
+            <a:r>
+              <a:rPr sz="1600" b="1" i="0">
+                <a:solidFill>
+                  <a:srgbClr val="FFFFFF"/>
+                </a:solidFill>
+                <a:latin typeface="Calibri"/>
+              </a:rPr>
+              <a:t>2</a:t>
+            </a:r>
+          </a:p>
+        </p:txBody>
+      </p:sp>
+      <p:sp>
+        <p:nvSpPr>
+          <p:cNvPr id="13" name="TextBox 12"/>
+          <p:cNvSpPr txBox="1"/>
+          <p:nvPr/>
+        </p:nvSpPr>
+        <p:spPr>
+          <a:xfrm>
+            <a:off x="1188720" y="2894076"/>
+            <a:ext cx="10271455" cy="886968"/>
+          </a:xfrm>
+          <a:prstGeom prst="rect">
+            <a:avLst/>
+          </a:prstGeom>
+          <a:noFill/>
+        </p:spPr>
+        <p:txBody>
+          <a:bodyPr wrap="square" anchor="ctr"/>
+          <a:lstStyle/>
+          <a:p>
             <a:r>
               <a:rPr sz="1500" b="1" i="0">
                 <a:solidFill>
-                  <a:srgbClr val="333333"/>
-                </a:solidFill>
-                <a:latin typeface="Calibri"/>
-              </a:rPr>
-              <a:t>LOS CUATRO HITOS</a:t>
-            </a:r>
-            <a:r>
-              <a:rPr sz="1500" b="0" i="0">
-                <a:solidFill>
-                  <a:srgbClr val="333333"/>
-                </a:solidFill>
-                <a:latin typeface="Calibri"/>
-              </a:rPr>
-              <a:t> — Cuatro hechos de su periodo, con año, puestos en orden en la línea de tiempo.</a:t>
-            </a:r>
-          </a:p>
-        </p:txBody>
-      </p:sp>
-      <p:sp>
-        <p:nvSpPr>
-          <p:cNvPr id="10" name="Rounded Rectangle 9"/>
+                  <a:srgbClr val="095292"/>
+                </a:solidFill>
+                <a:latin typeface="Calibri"/>
+              </a:rPr>
+              <a:t>60 s · Los cuatro hitos</a:t>
+            </a:r>
+          </a:p>
+          <a:p>
+            <a:pPr>
+              <a:spcBef>
+                <a:spcPts val="200"/>
+              </a:spcBef>
+            </a:pPr>
+            <a:r>
+              <a:rPr sz="1300" b="0" i="0">
+                <a:solidFill>
+                  <a:srgbClr val="333333"/>
+                </a:solidFill>
+                <a:latin typeface="Calibri"/>
+              </a:rPr>
+              <a:t>En orden, con año. Una frase por hito, sin leer la pantalla.</a:t>
+            </a:r>
+          </a:p>
+        </p:txBody>
+      </p:sp>
+      <p:sp>
+        <p:nvSpPr>
+          <p:cNvPr id="14" name="Rounded Rectangle 13"/>
           <p:cNvSpPr/>
           <p:nvPr/>
         </p:nvSpPr>
         <p:spPr>
           <a:xfrm>
-            <a:off x="457200" y="2148839"/>
-            <a:ext cx="11277295" cy="566928"/>
+            <a:off x="457200" y="3945636"/>
+            <a:ext cx="11277295" cy="1051560"/>
           </a:xfrm>
           <a:prstGeom prst="roundRect">
             <a:avLst>
@@ -7922,25 +8580,25 @@
       </p:sp>
       <p:sp>
         <p:nvSpPr>
-          <p:cNvPr id="11" name="Rectangle 10"/>
+          <p:cNvPr id="15" name="Rounded Rectangle 14"/>
           <p:cNvSpPr/>
           <p:nvPr/>
         </p:nvSpPr>
         <p:spPr>
           <a:xfrm>
-            <a:off x="640080" y="2295144"/>
-            <a:ext cx="274320" cy="274320"/>
-          </a:xfrm>
-          <a:prstGeom prst="rect">
-            <a:avLst/>
+            <a:off x="594360" y="4251960"/>
+            <a:ext cx="438912" cy="438912"/>
+          </a:xfrm>
+          <a:prstGeom prst="roundRect">
+            <a:avLst>
+              <a:gd name="adj" fmla="val 12000"/>
+            </a:avLst>
           </a:prstGeom>
           <a:solidFill>
-            <a:srgbClr val="FFFFFF"/>
+            <a:srgbClr val="095292"/>
           </a:solidFill>
           <a:ln>
-            <a:solidFill>
-              <a:srgbClr val="333333"/>
-            </a:solidFill>
+            <a:noFill/>
           </a:ln>
         </p:spPr>
         <p:style>
@@ -7967,20 +8625,103 @@
       </p:sp>
       <p:sp>
         <p:nvSpPr>
-          <p:cNvPr id="12" name="Rectangle 11"/>
+          <p:cNvPr id="16" name="TextBox 15"/>
+          <p:cNvSpPr txBox="1"/>
+          <p:nvPr/>
+        </p:nvSpPr>
+        <p:spPr>
+          <a:xfrm>
+            <a:off x="594360" y="4251960"/>
+            <a:ext cx="438912" cy="438912"/>
+          </a:xfrm>
+          <a:prstGeom prst="rect">
+            <a:avLst/>
+          </a:prstGeom>
+          <a:noFill/>
+        </p:spPr>
+        <p:txBody>
+          <a:bodyPr wrap="square" anchor="ctr"/>
+          <a:lstStyle/>
+          <a:p>
+            <a:pPr algn="ctr"/>
+            <a:r>
+              <a:rPr sz="1600" b="1" i="0">
+                <a:solidFill>
+                  <a:srgbClr val="FFFFFF"/>
+                </a:solidFill>
+                <a:latin typeface="Calibri"/>
+              </a:rPr>
+              <a:t>3</a:t>
+            </a:r>
+          </a:p>
+        </p:txBody>
+      </p:sp>
+      <p:sp>
+        <p:nvSpPr>
+          <p:cNvPr id="17" name="TextBox 16"/>
+          <p:cNvSpPr txBox="1"/>
+          <p:nvPr/>
+        </p:nvSpPr>
+        <p:spPr>
+          <a:xfrm>
+            <a:off x="1188720" y="4037076"/>
+            <a:ext cx="10271455" cy="886968"/>
+          </a:xfrm>
+          <a:prstGeom prst="rect">
+            <a:avLst/>
+          </a:prstGeom>
+          <a:noFill/>
+        </p:spPr>
+        <p:txBody>
+          <a:bodyPr wrap="square" anchor="ctr"/>
+          <a:lstStyle/>
+          <a:p>
+            <a:r>
+              <a:rPr sz="1500" b="1" i="0">
+                <a:solidFill>
+                  <a:srgbClr val="095292"/>
+                </a:solidFill>
+                <a:latin typeface="Calibri"/>
+              </a:rPr>
+              <a:t>60 s · Qué sigue vivo</a:t>
+            </a:r>
+          </a:p>
+          <a:p>
+            <a:pPr>
+              <a:spcBef>
+                <a:spcPts val="200"/>
+              </a:spcBef>
+            </a:pPr>
+            <a:r>
+              <a:rPr sz="1300" b="0" i="0">
+                <a:solidFill>
+                  <a:srgbClr val="333333"/>
+                </a:solidFill>
+                <a:latin typeface="Calibri"/>
+              </a:rPr>
+              <a:t>Los dos hitos cuyo problema no está cerrado, con su ejemplo propio. Es lo que más pesa.</a:t>
+            </a:r>
+          </a:p>
+        </p:txBody>
+      </p:sp>
+      <p:sp>
+        <p:nvSpPr>
+          <p:cNvPr id="18" name="Rounded Rectangle 17"/>
           <p:cNvSpPr/>
           <p:nvPr/>
         </p:nvSpPr>
         <p:spPr>
           <a:xfrm>
-            <a:off x="640080" y="2295144"/>
-            <a:ext cx="73152" cy="274320"/>
-          </a:xfrm>
-          <a:prstGeom prst="rect">
-            <a:avLst/>
+            <a:off x="457200" y="5088636"/>
+            <a:ext cx="11277295" cy="1051560"/>
+          </a:xfrm>
+          <a:prstGeom prst="roundRect">
+            <a:avLst>
+              <a:gd name="adj" fmla="val 12000"/>
+            </a:avLst>
           </a:prstGeom>
           <a:solidFill>
-            <a:srgbClr val="269CCB"/>
+            <a:srgbClr val="E8F4FA"/>
           </a:solidFill>
           <a:ln>
             <a:noFill/>
@@ -8010,55 +8751,14 @@
       </p:sp>
       <p:sp>
         <p:nvSpPr>
-          <p:cNvPr id="13" name="TextBox 12"/>
-          <p:cNvSpPr txBox="1"/>
-          <p:nvPr/>
-        </p:nvSpPr>
-        <p:spPr>
-          <a:xfrm>
-            <a:off x="1097280" y="2240279"/>
-            <a:ext cx="10362895" cy="402336"/>
-          </a:xfrm>
-          <a:prstGeom prst="rect">
-            <a:avLst/>
-          </a:prstGeom>
-          <a:noFill/>
-        </p:spPr>
-        <p:txBody>
-          <a:bodyPr wrap="square" anchor="ctr"/>
-          <a:lstStyle/>
-          <a:p>
-            <a:r>
-              <a:rPr sz="1500" b="1" i="0">
-                <a:solidFill>
-                  <a:srgbClr val="333333"/>
-                </a:solidFill>
-                <a:latin typeface="Calibri"/>
-              </a:rPr>
-              <a:t>QUÉ DOLÍA ANTES</a:t>
-            </a:r>
-            <a:r>
-              <a:rPr sz="1500" b="0" i="0">
-                <a:solidFill>
-                  <a:srgbClr val="333333"/>
-                </a:solidFill>
-                <a:latin typeface="Calibri"/>
-              </a:rPr>
-              <a:t> — Para cada hito: el problema concreto que existía antes y a quién le pasaba.</a:t>
-            </a:r>
-          </a:p>
-        </p:txBody>
-      </p:sp>
-      <p:sp>
-        <p:nvSpPr>
-          <p:cNvPr id="14" name="Rounded Rectangle 13"/>
+          <p:cNvPr id="19" name="Rounded Rectangle 18"/>
           <p:cNvSpPr/>
           <p:nvPr/>
         </p:nvSpPr>
         <p:spPr>
           <a:xfrm>
-            <a:off x="457200" y="2825496"/>
-            <a:ext cx="11277295" cy="566928"/>
+            <a:off x="594360" y="5394960"/>
+            <a:ext cx="438912" cy="438912"/>
           </a:xfrm>
           <a:prstGeom prst="roundRect">
             <a:avLst>
@@ -8066,7 +8766,7 @@
             </a:avLst>
           </a:prstGeom>
           <a:solidFill>
-            <a:srgbClr val="F2F2F2"/>
+            <a:srgbClr val="095292"/>
           </a:solidFill>
           <a:ln>
             <a:noFill/>
@@ -8096,263 +8796,34 @@
       </p:sp>
       <p:sp>
         <p:nvSpPr>
-          <p:cNvPr id="15" name="Rectangle 14"/>
-          <p:cNvSpPr/>
-          <p:nvPr/>
-        </p:nvSpPr>
-        <p:spPr>
-          <a:xfrm>
-            <a:off x="640080" y="2971800"/>
-            <a:ext cx="274320" cy="274320"/>
-          </a:xfrm>
-          <a:prstGeom prst="rect">
-            <a:avLst/>
-          </a:prstGeom>
-          <a:solidFill>
-            <a:srgbClr val="FFFFFF"/>
-          </a:solidFill>
-          <a:ln>
-            <a:solidFill>
-              <a:srgbClr val="333333"/>
-            </a:solidFill>
-          </a:ln>
-        </p:spPr>
-        <p:style>
-          <a:lnRef idx="1">
-            <a:schemeClr val="accent1"/>
-          </a:lnRef>
-          <a:fillRef idx="3">
-            <a:schemeClr val="accent1"/>
-          </a:fillRef>
-          <a:effectRef idx="2">
-            <a:schemeClr val="accent1"/>
-          </a:effectRef>
-          <a:fontRef idx="minor">
-            <a:schemeClr val="lt1"/>
-          </a:fontRef>
-        </p:style>
-        <p:txBody>
-          <a:bodyPr rtlCol="0" anchor="ctr"/>
+          <p:cNvPr id="20" name="TextBox 19"/>
+          <p:cNvSpPr txBox="1"/>
+          <p:nvPr/>
+        </p:nvSpPr>
+        <p:spPr>
+          <a:xfrm>
+            <a:off x="594360" y="5394960"/>
+            <a:ext cx="438912" cy="438912"/>
+          </a:xfrm>
+          <a:prstGeom prst="rect">
+            <a:avLst/>
+          </a:prstGeom>
+          <a:noFill/>
+        </p:spPr>
+        <p:txBody>
+          <a:bodyPr wrap="square" anchor="ctr"/>
           <a:lstStyle/>
           <a:p>
             <a:pPr algn="ctr"/>
-          </a:p>
-        </p:txBody>
-      </p:sp>
-      <p:sp>
-        <p:nvSpPr>
-          <p:cNvPr id="16" name="Rectangle 15"/>
-          <p:cNvSpPr/>
-          <p:nvPr/>
-        </p:nvSpPr>
-        <p:spPr>
-          <a:xfrm>
-            <a:off x="640080" y="2971800"/>
-            <a:ext cx="73152" cy="274320"/>
-          </a:xfrm>
-          <a:prstGeom prst="rect">
-            <a:avLst/>
-          </a:prstGeom>
-          <a:solidFill>
-            <a:srgbClr val="269CCB"/>
-          </a:solidFill>
-          <a:ln>
-            <a:noFill/>
-          </a:ln>
-        </p:spPr>
-        <p:style>
-          <a:lnRef idx="1">
-            <a:schemeClr val="accent1"/>
-          </a:lnRef>
-          <a:fillRef idx="3">
-            <a:schemeClr val="accent1"/>
-          </a:fillRef>
-          <a:effectRef idx="2">
-            <a:schemeClr val="accent1"/>
-          </a:effectRef>
-          <a:fontRef idx="minor">
-            <a:schemeClr val="lt1"/>
-          </a:fontRef>
-        </p:style>
-        <p:txBody>
-          <a:bodyPr rtlCol="0" anchor="ctr"/>
-          <a:lstStyle/>
-          <a:p>
-            <a:pPr algn="ctr"/>
-          </a:p>
-        </p:txBody>
-      </p:sp>
-      <p:sp>
-        <p:nvSpPr>
-          <p:cNvPr id="17" name="TextBox 16"/>
-          <p:cNvSpPr txBox="1"/>
-          <p:nvPr/>
-        </p:nvSpPr>
-        <p:spPr>
-          <a:xfrm>
-            <a:off x="1097280" y="2916936"/>
-            <a:ext cx="10362895" cy="402336"/>
-          </a:xfrm>
-          <a:prstGeom prst="rect">
-            <a:avLst/>
-          </a:prstGeom>
-          <a:noFill/>
-        </p:spPr>
-        <p:txBody>
-          <a:bodyPr wrap="square" anchor="ctr"/>
-          <a:lstStyle/>
-          <a:p>
-            <a:r>
-              <a:rPr sz="1500" b="1" i="0">
-                <a:solidFill>
-                  <a:srgbClr val="333333"/>
-                </a:solidFill>
-                <a:latin typeface="Calibri"/>
-              </a:rPr>
-              <a:t>QUÉ PROPUSO</a:t>
-            </a:r>
-            <a:r>
-              <a:rPr sz="1500" b="0" i="0">
-                <a:solidFill>
-                  <a:srgbClr val="333333"/>
-                </a:solidFill>
-                <a:latin typeface="Calibri"/>
-              </a:rPr>
-              <a:t> — Para cada hito: la idea, el método o la herramienta, en una frase que ustedes puedan explicar.</a:t>
-            </a:r>
-          </a:p>
-        </p:txBody>
-      </p:sp>
-      <p:sp>
-        <p:nvSpPr>
-          <p:cNvPr id="18" name="Rounded Rectangle 17"/>
-          <p:cNvSpPr/>
-          <p:nvPr/>
-        </p:nvSpPr>
-        <p:spPr>
-          <a:xfrm>
-            <a:off x="457200" y="3502152"/>
-            <a:ext cx="11277295" cy="566928"/>
-          </a:xfrm>
-          <a:prstGeom prst="roundRect">
-            <a:avLst>
-              <a:gd name="adj" fmla="val 12000"/>
-            </a:avLst>
-          </a:prstGeom>
-          <a:solidFill>
-            <a:srgbClr val="F2F2F2"/>
-          </a:solidFill>
-          <a:ln>
-            <a:noFill/>
-          </a:ln>
-        </p:spPr>
-        <p:style>
-          <a:lnRef idx="1">
-            <a:schemeClr val="accent1"/>
-          </a:lnRef>
-          <a:fillRef idx="3">
-            <a:schemeClr val="accent1"/>
-          </a:fillRef>
-          <a:effectRef idx="2">
-            <a:schemeClr val="accent1"/>
-          </a:effectRef>
-          <a:fontRef idx="minor">
-            <a:schemeClr val="lt1"/>
-          </a:fontRef>
-        </p:style>
-        <p:txBody>
-          <a:bodyPr rtlCol="0" anchor="ctr"/>
-          <a:lstStyle/>
-          <a:p>
-            <a:pPr algn="ctr"/>
-          </a:p>
-        </p:txBody>
-      </p:sp>
-      <p:sp>
-        <p:nvSpPr>
-          <p:cNvPr id="19" name="Rectangle 18"/>
-          <p:cNvSpPr/>
-          <p:nvPr/>
-        </p:nvSpPr>
-        <p:spPr>
-          <a:xfrm>
-            <a:off x="640080" y="3648456"/>
-            <a:ext cx="274320" cy="274320"/>
-          </a:xfrm>
-          <a:prstGeom prst="rect">
-            <a:avLst/>
-          </a:prstGeom>
-          <a:solidFill>
-            <a:srgbClr val="FFFFFF"/>
-          </a:solidFill>
-          <a:ln>
-            <a:solidFill>
-              <a:srgbClr val="333333"/>
-            </a:solidFill>
-          </a:ln>
-        </p:spPr>
-        <p:style>
-          <a:lnRef idx="1">
-            <a:schemeClr val="accent1"/>
-          </a:lnRef>
-          <a:fillRef idx="3">
-            <a:schemeClr val="accent1"/>
-          </a:fillRef>
-          <a:effectRef idx="2">
-            <a:schemeClr val="accent1"/>
-          </a:effectRef>
-          <a:fontRef idx="minor">
-            <a:schemeClr val="lt1"/>
-          </a:fontRef>
-        </p:style>
-        <p:txBody>
-          <a:bodyPr rtlCol="0" anchor="ctr"/>
-          <a:lstStyle/>
-          <a:p>
-            <a:pPr algn="ctr"/>
-          </a:p>
-        </p:txBody>
-      </p:sp>
-      <p:sp>
-        <p:nvSpPr>
-          <p:cNvPr id="20" name="Rectangle 19"/>
-          <p:cNvSpPr/>
-          <p:nvPr/>
-        </p:nvSpPr>
-        <p:spPr>
-          <a:xfrm>
-            <a:off x="640080" y="3648456"/>
-            <a:ext cx="73152" cy="274320"/>
-          </a:xfrm>
-          <a:prstGeom prst="rect">
-            <a:avLst/>
-          </a:prstGeom>
-          <a:solidFill>
-            <a:srgbClr val="269CCB"/>
-          </a:solidFill>
-          <a:ln>
-            <a:noFill/>
-          </a:ln>
-        </p:spPr>
-        <p:style>
-          <a:lnRef idx="1">
-            <a:schemeClr val="accent1"/>
-          </a:lnRef>
-          <a:fillRef idx="3">
-            <a:schemeClr val="accent1"/>
-          </a:fillRef>
-          <a:effectRef idx="2">
-            <a:schemeClr val="accent1"/>
-          </a:effectRef>
-          <a:fontRef idx="minor">
-            <a:schemeClr val="lt1"/>
-          </a:fontRef>
-        </p:style>
-        <p:txBody>
-          <a:bodyPr rtlCol="0" anchor="ctr"/>
-          <a:lstStyle/>
-          <a:p>
-            <a:pPr algn="ctr"/>
+            <a:r>
+              <a:rPr sz="1600" b="1" i="0">
+                <a:solidFill>
+                  <a:srgbClr val="FFFFFF"/>
+                </a:solidFill>
+                <a:latin typeface="Calibri"/>
+              </a:rPr>
+              <a:t>4</a:t>
+            </a:r>
           </a:p>
         </p:txBody>
       </p:sp>
@@ -8364,8 +8835,8 @@
         </p:nvSpPr>
         <p:spPr>
           <a:xfrm>
-            <a:off x="1097280" y="3593592"/>
-            <a:ext cx="10362895" cy="402336"/>
+            <a:off x="1188720" y="5180076"/>
+            <a:ext cx="10271455" cy="886968"/>
           </a:xfrm>
           <a:prstGeom prst="rect">
             <a:avLst/>
@@ -8379,219 +8850,34 @@
             <a:r>
               <a:rPr sz="1500" b="1" i="0">
                 <a:solidFill>
-                  <a:srgbClr val="333333"/>
-                </a:solidFill>
-                <a:latin typeface="Calibri"/>
-              </a:rPr>
-              <a:t>QUÉ SIGUE VIVO HOY</a:t>
-            </a:r>
-            <a:r>
-              <a:rPr sz="1500" b="0" i="0">
-                <a:solidFill>
-                  <a:srgbClr val="333333"/>
-                </a:solidFill>
-                <a:latin typeface="Calibri"/>
-              </a:rPr>
-              <a:t> — Para </a:t>
-            </a:r>
-            <a:r>
-              <a:rPr sz="1500" b="1" i="0">
-                <a:solidFill>
-                  <a:srgbClr val="333333"/>
-                </a:solidFill>
-                <a:latin typeface="Calibri"/>
-              </a:rPr>
-              <a:t>al menos dos</a:t>
-            </a:r>
-            <a:r>
-              <a:rPr sz="1500" b="0" i="0">
-                <a:solidFill>
-                  <a:srgbClr val="333333"/>
-                </a:solidFill>
-                <a:latin typeface="Calibri"/>
-              </a:rPr>
-              <a:t> de los cuatro hitos: qué parte de ese problema todavía no está resuelta, con un ejemplo de algo que ustedes hayan visto.</a:t>
-            </a:r>
-          </a:p>
-        </p:txBody>
-      </p:sp>
-      <p:sp>
-        <p:nvSpPr>
-          <p:cNvPr id="22" name="Rounded Rectangle 21"/>
-          <p:cNvSpPr/>
-          <p:nvPr/>
-        </p:nvSpPr>
-        <p:spPr>
-          <a:xfrm>
-            <a:off x="457200" y="4178808"/>
-            <a:ext cx="11277295" cy="566928"/>
-          </a:xfrm>
-          <a:prstGeom prst="roundRect">
-            <a:avLst>
-              <a:gd name="adj" fmla="val 12000"/>
-            </a:avLst>
-          </a:prstGeom>
-          <a:solidFill>
-            <a:srgbClr val="F2F2F2"/>
-          </a:solidFill>
-          <a:ln>
-            <a:noFill/>
-          </a:ln>
-        </p:spPr>
-        <p:style>
-          <a:lnRef idx="1">
-            <a:schemeClr val="accent1"/>
-          </a:lnRef>
-          <a:fillRef idx="3">
-            <a:schemeClr val="accent1"/>
-          </a:fillRef>
-          <a:effectRef idx="2">
-            <a:schemeClr val="accent1"/>
-          </a:effectRef>
-          <a:fontRef idx="minor">
-            <a:schemeClr val="lt1"/>
-          </a:fontRef>
-        </p:style>
-        <p:txBody>
-          <a:bodyPr rtlCol="0" anchor="ctr"/>
-          <a:lstStyle/>
-          <a:p>
-            <a:pPr algn="ctr"/>
-          </a:p>
-        </p:txBody>
-      </p:sp>
-      <p:sp>
-        <p:nvSpPr>
-          <p:cNvPr id="23" name="Rectangle 22"/>
-          <p:cNvSpPr/>
-          <p:nvPr/>
-        </p:nvSpPr>
-        <p:spPr>
-          <a:xfrm>
-            <a:off x="640080" y="4325112"/>
-            <a:ext cx="274320" cy="274320"/>
-          </a:xfrm>
-          <a:prstGeom prst="rect">
-            <a:avLst/>
-          </a:prstGeom>
-          <a:solidFill>
-            <a:srgbClr val="FFFFFF"/>
-          </a:solidFill>
-          <a:ln>
-            <a:solidFill>
-              <a:srgbClr val="333333"/>
-            </a:solidFill>
-          </a:ln>
-        </p:spPr>
-        <p:style>
-          <a:lnRef idx="1">
-            <a:schemeClr val="accent1"/>
-          </a:lnRef>
-          <a:fillRef idx="3">
-            <a:schemeClr val="accent1"/>
-          </a:fillRef>
-          <a:effectRef idx="2">
-            <a:schemeClr val="accent1"/>
-          </a:effectRef>
-          <a:fontRef idx="minor">
-            <a:schemeClr val="lt1"/>
-          </a:fontRef>
-        </p:style>
-        <p:txBody>
-          <a:bodyPr rtlCol="0" anchor="ctr"/>
-          <a:lstStyle/>
-          <a:p>
-            <a:pPr algn="ctr"/>
-          </a:p>
-        </p:txBody>
-      </p:sp>
-      <p:sp>
-        <p:nvSpPr>
-          <p:cNvPr id="24" name="Rectangle 23"/>
-          <p:cNvSpPr/>
-          <p:nvPr/>
-        </p:nvSpPr>
-        <p:spPr>
-          <a:xfrm>
-            <a:off x="640080" y="4325112"/>
-            <a:ext cx="73152" cy="274320"/>
-          </a:xfrm>
-          <a:prstGeom prst="rect">
-            <a:avLst/>
-          </a:prstGeom>
-          <a:solidFill>
-            <a:srgbClr val="269CCB"/>
-          </a:solidFill>
-          <a:ln>
-            <a:noFill/>
-          </a:ln>
-        </p:spPr>
-        <p:style>
-          <a:lnRef idx="1">
-            <a:schemeClr val="accent1"/>
-          </a:lnRef>
-          <a:fillRef idx="3">
-            <a:schemeClr val="accent1"/>
-          </a:fillRef>
-          <a:effectRef idx="2">
-            <a:schemeClr val="accent1"/>
-          </a:effectRef>
-          <a:fontRef idx="minor">
-            <a:schemeClr val="lt1"/>
-          </a:fontRef>
-        </p:style>
-        <p:txBody>
-          <a:bodyPr rtlCol="0" anchor="ctr"/>
-          <a:lstStyle/>
-          <a:p>
-            <a:pPr algn="ctr"/>
-          </a:p>
-        </p:txBody>
-      </p:sp>
-      <p:sp>
-        <p:nvSpPr>
-          <p:cNvPr id="25" name="TextBox 24"/>
-          <p:cNvSpPr txBox="1"/>
-          <p:nvPr/>
-        </p:nvSpPr>
-        <p:spPr>
-          <a:xfrm>
-            <a:off x="1097280" y="4270248"/>
-            <a:ext cx="10362895" cy="402336"/>
-          </a:xfrm>
-          <a:prstGeom prst="rect">
-            <a:avLst/>
-          </a:prstGeom>
-          <a:noFill/>
-        </p:spPr>
-        <p:txBody>
-          <a:bodyPr wrap="square" anchor="ctr"/>
-          <a:lstStyle/>
-          <a:p>
-            <a:r>
-              <a:rPr sz="1500" b="1" i="0">
-                <a:solidFill>
-                  <a:srgbClr val="333333"/>
-                </a:solidFill>
-                <a:latin typeface="Calibri"/>
-              </a:rPr>
-              <a:t>LA FUENTE</a:t>
-            </a:r>
-            <a:r>
-              <a:rPr sz="1500" b="0" i="0">
-                <a:solidFill>
-                  <a:srgbClr val="333333"/>
-                </a:solidFill>
-                <a:latin typeface="Calibri"/>
-              </a:rPr>
-              <a:t> — De dónde sacaron cada dato: autor o institución, y año. Si usaron una cifra («el 70 % de los proyectos…»), la fuente es obligatoria.</a:t>
-            </a:r>
-          </a:p>
-        </p:txBody>
-      </p:sp>
-      <p:sp>
-        <p:nvSpPr>
-          <p:cNvPr id="26" name="TextBox 25"/>
+                  <a:srgbClr val="095292"/>
+                </a:solidFill>
+                <a:latin typeface="Calibri"/>
+              </a:rPr>
+              <a:t>15 s · Las fuentes</a:t>
+            </a:r>
+          </a:p>
+          <a:p>
+            <a:pPr>
+              <a:spcBef>
+                <a:spcPts val="200"/>
+              </a:spcBef>
+            </a:pPr>
+            <a:r>
+              <a:rPr sz="1300" b="0" i="0">
+                <a:solidFill>
+                  <a:srgbClr val="333333"/>
+                </a:solidFill>
+                <a:latin typeface="Calibri"/>
+              </a:rPr>
+              <a:t>De dónde salió lo que dijeron.</a:t>
+            </a:r>
+          </a:p>
+        </p:txBody>
+      </p:sp>
+      <p:sp>
+        <p:nvSpPr>
+          <p:cNvPr id="22" name="TextBox 21"/>
           <p:cNvSpPr txBox="1"/>
           <p:nvPr/>
         </p:nvSpPr>
@@ -8659,7 +8945,7 @@
         <p:spPr>
           <a:xfrm>
             <a:off x="0" y="0"/>
-            <a:ext cx="12191695" cy="1170432"/>
+            <a:ext cx="12191695" cy="960120"/>
           </a:xfrm>
           <a:prstGeom prst="rect">
             <a:avLst/>
@@ -8701,7 +8987,7 @@
         </p:nvSpPr>
         <p:spPr>
           <a:xfrm>
-            <a:off x="0" y="1170432"/>
+            <a:off x="0" y="960120"/>
             <a:ext cx="12191695" cy="41148"/>
           </a:xfrm>
           <a:prstGeom prst="rect">
@@ -8745,7 +9031,7 @@
         <p:spPr>
           <a:xfrm>
             <a:off x="457200" y="164592"/>
-            <a:ext cx="11277295" cy="384048"/>
+            <a:ext cx="11277295" cy="502920"/>
           </a:xfrm>
           <a:prstGeom prst="rect">
             <a:avLst/>
@@ -8765,7 +9051,7 @@
                 </a:solidFill>
                 <a:latin typeface="Calibri"/>
               </a:rPr>
-              <a:t>Cómo se expone en 3 minutos</a:t>
+              <a:t>Para la Clase 3</a:t>
             </a:r>
           </a:p>
         </p:txBody>
@@ -8778,8 +9064,8 @@
         </p:nvSpPr>
         <p:spPr>
           <a:xfrm>
-            <a:off x="457200" y="566928"/>
-            <a:ext cx="11277295" cy="411480"/>
+            <a:off x="457200" y="1170432"/>
+            <a:ext cx="11277295" cy="5230368"/>
           </a:xfrm>
           <a:prstGeom prst="rect">
             <a:avLst/>
@@ -8792,705 +9078,180 @@
           </a:bodyPr>
           <a:lstStyle/>
           <a:p>
-            <a:r>
-              <a:rPr sz="1400" b="0" i="0">
-                <a:solidFill>
-                  <a:srgbClr val="B8D8EE"/>
-                </a:solidFill>
-                <a:latin typeface="Calibri"/>
-              </a:rPr>
-              <a:t>Habla el vocero con la pantalla ya compartida · cronómetro en pantalla · se corta al llegar a cero</a:t>
-            </a:r>
-          </a:p>
-        </p:txBody>
-      </p:sp>
-      <p:sp>
-        <p:nvSpPr>
-          <p:cNvPr id="6" name="Rounded Rectangle 5"/>
-          <p:cNvSpPr/>
-          <p:nvPr/>
-        </p:nvSpPr>
-        <p:spPr>
-          <a:xfrm>
-            <a:off x="457200" y="1659636"/>
-            <a:ext cx="11277295" cy="1051560"/>
-          </a:xfrm>
-          <a:prstGeom prst="roundRect">
-            <a:avLst>
-              <a:gd name="adj" fmla="val 12000"/>
-            </a:avLst>
-          </a:prstGeom>
-          <a:solidFill>
-            <a:srgbClr val="F2F2F2"/>
-          </a:solidFill>
-          <a:ln>
-            <a:noFill/>
-          </a:ln>
-        </p:spPr>
-        <p:style>
-          <a:lnRef idx="1">
-            <a:schemeClr val="accent1"/>
-          </a:lnRef>
-          <a:fillRef idx="3">
-            <a:schemeClr val="accent1"/>
-          </a:fillRef>
-          <a:effectRef idx="2">
-            <a:schemeClr val="accent1"/>
-          </a:effectRef>
-          <a:fontRef idx="minor">
-            <a:schemeClr val="lt1"/>
-          </a:fontRef>
-        </p:style>
-        <p:txBody>
-          <a:bodyPr rtlCol="0" anchor="ctr"/>
-          <a:lstStyle/>
-          <a:p>
-            <a:pPr algn="ctr"/>
-          </a:p>
-        </p:txBody>
-      </p:sp>
-      <p:sp>
-        <p:nvSpPr>
-          <p:cNvPr id="7" name="Rounded Rectangle 6"/>
-          <p:cNvSpPr/>
-          <p:nvPr/>
-        </p:nvSpPr>
-        <p:spPr>
-          <a:xfrm>
-            <a:off x="594360" y="1965960"/>
-            <a:ext cx="438912" cy="438912"/>
-          </a:xfrm>
-          <a:prstGeom prst="roundRect">
-            <a:avLst>
-              <a:gd name="adj" fmla="val 12000"/>
-            </a:avLst>
-          </a:prstGeom>
-          <a:solidFill>
-            <a:srgbClr val="095292"/>
-          </a:solidFill>
-          <a:ln>
-            <a:noFill/>
-          </a:ln>
-        </p:spPr>
-        <p:style>
-          <a:lnRef idx="1">
-            <a:schemeClr val="accent1"/>
-          </a:lnRef>
-          <a:fillRef idx="3">
-            <a:schemeClr val="accent1"/>
-          </a:fillRef>
-          <a:effectRef idx="2">
-            <a:schemeClr val="accent1"/>
-          </a:effectRef>
-          <a:fontRef idx="minor">
-            <a:schemeClr val="lt1"/>
-          </a:fontRef>
-        </p:style>
-        <p:txBody>
-          <a:bodyPr rtlCol="0" anchor="ctr"/>
-          <a:lstStyle/>
-          <a:p>
-            <a:pPr algn="ctr"/>
-          </a:p>
-        </p:txBody>
-      </p:sp>
-      <p:sp>
-        <p:nvSpPr>
-          <p:cNvPr id="8" name="TextBox 7"/>
-          <p:cNvSpPr txBox="1"/>
-          <p:nvPr/>
-        </p:nvSpPr>
-        <p:spPr>
-          <a:xfrm>
-            <a:off x="594360" y="1965960"/>
-            <a:ext cx="438912" cy="438912"/>
-          </a:xfrm>
-          <a:prstGeom prst="rect">
-            <a:avLst/>
-          </a:prstGeom>
-          <a:noFill/>
-        </p:spPr>
-        <p:txBody>
-          <a:bodyPr wrap="square" anchor="ctr"/>
-          <a:lstStyle/>
-          <a:p>
-            <a:pPr algn="ctr"/>
-            <a:r>
-              <a:rPr sz="1600" b="1" i="0">
-                <a:solidFill>
-                  <a:srgbClr val="FFFFFF"/>
-                </a:solidFill>
-                <a:latin typeface="Calibri"/>
-              </a:rPr>
-              <a:t>1</a:t>
-            </a:r>
-          </a:p>
-        </p:txBody>
-      </p:sp>
-      <p:sp>
-        <p:nvSpPr>
-          <p:cNvPr id="9" name="TextBox 8"/>
-          <p:cNvSpPr txBox="1"/>
-          <p:nvPr/>
-        </p:nvSpPr>
-        <p:spPr>
-          <a:xfrm>
-            <a:off x="1188720" y="1751076"/>
-            <a:ext cx="10271455" cy="886968"/>
-          </a:xfrm>
-          <a:prstGeom prst="rect">
-            <a:avLst/>
-          </a:prstGeom>
-          <a:noFill/>
-        </p:spPr>
-        <p:txBody>
-          <a:bodyPr wrap="square" anchor="ctr"/>
-          <a:lstStyle/>
-          <a:p>
-            <a:r>
-              <a:rPr sz="1500" b="1" i="0">
-                <a:solidFill>
-                  <a:srgbClr val="095292"/>
-                </a:solidFill>
-                <a:latin typeface="Calibri"/>
-              </a:rPr>
-              <a:t>45 s · El periodo y qué dolía</a:t>
-            </a:r>
-          </a:p>
-          <a:p>
             <a:pPr>
-              <a:spcBef>
-                <a:spcPts val="200"/>
-              </a:spcBef>
+              <a:spcAft>
+                <a:spcPts val="800"/>
+              </a:spcAft>
             </a:pPr>
             <a:r>
-              <a:rPr sz="1300" b="0" i="0">
-                <a:solidFill>
-                  <a:srgbClr val="333333"/>
-                </a:solidFill>
-                <a:latin typeface="Calibri"/>
-              </a:rPr>
-              <a:t>Qué años les tocaron y cuál era el problema de la época.</a:t>
-            </a:r>
-          </a:p>
-        </p:txBody>
-      </p:sp>
-      <p:sp>
-        <p:nvSpPr>
-          <p:cNvPr id="10" name="Rounded Rectangle 9"/>
-          <p:cNvSpPr/>
-          <p:nvPr/>
-        </p:nvSpPr>
-        <p:spPr>
-          <a:xfrm>
-            <a:off x="457200" y="2802636"/>
-            <a:ext cx="11277295" cy="1051560"/>
-          </a:xfrm>
-          <a:prstGeom prst="roundRect">
-            <a:avLst>
-              <a:gd name="adj" fmla="val 12000"/>
-            </a:avLst>
-          </a:prstGeom>
-          <a:solidFill>
-            <a:srgbClr val="E8F4FA"/>
-          </a:solidFill>
-          <a:ln>
-            <a:noFill/>
-          </a:ln>
-        </p:spPr>
-        <p:style>
-          <a:lnRef idx="1">
-            <a:schemeClr val="accent1"/>
-          </a:lnRef>
-          <a:fillRef idx="3">
-            <a:schemeClr val="accent1"/>
-          </a:fillRef>
-          <a:effectRef idx="2">
-            <a:schemeClr val="accent1"/>
-          </a:effectRef>
-          <a:fontRef idx="minor">
-            <a:schemeClr val="lt1"/>
-          </a:fontRef>
-        </p:style>
-        <p:txBody>
-          <a:bodyPr rtlCol="0" anchor="ctr"/>
-          <a:lstStyle/>
-          <a:p>
-            <a:pPr algn="ctr"/>
-          </a:p>
-        </p:txBody>
-      </p:sp>
-      <p:sp>
-        <p:nvSpPr>
-          <p:cNvPr id="11" name="Rounded Rectangle 10"/>
-          <p:cNvSpPr/>
-          <p:nvPr/>
-        </p:nvSpPr>
-        <p:spPr>
-          <a:xfrm>
-            <a:off x="594360" y="3108960"/>
-            <a:ext cx="438912" cy="438912"/>
-          </a:xfrm>
-          <a:prstGeom prst="roundRect">
-            <a:avLst>
-              <a:gd name="adj" fmla="val 12000"/>
-            </a:avLst>
-          </a:prstGeom>
-          <a:solidFill>
-            <a:srgbClr val="095292"/>
-          </a:solidFill>
-          <a:ln>
-            <a:noFill/>
-          </a:ln>
-        </p:spPr>
-        <p:style>
-          <a:lnRef idx="1">
-            <a:schemeClr val="accent1"/>
-          </a:lnRef>
-          <a:fillRef idx="3">
-            <a:schemeClr val="accent1"/>
-          </a:fillRef>
-          <a:effectRef idx="2">
-            <a:schemeClr val="accent1"/>
-          </a:effectRef>
-          <a:fontRef idx="minor">
-            <a:schemeClr val="lt1"/>
-          </a:fontRef>
-        </p:style>
-        <p:txBody>
-          <a:bodyPr rtlCol="0" anchor="ctr"/>
-          <a:lstStyle/>
-          <a:p>
-            <a:pPr algn="ctr"/>
-          </a:p>
-        </p:txBody>
-      </p:sp>
-      <p:sp>
-        <p:nvSpPr>
-          <p:cNvPr id="12" name="TextBox 11"/>
-          <p:cNvSpPr txBox="1"/>
-          <p:nvPr/>
-        </p:nvSpPr>
-        <p:spPr>
-          <a:xfrm>
-            <a:off x="594360" y="3108960"/>
-            <a:ext cx="438912" cy="438912"/>
-          </a:xfrm>
-          <a:prstGeom prst="rect">
-            <a:avLst/>
-          </a:prstGeom>
-          <a:noFill/>
-        </p:spPr>
-        <p:txBody>
-          <a:bodyPr wrap="square" anchor="ctr"/>
-          <a:lstStyle/>
-          <a:p>
-            <a:pPr algn="ctr"/>
-            <a:r>
-              <a:rPr sz="1600" b="1" i="0">
-                <a:solidFill>
-                  <a:srgbClr val="FFFFFF"/>
-                </a:solidFill>
-                <a:latin typeface="Calibri"/>
-              </a:rPr>
-              <a:t>2</a:t>
-            </a:r>
-          </a:p>
-        </p:txBody>
-      </p:sp>
-      <p:sp>
-        <p:nvSpPr>
-          <p:cNvPr id="13" name="TextBox 12"/>
-          <p:cNvSpPr txBox="1"/>
-          <p:nvPr/>
-        </p:nvSpPr>
-        <p:spPr>
-          <a:xfrm>
-            <a:off x="1188720" y="2894076"/>
-            <a:ext cx="10271455" cy="886968"/>
-          </a:xfrm>
-          <a:prstGeom prst="rect">
-            <a:avLst/>
-          </a:prstGeom>
-          <a:noFill/>
-        </p:spPr>
-        <p:txBody>
-          <a:bodyPr wrap="square" anchor="ctr"/>
-          <a:lstStyle/>
-          <a:p>
-            <a:r>
-              <a:rPr sz="1500" b="1" i="0">
-                <a:solidFill>
-                  <a:srgbClr val="095292"/>
-                </a:solidFill>
-                <a:latin typeface="Calibri"/>
-              </a:rPr>
-              <a:t>60 s · Los cuatro hitos</a:t>
+              <a:rPr sz="2000" b="0" i="0">
+                <a:solidFill>
+                  <a:srgbClr val="333333"/>
+                </a:solidFill>
+                <a:latin typeface="Calibri"/>
+              </a:rPr>
+              <a:t>–   </a:t>
+            </a:r>
+            <a:r>
+              <a:rPr sz="2000" b="1" i="0">
+                <a:solidFill>
+                  <a:srgbClr val="333333"/>
+                </a:solidFill>
+                <a:latin typeface="Calibri"/>
+              </a:rPr>
+              <a:t>Trabajo dirigido:</a:t>
+            </a:r>
+            <a:r>
+              <a:rPr sz="2000" b="0" i="0">
+                <a:solidFill>
+                  <a:srgbClr val="333333"/>
+                </a:solidFill>
+                <a:latin typeface="Calibri"/>
+              </a:rPr>
+              <a:t> Investigación sobre hitos históricos — cada equipo completa la línea de tiempo del curso juntando los cinco tramos expuestos hoy, en la carpeta del equipo.</a:t>
             </a:r>
           </a:p>
           <a:p>
             <a:pPr>
-              <a:spcBef>
-                <a:spcPts val="200"/>
-              </a:spcBef>
+              <a:spcAft>
+                <a:spcPts val="800"/>
+              </a:spcAft>
             </a:pPr>
             <a:r>
-              <a:rPr sz="1300" b="0" i="0">
-                <a:solidFill>
-                  <a:srgbClr val="333333"/>
-                </a:solidFill>
-                <a:latin typeface="Calibri"/>
-              </a:rPr>
-              <a:t>En orden, con año. Una frase por hito, sin leer la pantalla.</a:t>
-            </a:r>
-          </a:p>
-        </p:txBody>
-      </p:sp>
-      <p:sp>
-        <p:nvSpPr>
-          <p:cNvPr id="14" name="Rounded Rectangle 13"/>
-          <p:cNvSpPr/>
-          <p:nvPr/>
-        </p:nvSpPr>
-        <p:spPr>
-          <a:xfrm>
-            <a:off x="457200" y="3945636"/>
-            <a:ext cx="11277295" cy="1051560"/>
-          </a:xfrm>
-          <a:prstGeom prst="roundRect">
-            <a:avLst>
-              <a:gd name="adj" fmla="val 12000"/>
-            </a:avLst>
-          </a:prstGeom>
-          <a:solidFill>
-            <a:srgbClr val="F2F2F2"/>
-          </a:solidFill>
-          <a:ln>
-            <a:noFill/>
-          </a:ln>
-        </p:spPr>
-        <p:style>
-          <a:lnRef idx="1">
-            <a:schemeClr val="accent1"/>
-          </a:lnRef>
-          <a:fillRef idx="3">
-            <a:schemeClr val="accent1"/>
-          </a:fillRef>
-          <a:effectRef idx="2">
-            <a:schemeClr val="accent1"/>
-          </a:effectRef>
-          <a:fontRef idx="minor">
-            <a:schemeClr val="lt1"/>
-          </a:fontRef>
-        </p:style>
-        <p:txBody>
-          <a:bodyPr rtlCol="0" anchor="ctr"/>
-          <a:lstStyle/>
-          <a:p>
-            <a:pPr algn="ctr"/>
-          </a:p>
-        </p:txBody>
-      </p:sp>
-      <p:sp>
-        <p:nvSpPr>
-          <p:cNvPr id="15" name="Rounded Rectangle 14"/>
-          <p:cNvSpPr/>
-          <p:nvPr/>
-        </p:nvSpPr>
-        <p:spPr>
-          <a:xfrm>
-            <a:off x="594360" y="4251960"/>
-            <a:ext cx="438912" cy="438912"/>
-          </a:xfrm>
-          <a:prstGeom prst="roundRect">
-            <a:avLst>
-              <a:gd name="adj" fmla="val 12000"/>
-            </a:avLst>
-          </a:prstGeom>
-          <a:solidFill>
-            <a:srgbClr val="095292"/>
-          </a:solidFill>
-          <a:ln>
-            <a:noFill/>
-          </a:ln>
-        </p:spPr>
-        <p:style>
-          <a:lnRef idx="1">
-            <a:schemeClr val="accent1"/>
-          </a:lnRef>
-          <a:fillRef idx="3">
-            <a:schemeClr val="accent1"/>
-          </a:fillRef>
-          <a:effectRef idx="2">
-            <a:schemeClr val="accent1"/>
-          </a:effectRef>
-          <a:fontRef idx="minor">
-            <a:schemeClr val="lt1"/>
-          </a:fontRef>
-        </p:style>
-        <p:txBody>
-          <a:bodyPr rtlCol="0" anchor="ctr"/>
-          <a:lstStyle/>
-          <a:p>
-            <a:pPr algn="ctr"/>
-          </a:p>
-        </p:txBody>
-      </p:sp>
-      <p:sp>
-        <p:nvSpPr>
-          <p:cNvPr id="16" name="TextBox 15"/>
-          <p:cNvSpPr txBox="1"/>
-          <p:nvPr/>
-        </p:nvSpPr>
-        <p:spPr>
-          <a:xfrm>
-            <a:off x="594360" y="4251960"/>
-            <a:ext cx="438912" cy="438912"/>
-          </a:xfrm>
-          <a:prstGeom prst="rect">
-            <a:avLst/>
-          </a:prstGeom>
-          <a:noFill/>
-        </p:spPr>
-        <p:txBody>
-          <a:bodyPr wrap="square" anchor="ctr"/>
-          <a:lstStyle/>
-          <a:p>
-            <a:pPr algn="ctr"/>
-            <a:r>
-              <a:rPr sz="1600" b="1" i="0">
-                <a:solidFill>
-                  <a:srgbClr val="FFFFFF"/>
-                </a:solidFill>
-                <a:latin typeface="Calibri"/>
-              </a:rPr>
-              <a:t>3</a:t>
-            </a:r>
-          </a:p>
-        </p:txBody>
-      </p:sp>
-      <p:sp>
-        <p:nvSpPr>
-          <p:cNvPr id="17" name="TextBox 16"/>
-          <p:cNvSpPr txBox="1"/>
-          <p:nvPr/>
-        </p:nvSpPr>
-        <p:spPr>
-          <a:xfrm>
-            <a:off x="1188720" y="4037076"/>
-            <a:ext cx="10271455" cy="886968"/>
-          </a:xfrm>
-          <a:prstGeom prst="rect">
-            <a:avLst/>
-          </a:prstGeom>
-          <a:noFill/>
-        </p:spPr>
-        <p:txBody>
-          <a:bodyPr wrap="square" anchor="ctr"/>
-          <a:lstStyle/>
-          <a:p>
-            <a:r>
-              <a:rPr sz="1500" b="1" i="0">
-                <a:solidFill>
-                  <a:srgbClr val="095292"/>
-                </a:solidFill>
-                <a:latin typeface="Calibri"/>
-              </a:rPr>
-              <a:t>60 s · Qué sigue vivo</a:t>
+              <a:rPr sz="2000" b="0" i="0">
+                <a:solidFill>
+                  <a:srgbClr val="333333"/>
+                </a:solidFill>
+                <a:latin typeface="Calibri"/>
+              </a:rPr>
+              <a:t>–   </a:t>
+            </a:r>
+            <a:r>
+              <a:rPr sz="2000" b="1" i="0">
+                <a:solidFill>
+                  <a:srgbClr val="333333"/>
+                </a:solidFill>
+                <a:latin typeface="Calibri"/>
+              </a:rPr>
+              <a:t>Trabajo independiente:</a:t>
+            </a:r>
+            <a:r>
+              <a:rPr sz="2000" b="0" i="0">
+                <a:solidFill>
+                  <a:srgbClr val="333333"/>
+                </a:solidFill>
+                <a:latin typeface="Calibri"/>
+              </a:rPr>
+              <a:t> Elaboración de línea de tiempo: la versión completa (los cinco periodos), con al menos un «qué sigue vivo hoy» por periodo.</a:t>
             </a:r>
           </a:p>
           <a:p>
             <a:pPr>
-              <a:spcBef>
-                <a:spcPts val="200"/>
-              </a:spcBef>
+              <a:spcAft>
+                <a:spcPts val="800"/>
+              </a:spcAft>
             </a:pPr>
             <a:r>
-              <a:rPr sz="1300" b="0" i="0">
-                <a:solidFill>
-                  <a:srgbClr val="333333"/>
-                </a:solidFill>
-                <a:latin typeface="Calibri"/>
-              </a:rPr>
-              <a:t>Los dos hitos cuyo problema no está cerrado, con su ejemplo propio. Es lo que más pesa.</a:t>
-            </a:r>
-          </a:p>
-        </p:txBody>
-      </p:sp>
-      <p:sp>
-        <p:nvSpPr>
-          <p:cNvPr id="18" name="Rounded Rectangle 17"/>
-          <p:cNvSpPr/>
-          <p:nvPr/>
-        </p:nvSpPr>
-        <p:spPr>
-          <a:xfrm>
-            <a:off x="457200" y="5088636"/>
-            <a:ext cx="11277295" cy="1051560"/>
-          </a:xfrm>
-          <a:prstGeom prst="roundRect">
-            <a:avLst>
-              <a:gd name="adj" fmla="val 12000"/>
-            </a:avLst>
-          </a:prstGeom>
-          <a:solidFill>
-            <a:srgbClr val="E8F4FA"/>
-          </a:solidFill>
-          <a:ln>
-            <a:noFill/>
-          </a:ln>
-        </p:spPr>
-        <p:style>
-          <a:lnRef idx="1">
-            <a:schemeClr val="accent1"/>
-          </a:lnRef>
-          <a:fillRef idx="3">
-            <a:schemeClr val="accent1"/>
-          </a:fillRef>
-          <a:effectRef idx="2">
-            <a:schemeClr val="accent1"/>
-          </a:effectRef>
-          <a:fontRef idx="minor">
-            <a:schemeClr val="lt1"/>
-          </a:fontRef>
-        </p:style>
-        <p:txBody>
-          <a:bodyPr rtlCol="0" anchor="ctr"/>
-          <a:lstStyle/>
-          <a:p>
-            <a:pPr algn="ctr"/>
-          </a:p>
-        </p:txBody>
-      </p:sp>
-      <p:sp>
-        <p:nvSpPr>
-          <p:cNvPr id="19" name="Rounded Rectangle 18"/>
-          <p:cNvSpPr/>
-          <p:nvPr/>
-        </p:nvSpPr>
-        <p:spPr>
-          <a:xfrm>
-            <a:off x="594360" y="5394960"/>
-            <a:ext cx="438912" cy="438912"/>
-          </a:xfrm>
-          <a:prstGeom prst="roundRect">
-            <a:avLst>
-              <a:gd name="adj" fmla="val 12000"/>
-            </a:avLst>
-          </a:prstGeom>
-          <a:solidFill>
-            <a:srgbClr val="095292"/>
-          </a:solidFill>
-          <a:ln>
-            <a:noFill/>
-          </a:ln>
-        </p:spPr>
-        <p:style>
-          <a:lnRef idx="1">
-            <a:schemeClr val="accent1"/>
-          </a:lnRef>
-          <a:fillRef idx="3">
-            <a:schemeClr val="accent1"/>
-          </a:fillRef>
-          <a:effectRef idx="2">
-            <a:schemeClr val="accent1"/>
-          </a:effectRef>
-          <a:fontRef idx="minor">
-            <a:schemeClr val="lt1"/>
-          </a:fontRef>
-        </p:style>
-        <p:txBody>
-          <a:bodyPr rtlCol="0" anchor="ctr"/>
-          <a:lstStyle/>
-          <a:p>
-            <a:pPr algn="ctr"/>
-          </a:p>
-        </p:txBody>
-      </p:sp>
-      <p:sp>
-        <p:nvSpPr>
-          <p:cNvPr id="20" name="TextBox 19"/>
-          <p:cNvSpPr txBox="1"/>
-          <p:nvPr/>
-        </p:nvSpPr>
-        <p:spPr>
-          <a:xfrm>
-            <a:off x="594360" y="5394960"/>
-            <a:ext cx="438912" cy="438912"/>
-          </a:xfrm>
-          <a:prstGeom prst="rect">
-            <a:avLst/>
-          </a:prstGeom>
-          <a:noFill/>
-        </p:spPr>
-        <p:txBody>
-          <a:bodyPr wrap="square" anchor="ctr"/>
-          <a:lstStyle/>
-          <a:p>
-            <a:pPr algn="ctr"/>
-            <a:r>
-              <a:rPr sz="1600" b="1" i="0">
-                <a:solidFill>
-                  <a:srgbClr val="FFFFFF"/>
-                </a:solidFill>
-                <a:latin typeface="Calibri"/>
-              </a:rPr>
-              <a:t>4</a:t>
-            </a:r>
-          </a:p>
-        </p:txBody>
-      </p:sp>
-      <p:sp>
-        <p:nvSpPr>
-          <p:cNvPr id="21" name="TextBox 20"/>
-          <p:cNvSpPr txBox="1"/>
-          <p:nvPr/>
-        </p:nvSpPr>
-        <p:spPr>
-          <a:xfrm>
-            <a:off x="1188720" y="5180076"/>
-            <a:ext cx="10271455" cy="886968"/>
-          </a:xfrm>
-          <a:prstGeom prst="rect">
-            <a:avLst/>
-          </a:prstGeom>
-          <a:noFill/>
-        </p:spPr>
-        <p:txBody>
-          <a:bodyPr wrap="square" anchor="ctr"/>
-          <a:lstStyle/>
-          <a:p>
-            <a:r>
-              <a:rPr sz="1500" b="1" i="0">
-                <a:solidFill>
-                  <a:srgbClr val="095292"/>
-                </a:solidFill>
-                <a:latin typeface="Calibri"/>
-              </a:rPr>
-              <a:t>15 s · Las fuentes</a:t>
+              <a:rPr sz="2000" b="0" i="0">
+                <a:solidFill>
+                  <a:srgbClr val="333333"/>
+                </a:solidFill>
+                <a:latin typeface="Calibri"/>
+              </a:rPr>
+              <a:t>–   </a:t>
+            </a:r>
+            <a:r>
+              <a:rPr sz="2000" b="1" i="0">
+                <a:solidFill>
+                  <a:srgbClr val="333333"/>
+                </a:solidFill>
+                <a:latin typeface="Calibri"/>
+              </a:rPr>
+              <a:t>Clase 3 · Fundamentos básicos de la Ingeniería de Sistemas</a:t>
+            </a:r>
+            <a:r>
+              <a:rPr sz="2000" b="0" i="0">
+                <a:solidFill>
+                  <a:srgbClr val="333333"/>
+                </a:solidFill>
+                <a:latin typeface="Calibri"/>
+              </a:rPr>
+              <a:t> — qué es un sistema y por qué el software es solo una parte de él. Se trabaja con un asistente de IA, y hay que declarar el prompt usado.</a:t>
             </a:r>
           </a:p>
           <a:p>
             <a:pPr>
-              <a:spcBef>
-                <a:spcPts val="200"/>
-              </a:spcBef>
+              <a:spcAft>
+                <a:spcPts val="800"/>
+              </a:spcAft>
             </a:pPr>
             <a:r>
-              <a:rPr sz="1300" b="0" i="0">
-                <a:solidFill>
-                  <a:srgbClr val="333333"/>
-                </a:solidFill>
-                <a:latin typeface="Calibri"/>
-              </a:rPr>
-              <a:t>De dónde salió lo que dijeron.</a:t>
-            </a:r>
-          </a:p>
-        </p:txBody>
-      </p:sp>
-      <p:sp>
-        <p:nvSpPr>
-          <p:cNvPr id="22" name="TextBox 21"/>
+              <a:rPr sz="2000" b="0" i="0">
+                <a:solidFill>
+                  <a:srgbClr val="333333"/>
+                </a:solidFill>
+                <a:latin typeface="Calibri"/>
+              </a:rPr>
+              <a:t>–   </a:t>
+            </a:r>
+            <a:r>
+              <a:rPr sz="2000" b="1" i="0">
+                <a:solidFill>
+                  <a:srgbClr val="333333"/>
+                </a:solidFill>
+                <a:latin typeface="Calibri"/>
+              </a:rPr>
+              <a:t>Aviso:</a:t>
+            </a:r>
+            <a:r>
+              <a:rPr sz="2000" b="0" i="0">
+                <a:solidFill>
+                  <a:srgbClr val="333333"/>
+                </a:solidFill>
+                <a:latin typeface="Calibri"/>
+              </a:rPr>
+              <a:t> Traigan la línea de tiempo completa en la carpeta del equipo. En la sesión 3 se descompone un sistema del entorno y la línea de tiempo es el punto de partida.</a:t>
+            </a:r>
+          </a:p>
+          <a:p>
+            <a:pPr>
+              <a:spcAft>
+                <a:spcPts val="800"/>
+              </a:spcAft>
+            </a:pPr>
+            <a:r>
+              <a:rPr sz="2000" b="0" i="0">
+                <a:solidFill>
+                  <a:srgbClr val="333333"/>
+                </a:solidFill>
+                <a:latin typeface="Calibri"/>
+              </a:rPr>
+              <a:t>–   </a:t>
+            </a:r>
+            <a:r>
+              <a:rPr sz="2000" b="1" i="0">
+                <a:solidFill>
+                  <a:srgbClr val="333333"/>
+                </a:solidFill>
+                <a:latin typeface="Calibri"/>
+              </a:rPr>
+              <a:t>Antes de salir:</a:t>
+            </a:r>
+            <a:r>
+              <a:rPr sz="2000" b="0" i="0">
+                <a:solidFill>
+                  <a:srgbClr val="333333"/>
+                </a:solidFill>
+                <a:latin typeface="Calibri"/>
+              </a:rPr>
+              <a:t> el enlace del documento del equipo en el chat, con permiso de lectura para el docente, y el nombre del vocero de hoy.</a:t>
+            </a:r>
+          </a:p>
+        </p:txBody>
+      </p:sp>
+      <p:sp>
+        <p:nvSpPr>
+          <p:cNvPr id="6" name="TextBox 5"/>
           <p:cNvSpPr txBox="1"/>
           <p:nvPr/>
         </p:nvSpPr>
@@ -9532,380 +9293,6 @@
 </file>
 
 <file path=ppt/slides/slide22.xml><?xml version="1.0" encoding="utf-8"?>
-<p:sld xmlns:a="http://schemas.openxmlformats.org/drawingml/2006/main" xmlns:p="http://schemas.openxmlformats.org/presentationml/2006/main" xmlns:r="http://schemas.openxmlformats.org/officeDocument/2006/relationships">
-  <p:cSld>
-    <p:bg>
-      <p:bgPr>
-        <a:solidFill>
-          <a:srgbClr val="FFFFFF"/>
-        </a:solidFill>
-        <a:effectLst/>
-      </p:bgPr>
-    </p:bg>
-    <p:spTree>
-      <p:nvGrpSpPr>
-        <p:cNvPr id="1" name=""/>
-        <p:cNvGrpSpPr/>
-        <p:nvPr/>
-      </p:nvGrpSpPr>
-      <p:grpSpPr/>
-      <p:sp>
-        <p:nvSpPr>
-          <p:cNvPr id="2" name="Rectangle 1"/>
-          <p:cNvSpPr/>
-          <p:nvPr/>
-        </p:nvSpPr>
-        <p:spPr>
-          <a:xfrm>
-            <a:off x="0" y="0"/>
-            <a:ext cx="12191695" cy="960120"/>
-          </a:xfrm>
-          <a:prstGeom prst="rect">
-            <a:avLst/>
-          </a:prstGeom>
-          <a:solidFill>
-            <a:srgbClr val="095292"/>
-          </a:solidFill>
-          <a:ln>
-            <a:noFill/>
-          </a:ln>
-        </p:spPr>
-        <p:style>
-          <a:lnRef idx="1">
-            <a:schemeClr val="accent1"/>
-          </a:lnRef>
-          <a:fillRef idx="3">
-            <a:schemeClr val="accent1"/>
-          </a:fillRef>
-          <a:effectRef idx="2">
-            <a:schemeClr val="accent1"/>
-          </a:effectRef>
-          <a:fontRef idx="minor">
-            <a:schemeClr val="lt1"/>
-          </a:fontRef>
-        </p:style>
-        <p:txBody>
-          <a:bodyPr rtlCol="0" anchor="ctr"/>
-          <a:lstStyle/>
-          <a:p>
-            <a:pPr algn="ctr"/>
-          </a:p>
-        </p:txBody>
-      </p:sp>
-      <p:sp>
-        <p:nvSpPr>
-          <p:cNvPr id="3" name="Rectangle 2"/>
-          <p:cNvSpPr/>
-          <p:nvPr/>
-        </p:nvSpPr>
-        <p:spPr>
-          <a:xfrm>
-            <a:off x="0" y="960120"/>
-            <a:ext cx="12191695" cy="41148"/>
-          </a:xfrm>
-          <a:prstGeom prst="rect">
-            <a:avLst/>
-          </a:prstGeom>
-          <a:solidFill>
-            <a:srgbClr val="FFD000"/>
-          </a:solidFill>
-          <a:ln>
-            <a:noFill/>
-          </a:ln>
-        </p:spPr>
-        <p:style>
-          <a:lnRef idx="1">
-            <a:schemeClr val="accent1"/>
-          </a:lnRef>
-          <a:fillRef idx="3">
-            <a:schemeClr val="accent1"/>
-          </a:fillRef>
-          <a:effectRef idx="2">
-            <a:schemeClr val="accent1"/>
-          </a:effectRef>
-          <a:fontRef idx="minor">
-            <a:schemeClr val="lt1"/>
-          </a:fontRef>
-        </p:style>
-        <p:txBody>
-          <a:bodyPr rtlCol="0" anchor="ctr"/>
-          <a:lstStyle/>
-          <a:p>
-            <a:pPr algn="ctr"/>
-          </a:p>
-        </p:txBody>
-      </p:sp>
-      <p:sp>
-        <p:nvSpPr>
-          <p:cNvPr id="4" name="TextBox 3"/>
-          <p:cNvSpPr txBox="1"/>
-          <p:nvPr/>
-        </p:nvSpPr>
-        <p:spPr>
-          <a:xfrm>
-            <a:off x="457200" y="164592"/>
-            <a:ext cx="11277295" cy="502920"/>
-          </a:xfrm>
-          <a:prstGeom prst="rect">
-            <a:avLst/>
-          </a:prstGeom>
-          <a:noFill/>
-        </p:spPr>
-        <p:txBody>
-          <a:bodyPr wrap="square">
-            <a:spAutoFit/>
-          </a:bodyPr>
-          <a:lstStyle/>
-          <a:p>
-            <a:r>
-              <a:rPr sz="2600" b="1" i="0">
-                <a:solidFill>
-                  <a:srgbClr val="FFFFFF"/>
-                </a:solidFill>
-                <a:latin typeface="Calibri"/>
-              </a:rPr>
-              <a:t>Para la Clase 3</a:t>
-            </a:r>
-          </a:p>
-        </p:txBody>
-      </p:sp>
-      <p:sp>
-        <p:nvSpPr>
-          <p:cNvPr id="5" name="TextBox 4"/>
-          <p:cNvSpPr txBox="1"/>
-          <p:nvPr/>
-        </p:nvSpPr>
-        <p:spPr>
-          <a:xfrm>
-            <a:off x="457200" y="1170432"/>
-            <a:ext cx="11277295" cy="5230368"/>
-          </a:xfrm>
-          <a:prstGeom prst="rect">
-            <a:avLst/>
-          </a:prstGeom>
-          <a:noFill/>
-        </p:spPr>
-        <p:txBody>
-          <a:bodyPr wrap="square">
-            <a:spAutoFit/>
-          </a:bodyPr>
-          <a:lstStyle/>
-          <a:p>
-            <a:pPr>
-              <a:spcAft>
-                <a:spcPts val="800"/>
-              </a:spcAft>
-            </a:pPr>
-            <a:r>
-              <a:rPr sz="2000" b="0" i="0">
-                <a:solidFill>
-                  <a:srgbClr val="333333"/>
-                </a:solidFill>
-                <a:latin typeface="Calibri"/>
-              </a:rPr>
-              <a:t>–   </a:t>
-            </a:r>
-            <a:r>
-              <a:rPr sz="2000" b="1" i="0">
-                <a:solidFill>
-                  <a:srgbClr val="333333"/>
-                </a:solidFill>
-                <a:latin typeface="Calibri"/>
-              </a:rPr>
-              <a:t>Trabajo dirigido:</a:t>
-            </a:r>
-            <a:r>
-              <a:rPr sz="2000" b="0" i="0">
-                <a:solidFill>
-                  <a:srgbClr val="333333"/>
-                </a:solidFill>
-                <a:latin typeface="Calibri"/>
-              </a:rPr>
-              <a:t> Investigación sobre hitos históricos — cada equipo completa la línea de tiempo del curso juntando los cinco tramos expuestos hoy, en la carpeta del equipo.</a:t>
-            </a:r>
-          </a:p>
-          <a:p>
-            <a:pPr>
-              <a:spcAft>
-                <a:spcPts val="800"/>
-              </a:spcAft>
-            </a:pPr>
-            <a:r>
-              <a:rPr sz="2000" b="0" i="0">
-                <a:solidFill>
-                  <a:srgbClr val="333333"/>
-                </a:solidFill>
-                <a:latin typeface="Calibri"/>
-              </a:rPr>
-              <a:t>–   </a:t>
-            </a:r>
-            <a:r>
-              <a:rPr sz="2000" b="1" i="0">
-                <a:solidFill>
-                  <a:srgbClr val="333333"/>
-                </a:solidFill>
-                <a:latin typeface="Calibri"/>
-              </a:rPr>
-              <a:t>Trabajo independiente:</a:t>
-            </a:r>
-            <a:r>
-              <a:rPr sz="2000" b="0" i="0">
-                <a:solidFill>
-                  <a:srgbClr val="333333"/>
-                </a:solidFill>
-                <a:latin typeface="Calibri"/>
-              </a:rPr>
-              <a:t> Elaboración de línea de tiempo: la versión completa (los cinco periodos), con al menos un «qué sigue vivo hoy» por periodo.</a:t>
-            </a:r>
-          </a:p>
-          <a:p>
-            <a:pPr>
-              <a:spcAft>
-                <a:spcPts val="800"/>
-              </a:spcAft>
-            </a:pPr>
-            <a:r>
-              <a:rPr sz="2000" b="0" i="0">
-                <a:solidFill>
-                  <a:srgbClr val="333333"/>
-                </a:solidFill>
-                <a:latin typeface="Calibri"/>
-              </a:rPr>
-              <a:t>–   </a:t>
-            </a:r>
-            <a:r>
-              <a:rPr sz="2000" b="1" i="0">
-                <a:solidFill>
-                  <a:srgbClr val="333333"/>
-                </a:solidFill>
-                <a:latin typeface="Calibri"/>
-              </a:rPr>
-              <a:t>Clase 3 · Fundamentos básicos de la Ingeniería de Sistemas</a:t>
-            </a:r>
-            <a:r>
-              <a:rPr sz="2000" b="0" i="0">
-                <a:solidFill>
-                  <a:srgbClr val="333333"/>
-                </a:solidFill>
-                <a:latin typeface="Calibri"/>
-              </a:rPr>
-              <a:t> — qué es un sistema y por qué el software es solo una parte de él. Se trabaja con un asistente de IA, y hay que declarar el prompt usado.</a:t>
-            </a:r>
-          </a:p>
-          <a:p>
-            <a:pPr>
-              <a:spcAft>
-                <a:spcPts val="800"/>
-              </a:spcAft>
-            </a:pPr>
-            <a:r>
-              <a:rPr sz="2000" b="0" i="0">
-                <a:solidFill>
-                  <a:srgbClr val="333333"/>
-                </a:solidFill>
-                <a:latin typeface="Calibri"/>
-              </a:rPr>
-              <a:t>–   </a:t>
-            </a:r>
-            <a:r>
-              <a:rPr sz="2000" b="1" i="0">
-                <a:solidFill>
-                  <a:srgbClr val="333333"/>
-                </a:solidFill>
-                <a:latin typeface="Calibri"/>
-              </a:rPr>
-              <a:t>Aviso:</a:t>
-            </a:r>
-            <a:r>
-              <a:rPr sz="2000" b="0" i="0">
-                <a:solidFill>
-                  <a:srgbClr val="333333"/>
-                </a:solidFill>
-                <a:latin typeface="Calibri"/>
-              </a:rPr>
-              <a:t> Traigan la línea de tiempo completa en la carpeta del equipo. En la sesión 3 se descompone un sistema del entorno y la línea de tiempo es el punto de partida.</a:t>
-            </a:r>
-          </a:p>
-          <a:p>
-            <a:pPr>
-              <a:spcAft>
-                <a:spcPts val="800"/>
-              </a:spcAft>
-            </a:pPr>
-            <a:r>
-              <a:rPr sz="2000" b="0" i="0">
-                <a:solidFill>
-                  <a:srgbClr val="333333"/>
-                </a:solidFill>
-                <a:latin typeface="Calibri"/>
-              </a:rPr>
-              <a:t>–   </a:t>
-            </a:r>
-            <a:r>
-              <a:rPr sz="2000" b="1" i="0">
-                <a:solidFill>
-                  <a:srgbClr val="333333"/>
-                </a:solidFill>
-                <a:latin typeface="Calibri"/>
-              </a:rPr>
-              <a:t>Antes de salir:</a:t>
-            </a:r>
-            <a:r>
-              <a:rPr sz="2000" b="0" i="0">
-                <a:solidFill>
-                  <a:srgbClr val="333333"/>
-                </a:solidFill>
-                <a:latin typeface="Calibri"/>
-              </a:rPr>
-              <a:t> el enlace del documento del equipo en el chat, con permiso de lectura para el docente, y el nombre del vocero de hoy.</a:t>
-            </a:r>
-          </a:p>
-        </p:txBody>
-      </p:sp>
-      <p:sp>
-        <p:nvSpPr>
-          <p:cNvPr id="6" name="TextBox 5"/>
-          <p:cNvSpPr txBox="1"/>
-          <p:nvPr/>
-        </p:nvSpPr>
-        <p:spPr>
-          <a:xfrm>
-            <a:off x="11185855" y="6473952"/>
-            <a:ext cx="640080" cy="274320"/>
-          </a:xfrm>
-          <a:prstGeom prst="rect">
-            <a:avLst/>
-          </a:prstGeom>
-          <a:noFill/>
-        </p:spPr>
-        <p:txBody>
-          <a:bodyPr wrap="square">
-            <a:spAutoFit/>
-          </a:bodyPr>
-          <a:lstStyle/>
-          <a:p>
-            <a:pPr algn="r"/>
-            <a:r>
-              <a:rPr sz="1100" b="0" i="0">
-                <a:solidFill>
-                  <a:srgbClr val="666666"/>
-                </a:solidFill>
-                <a:latin typeface="Calibri"/>
-              </a:rPr>
-              <a:t>22</a:t>
-            </a:r>
-          </a:p>
-        </p:txBody>
-      </p:sp>
-    </p:spTree>
-  </p:cSld>
-  <p:clrMapOvr>
-    <a:masterClrMapping/>
-  </p:clrMapOvr>
-</p:sld>
-</file>
-
-<file path=ppt/slides/slide23.xml><?xml version="1.0" encoding="utf-8"?>
 <p:sld xmlns:a="http://schemas.openxmlformats.org/drawingml/2006/main" xmlns:p="http://schemas.openxmlformats.org/presentationml/2006/main" xmlns:r="http://schemas.openxmlformats.org/officeDocument/2006/relationships">
   <p:cSld>
     <p:bg>

--- a/Introduccion a la Ingenieria/Clases/Clase 2 - Historia y evolucion de la Ingenieria/Presentacion.pptx
+++ b/Introduccion a la Ingenieria/Clases/Clase 2 - Historia y evolucion de la Ingenieria/Presentacion.pptx
@@ -27,6 +27,8 @@
     <p:sldId id="275" r:id="rId26"/>
     <p:sldId id="276" r:id="rId27"/>
     <p:sldId id="277" r:id="rId28"/>
+    <p:sldId id="278" r:id="rId29"/>
+    <p:sldId id="279" r:id="rId30"/>
   </p:sldIdLst>
   <p:sldSz cx="12191695" cy="6858000" type="screen4x3"/>
   <p:notesSz cx="6858000" cy="9144000"/>
@@ -6057,7 +6059,7 @@
         <p:spPr>
           <a:xfrm>
             <a:off x="0" y="0"/>
-            <a:ext cx="12191695" cy="1170432"/>
+            <a:ext cx="12191695" cy="960120"/>
           </a:xfrm>
           <a:prstGeom prst="rect">
             <a:avLst/>
@@ -6099,7 +6101,7 @@
         </p:nvSpPr>
         <p:spPr>
           <a:xfrm>
-            <a:off x="0" y="1170432"/>
+            <a:off x="0" y="960120"/>
             <a:ext cx="12191695" cy="41148"/>
           </a:xfrm>
           <a:prstGeom prst="rect">
@@ -6143,7 +6145,7 @@
         <p:spPr>
           <a:xfrm>
             <a:off x="457200" y="164592"/>
-            <a:ext cx="11277295" cy="384048"/>
+            <a:ext cx="11277295" cy="502920"/>
           </a:xfrm>
           <a:prstGeom prst="rect">
             <a:avLst/>
@@ -6163,55 +6165,21 @@
                 </a:solidFill>
                 <a:latin typeface="Calibri"/>
               </a:rPr>
-              <a:t>Taller de hoy: Línea de tiempo del periodo</a:t>
-            </a:r>
-          </a:p>
-        </p:txBody>
-      </p:sp>
-      <p:sp>
-        <p:nvSpPr>
-          <p:cNvPr id="5" name="TextBox 4"/>
-          <p:cNvSpPr txBox="1"/>
-          <p:nvPr/>
-        </p:nvSpPr>
-        <p:spPr>
-          <a:xfrm>
-            <a:off x="457200" y="566928"/>
-            <a:ext cx="11277295" cy="411480"/>
-          </a:xfrm>
-          <a:prstGeom prst="rect">
-            <a:avLst/>
-          </a:prstGeom>
-          <a:noFill/>
-        </p:spPr>
-        <p:txBody>
-          <a:bodyPr wrap="square">
-            <a:spAutoFit/>
-          </a:bodyPr>
-          <a:lstStyle/>
-          <a:p>
-            <a:r>
-              <a:rPr sz="1400" b="0" i="0">
-                <a:solidFill>
-                  <a:srgbClr val="B8D8EE"/>
-                </a:solidFill>
-                <a:latin typeface="Calibri"/>
-              </a:rPr>
-              <a:t>17 min en equipos · un periodo por equipo, asignado en orden histórico · línea de tiempo de 4 hitos en draw.io</a:t>
-            </a:r>
-          </a:p>
-        </p:txBody>
-      </p:sp>
-      <p:sp>
-        <p:nvSpPr>
-          <p:cNvPr id="6" name="Rounded Rectangle 5"/>
+              <a:t>Plantilla del entregable: los 5 bloques</a:t>
+            </a:r>
+          </a:p>
+        </p:txBody>
+      </p:sp>
+      <p:sp>
+        <p:nvSpPr>
+          <p:cNvPr id="5" name="Rounded Rectangle 4"/>
           <p:cNvSpPr/>
           <p:nvPr/>
         </p:nvSpPr>
         <p:spPr>
           <a:xfrm>
-            <a:off x="457200" y="1472184"/>
-            <a:ext cx="11277295" cy="566928"/>
+            <a:off x="457200" y="1261872"/>
+            <a:ext cx="11277295" cy="5093208"/>
           </a:xfrm>
           <a:prstGeom prst="roundRect">
             <a:avLst>
@@ -6219,7 +6187,7 @@
             </a:avLst>
           </a:prstGeom>
           <a:solidFill>
-            <a:srgbClr val="F2F2F2"/>
+            <a:srgbClr val="1E2A38"/>
           </a:solidFill>
           <a:ln>
             <a:noFill/>
@@ -6249,25 +6217,23 @@
       </p:sp>
       <p:sp>
         <p:nvSpPr>
-          <p:cNvPr id="7" name="Rectangle 6"/>
+          <p:cNvPr id="6" name="Rectangle 5"/>
           <p:cNvSpPr/>
           <p:nvPr/>
         </p:nvSpPr>
         <p:spPr>
           <a:xfrm>
-            <a:off x="640080" y="1618487"/>
-            <a:ext cx="274320" cy="274320"/>
+            <a:off x="457200" y="1261872"/>
+            <a:ext cx="11277295" cy="320040"/>
           </a:xfrm>
           <a:prstGeom prst="rect">
             <a:avLst/>
           </a:prstGeom>
           <a:solidFill>
-            <a:srgbClr val="FFFFFF"/>
+            <a:srgbClr val="095292"/>
           </a:solidFill>
           <a:ln>
-            <a:solidFill>
-              <a:srgbClr val="333333"/>
-            </a:solidFill>
+            <a:noFill/>
           </a:ln>
         </p:spPr>
         <p:style>
@@ -6294,805 +6260,222 @@
       </p:sp>
       <p:sp>
         <p:nvSpPr>
-          <p:cNvPr id="8" name="Rectangle 7"/>
-          <p:cNvSpPr/>
-          <p:nvPr/>
-        </p:nvSpPr>
-        <p:spPr>
-          <a:xfrm>
-            <a:off x="640080" y="1618487"/>
-            <a:ext cx="73152" cy="274320"/>
-          </a:xfrm>
-          <a:prstGeom prst="rect">
-            <a:avLst/>
-          </a:prstGeom>
-          <a:solidFill>
-            <a:srgbClr val="269CCB"/>
-          </a:solidFill>
-          <a:ln>
-            <a:noFill/>
-          </a:ln>
-        </p:spPr>
-        <p:style>
-          <a:lnRef idx="1">
-            <a:schemeClr val="accent1"/>
-          </a:lnRef>
-          <a:fillRef idx="3">
-            <a:schemeClr val="accent1"/>
-          </a:fillRef>
-          <a:effectRef idx="2">
-            <a:schemeClr val="accent1"/>
-          </a:effectRef>
-          <a:fontRef idx="minor">
-            <a:schemeClr val="lt1"/>
-          </a:fontRef>
-        </p:style>
-        <p:txBody>
-          <a:bodyPr rtlCol="0" anchor="ctr"/>
-          <a:lstStyle/>
-          <a:p>
-            <a:pPr algn="ctr"/>
+          <p:cNvPr id="7" name="TextBox 6"/>
+          <p:cNvSpPr txBox="1"/>
+          <p:nvPr/>
+        </p:nvSpPr>
+        <p:spPr>
+          <a:xfrm>
+            <a:off x="685800" y="1307592"/>
+            <a:ext cx="10820095" cy="256032"/>
+          </a:xfrm>
+          <a:prstGeom prst="rect">
+            <a:avLst/>
+          </a:prstGeom>
+          <a:noFill/>
+        </p:spPr>
+        <p:txBody>
+          <a:bodyPr wrap="square" anchor="ctr"/>
+          <a:lstStyle/>
+          <a:p>
+            <a:r>
+              <a:rPr sz="1000" b="1" i="0">
+                <a:solidFill>
+                  <a:srgbClr val="269CCB"/>
+                </a:solidFill>
+                <a:latin typeface="Calibri"/>
+              </a:rPr>
+              <a:t>● ● ●</a:t>
+            </a:r>
+          </a:p>
+        </p:txBody>
+      </p:sp>
+      <p:sp>
+        <p:nvSpPr>
+          <p:cNvPr id="8" name="TextBox 7"/>
+          <p:cNvSpPr txBox="1"/>
+          <p:nvPr/>
+        </p:nvSpPr>
+        <p:spPr>
+          <a:xfrm>
+            <a:off x="777240" y="1719072"/>
+            <a:ext cx="10637215" cy="4453128"/>
+          </a:xfrm>
+          <a:prstGeom prst="rect">
+            <a:avLst/>
+          </a:prstGeom>
+          <a:noFill/>
+        </p:spPr>
+        <p:txBody>
+          <a:bodyPr wrap="square">
+            <a:spAutoFit/>
+          </a:bodyPr>
+          <a:lstStyle/>
+          <a:p>
+            <a:pPr>
+              <a:spcAft>
+                <a:spcPts val="400"/>
+              </a:spcAft>
+            </a:pPr>
+            <a:r>
+              <a:rPr sz="1400" b="0" i="0">
+                <a:solidFill>
+                  <a:srgbClr val="FFFFFF"/>
+                </a:solidFill>
+                <a:latin typeface="Calibri"/>
+              </a:rPr>
+              <a:t># Línea de tiempo del periodo</a:t>
+            </a:r>
+          </a:p>
+          <a:p>
+            <a:pPr>
+              <a:spcAft>
+                <a:spcPts val="400"/>
+              </a:spcAft>
+            </a:pPr>
+            <a:r>
+              <a:rPr sz="1400" b="0" i="0">
+                <a:solidFill>
+                  <a:srgbClr val="FFFFFF"/>
+                </a:solidFill>
+                <a:latin typeface="Calibri"/>
+              </a:rPr>
+              <a:t># Documento del equipo · un bloque por titulo, sin cambiar los nombres</a:t>
+            </a:r>
+          </a:p>
+          <a:p>
+            <a:pPr>
+              <a:spcAft>
+                <a:spcPts val="400"/>
+              </a:spcAft>
+            </a:pPr>
+            <a:r>
+              <a:rPr sz="1400" b="0" i="0">
+                <a:solidFill>
+                  <a:srgbClr val="FFFFFF"/>
+                </a:solidFill>
+                <a:latin typeface="Calibri"/>
+              </a:rPr>
+              <a:t/>
+            </a:r>
+          </a:p>
+          <a:p>
+            <a:pPr>
+              <a:spcAft>
+                <a:spcPts val="400"/>
+              </a:spcAft>
+            </a:pPr>
+            <a:r>
+              <a:rPr sz="1400" b="0" i="0">
+                <a:solidFill>
+                  <a:srgbClr val="FFFFFF"/>
+                </a:solidFill>
+                <a:latin typeface="Calibri"/>
+              </a:rPr>
+              <a:t>## 1. LOS CUATRO HITOS</a:t>
+            </a:r>
+          </a:p>
+          <a:p>
+            <a:pPr>
+              <a:spcAft>
+                <a:spcPts val="400"/>
+              </a:spcAft>
+            </a:pPr>
+            <a:r>
+              <a:rPr sz="1400" b="0" i="0">
+                <a:solidFill>
+                  <a:srgbClr val="FFFFFF"/>
+                </a:solidFill>
+                <a:latin typeface="Calibri"/>
+              </a:rPr>
+              <a:t>## 2. QUÉ DOLÍA ANTES</a:t>
+            </a:r>
+          </a:p>
+          <a:p>
+            <a:pPr>
+              <a:spcAft>
+                <a:spcPts val="400"/>
+              </a:spcAft>
+            </a:pPr>
+            <a:r>
+              <a:rPr sz="1400" b="0" i="0">
+                <a:solidFill>
+                  <a:srgbClr val="FFFFFF"/>
+                </a:solidFill>
+                <a:latin typeface="Calibri"/>
+              </a:rPr>
+              <a:t>## 3. QUÉ PROPUSO</a:t>
+            </a:r>
+          </a:p>
+          <a:p>
+            <a:pPr>
+              <a:spcAft>
+                <a:spcPts val="400"/>
+              </a:spcAft>
+            </a:pPr>
+            <a:r>
+              <a:rPr sz="1400" b="0" i="0">
+                <a:solidFill>
+                  <a:srgbClr val="FFFFFF"/>
+                </a:solidFill>
+                <a:latin typeface="Calibri"/>
+              </a:rPr>
+              <a:t>## 4. QUÉ SIGUE VIVO HOY</a:t>
+            </a:r>
+          </a:p>
+          <a:p>
+            <a:pPr>
+              <a:spcAft>
+                <a:spcPts val="400"/>
+              </a:spcAft>
+            </a:pPr>
+            <a:r>
+              <a:rPr sz="1400" b="0" i="0">
+                <a:solidFill>
+                  <a:srgbClr val="FFFFFF"/>
+                </a:solidFill>
+                <a:latin typeface="Calibri"/>
+              </a:rPr>
+              <a:t>## 5. LA FUENTE</a:t>
+            </a:r>
+          </a:p>
+          <a:p>
+            <a:pPr>
+              <a:spcAft>
+                <a:spcPts val="400"/>
+              </a:spcAft>
+            </a:pPr>
+            <a:r>
+              <a:rPr sz="1400" b="0" i="0">
+                <a:solidFill>
+                  <a:srgbClr val="FFFFFF"/>
+                </a:solidFill>
+                <a:latin typeface="Calibri"/>
+              </a:rPr>
+              <a:t/>
+            </a:r>
+          </a:p>
+          <a:p>
+            <a:pPr>
+              <a:spcAft>
+                <a:spcPts val="400"/>
+              </a:spcAft>
+            </a:pPr>
+            <a:r>
+              <a:rPr sz="1400" b="0" i="0">
+                <a:solidFill>
+                  <a:srgbClr val="FFFFFF"/>
+                </a:solidFill>
+                <a:latin typeface="Calibri"/>
+              </a:rPr>
+              <a:t># Los titulos van TAL CUAL: son con los que se califica.</a:t>
+            </a:r>
           </a:p>
         </p:txBody>
       </p:sp>
       <p:sp>
         <p:nvSpPr>
           <p:cNvPr id="9" name="TextBox 8"/>
-          <p:cNvSpPr txBox="1"/>
-          <p:nvPr/>
-        </p:nvSpPr>
-        <p:spPr>
-          <a:xfrm>
-            <a:off x="1097280" y="1563624"/>
-            <a:ext cx="10362895" cy="402336"/>
-          </a:xfrm>
-          <a:prstGeom prst="rect">
-            <a:avLst/>
-          </a:prstGeom>
-          <a:noFill/>
-        </p:spPr>
-        <p:txBody>
-          <a:bodyPr wrap="square" anchor="ctr"/>
-          <a:lstStyle/>
-          <a:p>
-            <a:r>
-              <a:rPr sz="1500" b="1" i="0">
-                <a:solidFill>
-                  <a:srgbClr val="333333"/>
-                </a:solidFill>
-                <a:latin typeface="Calibri"/>
-              </a:rPr>
-              <a:t>LOS CUATRO HITOS</a:t>
-            </a:r>
-            <a:r>
-              <a:rPr sz="1500" b="0" i="0">
-                <a:solidFill>
-                  <a:srgbClr val="333333"/>
-                </a:solidFill>
-                <a:latin typeface="Calibri"/>
-              </a:rPr>
-              <a:t> — Cuatro hechos de su periodo, con año, puestos en orden en la línea de tiempo.</a:t>
-            </a:r>
-          </a:p>
-        </p:txBody>
-      </p:sp>
-      <p:sp>
-        <p:nvSpPr>
-          <p:cNvPr id="10" name="Rounded Rectangle 9"/>
-          <p:cNvSpPr/>
-          <p:nvPr/>
-        </p:nvSpPr>
-        <p:spPr>
-          <a:xfrm>
-            <a:off x="457200" y="2148839"/>
-            <a:ext cx="11277295" cy="566928"/>
-          </a:xfrm>
-          <a:prstGeom prst="roundRect">
-            <a:avLst>
-              <a:gd name="adj" fmla="val 12000"/>
-            </a:avLst>
-          </a:prstGeom>
-          <a:solidFill>
-            <a:srgbClr val="F2F2F2"/>
-          </a:solidFill>
-          <a:ln>
-            <a:noFill/>
-          </a:ln>
-        </p:spPr>
-        <p:style>
-          <a:lnRef idx="1">
-            <a:schemeClr val="accent1"/>
-          </a:lnRef>
-          <a:fillRef idx="3">
-            <a:schemeClr val="accent1"/>
-          </a:fillRef>
-          <a:effectRef idx="2">
-            <a:schemeClr val="accent1"/>
-          </a:effectRef>
-          <a:fontRef idx="minor">
-            <a:schemeClr val="lt1"/>
-          </a:fontRef>
-        </p:style>
-        <p:txBody>
-          <a:bodyPr rtlCol="0" anchor="ctr"/>
-          <a:lstStyle/>
-          <a:p>
-            <a:pPr algn="ctr"/>
-          </a:p>
-        </p:txBody>
-      </p:sp>
-      <p:sp>
-        <p:nvSpPr>
-          <p:cNvPr id="11" name="Rectangle 10"/>
-          <p:cNvSpPr/>
-          <p:nvPr/>
-        </p:nvSpPr>
-        <p:spPr>
-          <a:xfrm>
-            <a:off x="640080" y="2295144"/>
-            <a:ext cx="274320" cy="274320"/>
-          </a:xfrm>
-          <a:prstGeom prst="rect">
-            <a:avLst/>
-          </a:prstGeom>
-          <a:solidFill>
-            <a:srgbClr val="FFFFFF"/>
-          </a:solidFill>
-          <a:ln>
-            <a:solidFill>
-              <a:srgbClr val="333333"/>
-            </a:solidFill>
-          </a:ln>
-        </p:spPr>
-        <p:style>
-          <a:lnRef idx="1">
-            <a:schemeClr val="accent1"/>
-          </a:lnRef>
-          <a:fillRef idx="3">
-            <a:schemeClr val="accent1"/>
-          </a:fillRef>
-          <a:effectRef idx="2">
-            <a:schemeClr val="accent1"/>
-          </a:effectRef>
-          <a:fontRef idx="minor">
-            <a:schemeClr val="lt1"/>
-          </a:fontRef>
-        </p:style>
-        <p:txBody>
-          <a:bodyPr rtlCol="0" anchor="ctr"/>
-          <a:lstStyle/>
-          <a:p>
-            <a:pPr algn="ctr"/>
-          </a:p>
-        </p:txBody>
-      </p:sp>
-      <p:sp>
-        <p:nvSpPr>
-          <p:cNvPr id="12" name="Rectangle 11"/>
-          <p:cNvSpPr/>
-          <p:nvPr/>
-        </p:nvSpPr>
-        <p:spPr>
-          <a:xfrm>
-            <a:off x="640080" y="2295144"/>
-            <a:ext cx="73152" cy="274320"/>
-          </a:xfrm>
-          <a:prstGeom prst="rect">
-            <a:avLst/>
-          </a:prstGeom>
-          <a:solidFill>
-            <a:srgbClr val="269CCB"/>
-          </a:solidFill>
-          <a:ln>
-            <a:noFill/>
-          </a:ln>
-        </p:spPr>
-        <p:style>
-          <a:lnRef idx="1">
-            <a:schemeClr val="accent1"/>
-          </a:lnRef>
-          <a:fillRef idx="3">
-            <a:schemeClr val="accent1"/>
-          </a:fillRef>
-          <a:effectRef idx="2">
-            <a:schemeClr val="accent1"/>
-          </a:effectRef>
-          <a:fontRef idx="minor">
-            <a:schemeClr val="lt1"/>
-          </a:fontRef>
-        </p:style>
-        <p:txBody>
-          <a:bodyPr rtlCol="0" anchor="ctr"/>
-          <a:lstStyle/>
-          <a:p>
-            <a:pPr algn="ctr"/>
-          </a:p>
-        </p:txBody>
-      </p:sp>
-      <p:sp>
-        <p:nvSpPr>
-          <p:cNvPr id="13" name="TextBox 12"/>
-          <p:cNvSpPr txBox="1"/>
-          <p:nvPr/>
-        </p:nvSpPr>
-        <p:spPr>
-          <a:xfrm>
-            <a:off x="1097280" y="2240279"/>
-            <a:ext cx="10362895" cy="402336"/>
-          </a:xfrm>
-          <a:prstGeom prst="rect">
-            <a:avLst/>
-          </a:prstGeom>
-          <a:noFill/>
-        </p:spPr>
-        <p:txBody>
-          <a:bodyPr wrap="square" anchor="ctr"/>
-          <a:lstStyle/>
-          <a:p>
-            <a:r>
-              <a:rPr sz="1500" b="1" i="0">
-                <a:solidFill>
-                  <a:srgbClr val="333333"/>
-                </a:solidFill>
-                <a:latin typeface="Calibri"/>
-              </a:rPr>
-              <a:t>QUÉ DOLÍA ANTES</a:t>
-            </a:r>
-            <a:r>
-              <a:rPr sz="1500" b="0" i="0">
-                <a:solidFill>
-                  <a:srgbClr val="333333"/>
-                </a:solidFill>
-                <a:latin typeface="Calibri"/>
-              </a:rPr>
-              <a:t> — Para cada hito: el problema concreto que existía antes y a quién le pasaba.</a:t>
-            </a:r>
-          </a:p>
-        </p:txBody>
-      </p:sp>
-      <p:sp>
-        <p:nvSpPr>
-          <p:cNvPr id="14" name="Rounded Rectangle 13"/>
-          <p:cNvSpPr/>
-          <p:nvPr/>
-        </p:nvSpPr>
-        <p:spPr>
-          <a:xfrm>
-            <a:off x="457200" y="2825496"/>
-            <a:ext cx="11277295" cy="566928"/>
-          </a:xfrm>
-          <a:prstGeom prst="roundRect">
-            <a:avLst>
-              <a:gd name="adj" fmla="val 12000"/>
-            </a:avLst>
-          </a:prstGeom>
-          <a:solidFill>
-            <a:srgbClr val="F2F2F2"/>
-          </a:solidFill>
-          <a:ln>
-            <a:noFill/>
-          </a:ln>
-        </p:spPr>
-        <p:style>
-          <a:lnRef idx="1">
-            <a:schemeClr val="accent1"/>
-          </a:lnRef>
-          <a:fillRef idx="3">
-            <a:schemeClr val="accent1"/>
-          </a:fillRef>
-          <a:effectRef idx="2">
-            <a:schemeClr val="accent1"/>
-          </a:effectRef>
-          <a:fontRef idx="minor">
-            <a:schemeClr val="lt1"/>
-          </a:fontRef>
-        </p:style>
-        <p:txBody>
-          <a:bodyPr rtlCol="0" anchor="ctr"/>
-          <a:lstStyle/>
-          <a:p>
-            <a:pPr algn="ctr"/>
-          </a:p>
-        </p:txBody>
-      </p:sp>
-      <p:sp>
-        <p:nvSpPr>
-          <p:cNvPr id="15" name="Rectangle 14"/>
-          <p:cNvSpPr/>
-          <p:nvPr/>
-        </p:nvSpPr>
-        <p:spPr>
-          <a:xfrm>
-            <a:off x="640080" y="2971800"/>
-            <a:ext cx="274320" cy="274320"/>
-          </a:xfrm>
-          <a:prstGeom prst="rect">
-            <a:avLst/>
-          </a:prstGeom>
-          <a:solidFill>
-            <a:srgbClr val="FFFFFF"/>
-          </a:solidFill>
-          <a:ln>
-            <a:solidFill>
-              <a:srgbClr val="333333"/>
-            </a:solidFill>
-          </a:ln>
-        </p:spPr>
-        <p:style>
-          <a:lnRef idx="1">
-            <a:schemeClr val="accent1"/>
-          </a:lnRef>
-          <a:fillRef idx="3">
-            <a:schemeClr val="accent1"/>
-          </a:fillRef>
-          <a:effectRef idx="2">
-            <a:schemeClr val="accent1"/>
-          </a:effectRef>
-          <a:fontRef idx="minor">
-            <a:schemeClr val="lt1"/>
-          </a:fontRef>
-        </p:style>
-        <p:txBody>
-          <a:bodyPr rtlCol="0" anchor="ctr"/>
-          <a:lstStyle/>
-          <a:p>
-            <a:pPr algn="ctr"/>
-          </a:p>
-        </p:txBody>
-      </p:sp>
-      <p:sp>
-        <p:nvSpPr>
-          <p:cNvPr id="16" name="Rectangle 15"/>
-          <p:cNvSpPr/>
-          <p:nvPr/>
-        </p:nvSpPr>
-        <p:spPr>
-          <a:xfrm>
-            <a:off x="640080" y="2971800"/>
-            <a:ext cx="73152" cy="274320"/>
-          </a:xfrm>
-          <a:prstGeom prst="rect">
-            <a:avLst/>
-          </a:prstGeom>
-          <a:solidFill>
-            <a:srgbClr val="269CCB"/>
-          </a:solidFill>
-          <a:ln>
-            <a:noFill/>
-          </a:ln>
-        </p:spPr>
-        <p:style>
-          <a:lnRef idx="1">
-            <a:schemeClr val="accent1"/>
-          </a:lnRef>
-          <a:fillRef idx="3">
-            <a:schemeClr val="accent1"/>
-          </a:fillRef>
-          <a:effectRef idx="2">
-            <a:schemeClr val="accent1"/>
-          </a:effectRef>
-          <a:fontRef idx="minor">
-            <a:schemeClr val="lt1"/>
-          </a:fontRef>
-        </p:style>
-        <p:txBody>
-          <a:bodyPr rtlCol="0" anchor="ctr"/>
-          <a:lstStyle/>
-          <a:p>
-            <a:pPr algn="ctr"/>
-          </a:p>
-        </p:txBody>
-      </p:sp>
-      <p:sp>
-        <p:nvSpPr>
-          <p:cNvPr id="17" name="TextBox 16"/>
-          <p:cNvSpPr txBox="1"/>
-          <p:nvPr/>
-        </p:nvSpPr>
-        <p:spPr>
-          <a:xfrm>
-            <a:off x="1097280" y="2916936"/>
-            <a:ext cx="10362895" cy="402336"/>
-          </a:xfrm>
-          <a:prstGeom prst="rect">
-            <a:avLst/>
-          </a:prstGeom>
-          <a:noFill/>
-        </p:spPr>
-        <p:txBody>
-          <a:bodyPr wrap="square" anchor="ctr"/>
-          <a:lstStyle/>
-          <a:p>
-            <a:r>
-              <a:rPr sz="1500" b="1" i="0">
-                <a:solidFill>
-                  <a:srgbClr val="333333"/>
-                </a:solidFill>
-                <a:latin typeface="Calibri"/>
-              </a:rPr>
-              <a:t>QUÉ PROPUSO</a:t>
-            </a:r>
-            <a:r>
-              <a:rPr sz="1500" b="0" i="0">
-                <a:solidFill>
-                  <a:srgbClr val="333333"/>
-                </a:solidFill>
-                <a:latin typeface="Calibri"/>
-              </a:rPr>
-              <a:t> — Para cada hito: la idea, el método o la herramienta, en una frase que ustedes puedan explicar.</a:t>
-            </a:r>
-          </a:p>
-        </p:txBody>
-      </p:sp>
-      <p:sp>
-        <p:nvSpPr>
-          <p:cNvPr id="18" name="Rounded Rectangle 17"/>
-          <p:cNvSpPr/>
-          <p:nvPr/>
-        </p:nvSpPr>
-        <p:spPr>
-          <a:xfrm>
-            <a:off x="457200" y="3502152"/>
-            <a:ext cx="11277295" cy="566928"/>
-          </a:xfrm>
-          <a:prstGeom prst="roundRect">
-            <a:avLst>
-              <a:gd name="adj" fmla="val 12000"/>
-            </a:avLst>
-          </a:prstGeom>
-          <a:solidFill>
-            <a:srgbClr val="F2F2F2"/>
-          </a:solidFill>
-          <a:ln>
-            <a:noFill/>
-          </a:ln>
-        </p:spPr>
-        <p:style>
-          <a:lnRef idx="1">
-            <a:schemeClr val="accent1"/>
-          </a:lnRef>
-          <a:fillRef idx="3">
-            <a:schemeClr val="accent1"/>
-          </a:fillRef>
-          <a:effectRef idx="2">
-            <a:schemeClr val="accent1"/>
-          </a:effectRef>
-          <a:fontRef idx="minor">
-            <a:schemeClr val="lt1"/>
-          </a:fontRef>
-        </p:style>
-        <p:txBody>
-          <a:bodyPr rtlCol="0" anchor="ctr"/>
-          <a:lstStyle/>
-          <a:p>
-            <a:pPr algn="ctr"/>
-          </a:p>
-        </p:txBody>
-      </p:sp>
-      <p:sp>
-        <p:nvSpPr>
-          <p:cNvPr id="19" name="Rectangle 18"/>
-          <p:cNvSpPr/>
-          <p:nvPr/>
-        </p:nvSpPr>
-        <p:spPr>
-          <a:xfrm>
-            <a:off x="640080" y="3648456"/>
-            <a:ext cx="274320" cy="274320"/>
-          </a:xfrm>
-          <a:prstGeom prst="rect">
-            <a:avLst/>
-          </a:prstGeom>
-          <a:solidFill>
-            <a:srgbClr val="FFFFFF"/>
-          </a:solidFill>
-          <a:ln>
-            <a:solidFill>
-              <a:srgbClr val="333333"/>
-            </a:solidFill>
-          </a:ln>
-        </p:spPr>
-        <p:style>
-          <a:lnRef idx="1">
-            <a:schemeClr val="accent1"/>
-          </a:lnRef>
-          <a:fillRef idx="3">
-            <a:schemeClr val="accent1"/>
-          </a:fillRef>
-          <a:effectRef idx="2">
-            <a:schemeClr val="accent1"/>
-          </a:effectRef>
-          <a:fontRef idx="minor">
-            <a:schemeClr val="lt1"/>
-          </a:fontRef>
-        </p:style>
-        <p:txBody>
-          <a:bodyPr rtlCol="0" anchor="ctr"/>
-          <a:lstStyle/>
-          <a:p>
-            <a:pPr algn="ctr"/>
-          </a:p>
-        </p:txBody>
-      </p:sp>
-      <p:sp>
-        <p:nvSpPr>
-          <p:cNvPr id="20" name="Rectangle 19"/>
-          <p:cNvSpPr/>
-          <p:nvPr/>
-        </p:nvSpPr>
-        <p:spPr>
-          <a:xfrm>
-            <a:off x="640080" y="3648456"/>
-            <a:ext cx="73152" cy="274320"/>
-          </a:xfrm>
-          <a:prstGeom prst="rect">
-            <a:avLst/>
-          </a:prstGeom>
-          <a:solidFill>
-            <a:srgbClr val="269CCB"/>
-          </a:solidFill>
-          <a:ln>
-            <a:noFill/>
-          </a:ln>
-        </p:spPr>
-        <p:style>
-          <a:lnRef idx="1">
-            <a:schemeClr val="accent1"/>
-          </a:lnRef>
-          <a:fillRef idx="3">
-            <a:schemeClr val="accent1"/>
-          </a:fillRef>
-          <a:effectRef idx="2">
-            <a:schemeClr val="accent1"/>
-          </a:effectRef>
-          <a:fontRef idx="minor">
-            <a:schemeClr val="lt1"/>
-          </a:fontRef>
-        </p:style>
-        <p:txBody>
-          <a:bodyPr rtlCol="0" anchor="ctr"/>
-          <a:lstStyle/>
-          <a:p>
-            <a:pPr algn="ctr"/>
-          </a:p>
-        </p:txBody>
-      </p:sp>
-      <p:sp>
-        <p:nvSpPr>
-          <p:cNvPr id="21" name="TextBox 20"/>
-          <p:cNvSpPr txBox="1"/>
-          <p:nvPr/>
-        </p:nvSpPr>
-        <p:spPr>
-          <a:xfrm>
-            <a:off x="1097280" y="3593592"/>
-            <a:ext cx="10362895" cy="402336"/>
-          </a:xfrm>
-          <a:prstGeom prst="rect">
-            <a:avLst/>
-          </a:prstGeom>
-          <a:noFill/>
-        </p:spPr>
-        <p:txBody>
-          <a:bodyPr wrap="square" anchor="ctr"/>
-          <a:lstStyle/>
-          <a:p>
-            <a:r>
-              <a:rPr sz="1500" b="1" i="0">
-                <a:solidFill>
-                  <a:srgbClr val="333333"/>
-                </a:solidFill>
-                <a:latin typeface="Calibri"/>
-              </a:rPr>
-              <a:t>QUÉ SIGUE VIVO HOY</a:t>
-            </a:r>
-            <a:r>
-              <a:rPr sz="1500" b="0" i="0">
-                <a:solidFill>
-                  <a:srgbClr val="333333"/>
-                </a:solidFill>
-                <a:latin typeface="Calibri"/>
-              </a:rPr>
-              <a:t> — Para </a:t>
-            </a:r>
-            <a:r>
-              <a:rPr sz="1500" b="1" i="0">
-                <a:solidFill>
-                  <a:srgbClr val="333333"/>
-                </a:solidFill>
-                <a:latin typeface="Calibri"/>
-              </a:rPr>
-              <a:t>al menos dos</a:t>
-            </a:r>
-            <a:r>
-              <a:rPr sz="1500" b="0" i="0">
-                <a:solidFill>
-                  <a:srgbClr val="333333"/>
-                </a:solidFill>
-                <a:latin typeface="Calibri"/>
-              </a:rPr>
-              <a:t> de los cuatro hitos: qué parte de ese problema todavía no está resuelta, con un ejemplo de algo que ustedes hayan visto.</a:t>
-            </a:r>
-          </a:p>
-        </p:txBody>
-      </p:sp>
-      <p:sp>
-        <p:nvSpPr>
-          <p:cNvPr id="22" name="Rounded Rectangle 21"/>
-          <p:cNvSpPr/>
-          <p:nvPr/>
-        </p:nvSpPr>
-        <p:spPr>
-          <a:xfrm>
-            <a:off x="457200" y="4178808"/>
-            <a:ext cx="11277295" cy="566928"/>
-          </a:xfrm>
-          <a:prstGeom prst="roundRect">
-            <a:avLst>
-              <a:gd name="adj" fmla="val 12000"/>
-            </a:avLst>
-          </a:prstGeom>
-          <a:solidFill>
-            <a:srgbClr val="F2F2F2"/>
-          </a:solidFill>
-          <a:ln>
-            <a:noFill/>
-          </a:ln>
-        </p:spPr>
-        <p:style>
-          <a:lnRef idx="1">
-            <a:schemeClr val="accent1"/>
-          </a:lnRef>
-          <a:fillRef idx="3">
-            <a:schemeClr val="accent1"/>
-          </a:fillRef>
-          <a:effectRef idx="2">
-            <a:schemeClr val="accent1"/>
-          </a:effectRef>
-          <a:fontRef idx="minor">
-            <a:schemeClr val="lt1"/>
-          </a:fontRef>
-        </p:style>
-        <p:txBody>
-          <a:bodyPr rtlCol="0" anchor="ctr"/>
-          <a:lstStyle/>
-          <a:p>
-            <a:pPr algn="ctr"/>
-          </a:p>
-        </p:txBody>
-      </p:sp>
-      <p:sp>
-        <p:nvSpPr>
-          <p:cNvPr id="23" name="Rectangle 22"/>
-          <p:cNvSpPr/>
-          <p:nvPr/>
-        </p:nvSpPr>
-        <p:spPr>
-          <a:xfrm>
-            <a:off x="640080" y="4325112"/>
-            <a:ext cx="274320" cy="274320"/>
-          </a:xfrm>
-          <a:prstGeom prst="rect">
-            <a:avLst/>
-          </a:prstGeom>
-          <a:solidFill>
-            <a:srgbClr val="FFFFFF"/>
-          </a:solidFill>
-          <a:ln>
-            <a:solidFill>
-              <a:srgbClr val="333333"/>
-            </a:solidFill>
-          </a:ln>
-        </p:spPr>
-        <p:style>
-          <a:lnRef idx="1">
-            <a:schemeClr val="accent1"/>
-          </a:lnRef>
-          <a:fillRef idx="3">
-            <a:schemeClr val="accent1"/>
-          </a:fillRef>
-          <a:effectRef idx="2">
-            <a:schemeClr val="accent1"/>
-          </a:effectRef>
-          <a:fontRef idx="minor">
-            <a:schemeClr val="lt1"/>
-          </a:fontRef>
-        </p:style>
-        <p:txBody>
-          <a:bodyPr rtlCol="0" anchor="ctr"/>
-          <a:lstStyle/>
-          <a:p>
-            <a:pPr algn="ctr"/>
-          </a:p>
-        </p:txBody>
-      </p:sp>
-      <p:sp>
-        <p:nvSpPr>
-          <p:cNvPr id="24" name="Rectangle 23"/>
-          <p:cNvSpPr/>
-          <p:nvPr/>
-        </p:nvSpPr>
-        <p:spPr>
-          <a:xfrm>
-            <a:off x="640080" y="4325112"/>
-            <a:ext cx="73152" cy="274320"/>
-          </a:xfrm>
-          <a:prstGeom prst="rect">
-            <a:avLst/>
-          </a:prstGeom>
-          <a:solidFill>
-            <a:srgbClr val="269CCB"/>
-          </a:solidFill>
-          <a:ln>
-            <a:noFill/>
-          </a:ln>
-        </p:spPr>
-        <p:style>
-          <a:lnRef idx="1">
-            <a:schemeClr val="accent1"/>
-          </a:lnRef>
-          <a:fillRef idx="3">
-            <a:schemeClr val="accent1"/>
-          </a:fillRef>
-          <a:effectRef idx="2">
-            <a:schemeClr val="accent1"/>
-          </a:effectRef>
-          <a:fontRef idx="minor">
-            <a:schemeClr val="lt1"/>
-          </a:fontRef>
-        </p:style>
-        <p:txBody>
-          <a:bodyPr rtlCol="0" anchor="ctr"/>
-          <a:lstStyle/>
-          <a:p>
-            <a:pPr algn="ctr"/>
-          </a:p>
-        </p:txBody>
-      </p:sp>
-      <p:sp>
-        <p:nvSpPr>
-          <p:cNvPr id="25" name="TextBox 24"/>
-          <p:cNvSpPr txBox="1"/>
-          <p:nvPr/>
-        </p:nvSpPr>
-        <p:spPr>
-          <a:xfrm>
-            <a:off x="1097280" y="4270248"/>
-            <a:ext cx="10362895" cy="402336"/>
-          </a:xfrm>
-          <a:prstGeom prst="rect">
-            <a:avLst/>
-          </a:prstGeom>
-          <a:noFill/>
-        </p:spPr>
-        <p:txBody>
-          <a:bodyPr wrap="square" anchor="ctr"/>
-          <a:lstStyle/>
-          <a:p>
-            <a:r>
-              <a:rPr sz="1500" b="1" i="0">
-                <a:solidFill>
-                  <a:srgbClr val="333333"/>
-                </a:solidFill>
-                <a:latin typeface="Calibri"/>
-              </a:rPr>
-              <a:t>LA FUENTE</a:t>
-            </a:r>
-            <a:r>
-              <a:rPr sz="1500" b="0" i="0">
-                <a:solidFill>
-                  <a:srgbClr val="333333"/>
-                </a:solidFill>
-                <a:latin typeface="Calibri"/>
-              </a:rPr>
-              <a:t> — De dónde sacaron cada dato: autor o institución, y año. Si usaron una cifra («el 70 % de los proyectos…»), la fuente es obligatoria.</a:t>
-            </a:r>
-          </a:p>
-        </p:txBody>
-      </p:sp>
-      <p:sp>
-        <p:nvSpPr>
-          <p:cNvPr id="26" name="TextBox 25"/>
           <p:cNvSpPr txBox="1"/>
           <p:nvPr/>
         </p:nvSpPr>
@@ -8046,7 +7429,7 @@
         <p:spPr>
           <a:xfrm>
             <a:off x="0" y="0"/>
-            <a:ext cx="12191695" cy="1170432"/>
+            <a:ext cx="12191695" cy="960120"/>
           </a:xfrm>
           <a:prstGeom prst="rect">
             <a:avLst/>
@@ -8088,7 +7471,7 @@
         </p:nvSpPr>
         <p:spPr>
           <a:xfrm>
-            <a:off x="0" y="1170432"/>
+            <a:off x="0" y="960120"/>
             <a:ext cx="12191695" cy="41148"/>
           </a:xfrm>
           <a:prstGeom prst="rect">
@@ -8132,7 +7515,7 @@
         <p:spPr>
           <a:xfrm>
             <a:off x="457200" y="164592"/>
-            <a:ext cx="11277295" cy="384048"/>
+            <a:ext cx="11277295" cy="502920"/>
           </a:xfrm>
           <a:prstGeom prst="rect">
             <a:avLst/>
@@ -8152,55 +7535,21 @@
                 </a:solidFill>
                 <a:latin typeface="Calibri"/>
               </a:rPr>
-              <a:t>Cómo se expone en 3 minutos</a:t>
-            </a:r>
-          </a:p>
-        </p:txBody>
-      </p:sp>
-      <p:sp>
-        <p:nvSpPr>
-          <p:cNvPr id="5" name="TextBox 4"/>
-          <p:cNvSpPr txBox="1"/>
-          <p:nvPr/>
-        </p:nvSpPr>
-        <p:spPr>
-          <a:xfrm>
-            <a:off x="457200" y="566928"/>
-            <a:ext cx="11277295" cy="411480"/>
-          </a:xfrm>
-          <a:prstGeom prst="rect">
-            <a:avLst/>
-          </a:prstGeom>
-          <a:noFill/>
-        </p:spPr>
-        <p:txBody>
-          <a:bodyPr wrap="square">
-            <a:spAutoFit/>
-          </a:bodyPr>
-          <a:lstStyle/>
-          <a:p>
-            <a:r>
-              <a:rPr sz="1400" b="0" i="0">
-                <a:solidFill>
-                  <a:srgbClr val="B8D8EE"/>
-                </a:solidFill>
-                <a:latin typeface="Calibri"/>
-              </a:rPr>
-              <a:t>Habla el vocero con la pantalla ya compartida · cronómetro en pantalla · se corta al llegar a cero</a:t>
-            </a:r>
-          </a:p>
-        </p:txBody>
-      </p:sp>
-      <p:sp>
-        <p:nvSpPr>
-          <p:cNvPr id="6" name="Rounded Rectangle 5"/>
+              <a:t>Guion de la exposicion, con tiempos</a:t>
+            </a:r>
+          </a:p>
+        </p:txBody>
+      </p:sp>
+      <p:sp>
+        <p:nvSpPr>
+          <p:cNvPr id="5" name="Rounded Rectangle 4"/>
           <p:cNvSpPr/>
           <p:nvPr/>
         </p:nvSpPr>
         <p:spPr>
           <a:xfrm>
-            <a:off x="457200" y="1659636"/>
-            <a:ext cx="11277295" cy="1051560"/>
+            <a:off x="457200" y="1261872"/>
+            <a:ext cx="11277295" cy="5093208"/>
           </a:xfrm>
           <a:prstGeom prst="roundRect">
             <a:avLst>
@@ -8208,7 +7557,7 @@
             </a:avLst>
           </a:prstGeom>
           <a:solidFill>
-            <a:srgbClr val="F2F2F2"/>
+            <a:srgbClr val="1E2A38"/>
           </a:solidFill>
           <a:ln>
             <a:noFill/>
@@ -8238,19 +7587,17 @@
       </p:sp>
       <p:sp>
         <p:nvSpPr>
-          <p:cNvPr id="7" name="Rounded Rectangle 6"/>
+          <p:cNvPr id="6" name="Rectangle 5"/>
           <p:cNvSpPr/>
           <p:nvPr/>
         </p:nvSpPr>
         <p:spPr>
           <a:xfrm>
-            <a:off x="594360" y="1965960"/>
-            <a:ext cx="438912" cy="438912"/>
-          </a:xfrm>
-          <a:prstGeom prst="roundRect">
-            <a:avLst>
-              <a:gd name="adj" fmla="val 12000"/>
-            </a:avLst>
+            <a:off x="457200" y="1261872"/>
+            <a:ext cx="11277295" cy="320040"/>
+          </a:xfrm>
+          <a:prstGeom prst="rect">
+            <a:avLst/>
           </a:prstGeom>
           <a:solidFill>
             <a:srgbClr val="095292"/>
@@ -8283,14 +7630,46 @@
       </p:sp>
       <p:sp>
         <p:nvSpPr>
+          <p:cNvPr id="7" name="TextBox 6"/>
+          <p:cNvSpPr txBox="1"/>
+          <p:nvPr/>
+        </p:nvSpPr>
+        <p:spPr>
+          <a:xfrm>
+            <a:off x="685800" y="1307592"/>
+            <a:ext cx="10820095" cy="256032"/>
+          </a:xfrm>
+          <a:prstGeom prst="rect">
+            <a:avLst/>
+          </a:prstGeom>
+          <a:noFill/>
+        </p:spPr>
+        <p:txBody>
+          <a:bodyPr wrap="square" anchor="ctr"/>
+          <a:lstStyle/>
+          <a:p>
+            <a:r>
+              <a:rPr sz="1000" b="1" i="0">
+                <a:solidFill>
+                  <a:srgbClr val="269CCB"/>
+                </a:solidFill>
+                <a:latin typeface="Calibri"/>
+              </a:rPr>
+              <a:t>● ● ●</a:t>
+            </a:r>
+          </a:p>
+        </p:txBody>
+      </p:sp>
+      <p:sp>
+        <p:nvSpPr>
           <p:cNvPr id="8" name="TextBox 7"/>
           <p:cNvSpPr txBox="1"/>
           <p:nvPr/>
         </p:nvSpPr>
         <p:spPr>
           <a:xfrm>
-            <a:off x="594360" y="1965960"/>
-            <a:ext cx="438912" cy="438912"/>
+            <a:off x="777240" y="1719072"/>
+            <a:ext cx="10637215" cy="4453128"/>
           </a:xfrm>
           <a:prstGeom prst="rect">
             <a:avLst/>
@@ -8298,18 +7677,152 @@
           <a:noFill/>
         </p:spPr>
         <p:txBody>
-          <a:bodyPr wrap="square" anchor="ctr"/>
-          <a:lstStyle/>
-          <a:p>
-            <a:pPr algn="ctr"/>
-            <a:r>
-              <a:rPr sz="1600" b="1" i="0">
+          <a:bodyPr wrap="square">
+            <a:spAutoFit/>
+          </a:bodyPr>
+          <a:lstStyle/>
+          <a:p>
+            <a:pPr>
+              <a:spcAft>
+                <a:spcPts val="400"/>
+              </a:spcAft>
+            </a:pPr>
+            <a:r>
+              <a:rPr sz="1400" b="0" i="0">
                 <a:solidFill>
                   <a:srgbClr val="FFFFFF"/>
                 </a:solidFill>
                 <a:latin typeface="Calibri"/>
               </a:rPr>
-              <a:t>1</a:t>
+              <a:t># Exposicion de hoy · lo que se califica es el reparto, no el total</a:t>
+            </a:r>
+          </a:p>
+          <a:p>
+            <a:pPr>
+              <a:spcAft>
+                <a:spcPts val="400"/>
+              </a:spcAft>
+            </a:pPr>
+            <a:r>
+              <a:rPr sz="1400" b="0" i="0">
+                <a:solidFill>
+                  <a:srgbClr val="FFFFFF"/>
+                </a:solidFill>
+                <a:latin typeface="Calibri"/>
+              </a:rPr>
+              <a:t/>
+            </a:r>
+          </a:p>
+          <a:p>
+            <a:pPr>
+              <a:spcAft>
+                <a:spcPts val="400"/>
+              </a:spcAft>
+            </a:pPr>
+            <a:r>
+              <a:rPr sz="1400" b="0" i="0">
+                <a:solidFill>
+                  <a:srgbClr val="FFFFFF"/>
+                </a:solidFill>
+                <a:latin typeface="Calibri"/>
+              </a:rPr>
+              <a:t>45 s · El periodo y qué dolía      Qué años les tocaron y cuál era el problema </a:t>
+            </a:r>
+          </a:p>
+          <a:p>
+            <a:pPr>
+              <a:spcAft>
+                <a:spcPts val="400"/>
+              </a:spcAft>
+            </a:pPr>
+            <a:r>
+              <a:rPr sz="1400" b="0" i="0">
+                <a:solidFill>
+                  <a:srgbClr val="FFFFFF"/>
+                </a:solidFill>
+                <a:latin typeface="Calibri"/>
+              </a:rPr>
+              <a:t>60 s · Los cuatro hitos            En orden, con año. Una frase por hito, sin l</a:t>
+            </a:r>
+          </a:p>
+          <a:p>
+            <a:pPr>
+              <a:spcAft>
+                <a:spcPts val="400"/>
+              </a:spcAft>
+            </a:pPr>
+            <a:r>
+              <a:rPr sz="1400" b="0" i="0">
+                <a:solidFill>
+                  <a:srgbClr val="FFFFFF"/>
+                </a:solidFill>
+                <a:latin typeface="Calibri"/>
+              </a:rPr>
+              <a:t>60 s · Qué sigue vivo              Los dos hitos cuyo problema no está cerrado,</a:t>
+            </a:r>
+          </a:p>
+          <a:p>
+            <a:pPr>
+              <a:spcAft>
+                <a:spcPts val="400"/>
+              </a:spcAft>
+            </a:pPr>
+            <a:r>
+              <a:rPr sz="1400" b="0" i="0">
+                <a:solidFill>
+                  <a:srgbClr val="FFFFFF"/>
+                </a:solidFill>
+                <a:latin typeface="Calibri"/>
+              </a:rPr>
+              <a:t>15 s · Las fuentes                 De dónde salió lo que dijeron.</a:t>
+            </a:r>
+          </a:p>
+          <a:p>
+            <a:pPr>
+              <a:spcAft>
+                <a:spcPts val="400"/>
+              </a:spcAft>
+            </a:pPr>
+            <a:r>
+              <a:rPr sz="1400" b="0" i="0">
+                <a:solidFill>
+                  <a:srgbClr val="FFFFFF"/>
+                </a:solidFill>
+                <a:latin typeface="Calibri"/>
+              </a:rPr>
+              <a:t/>
+            </a:r>
+          </a:p>
+          <a:p>
+            <a:pPr>
+              <a:spcAft>
+                <a:spcPts val="400"/>
+              </a:spcAft>
+            </a:pPr>
+            <a:r>
+              <a:rPr sz="1400" b="0" i="0">
+                <a:solidFill>
+                  <a:srgbClr val="FFFFFF"/>
+                </a:solidFill>
+                <a:latin typeface="Calibri"/>
+              </a:rPr>
+              <a:t># El tramo marcado como obligatorio es el que el jurado califica:</a:t>
+            </a:r>
+          </a:p>
+          <a:p>
+            <a:pPr>
+              <a:spcAft>
+                <a:spcPts val="400"/>
+              </a:spcAft>
+            </a:pPr>
+            <a:r>
+              <a:rPr sz="1400" b="0" i="0">
+                <a:solidFill>
+                  <a:srgbClr val="FFFFFF"/>
+                </a:solidFill>
+                <a:latin typeface="Calibri"/>
+              </a:rPr>
+              <a:t># si el guion no esta cronometrado, es el que se queda sin tiempo.</a:t>
             </a:r>
           </a:p>
         </p:txBody>
@@ -8317,567 +7830,6 @@
       <p:sp>
         <p:nvSpPr>
           <p:cNvPr id="9" name="TextBox 8"/>
-          <p:cNvSpPr txBox="1"/>
-          <p:nvPr/>
-        </p:nvSpPr>
-        <p:spPr>
-          <a:xfrm>
-            <a:off x="1188720" y="1751076"/>
-            <a:ext cx="10271455" cy="886968"/>
-          </a:xfrm>
-          <a:prstGeom prst="rect">
-            <a:avLst/>
-          </a:prstGeom>
-          <a:noFill/>
-        </p:spPr>
-        <p:txBody>
-          <a:bodyPr wrap="square" anchor="ctr"/>
-          <a:lstStyle/>
-          <a:p>
-            <a:r>
-              <a:rPr sz="1500" b="1" i="0">
-                <a:solidFill>
-                  <a:srgbClr val="095292"/>
-                </a:solidFill>
-                <a:latin typeface="Calibri"/>
-              </a:rPr>
-              <a:t>45 s · El periodo y qué dolía</a:t>
-            </a:r>
-          </a:p>
-          <a:p>
-            <a:pPr>
-              <a:spcBef>
-                <a:spcPts val="200"/>
-              </a:spcBef>
-            </a:pPr>
-            <a:r>
-              <a:rPr sz="1300" b="0" i="0">
-                <a:solidFill>
-                  <a:srgbClr val="333333"/>
-                </a:solidFill>
-                <a:latin typeface="Calibri"/>
-              </a:rPr>
-              <a:t>Qué años les tocaron y cuál era el problema de la época.</a:t>
-            </a:r>
-          </a:p>
-        </p:txBody>
-      </p:sp>
-      <p:sp>
-        <p:nvSpPr>
-          <p:cNvPr id="10" name="Rounded Rectangle 9"/>
-          <p:cNvSpPr/>
-          <p:nvPr/>
-        </p:nvSpPr>
-        <p:spPr>
-          <a:xfrm>
-            <a:off x="457200" y="2802636"/>
-            <a:ext cx="11277295" cy="1051560"/>
-          </a:xfrm>
-          <a:prstGeom prst="roundRect">
-            <a:avLst>
-              <a:gd name="adj" fmla="val 12000"/>
-            </a:avLst>
-          </a:prstGeom>
-          <a:solidFill>
-            <a:srgbClr val="E8F4FA"/>
-          </a:solidFill>
-          <a:ln>
-            <a:noFill/>
-          </a:ln>
-        </p:spPr>
-        <p:style>
-          <a:lnRef idx="1">
-            <a:schemeClr val="accent1"/>
-          </a:lnRef>
-          <a:fillRef idx="3">
-            <a:schemeClr val="accent1"/>
-          </a:fillRef>
-          <a:effectRef idx="2">
-            <a:schemeClr val="accent1"/>
-          </a:effectRef>
-          <a:fontRef idx="minor">
-            <a:schemeClr val="lt1"/>
-          </a:fontRef>
-        </p:style>
-        <p:txBody>
-          <a:bodyPr rtlCol="0" anchor="ctr"/>
-          <a:lstStyle/>
-          <a:p>
-            <a:pPr algn="ctr"/>
-          </a:p>
-        </p:txBody>
-      </p:sp>
-      <p:sp>
-        <p:nvSpPr>
-          <p:cNvPr id="11" name="Rounded Rectangle 10"/>
-          <p:cNvSpPr/>
-          <p:nvPr/>
-        </p:nvSpPr>
-        <p:spPr>
-          <a:xfrm>
-            <a:off x="594360" y="3108960"/>
-            <a:ext cx="438912" cy="438912"/>
-          </a:xfrm>
-          <a:prstGeom prst="roundRect">
-            <a:avLst>
-              <a:gd name="adj" fmla="val 12000"/>
-            </a:avLst>
-          </a:prstGeom>
-          <a:solidFill>
-            <a:srgbClr val="095292"/>
-          </a:solidFill>
-          <a:ln>
-            <a:noFill/>
-          </a:ln>
-        </p:spPr>
-        <p:style>
-          <a:lnRef idx="1">
-            <a:schemeClr val="accent1"/>
-          </a:lnRef>
-          <a:fillRef idx="3">
-            <a:schemeClr val="accent1"/>
-          </a:fillRef>
-          <a:effectRef idx="2">
-            <a:schemeClr val="accent1"/>
-          </a:effectRef>
-          <a:fontRef idx="minor">
-            <a:schemeClr val="lt1"/>
-          </a:fontRef>
-        </p:style>
-        <p:txBody>
-          <a:bodyPr rtlCol="0" anchor="ctr"/>
-          <a:lstStyle/>
-          <a:p>
-            <a:pPr algn="ctr"/>
-          </a:p>
-        </p:txBody>
-      </p:sp>
-      <p:sp>
-        <p:nvSpPr>
-          <p:cNvPr id="12" name="TextBox 11"/>
-          <p:cNvSpPr txBox="1"/>
-          <p:nvPr/>
-        </p:nvSpPr>
-        <p:spPr>
-          <a:xfrm>
-            <a:off x="594360" y="3108960"/>
-            <a:ext cx="438912" cy="438912"/>
-          </a:xfrm>
-          <a:prstGeom prst="rect">
-            <a:avLst/>
-          </a:prstGeom>
-          <a:noFill/>
-        </p:spPr>
-        <p:txBody>
-          <a:bodyPr wrap="square" anchor="ctr"/>
-          <a:lstStyle/>
-          <a:p>
-            <a:pPr algn="ctr"/>
-            <a:r>
-              <a:rPr sz="1600" b="1" i="0">
-                <a:solidFill>
-                  <a:srgbClr val="FFFFFF"/>
-                </a:solidFill>
-                <a:latin typeface="Calibri"/>
-              </a:rPr>
-              <a:t>2</a:t>
-            </a:r>
-          </a:p>
-        </p:txBody>
-      </p:sp>
-      <p:sp>
-        <p:nvSpPr>
-          <p:cNvPr id="13" name="TextBox 12"/>
-          <p:cNvSpPr txBox="1"/>
-          <p:nvPr/>
-        </p:nvSpPr>
-        <p:spPr>
-          <a:xfrm>
-            <a:off x="1188720" y="2894076"/>
-            <a:ext cx="10271455" cy="886968"/>
-          </a:xfrm>
-          <a:prstGeom prst="rect">
-            <a:avLst/>
-          </a:prstGeom>
-          <a:noFill/>
-        </p:spPr>
-        <p:txBody>
-          <a:bodyPr wrap="square" anchor="ctr"/>
-          <a:lstStyle/>
-          <a:p>
-            <a:r>
-              <a:rPr sz="1500" b="1" i="0">
-                <a:solidFill>
-                  <a:srgbClr val="095292"/>
-                </a:solidFill>
-                <a:latin typeface="Calibri"/>
-              </a:rPr>
-              <a:t>60 s · Los cuatro hitos</a:t>
-            </a:r>
-          </a:p>
-          <a:p>
-            <a:pPr>
-              <a:spcBef>
-                <a:spcPts val="200"/>
-              </a:spcBef>
-            </a:pPr>
-            <a:r>
-              <a:rPr sz="1300" b="0" i="0">
-                <a:solidFill>
-                  <a:srgbClr val="333333"/>
-                </a:solidFill>
-                <a:latin typeface="Calibri"/>
-              </a:rPr>
-              <a:t>En orden, con año. Una frase por hito, sin leer la pantalla.</a:t>
-            </a:r>
-          </a:p>
-        </p:txBody>
-      </p:sp>
-      <p:sp>
-        <p:nvSpPr>
-          <p:cNvPr id="14" name="Rounded Rectangle 13"/>
-          <p:cNvSpPr/>
-          <p:nvPr/>
-        </p:nvSpPr>
-        <p:spPr>
-          <a:xfrm>
-            <a:off x="457200" y="3945636"/>
-            <a:ext cx="11277295" cy="1051560"/>
-          </a:xfrm>
-          <a:prstGeom prst="roundRect">
-            <a:avLst>
-              <a:gd name="adj" fmla="val 12000"/>
-            </a:avLst>
-          </a:prstGeom>
-          <a:solidFill>
-            <a:srgbClr val="F2F2F2"/>
-          </a:solidFill>
-          <a:ln>
-            <a:noFill/>
-          </a:ln>
-        </p:spPr>
-        <p:style>
-          <a:lnRef idx="1">
-            <a:schemeClr val="accent1"/>
-          </a:lnRef>
-          <a:fillRef idx="3">
-            <a:schemeClr val="accent1"/>
-          </a:fillRef>
-          <a:effectRef idx="2">
-            <a:schemeClr val="accent1"/>
-          </a:effectRef>
-          <a:fontRef idx="minor">
-            <a:schemeClr val="lt1"/>
-          </a:fontRef>
-        </p:style>
-        <p:txBody>
-          <a:bodyPr rtlCol="0" anchor="ctr"/>
-          <a:lstStyle/>
-          <a:p>
-            <a:pPr algn="ctr"/>
-          </a:p>
-        </p:txBody>
-      </p:sp>
-      <p:sp>
-        <p:nvSpPr>
-          <p:cNvPr id="15" name="Rounded Rectangle 14"/>
-          <p:cNvSpPr/>
-          <p:nvPr/>
-        </p:nvSpPr>
-        <p:spPr>
-          <a:xfrm>
-            <a:off x="594360" y="4251960"/>
-            <a:ext cx="438912" cy="438912"/>
-          </a:xfrm>
-          <a:prstGeom prst="roundRect">
-            <a:avLst>
-              <a:gd name="adj" fmla="val 12000"/>
-            </a:avLst>
-          </a:prstGeom>
-          <a:solidFill>
-            <a:srgbClr val="095292"/>
-          </a:solidFill>
-          <a:ln>
-            <a:noFill/>
-          </a:ln>
-        </p:spPr>
-        <p:style>
-          <a:lnRef idx="1">
-            <a:schemeClr val="accent1"/>
-          </a:lnRef>
-          <a:fillRef idx="3">
-            <a:schemeClr val="accent1"/>
-          </a:fillRef>
-          <a:effectRef idx="2">
-            <a:schemeClr val="accent1"/>
-          </a:effectRef>
-          <a:fontRef idx="minor">
-            <a:schemeClr val="lt1"/>
-          </a:fontRef>
-        </p:style>
-        <p:txBody>
-          <a:bodyPr rtlCol="0" anchor="ctr"/>
-          <a:lstStyle/>
-          <a:p>
-            <a:pPr algn="ctr"/>
-          </a:p>
-        </p:txBody>
-      </p:sp>
-      <p:sp>
-        <p:nvSpPr>
-          <p:cNvPr id="16" name="TextBox 15"/>
-          <p:cNvSpPr txBox="1"/>
-          <p:nvPr/>
-        </p:nvSpPr>
-        <p:spPr>
-          <a:xfrm>
-            <a:off x="594360" y="4251960"/>
-            <a:ext cx="438912" cy="438912"/>
-          </a:xfrm>
-          <a:prstGeom prst="rect">
-            <a:avLst/>
-          </a:prstGeom>
-          <a:noFill/>
-        </p:spPr>
-        <p:txBody>
-          <a:bodyPr wrap="square" anchor="ctr"/>
-          <a:lstStyle/>
-          <a:p>
-            <a:pPr algn="ctr"/>
-            <a:r>
-              <a:rPr sz="1600" b="1" i="0">
-                <a:solidFill>
-                  <a:srgbClr val="FFFFFF"/>
-                </a:solidFill>
-                <a:latin typeface="Calibri"/>
-              </a:rPr>
-              <a:t>3</a:t>
-            </a:r>
-          </a:p>
-        </p:txBody>
-      </p:sp>
-      <p:sp>
-        <p:nvSpPr>
-          <p:cNvPr id="17" name="TextBox 16"/>
-          <p:cNvSpPr txBox="1"/>
-          <p:nvPr/>
-        </p:nvSpPr>
-        <p:spPr>
-          <a:xfrm>
-            <a:off x="1188720" y="4037076"/>
-            <a:ext cx="10271455" cy="886968"/>
-          </a:xfrm>
-          <a:prstGeom prst="rect">
-            <a:avLst/>
-          </a:prstGeom>
-          <a:noFill/>
-        </p:spPr>
-        <p:txBody>
-          <a:bodyPr wrap="square" anchor="ctr"/>
-          <a:lstStyle/>
-          <a:p>
-            <a:r>
-              <a:rPr sz="1500" b="1" i="0">
-                <a:solidFill>
-                  <a:srgbClr val="095292"/>
-                </a:solidFill>
-                <a:latin typeface="Calibri"/>
-              </a:rPr>
-              <a:t>60 s · Qué sigue vivo</a:t>
-            </a:r>
-          </a:p>
-          <a:p>
-            <a:pPr>
-              <a:spcBef>
-                <a:spcPts val="200"/>
-              </a:spcBef>
-            </a:pPr>
-            <a:r>
-              <a:rPr sz="1300" b="0" i="0">
-                <a:solidFill>
-                  <a:srgbClr val="333333"/>
-                </a:solidFill>
-                <a:latin typeface="Calibri"/>
-              </a:rPr>
-              <a:t>Los dos hitos cuyo problema no está cerrado, con su ejemplo propio. Es lo que más pesa.</a:t>
-            </a:r>
-          </a:p>
-        </p:txBody>
-      </p:sp>
-      <p:sp>
-        <p:nvSpPr>
-          <p:cNvPr id="18" name="Rounded Rectangle 17"/>
-          <p:cNvSpPr/>
-          <p:nvPr/>
-        </p:nvSpPr>
-        <p:spPr>
-          <a:xfrm>
-            <a:off x="457200" y="5088636"/>
-            <a:ext cx="11277295" cy="1051560"/>
-          </a:xfrm>
-          <a:prstGeom prst="roundRect">
-            <a:avLst>
-              <a:gd name="adj" fmla="val 12000"/>
-            </a:avLst>
-          </a:prstGeom>
-          <a:solidFill>
-            <a:srgbClr val="E8F4FA"/>
-          </a:solidFill>
-          <a:ln>
-            <a:noFill/>
-          </a:ln>
-        </p:spPr>
-        <p:style>
-          <a:lnRef idx="1">
-            <a:schemeClr val="accent1"/>
-          </a:lnRef>
-          <a:fillRef idx="3">
-            <a:schemeClr val="accent1"/>
-          </a:fillRef>
-          <a:effectRef idx="2">
-            <a:schemeClr val="accent1"/>
-          </a:effectRef>
-          <a:fontRef idx="minor">
-            <a:schemeClr val="lt1"/>
-          </a:fontRef>
-        </p:style>
-        <p:txBody>
-          <a:bodyPr rtlCol="0" anchor="ctr"/>
-          <a:lstStyle/>
-          <a:p>
-            <a:pPr algn="ctr"/>
-          </a:p>
-        </p:txBody>
-      </p:sp>
-      <p:sp>
-        <p:nvSpPr>
-          <p:cNvPr id="19" name="Rounded Rectangle 18"/>
-          <p:cNvSpPr/>
-          <p:nvPr/>
-        </p:nvSpPr>
-        <p:spPr>
-          <a:xfrm>
-            <a:off x="594360" y="5394960"/>
-            <a:ext cx="438912" cy="438912"/>
-          </a:xfrm>
-          <a:prstGeom prst="roundRect">
-            <a:avLst>
-              <a:gd name="adj" fmla="val 12000"/>
-            </a:avLst>
-          </a:prstGeom>
-          <a:solidFill>
-            <a:srgbClr val="095292"/>
-          </a:solidFill>
-          <a:ln>
-            <a:noFill/>
-          </a:ln>
-        </p:spPr>
-        <p:style>
-          <a:lnRef idx="1">
-            <a:schemeClr val="accent1"/>
-          </a:lnRef>
-          <a:fillRef idx="3">
-            <a:schemeClr val="accent1"/>
-          </a:fillRef>
-          <a:effectRef idx="2">
-            <a:schemeClr val="accent1"/>
-          </a:effectRef>
-          <a:fontRef idx="minor">
-            <a:schemeClr val="lt1"/>
-          </a:fontRef>
-        </p:style>
-        <p:txBody>
-          <a:bodyPr rtlCol="0" anchor="ctr"/>
-          <a:lstStyle/>
-          <a:p>
-            <a:pPr algn="ctr"/>
-          </a:p>
-        </p:txBody>
-      </p:sp>
-      <p:sp>
-        <p:nvSpPr>
-          <p:cNvPr id="20" name="TextBox 19"/>
-          <p:cNvSpPr txBox="1"/>
-          <p:nvPr/>
-        </p:nvSpPr>
-        <p:spPr>
-          <a:xfrm>
-            <a:off x="594360" y="5394960"/>
-            <a:ext cx="438912" cy="438912"/>
-          </a:xfrm>
-          <a:prstGeom prst="rect">
-            <a:avLst/>
-          </a:prstGeom>
-          <a:noFill/>
-        </p:spPr>
-        <p:txBody>
-          <a:bodyPr wrap="square" anchor="ctr"/>
-          <a:lstStyle/>
-          <a:p>
-            <a:pPr algn="ctr"/>
-            <a:r>
-              <a:rPr sz="1600" b="1" i="0">
-                <a:solidFill>
-                  <a:srgbClr val="FFFFFF"/>
-                </a:solidFill>
-                <a:latin typeface="Calibri"/>
-              </a:rPr>
-              <a:t>4</a:t>
-            </a:r>
-          </a:p>
-        </p:txBody>
-      </p:sp>
-      <p:sp>
-        <p:nvSpPr>
-          <p:cNvPr id="21" name="TextBox 20"/>
-          <p:cNvSpPr txBox="1"/>
-          <p:nvPr/>
-        </p:nvSpPr>
-        <p:spPr>
-          <a:xfrm>
-            <a:off x="1188720" y="5180076"/>
-            <a:ext cx="10271455" cy="886968"/>
-          </a:xfrm>
-          <a:prstGeom prst="rect">
-            <a:avLst/>
-          </a:prstGeom>
-          <a:noFill/>
-        </p:spPr>
-        <p:txBody>
-          <a:bodyPr wrap="square" anchor="ctr"/>
-          <a:lstStyle/>
-          <a:p>
-            <a:r>
-              <a:rPr sz="1500" b="1" i="0">
-                <a:solidFill>
-                  <a:srgbClr val="095292"/>
-                </a:solidFill>
-                <a:latin typeface="Calibri"/>
-              </a:rPr>
-              <a:t>15 s · Las fuentes</a:t>
-            </a:r>
-          </a:p>
-          <a:p>
-            <a:pPr>
-              <a:spcBef>
-                <a:spcPts val="200"/>
-              </a:spcBef>
-            </a:pPr>
-            <a:r>
-              <a:rPr sz="1300" b="0" i="0">
-                <a:solidFill>
-                  <a:srgbClr val="333333"/>
-                </a:solidFill>
-                <a:latin typeface="Calibri"/>
-              </a:rPr>
-              <a:t>De dónde salió lo que dijeron.</a:t>
-            </a:r>
-          </a:p>
-        </p:txBody>
-      </p:sp>
-      <p:sp>
-        <p:nvSpPr>
-          <p:cNvPr id="22" name="TextBox 21"/>
           <p:cNvSpPr txBox="1"/>
           <p:nvPr/>
         </p:nvSpPr>
@@ -8945,7 +7897,7 @@
         <p:spPr>
           <a:xfrm>
             <a:off x="0" y="0"/>
-            <a:ext cx="12191695" cy="960120"/>
+            <a:ext cx="12191695" cy="1170432"/>
           </a:xfrm>
           <a:prstGeom prst="rect">
             <a:avLst/>
@@ -8987,7 +7939,7 @@
         </p:nvSpPr>
         <p:spPr>
           <a:xfrm>
-            <a:off x="0" y="960120"/>
+            <a:off x="0" y="1170432"/>
             <a:ext cx="12191695" cy="41148"/>
           </a:xfrm>
           <a:prstGeom prst="rect">
@@ -9031,7 +7983,7 @@
         <p:spPr>
           <a:xfrm>
             <a:off x="457200" y="164592"/>
-            <a:ext cx="11277295" cy="502920"/>
+            <a:ext cx="11277295" cy="384048"/>
           </a:xfrm>
           <a:prstGeom prst="rect">
             <a:avLst/>
@@ -9051,7 +8003,7 @@
                 </a:solidFill>
                 <a:latin typeface="Calibri"/>
               </a:rPr>
-              <a:t>Para la Clase 3</a:t>
+              <a:t>Taller de hoy: Línea de tiempo del periodo</a:t>
             </a:r>
           </a:p>
         </p:txBody>
@@ -9064,8 +8016,8 @@
         </p:nvSpPr>
         <p:spPr>
           <a:xfrm>
-            <a:off x="457200" y="1170432"/>
-            <a:ext cx="11277295" cy="5230368"/>
+            <a:off x="457200" y="566928"/>
+            <a:ext cx="11277295" cy="411480"/>
           </a:xfrm>
           <a:prstGeom prst="rect">
             <a:avLst/>
@@ -9078,180 +8030,909 @@
           </a:bodyPr>
           <a:lstStyle/>
           <a:p>
-            <a:pPr>
-              <a:spcAft>
-                <a:spcPts val="800"/>
-              </a:spcAft>
-            </a:pPr>
-            <a:r>
-              <a:rPr sz="2000" b="0" i="0">
-                <a:solidFill>
-                  <a:srgbClr val="333333"/>
-                </a:solidFill>
-                <a:latin typeface="Calibri"/>
-              </a:rPr>
-              <a:t>–   </a:t>
-            </a:r>
-            <a:r>
-              <a:rPr sz="2000" b="1" i="0">
-                <a:solidFill>
-                  <a:srgbClr val="333333"/>
-                </a:solidFill>
-                <a:latin typeface="Calibri"/>
-              </a:rPr>
-              <a:t>Trabajo dirigido:</a:t>
-            </a:r>
-            <a:r>
-              <a:rPr sz="2000" b="0" i="0">
-                <a:solidFill>
-                  <a:srgbClr val="333333"/>
-                </a:solidFill>
-                <a:latin typeface="Calibri"/>
-              </a:rPr>
-              <a:t> Investigación sobre hitos históricos — cada equipo completa la línea de tiempo del curso juntando los cinco tramos expuestos hoy, en la carpeta del equipo.</a:t>
-            </a:r>
-          </a:p>
-          <a:p>
-            <a:pPr>
-              <a:spcAft>
-                <a:spcPts val="800"/>
-              </a:spcAft>
-            </a:pPr>
-            <a:r>
-              <a:rPr sz="2000" b="0" i="0">
-                <a:solidFill>
-                  <a:srgbClr val="333333"/>
-                </a:solidFill>
-                <a:latin typeface="Calibri"/>
-              </a:rPr>
-              <a:t>–   </a:t>
-            </a:r>
-            <a:r>
-              <a:rPr sz="2000" b="1" i="0">
-                <a:solidFill>
-                  <a:srgbClr val="333333"/>
-                </a:solidFill>
-                <a:latin typeface="Calibri"/>
-              </a:rPr>
-              <a:t>Trabajo independiente:</a:t>
-            </a:r>
-            <a:r>
-              <a:rPr sz="2000" b="0" i="0">
-                <a:solidFill>
-                  <a:srgbClr val="333333"/>
-                </a:solidFill>
-                <a:latin typeface="Calibri"/>
-              </a:rPr>
-              <a:t> Elaboración de línea de tiempo: la versión completa (los cinco periodos), con al menos un «qué sigue vivo hoy» por periodo.</a:t>
-            </a:r>
-          </a:p>
-          <a:p>
-            <a:pPr>
-              <a:spcAft>
-                <a:spcPts val="800"/>
-              </a:spcAft>
-            </a:pPr>
-            <a:r>
-              <a:rPr sz="2000" b="0" i="0">
-                <a:solidFill>
-                  <a:srgbClr val="333333"/>
-                </a:solidFill>
-                <a:latin typeface="Calibri"/>
-              </a:rPr>
-              <a:t>–   </a:t>
-            </a:r>
-            <a:r>
-              <a:rPr sz="2000" b="1" i="0">
-                <a:solidFill>
-                  <a:srgbClr val="333333"/>
-                </a:solidFill>
-                <a:latin typeface="Calibri"/>
-              </a:rPr>
-              <a:t>Clase 3 · Fundamentos básicos de la Ingeniería de Sistemas</a:t>
-            </a:r>
-            <a:r>
-              <a:rPr sz="2000" b="0" i="0">
-                <a:solidFill>
-                  <a:srgbClr val="333333"/>
-                </a:solidFill>
-                <a:latin typeface="Calibri"/>
-              </a:rPr>
-              <a:t> — qué es un sistema y por qué el software es solo una parte de él. Se trabaja con un asistente de IA, y hay que declarar el prompt usado.</a:t>
-            </a:r>
-          </a:p>
-          <a:p>
-            <a:pPr>
-              <a:spcAft>
-                <a:spcPts val="800"/>
-              </a:spcAft>
-            </a:pPr>
-            <a:r>
-              <a:rPr sz="2000" b="0" i="0">
-                <a:solidFill>
-                  <a:srgbClr val="333333"/>
-                </a:solidFill>
-                <a:latin typeface="Calibri"/>
-              </a:rPr>
-              <a:t>–   </a:t>
-            </a:r>
-            <a:r>
-              <a:rPr sz="2000" b="1" i="0">
-                <a:solidFill>
-                  <a:srgbClr val="333333"/>
-                </a:solidFill>
-                <a:latin typeface="Calibri"/>
-              </a:rPr>
-              <a:t>Aviso:</a:t>
-            </a:r>
-            <a:r>
-              <a:rPr sz="2000" b="0" i="0">
-                <a:solidFill>
-                  <a:srgbClr val="333333"/>
-                </a:solidFill>
-                <a:latin typeface="Calibri"/>
-              </a:rPr>
-              <a:t> Traigan la línea de tiempo completa en la carpeta del equipo. En la sesión 3 se descompone un sistema del entorno y la línea de tiempo es el punto de partida.</a:t>
-            </a:r>
-          </a:p>
-          <a:p>
-            <a:pPr>
-              <a:spcAft>
-                <a:spcPts val="800"/>
-              </a:spcAft>
-            </a:pPr>
-            <a:r>
-              <a:rPr sz="2000" b="0" i="0">
-                <a:solidFill>
-                  <a:srgbClr val="333333"/>
-                </a:solidFill>
-                <a:latin typeface="Calibri"/>
-              </a:rPr>
-              <a:t>–   </a:t>
-            </a:r>
-            <a:r>
-              <a:rPr sz="2000" b="1" i="0">
-                <a:solidFill>
-                  <a:srgbClr val="333333"/>
-                </a:solidFill>
-                <a:latin typeface="Calibri"/>
-              </a:rPr>
-              <a:t>Antes de salir:</a:t>
-            </a:r>
-            <a:r>
-              <a:rPr sz="2000" b="0" i="0">
-                <a:solidFill>
-                  <a:srgbClr val="333333"/>
-                </a:solidFill>
-                <a:latin typeface="Calibri"/>
-              </a:rPr>
-              <a:t> el enlace del documento del equipo en el chat, con permiso de lectura para el docente, y el nombre del vocero de hoy.</a:t>
-            </a:r>
-          </a:p>
-        </p:txBody>
-      </p:sp>
-      <p:sp>
-        <p:nvSpPr>
-          <p:cNvPr id="6" name="TextBox 5"/>
+            <a:r>
+              <a:rPr sz="1400" b="0" i="0">
+                <a:solidFill>
+                  <a:srgbClr val="B8D8EE"/>
+                </a:solidFill>
+                <a:latin typeface="Calibri"/>
+              </a:rPr>
+              <a:t>17 min en equipos · un periodo por equipo, asignado en orden histórico · línea de tiempo de 4 hitos en draw.io</a:t>
+            </a:r>
+          </a:p>
+        </p:txBody>
+      </p:sp>
+      <p:sp>
+        <p:nvSpPr>
+          <p:cNvPr id="6" name="Rounded Rectangle 5"/>
+          <p:cNvSpPr/>
+          <p:nvPr/>
+        </p:nvSpPr>
+        <p:spPr>
+          <a:xfrm>
+            <a:off x="457200" y="1472184"/>
+            <a:ext cx="11277295" cy="566928"/>
+          </a:xfrm>
+          <a:prstGeom prst="roundRect">
+            <a:avLst>
+              <a:gd name="adj" fmla="val 12000"/>
+            </a:avLst>
+          </a:prstGeom>
+          <a:solidFill>
+            <a:srgbClr val="F2F2F2"/>
+          </a:solidFill>
+          <a:ln>
+            <a:noFill/>
+          </a:ln>
+        </p:spPr>
+        <p:style>
+          <a:lnRef idx="1">
+            <a:schemeClr val="accent1"/>
+          </a:lnRef>
+          <a:fillRef idx="3">
+            <a:schemeClr val="accent1"/>
+          </a:fillRef>
+          <a:effectRef idx="2">
+            <a:schemeClr val="accent1"/>
+          </a:effectRef>
+          <a:fontRef idx="minor">
+            <a:schemeClr val="lt1"/>
+          </a:fontRef>
+        </p:style>
+        <p:txBody>
+          <a:bodyPr rtlCol="0" anchor="ctr"/>
+          <a:lstStyle/>
+          <a:p>
+            <a:pPr algn="ctr"/>
+          </a:p>
+        </p:txBody>
+      </p:sp>
+      <p:sp>
+        <p:nvSpPr>
+          <p:cNvPr id="7" name="Rectangle 6"/>
+          <p:cNvSpPr/>
+          <p:nvPr/>
+        </p:nvSpPr>
+        <p:spPr>
+          <a:xfrm>
+            <a:off x="640080" y="1618487"/>
+            <a:ext cx="274320" cy="274320"/>
+          </a:xfrm>
+          <a:prstGeom prst="rect">
+            <a:avLst/>
+          </a:prstGeom>
+          <a:solidFill>
+            <a:srgbClr val="FFFFFF"/>
+          </a:solidFill>
+          <a:ln>
+            <a:solidFill>
+              <a:srgbClr val="333333"/>
+            </a:solidFill>
+          </a:ln>
+        </p:spPr>
+        <p:style>
+          <a:lnRef idx="1">
+            <a:schemeClr val="accent1"/>
+          </a:lnRef>
+          <a:fillRef idx="3">
+            <a:schemeClr val="accent1"/>
+          </a:fillRef>
+          <a:effectRef idx="2">
+            <a:schemeClr val="accent1"/>
+          </a:effectRef>
+          <a:fontRef idx="minor">
+            <a:schemeClr val="lt1"/>
+          </a:fontRef>
+        </p:style>
+        <p:txBody>
+          <a:bodyPr rtlCol="0" anchor="ctr"/>
+          <a:lstStyle/>
+          <a:p>
+            <a:pPr algn="ctr"/>
+          </a:p>
+        </p:txBody>
+      </p:sp>
+      <p:sp>
+        <p:nvSpPr>
+          <p:cNvPr id="8" name="Rectangle 7"/>
+          <p:cNvSpPr/>
+          <p:nvPr/>
+        </p:nvSpPr>
+        <p:spPr>
+          <a:xfrm>
+            <a:off x="640080" y="1618487"/>
+            <a:ext cx="73152" cy="274320"/>
+          </a:xfrm>
+          <a:prstGeom prst="rect">
+            <a:avLst/>
+          </a:prstGeom>
+          <a:solidFill>
+            <a:srgbClr val="269CCB"/>
+          </a:solidFill>
+          <a:ln>
+            <a:noFill/>
+          </a:ln>
+        </p:spPr>
+        <p:style>
+          <a:lnRef idx="1">
+            <a:schemeClr val="accent1"/>
+          </a:lnRef>
+          <a:fillRef idx="3">
+            <a:schemeClr val="accent1"/>
+          </a:fillRef>
+          <a:effectRef idx="2">
+            <a:schemeClr val="accent1"/>
+          </a:effectRef>
+          <a:fontRef idx="minor">
+            <a:schemeClr val="lt1"/>
+          </a:fontRef>
+        </p:style>
+        <p:txBody>
+          <a:bodyPr rtlCol="0" anchor="ctr"/>
+          <a:lstStyle/>
+          <a:p>
+            <a:pPr algn="ctr"/>
+          </a:p>
+        </p:txBody>
+      </p:sp>
+      <p:sp>
+        <p:nvSpPr>
+          <p:cNvPr id="9" name="TextBox 8"/>
+          <p:cNvSpPr txBox="1"/>
+          <p:nvPr/>
+        </p:nvSpPr>
+        <p:spPr>
+          <a:xfrm>
+            <a:off x="1097280" y="1563624"/>
+            <a:ext cx="10362895" cy="402336"/>
+          </a:xfrm>
+          <a:prstGeom prst="rect">
+            <a:avLst/>
+          </a:prstGeom>
+          <a:noFill/>
+        </p:spPr>
+        <p:txBody>
+          <a:bodyPr wrap="square" anchor="ctr"/>
+          <a:lstStyle/>
+          <a:p>
+            <a:r>
+              <a:rPr sz="1500" b="1" i="0">
+                <a:solidFill>
+                  <a:srgbClr val="333333"/>
+                </a:solidFill>
+                <a:latin typeface="Calibri"/>
+              </a:rPr>
+              <a:t>LOS CUATRO HITOS</a:t>
+            </a:r>
+            <a:r>
+              <a:rPr sz="1500" b="0" i="0">
+                <a:solidFill>
+                  <a:srgbClr val="333333"/>
+                </a:solidFill>
+                <a:latin typeface="Calibri"/>
+              </a:rPr>
+              <a:t> — Cuatro hechos de su periodo, con año, puestos en orden en la línea de tiempo.</a:t>
+            </a:r>
+          </a:p>
+        </p:txBody>
+      </p:sp>
+      <p:sp>
+        <p:nvSpPr>
+          <p:cNvPr id="10" name="Rounded Rectangle 9"/>
+          <p:cNvSpPr/>
+          <p:nvPr/>
+        </p:nvSpPr>
+        <p:spPr>
+          <a:xfrm>
+            <a:off x="457200" y="2148839"/>
+            <a:ext cx="11277295" cy="566928"/>
+          </a:xfrm>
+          <a:prstGeom prst="roundRect">
+            <a:avLst>
+              <a:gd name="adj" fmla="val 12000"/>
+            </a:avLst>
+          </a:prstGeom>
+          <a:solidFill>
+            <a:srgbClr val="F2F2F2"/>
+          </a:solidFill>
+          <a:ln>
+            <a:noFill/>
+          </a:ln>
+        </p:spPr>
+        <p:style>
+          <a:lnRef idx="1">
+            <a:schemeClr val="accent1"/>
+          </a:lnRef>
+          <a:fillRef idx="3">
+            <a:schemeClr val="accent1"/>
+          </a:fillRef>
+          <a:effectRef idx="2">
+            <a:schemeClr val="accent1"/>
+          </a:effectRef>
+          <a:fontRef idx="minor">
+            <a:schemeClr val="lt1"/>
+          </a:fontRef>
+        </p:style>
+        <p:txBody>
+          <a:bodyPr rtlCol="0" anchor="ctr"/>
+          <a:lstStyle/>
+          <a:p>
+            <a:pPr algn="ctr"/>
+          </a:p>
+        </p:txBody>
+      </p:sp>
+      <p:sp>
+        <p:nvSpPr>
+          <p:cNvPr id="11" name="Rectangle 10"/>
+          <p:cNvSpPr/>
+          <p:nvPr/>
+        </p:nvSpPr>
+        <p:spPr>
+          <a:xfrm>
+            <a:off x="640080" y="2295144"/>
+            <a:ext cx="274320" cy="274320"/>
+          </a:xfrm>
+          <a:prstGeom prst="rect">
+            <a:avLst/>
+          </a:prstGeom>
+          <a:solidFill>
+            <a:srgbClr val="FFFFFF"/>
+          </a:solidFill>
+          <a:ln>
+            <a:solidFill>
+              <a:srgbClr val="333333"/>
+            </a:solidFill>
+          </a:ln>
+        </p:spPr>
+        <p:style>
+          <a:lnRef idx="1">
+            <a:schemeClr val="accent1"/>
+          </a:lnRef>
+          <a:fillRef idx="3">
+            <a:schemeClr val="accent1"/>
+          </a:fillRef>
+          <a:effectRef idx="2">
+            <a:schemeClr val="accent1"/>
+          </a:effectRef>
+          <a:fontRef idx="minor">
+            <a:schemeClr val="lt1"/>
+          </a:fontRef>
+        </p:style>
+        <p:txBody>
+          <a:bodyPr rtlCol="0" anchor="ctr"/>
+          <a:lstStyle/>
+          <a:p>
+            <a:pPr algn="ctr"/>
+          </a:p>
+        </p:txBody>
+      </p:sp>
+      <p:sp>
+        <p:nvSpPr>
+          <p:cNvPr id="12" name="Rectangle 11"/>
+          <p:cNvSpPr/>
+          <p:nvPr/>
+        </p:nvSpPr>
+        <p:spPr>
+          <a:xfrm>
+            <a:off x="640080" y="2295144"/>
+            <a:ext cx="73152" cy="274320"/>
+          </a:xfrm>
+          <a:prstGeom prst="rect">
+            <a:avLst/>
+          </a:prstGeom>
+          <a:solidFill>
+            <a:srgbClr val="269CCB"/>
+          </a:solidFill>
+          <a:ln>
+            <a:noFill/>
+          </a:ln>
+        </p:spPr>
+        <p:style>
+          <a:lnRef idx="1">
+            <a:schemeClr val="accent1"/>
+          </a:lnRef>
+          <a:fillRef idx="3">
+            <a:schemeClr val="accent1"/>
+          </a:fillRef>
+          <a:effectRef idx="2">
+            <a:schemeClr val="accent1"/>
+          </a:effectRef>
+          <a:fontRef idx="minor">
+            <a:schemeClr val="lt1"/>
+          </a:fontRef>
+        </p:style>
+        <p:txBody>
+          <a:bodyPr rtlCol="0" anchor="ctr"/>
+          <a:lstStyle/>
+          <a:p>
+            <a:pPr algn="ctr"/>
+          </a:p>
+        </p:txBody>
+      </p:sp>
+      <p:sp>
+        <p:nvSpPr>
+          <p:cNvPr id="13" name="TextBox 12"/>
+          <p:cNvSpPr txBox="1"/>
+          <p:nvPr/>
+        </p:nvSpPr>
+        <p:spPr>
+          <a:xfrm>
+            <a:off x="1097280" y="2240279"/>
+            <a:ext cx="10362895" cy="402336"/>
+          </a:xfrm>
+          <a:prstGeom prst="rect">
+            <a:avLst/>
+          </a:prstGeom>
+          <a:noFill/>
+        </p:spPr>
+        <p:txBody>
+          <a:bodyPr wrap="square" anchor="ctr"/>
+          <a:lstStyle/>
+          <a:p>
+            <a:r>
+              <a:rPr sz="1500" b="1" i="0">
+                <a:solidFill>
+                  <a:srgbClr val="333333"/>
+                </a:solidFill>
+                <a:latin typeface="Calibri"/>
+              </a:rPr>
+              <a:t>QUÉ DOLÍA ANTES</a:t>
+            </a:r>
+            <a:r>
+              <a:rPr sz="1500" b="0" i="0">
+                <a:solidFill>
+                  <a:srgbClr val="333333"/>
+                </a:solidFill>
+                <a:latin typeface="Calibri"/>
+              </a:rPr>
+              <a:t> — Para cada hito: el problema concreto que existía antes y a quién le pasaba.</a:t>
+            </a:r>
+          </a:p>
+        </p:txBody>
+      </p:sp>
+      <p:sp>
+        <p:nvSpPr>
+          <p:cNvPr id="14" name="Rounded Rectangle 13"/>
+          <p:cNvSpPr/>
+          <p:nvPr/>
+        </p:nvSpPr>
+        <p:spPr>
+          <a:xfrm>
+            <a:off x="457200" y="2825496"/>
+            <a:ext cx="11277295" cy="566928"/>
+          </a:xfrm>
+          <a:prstGeom prst="roundRect">
+            <a:avLst>
+              <a:gd name="adj" fmla="val 12000"/>
+            </a:avLst>
+          </a:prstGeom>
+          <a:solidFill>
+            <a:srgbClr val="F2F2F2"/>
+          </a:solidFill>
+          <a:ln>
+            <a:noFill/>
+          </a:ln>
+        </p:spPr>
+        <p:style>
+          <a:lnRef idx="1">
+            <a:schemeClr val="accent1"/>
+          </a:lnRef>
+          <a:fillRef idx="3">
+            <a:schemeClr val="accent1"/>
+          </a:fillRef>
+          <a:effectRef idx="2">
+            <a:schemeClr val="accent1"/>
+          </a:effectRef>
+          <a:fontRef idx="minor">
+            <a:schemeClr val="lt1"/>
+          </a:fontRef>
+        </p:style>
+        <p:txBody>
+          <a:bodyPr rtlCol="0" anchor="ctr"/>
+          <a:lstStyle/>
+          <a:p>
+            <a:pPr algn="ctr"/>
+          </a:p>
+        </p:txBody>
+      </p:sp>
+      <p:sp>
+        <p:nvSpPr>
+          <p:cNvPr id="15" name="Rectangle 14"/>
+          <p:cNvSpPr/>
+          <p:nvPr/>
+        </p:nvSpPr>
+        <p:spPr>
+          <a:xfrm>
+            <a:off x="640080" y="2971800"/>
+            <a:ext cx="274320" cy="274320"/>
+          </a:xfrm>
+          <a:prstGeom prst="rect">
+            <a:avLst/>
+          </a:prstGeom>
+          <a:solidFill>
+            <a:srgbClr val="FFFFFF"/>
+          </a:solidFill>
+          <a:ln>
+            <a:solidFill>
+              <a:srgbClr val="333333"/>
+            </a:solidFill>
+          </a:ln>
+        </p:spPr>
+        <p:style>
+          <a:lnRef idx="1">
+            <a:schemeClr val="accent1"/>
+          </a:lnRef>
+          <a:fillRef idx="3">
+            <a:schemeClr val="accent1"/>
+          </a:fillRef>
+          <a:effectRef idx="2">
+            <a:schemeClr val="accent1"/>
+          </a:effectRef>
+          <a:fontRef idx="minor">
+            <a:schemeClr val="lt1"/>
+          </a:fontRef>
+        </p:style>
+        <p:txBody>
+          <a:bodyPr rtlCol="0" anchor="ctr"/>
+          <a:lstStyle/>
+          <a:p>
+            <a:pPr algn="ctr"/>
+          </a:p>
+        </p:txBody>
+      </p:sp>
+      <p:sp>
+        <p:nvSpPr>
+          <p:cNvPr id="16" name="Rectangle 15"/>
+          <p:cNvSpPr/>
+          <p:nvPr/>
+        </p:nvSpPr>
+        <p:spPr>
+          <a:xfrm>
+            <a:off x="640080" y="2971800"/>
+            <a:ext cx="73152" cy="274320"/>
+          </a:xfrm>
+          <a:prstGeom prst="rect">
+            <a:avLst/>
+          </a:prstGeom>
+          <a:solidFill>
+            <a:srgbClr val="269CCB"/>
+          </a:solidFill>
+          <a:ln>
+            <a:noFill/>
+          </a:ln>
+        </p:spPr>
+        <p:style>
+          <a:lnRef idx="1">
+            <a:schemeClr val="accent1"/>
+          </a:lnRef>
+          <a:fillRef idx="3">
+            <a:schemeClr val="accent1"/>
+          </a:fillRef>
+          <a:effectRef idx="2">
+            <a:schemeClr val="accent1"/>
+          </a:effectRef>
+          <a:fontRef idx="minor">
+            <a:schemeClr val="lt1"/>
+          </a:fontRef>
+        </p:style>
+        <p:txBody>
+          <a:bodyPr rtlCol="0" anchor="ctr"/>
+          <a:lstStyle/>
+          <a:p>
+            <a:pPr algn="ctr"/>
+          </a:p>
+        </p:txBody>
+      </p:sp>
+      <p:sp>
+        <p:nvSpPr>
+          <p:cNvPr id="17" name="TextBox 16"/>
+          <p:cNvSpPr txBox="1"/>
+          <p:nvPr/>
+        </p:nvSpPr>
+        <p:spPr>
+          <a:xfrm>
+            <a:off x="1097280" y="2916936"/>
+            <a:ext cx="10362895" cy="402336"/>
+          </a:xfrm>
+          <a:prstGeom prst="rect">
+            <a:avLst/>
+          </a:prstGeom>
+          <a:noFill/>
+        </p:spPr>
+        <p:txBody>
+          <a:bodyPr wrap="square" anchor="ctr"/>
+          <a:lstStyle/>
+          <a:p>
+            <a:r>
+              <a:rPr sz="1500" b="1" i="0">
+                <a:solidFill>
+                  <a:srgbClr val="333333"/>
+                </a:solidFill>
+                <a:latin typeface="Calibri"/>
+              </a:rPr>
+              <a:t>QUÉ PROPUSO</a:t>
+            </a:r>
+            <a:r>
+              <a:rPr sz="1500" b="0" i="0">
+                <a:solidFill>
+                  <a:srgbClr val="333333"/>
+                </a:solidFill>
+                <a:latin typeface="Calibri"/>
+              </a:rPr>
+              <a:t> — Para cada hito: la idea, el método o la herramienta, en una frase que ustedes puedan explicar.</a:t>
+            </a:r>
+          </a:p>
+        </p:txBody>
+      </p:sp>
+      <p:sp>
+        <p:nvSpPr>
+          <p:cNvPr id="18" name="Rounded Rectangle 17"/>
+          <p:cNvSpPr/>
+          <p:nvPr/>
+        </p:nvSpPr>
+        <p:spPr>
+          <a:xfrm>
+            <a:off x="457200" y="3502152"/>
+            <a:ext cx="11277295" cy="566928"/>
+          </a:xfrm>
+          <a:prstGeom prst="roundRect">
+            <a:avLst>
+              <a:gd name="adj" fmla="val 12000"/>
+            </a:avLst>
+          </a:prstGeom>
+          <a:solidFill>
+            <a:srgbClr val="F2F2F2"/>
+          </a:solidFill>
+          <a:ln>
+            <a:noFill/>
+          </a:ln>
+        </p:spPr>
+        <p:style>
+          <a:lnRef idx="1">
+            <a:schemeClr val="accent1"/>
+          </a:lnRef>
+          <a:fillRef idx="3">
+            <a:schemeClr val="accent1"/>
+          </a:fillRef>
+          <a:effectRef idx="2">
+            <a:schemeClr val="accent1"/>
+          </a:effectRef>
+          <a:fontRef idx="minor">
+            <a:schemeClr val="lt1"/>
+          </a:fontRef>
+        </p:style>
+        <p:txBody>
+          <a:bodyPr rtlCol="0" anchor="ctr"/>
+          <a:lstStyle/>
+          <a:p>
+            <a:pPr algn="ctr"/>
+          </a:p>
+        </p:txBody>
+      </p:sp>
+      <p:sp>
+        <p:nvSpPr>
+          <p:cNvPr id="19" name="Rectangle 18"/>
+          <p:cNvSpPr/>
+          <p:nvPr/>
+        </p:nvSpPr>
+        <p:spPr>
+          <a:xfrm>
+            <a:off x="640080" y="3648456"/>
+            <a:ext cx="274320" cy="274320"/>
+          </a:xfrm>
+          <a:prstGeom prst="rect">
+            <a:avLst/>
+          </a:prstGeom>
+          <a:solidFill>
+            <a:srgbClr val="FFFFFF"/>
+          </a:solidFill>
+          <a:ln>
+            <a:solidFill>
+              <a:srgbClr val="333333"/>
+            </a:solidFill>
+          </a:ln>
+        </p:spPr>
+        <p:style>
+          <a:lnRef idx="1">
+            <a:schemeClr val="accent1"/>
+          </a:lnRef>
+          <a:fillRef idx="3">
+            <a:schemeClr val="accent1"/>
+          </a:fillRef>
+          <a:effectRef idx="2">
+            <a:schemeClr val="accent1"/>
+          </a:effectRef>
+          <a:fontRef idx="minor">
+            <a:schemeClr val="lt1"/>
+          </a:fontRef>
+        </p:style>
+        <p:txBody>
+          <a:bodyPr rtlCol="0" anchor="ctr"/>
+          <a:lstStyle/>
+          <a:p>
+            <a:pPr algn="ctr"/>
+          </a:p>
+        </p:txBody>
+      </p:sp>
+      <p:sp>
+        <p:nvSpPr>
+          <p:cNvPr id="20" name="Rectangle 19"/>
+          <p:cNvSpPr/>
+          <p:nvPr/>
+        </p:nvSpPr>
+        <p:spPr>
+          <a:xfrm>
+            <a:off x="640080" y="3648456"/>
+            <a:ext cx="73152" cy="274320"/>
+          </a:xfrm>
+          <a:prstGeom prst="rect">
+            <a:avLst/>
+          </a:prstGeom>
+          <a:solidFill>
+            <a:srgbClr val="269CCB"/>
+          </a:solidFill>
+          <a:ln>
+            <a:noFill/>
+          </a:ln>
+        </p:spPr>
+        <p:style>
+          <a:lnRef idx="1">
+            <a:schemeClr val="accent1"/>
+          </a:lnRef>
+          <a:fillRef idx="3">
+            <a:schemeClr val="accent1"/>
+          </a:fillRef>
+          <a:effectRef idx="2">
+            <a:schemeClr val="accent1"/>
+          </a:effectRef>
+          <a:fontRef idx="minor">
+            <a:schemeClr val="lt1"/>
+          </a:fontRef>
+        </p:style>
+        <p:txBody>
+          <a:bodyPr rtlCol="0" anchor="ctr"/>
+          <a:lstStyle/>
+          <a:p>
+            <a:pPr algn="ctr"/>
+          </a:p>
+        </p:txBody>
+      </p:sp>
+      <p:sp>
+        <p:nvSpPr>
+          <p:cNvPr id="21" name="TextBox 20"/>
+          <p:cNvSpPr txBox="1"/>
+          <p:nvPr/>
+        </p:nvSpPr>
+        <p:spPr>
+          <a:xfrm>
+            <a:off x="1097280" y="3593592"/>
+            <a:ext cx="10362895" cy="402336"/>
+          </a:xfrm>
+          <a:prstGeom prst="rect">
+            <a:avLst/>
+          </a:prstGeom>
+          <a:noFill/>
+        </p:spPr>
+        <p:txBody>
+          <a:bodyPr wrap="square" anchor="ctr"/>
+          <a:lstStyle/>
+          <a:p>
+            <a:r>
+              <a:rPr sz="1500" b="1" i="0">
+                <a:solidFill>
+                  <a:srgbClr val="333333"/>
+                </a:solidFill>
+                <a:latin typeface="Calibri"/>
+              </a:rPr>
+              <a:t>QUÉ SIGUE VIVO HOY</a:t>
+            </a:r>
+            <a:r>
+              <a:rPr sz="1500" b="0" i="0">
+                <a:solidFill>
+                  <a:srgbClr val="333333"/>
+                </a:solidFill>
+                <a:latin typeface="Calibri"/>
+              </a:rPr>
+              <a:t> — Para </a:t>
+            </a:r>
+            <a:r>
+              <a:rPr sz="1500" b="1" i="0">
+                <a:solidFill>
+                  <a:srgbClr val="333333"/>
+                </a:solidFill>
+                <a:latin typeface="Calibri"/>
+              </a:rPr>
+              <a:t>al menos dos</a:t>
+            </a:r>
+            <a:r>
+              <a:rPr sz="1500" b="0" i="0">
+                <a:solidFill>
+                  <a:srgbClr val="333333"/>
+                </a:solidFill>
+                <a:latin typeface="Calibri"/>
+              </a:rPr>
+              <a:t> de los cuatro hitos: qué parte de ese problema todavía no está resuelta, con un ejemplo de algo que ustedes hayan visto.</a:t>
+            </a:r>
+          </a:p>
+        </p:txBody>
+      </p:sp>
+      <p:sp>
+        <p:nvSpPr>
+          <p:cNvPr id="22" name="Rounded Rectangle 21"/>
+          <p:cNvSpPr/>
+          <p:nvPr/>
+        </p:nvSpPr>
+        <p:spPr>
+          <a:xfrm>
+            <a:off x="457200" y="4178808"/>
+            <a:ext cx="11277295" cy="566928"/>
+          </a:xfrm>
+          <a:prstGeom prst="roundRect">
+            <a:avLst>
+              <a:gd name="adj" fmla="val 12000"/>
+            </a:avLst>
+          </a:prstGeom>
+          <a:solidFill>
+            <a:srgbClr val="F2F2F2"/>
+          </a:solidFill>
+          <a:ln>
+            <a:noFill/>
+          </a:ln>
+        </p:spPr>
+        <p:style>
+          <a:lnRef idx="1">
+            <a:schemeClr val="accent1"/>
+          </a:lnRef>
+          <a:fillRef idx="3">
+            <a:schemeClr val="accent1"/>
+          </a:fillRef>
+          <a:effectRef idx="2">
+            <a:schemeClr val="accent1"/>
+          </a:effectRef>
+          <a:fontRef idx="minor">
+            <a:schemeClr val="lt1"/>
+          </a:fontRef>
+        </p:style>
+        <p:txBody>
+          <a:bodyPr rtlCol="0" anchor="ctr"/>
+          <a:lstStyle/>
+          <a:p>
+            <a:pPr algn="ctr"/>
+          </a:p>
+        </p:txBody>
+      </p:sp>
+      <p:sp>
+        <p:nvSpPr>
+          <p:cNvPr id="23" name="Rectangle 22"/>
+          <p:cNvSpPr/>
+          <p:nvPr/>
+        </p:nvSpPr>
+        <p:spPr>
+          <a:xfrm>
+            <a:off x="640080" y="4325112"/>
+            <a:ext cx="274320" cy="274320"/>
+          </a:xfrm>
+          <a:prstGeom prst="rect">
+            <a:avLst/>
+          </a:prstGeom>
+          <a:solidFill>
+            <a:srgbClr val="FFFFFF"/>
+          </a:solidFill>
+          <a:ln>
+            <a:solidFill>
+              <a:srgbClr val="333333"/>
+            </a:solidFill>
+          </a:ln>
+        </p:spPr>
+        <p:style>
+          <a:lnRef idx="1">
+            <a:schemeClr val="accent1"/>
+          </a:lnRef>
+          <a:fillRef idx="3">
+            <a:schemeClr val="accent1"/>
+          </a:fillRef>
+          <a:effectRef idx="2">
+            <a:schemeClr val="accent1"/>
+          </a:effectRef>
+          <a:fontRef idx="minor">
+            <a:schemeClr val="lt1"/>
+          </a:fontRef>
+        </p:style>
+        <p:txBody>
+          <a:bodyPr rtlCol="0" anchor="ctr"/>
+          <a:lstStyle/>
+          <a:p>
+            <a:pPr algn="ctr"/>
+          </a:p>
+        </p:txBody>
+      </p:sp>
+      <p:sp>
+        <p:nvSpPr>
+          <p:cNvPr id="24" name="Rectangle 23"/>
+          <p:cNvSpPr/>
+          <p:nvPr/>
+        </p:nvSpPr>
+        <p:spPr>
+          <a:xfrm>
+            <a:off x="640080" y="4325112"/>
+            <a:ext cx="73152" cy="274320"/>
+          </a:xfrm>
+          <a:prstGeom prst="rect">
+            <a:avLst/>
+          </a:prstGeom>
+          <a:solidFill>
+            <a:srgbClr val="269CCB"/>
+          </a:solidFill>
+          <a:ln>
+            <a:noFill/>
+          </a:ln>
+        </p:spPr>
+        <p:style>
+          <a:lnRef idx="1">
+            <a:schemeClr val="accent1"/>
+          </a:lnRef>
+          <a:fillRef idx="3">
+            <a:schemeClr val="accent1"/>
+          </a:fillRef>
+          <a:effectRef idx="2">
+            <a:schemeClr val="accent1"/>
+          </a:effectRef>
+          <a:fontRef idx="minor">
+            <a:schemeClr val="lt1"/>
+          </a:fontRef>
+        </p:style>
+        <p:txBody>
+          <a:bodyPr rtlCol="0" anchor="ctr"/>
+          <a:lstStyle/>
+          <a:p>
+            <a:pPr algn="ctr"/>
+          </a:p>
+        </p:txBody>
+      </p:sp>
+      <p:sp>
+        <p:nvSpPr>
+          <p:cNvPr id="25" name="TextBox 24"/>
+          <p:cNvSpPr txBox="1"/>
+          <p:nvPr/>
+        </p:nvSpPr>
+        <p:spPr>
+          <a:xfrm>
+            <a:off x="1097280" y="4270248"/>
+            <a:ext cx="10362895" cy="402336"/>
+          </a:xfrm>
+          <a:prstGeom prst="rect">
+            <a:avLst/>
+          </a:prstGeom>
+          <a:noFill/>
+        </p:spPr>
+        <p:txBody>
+          <a:bodyPr wrap="square" anchor="ctr"/>
+          <a:lstStyle/>
+          <a:p>
+            <a:r>
+              <a:rPr sz="1500" b="1" i="0">
+                <a:solidFill>
+                  <a:srgbClr val="333333"/>
+                </a:solidFill>
+                <a:latin typeface="Calibri"/>
+              </a:rPr>
+              <a:t>LA FUENTE</a:t>
+            </a:r>
+            <a:r>
+              <a:rPr sz="1500" b="0" i="0">
+                <a:solidFill>
+                  <a:srgbClr val="333333"/>
+                </a:solidFill>
+                <a:latin typeface="Calibri"/>
+              </a:rPr>
+              <a:t> — De dónde sacaron cada dato: autor o institución, y año. Si usaron una cifra («el 70 % de los proyectos…»), la fuente es obligatoria.</a:t>
+            </a:r>
+          </a:p>
+        </p:txBody>
+      </p:sp>
+      <p:sp>
+        <p:nvSpPr>
+          <p:cNvPr id="26" name="TextBox 25"/>
           <p:cNvSpPr txBox="1"/>
           <p:nvPr/>
         </p:nvSpPr>
@@ -9293,6 +8974,1279 @@
 </file>
 
 <file path=ppt/slides/slide22.xml><?xml version="1.0" encoding="utf-8"?>
+<p:sld xmlns:a="http://schemas.openxmlformats.org/drawingml/2006/main" xmlns:p="http://schemas.openxmlformats.org/presentationml/2006/main" xmlns:r="http://schemas.openxmlformats.org/officeDocument/2006/relationships">
+  <p:cSld>
+    <p:bg>
+      <p:bgPr>
+        <a:solidFill>
+          <a:srgbClr val="FFFFFF"/>
+        </a:solidFill>
+        <a:effectLst/>
+      </p:bgPr>
+    </p:bg>
+    <p:spTree>
+      <p:nvGrpSpPr>
+        <p:cNvPr id="1" name=""/>
+        <p:cNvGrpSpPr/>
+        <p:nvPr/>
+      </p:nvGrpSpPr>
+      <p:grpSpPr/>
+      <p:sp>
+        <p:nvSpPr>
+          <p:cNvPr id="2" name="Rectangle 1"/>
+          <p:cNvSpPr/>
+          <p:nvPr/>
+        </p:nvSpPr>
+        <p:spPr>
+          <a:xfrm>
+            <a:off x="0" y="0"/>
+            <a:ext cx="12191695" cy="1170432"/>
+          </a:xfrm>
+          <a:prstGeom prst="rect">
+            <a:avLst/>
+          </a:prstGeom>
+          <a:solidFill>
+            <a:srgbClr val="095292"/>
+          </a:solidFill>
+          <a:ln>
+            <a:noFill/>
+          </a:ln>
+        </p:spPr>
+        <p:style>
+          <a:lnRef idx="1">
+            <a:schemeClr val="accent1"/>
+          </a:lnRef>
+          <a:fillRef idx="3">
+            <a:schemeClr val="accent1"/>
+          </a:fillRef>
+          <a:effectRef idx="2">
+            <a:schemeClr val="accent1"/>
+          </a:effectRef>
+          <a:fontRef idx="minor">
+            <a:schemeClr val="lt1"/>
+          </a:fontRef>
+        </p:style>
+        <p:txBody>
+          <a:bodyPr rtlCol="0" anchor="ctr"/>
+          <a:lstStyle/>
+          <a:p>
+            <a:pPr algn="ctr"/>
+          </a:p>
+        </p:txBody>
+      </p:sp>
+      <p:sp>
+        <p:nvSpPr>
+          <p:cNvPr id="3" name="Rectangle 2"/>
+          <p:cNvSpPr/>
+          <p:nvPr/>
+        </p:nvSpPr>
+        <p:spPr>
+          <a:xfrm>
+            <a:off x="0" y="1170432"/>
+            <a:ext cx="12191695" cy="41148"/>
+          </a:xfrm>
+          <a:prstGeom prst="rect">
+            <a:avLst/>
+          </a:prstGeom>
+          <a:solidFill>
+            <a:srgbClr val="FFD000"/>
+          </a:solidFill>
+          <a:ln>
+            <a:noFill/>
+          </a:ln>
+        </p:spPr>
+        <p:style>
+          <a:lnRef idx="1">
+            <a:schemeClr val="accent1"/>
+          </a:lnRef>
+          <a:fillRef idx="3">
+            <a:schemeClr val="accent1"/>
+          </a:fillRef>
+          <a:effectRef idx="2">
+            <a:schemeClr val="accent1"/>
+          </a:effectRef>
+          <a:fontRef idx="minor">
+            <a:schemeClr val="lt1"/>
+          </a:fontRef>
+        </p:style>
+        <p:txBody>
+          <a:bodyPr rtlCol="0" anchor="ctr"/>
+          <a:lstStyle/>
+          <a:p>
+            <a:pPr algn="ctr"/>
+          </a:p>
+        </p:txBody>
+      </p:sp>
+      <p:sp>
+        <p:nvSpPr>
+          <p:cNvPr id="4" name="TextBox 3"/>
+          <p:cNvSpPr txBox="1"/>
+          <p:nvPr/>
+        </p:nvSpPr>
+        <p:spPr>
+          <a:xfrm>
+            <a:off x="457200" y="164592"/>
+            <a:ext cx="11277295" cy="384048"/>
+          </a:xfrm>
+          <a:prstGeom prst="rect">
+            <a:avLst/>
+          </a:prstGeom>
+          <a:noFill/>
+        </p:spPr>
+        <p:txBody>
+          <a:bodyPr wrap="square">
+            <a:spAutoFit/>
+          </a:bodyPr>
+          <a:lstStyle/>
+          <a:p>
+            <a:r>
+              <a:rPr sz="2600" b="1" i="0">
+                <a:solidFill>
+                  <a:srgbClr val="FFFFFF"/>
+                </a:solidFill>
+                <a:latin typeface="Calibri"/>
+              </a:rPr>
+              <a:t>Cómo se expone en 3 minutos</a:t>
+            </a:r>
+          </a:p>
+        </p:txBody>
+      </p:sp>
+      <p:sp>
+        <p:nvSpPr>
+          <p:cNvPr id="5" name="TextBox 4"/>
+          <p:cNvSpPr txBox="1"/>
+          <p:nvPr/>
+        </p:nvSpPr>
+        <p:spPr>
+          <a:xfrm>
+            <a:off x="457200" y="566928"/>
+            <a:ext cx="11277295" cy="411480"/>
+          </a:xfrm>
+          <a:prstGeom prst="rect">
+            <a:avLst/>
+          </a:prstGeom>
+          <a:noFill/>
+        </p:spPr>
+        <p:txBody>
+          <a:bodyPr wrap="square">
+            <a:spAutoFit/>
+          </a:bodyPr>
+          <a:lstStyle/>
+          <a:p>
+            <a:r>
+              <a:rPr sz="1400" b="0" i="0">
+                <a:solidFill>
+                  <a:srgbClr val="B8D8EE"/>
+                </a:solidFill>
+                <a:latin typeface="Calibri"/>
+              </a:rPr>
+              <a:t>Habla el vocero con la pantalla ya compartida · cronómetro en pantalla · se corta al llegar a cero</a:t>
+            </a:r>
+          </a:p>
+        </p:txBody>
+      </p:sp>
+      <p:sp>
+        <p:nvSpPr>
+          <p:cNvPr id="6" name="Rounded Rectangle 5"/>
+          <p:cNvSpPr/>
+          <p:nvPr/>
+        </p:nvSpPr>
+        <p:spPr>
+          <a:xfrm>
+            <a:off x="457200" y="1659636"/>
+            <a:ext cx="11277295" cy="1051560"/>
+          </a:xfrm>
+          <a:prstGeom prst="roundRect">
+            <a:avLst>
+              <a:gd name="adj" fmla="val 12000"/>
+            </a:avLst>
+          </a:prstGeom>
+          <a:solidFill>
+            <a:srgbClr val="F2F2F2"/>
+          </a:solidFill>
+          <a:ln>
+            <a:noFill/>
+          </a:ln>
+        </p:spPr>
+        <p:style>
+          <a:lnRef idx="1">
+            <a:schemeClr val="accent1"/>
+          </a:lnRef>
+          <a:fillRef idx="3">
+            <a:schemeClr val="accent1"/>
+          </a:fillRef>
+          <a:effectRef idx="2">
+            <a:schemeClr val="accent1"/>
+          </a:effectRef>
+          <a:fontRef idx="minor">
+            <a:schemeClr val="lt1"/>
+          </a:fontRef>
+        </p:style>
+        <p:txBody>
+          <a:bodyPr rtlCol="0" anchor="ctr"/>
+          <a:lstStyle/>
+          <a:p>
+            <a:pPr algn="ctr"/>
+          </a:p>
+        </p:txBody>
+      </p:sp>
+      <p:sp>
+        <p:nvSpPr>
+          <p:cNvPr id="7" name="Rounded Rectangle 6"/>
+          <p:cNvSpPr/>
+          <p:nvPr/>
+        </p:nvSpPr>
+        <p:spPr>
+          <a:xfrm>
+            <a:off x="594360" y="1965960"/>
+            <a:ext cx="438912" cy="438912"/>
+          </a:xfrm>
+          <a:prstGeom prst="roundRect">
+            <a:avLst>
+              <a:gd name="adj" fmla="val 12000"/>
+            </a:avLst>
+          </a:prstGeom>
+          <a:solidFill>
+            <a:srgbClr val="095292"/>
+          </a:solidFill>
+          <a:ln>
+            <a:noFill/>
+          </a:ln>
+        </p:spPr>
+        <p:style>
+          <a:lnRef idx="1">
+            <a:schemeClr val="accent1"/>
+          </a:lnRef>
+          <a:fillRef idx="3">
+            <a:schemeClr val="accent1"/>
+          </a:fillRef>
+          <a:effectRef idx="2">
+            <a:schemeClr val="accent1"/>
+          </a:effectRef>
+          <a:fontRef idx="minor">
+            <a:schemeClr val="lt1"/>
+          </a:fontRef>
+        </p:style>
+        <p:txBody>
+          <a:bodyPr rtlCol="0" anchor="ctr"/>
+          <a:lstStyle/>
+          <a:p>
+            <a:pPr algn="ctr"/>
+          </a:p>
+        </p:txBody>
+      </p:sp>
+      <p:sp>
+        <p:nvSpPr>
+          <p:cNvPr id="8" name="TextBox 7"/>
+          <p:cNvSpPr txBox="1"/>
+          <p:nvPr/>
+        </p:nvSpPr>
+        <p:spPr>
+          <a:xfrm>
+            <a:off x="594360" y="1965960"/>
+            <a:ext cx="438912" cy="438912"/>
+          </a:xfrm>
+          <a:prstGeom prst="rect">
+            <a:avLst/>
+          </a:prstGeom>
+          <a:noFill/>
+        </p:spPr>
+        <p:txBody>
+          <a:bodyPr wrap="square" anchor="ctr"/>
+          <a:lstStyle/>
+          <a:p>
+            <a:pPr algn="ctr"/>
+            <a:r>
+              <a:rPr sz="1600" b="1" i="0">
+                <a:solidFill>
+                  <a:srgbClr val="FFFFFF"/>
+                </a:solidFill>
+                <a:latin typeface="Calibri"/>
+              </a:rPr>
+              <a:t>1</a:t>
+            </a:r>
+          </a:p>
+        </p:txBody>
+      </p:sp>
+      <p:sp>
+        <p:nvSpPr>
+          <p:cNvPr id="9" name="TextBox 8"/>
+          <p:cNvSpPr txBox="1"/>
+          <p:nvPr/>
+        </p:nvSpPr>
+        <p:spPr>
+          <a:xfrm>
+            <a:off x="1188720" y="1751076"/>
+            <a:ext cx="10271455" cy="886968"/>
+          </a:xfrm>
+          <a:prstGeom prst="rect">
+            <a:avLst/>
+          </a:prstGeom>
+          <a:noFill/>
+        </p:spPr>
+        <p:txBody>
+          <a:bodyPr wrap="square" anchor="ctr"/>
+          <a:lstStyle/>
+          <a:p>
+            <a:r>
+              <a:rPr sz="1500" b="1" i="0">
+                <a:solidFill>
+                  <a:srgbClr val="095292"/>
+                </a:solidFill>
+                <a:latin typeface="Calibri"/>
+              </a:rPr>
+              <a:t>45 s · El periodo y qué dolía</a:t>
+            </a:r>
+          </a:p>
+          <a:p>
+            <a:pPr>
+              <a:spcBef>
+                <a:spcPts val="200"/>
+              </a:spcBef>
+            </a:pPr>
+            <a:r>
+              <a:rPr sz="1300" b="0" i="0">
+                <a:solidFill>
+                  <a:srgbClr val="333333"/>
+                </a:solidFill>
+                <a:latin typeface="Calibri"/>
+              </a:rPr>
+              <a:t>Qué años les tocaron y cuál era el problema de la época.</a:t>
+            </a:r>
+          </a:p>
+        </p:txBody>
+      </p:sp>
+      <p:sp>
+        <p:nvSpPr>
+          <p:cNvPr id="10" name="Rounded Rectangle 9"/>
+          <p:cNvSpPr/>
+          <p:nvPr/>
+        </p:nvSpPr>
+        <p:spPr>
+          <a:xfrm>
+            <a:off x="457200" y="2802636"/>
+            <a:ext cx="11277295" cy="1051560"/>
+          </a:xfrm>
+          <a:prstGeom prst="roundRect">
+            <a:avLst>
+              <a:gd name="adj" fmla="val 12000"/>
+            </a:avLst>
+          </a:prstGeom>
+          <a:solidFill>
+            <a:srgbClr val="E8F4FA"/>
+          </a:solidFill>
+          <a:ln>
+            <a:noFill/>
+          </a:ln>
+        </p:spPr>
+        <p:style>
+          <a:lnRef idx="1">
+            <a:schemeClr val="accent1"/>
+          </a:lnRef>
+          <a:fillRef idx="3">
+            <a:schemeClr val="accent1"/>
+          </a:fillRef>
+          <a:effectRef idx="2">
+            <a:schemeClr val="accent1"/>
+          </a:effectRef>
+          <a:fontRef idx="minor">
+            <a:schemeClr val="lt1"/>
+          </a:fontRef>
+        </p:style>
+        <p:txBody>
+          <a:bodyPr rtlCol="0" anchor="ctr"/>
+          <a:lstStyle/>
+          <a:p>
+            <a:pPr algn="ctr"/>
+          </a:p>
+        </p:txBody>
+      </p:sp>
+      <p:sp>
+        <p:nvSpPr>
+          <p:cNvPr id="11" name="Rounded Rectangle 10"/>
+          <p:cNvSpPr/>
+          <p:nvPr/>
+        </p:nvSpPr>
+        <p:spPr>
+          <a:xfrm>
+            <a:off x="594360" y="3108960"/>
+            <a:ext cx="438912" cy="438912"/>
+          </a:xfrm>
+          <a:prstGeom prst="roundRect">
+            <a:avLst>
+              <a:gd name="adj" fmla="val 12000"/>
+            </a:avLst>
+          </a:prstGeom>
+          <a:solidFill>
+            <a:srgbClr val="095292"/>
+          </a:solidFill>
+          <a:ln>
+            <a:noFill/>
+          </a:ln>
+        </p:spPr>
+        <p:style>
+          <a:lnRef idx="1">
+            <a:schemeClr val="accent1"/>
+          </a:lnRef>
+          <a:fillRef idx="3">
+            <a:schemeClr val="accent1"/>
+          </a:fillRef>
+          <a:effectRef idx="2">
+            <a:schemeClr val="accent1"/>
+          </a:effectRef>
+          <a:fontRef idx="minor">
+            <a:schemeClr val="lt1"/>
+          </a:fontRef>
+        </p:style>
+        <p:txBody>
+          <a:bodyPr rtlCol="0" anchor="ctr"/>
+          <a:lstStyle/>
+          <a:p>
+            <a:pPr algn="ctr"/>
+          </a:p>
+        </p:txBody>
+      </p:sp>
+      <p:sp>
+        <p:nvSpPr>
+          <p:cNvPr id="12" name="TextBox 11"/>
+          <p:cNvSpPr txBox="1"/>
+          <p:nvPr/>
+        </p:nvSpPr>
+        <p:spPr>
+          <a:xfrm>
+            <a:off x="594360" y="3108960"/>
+            <a:ext cx="438912" cy="438912"/>
+          </a:xfrm>
+          <a:prstGeom prst="rect">
+            <a:avLst/>
+          </a:prstGeom>
+          <a:noFill/>
+        </p:spPr>
+        <p:txBody>
+          <a:bodyPr wrap="square" anchor="ctr"/>
+          <a:lstStyle/>
+          <a:p>
+            <a:pPr algn="ctr"/>
+            <a:r>
+              <a:rPr sz="1600" b="1" i="0">
+                <a:solidFill>
+                  <a:srgbClr val="FFFFFF"/>
+                </a:solidFill>
+                <a:latin typeface="Calibri"/>
+              </a:rPr>
+              <a:t>2</a:t>
+            </a:r>
+          </a:p>
+        </p:txBody>
+      </p:sp>
+      <p:sp>
+        <p:nvSpPr>
+          <p:cNvPr id="13" name="TextBox 12"/>
+          <p:cNvSpPr txBox="1"/>
+          <p:nvPr/>
+        </p:nvSpPr>
+        <p:spPr>
+          <a:xfrm>
+            <a:off x="1188720" y="2894076"/>
+            <a:ext cx="10271455" cy="886968"/>
+          </a:xfrm>
+          <a:prstGeom prst="rect">
+            <a:avLst/>
+          </a:prstGeom>
+          <a:noFill/>
+        </p:spPr>
+        <p:txBody>
+          <a:bodyPr wrap="square" anchor="ctr"/>
+          <a:lstStyle/>
+          <a:p>
+            <a:r>
+              <a:rPr sz="1500" b="1" i="0">
+                <a:solidFill>
+                  <a:srgbClr val="095292"/>
+                </a:solidFill>
+                <a:latin typeface="Calibri"/>
+              </a:rPr>
+              <a:t>60 s · Los cuatro hitos</a:t>
+            </a:r>
+          </a:p>
+          <a:p>
+            <a:pPr>
+              <a:spcBef>
+                <a:spcPts val="200"/>
+              </a:spcBef>
+            </a:pPr>
+            <a:r>
+              <a:rPr sz="1300" b="0" i="0">
+                <a:solidFill>
+                  <a:srgbClr val="333333"/>
+                </a:solidFill>
+                <a:latin typeface="Calibri"/>
+              </a:rPr>
+              <a:t>En orden, con año. Una frase por hito, sin leer la pantalla.</a:t>
+            </a:r>
+          </a:p>
+        </p:txBody>
+      </p:sp>
+      <p:sp>
+        <p:nvSpPr>
+          <p:cNvPr id="14" name="Rounded Rectangle 13"/>
+          <p:cNvSpPr/>
+          <p:nvPr/>
+        </p:nvSpPr>
+        <p:spPr>
+          <a:xfrm>
+            <a:off x="457200" y="3945636"/>
+            <a:ext cx="11277295" cy="1051560"/>
+          </a:xfrm>
+          <a:prstGeom prst="roundRect">
+            <a:avLst>
+              <a:gd name="adj" fmla="val 12000"/>
+            </a:avLst>
+          </a:prstGeom>
+          <a:solidFill>
+            <a:srgbClr val="F2F2F2"/>
+          </a:solidFill>
+          <a:ln>
+            <a:noFill/>
+          </a:ln>
+        </p:spPr>
+        <p:style>
+          <a:lnRef idx="1">
+            <a:schemeClr val="accent1"/>
+          </a:lnRef>
+          <a:fillRef idx="3">
+            <a:schemeClr val="accent1"/>
+          </a:fillRef>
+          <a:effectRef idx="2">
+            <a:schemeClr val="accent1"/>
+          </a:effectRef>
+          <a:fontRef idx="minor">
+            <a:schemeClr val="lt1"/>
+          </a:fontRef>
+        </p:style>
+        <p:txBody>
+          <a:bodyPr rtlCol="0" anchor="ctr"/>
+          <a:lstStyle/>
+          <a:p>
+            <a:pPr algn="ctr"/>
+          </a:p>
+        </p:txBody>
+      </p:sp>
+      <p:sp>
+        <p:nvSpPr>
+          <p:cNvPr id="15" name="Rounded Rectangle 14"/>
+          <p:cNvSpPr/>
+          <p:nvPr/>
+        </p:nvSpPr>
+        <p:spPr>
+          <a:xfrm>
+            <a:off x="594360" y="4251960"/>
+            <a:ext cx="438912" cy="438912"/>
+          </a:xfrm>
+          <a:prstGeom prst="roundRect">
+            <a:avLst>
+              <a:gd name="adj" fmla="val 12000"/>
+            </a:avLst>
+          </a:prstGeom>
+          <a:solidFill>
+            <a:srgbClr val="095292"/>
+          </a:solidFill>
+          <a:ln>
+            <a:noFill/>
+          </a:ln>
+        </p:spPr>
+        <p:style>
+          <a:lnRef idx="1">
+            <a:schemeClr val="accent1"/>
+          </a:lnRef>
+          <a:fillRef idx="3">
+            <a:schemeClr val="accent1"/>
+          </a:fillRef>
+          <a:effectRef idx="2">
+            <a:schemeClr val="accent1"/>
+          </a:effectRef>
+          <a:fontRef idx="minor">
+            <a:schemeClr val="lt1"/>
+          </a:fontRef>
+        </p:style>
+        <p:txBody>
+          <a:bodyPr rtlCol="0" anchor="ctr"/>
+          <a:lstStyle/>
+          <a:p>
+            <a:pPr algn="ctr"/>
+          </a:p>
+        </p:txBody>
+      </p:sp>
+      <p:sp>
+        <p:nvSpPr>
+          <p:cNvPr id="16" name="TextBox 15"/>
+          <p:cNvSpPr txBox="1"/>
+          <p:nvPr/>
+        </p:nvSpPr>
+        <p:spPr>
+          <a:xfrm>
+            <a:off x="594360" y="4251960"/>
+            <a:ext cx="438912" cy="438912"/>
+          </a:xfrm>
+          <a:prstGeom prst="rect">
+            <a:avLst/>
+          </a:prstGeom>
+          <a:noFill/>
+        </p:spPr>
+        <p:txBody>
+          <a:bodyPr wrap="square" anchor="ctr"/>
+          <a:lstStyle/>
+          <a:p>
+            <a:pPr algn="ctr"/>
+            <a:r>
+              <a:rPr sz="1600" b="1" i="0">
+                <a:solidFill>
+                  <a:srgbClr val="FFFFFF"/>
+                </a:solidFill>
+                <a:latin typeface="Calibri"/>
+              </a:rPr>
+              <a:t>3</a:t>
+            </a:r>
+          </a:p>
+        </p:txBody>
+      </p:sp>
+      <p:sp>
+        <p:nvSpPr>
+          <p:cNvPr id="17" name="TextBox 16"/>
+          <p:cNvSpPr txBox="1"/>
+          <p:nvPr/>
+        </p:nvSpPr>
+        <p:spPr>
+          <a:xfrm>
+            <a:off x="1188720" y="4037076"/>
+            <a:ext cx="10271455" cy="886968"/>
+          </a:xfrm>
+          <a:prstGeom prst="rect">
+            <a:avLst/>
+          </a:prstGeom>
+          <a:noFill/>
+        </p:spPr>
+        <p:txBody>
+          <a:bodyPr wrap="square" anchor="ctr"/>
+          <a:lstStyle/>
+          <a:p>
+            <a:r>
+              <a:rPr sz="1500" b="1" i="0">
+                <a:solidFill>
+                  <a:srgbClr val="095292"/>
+                </a:solidFill>
+                <a:latin typeface="Calibri"/>
+              </a:rPr>
+              <a:t>60 s · Qué sigue vivo</a:t>
+            </a:r>
+          </a:p>
+          <a:p>
+            <a:pPr>
+              <a:spcBef>
+                <a:spcPts val="200"/>
+              </a:spcBef>
+            </a:pPr>
+            <a:r>
+              <a:rPr sz="1300" b="0" i="0">
+                <a:solidFill>
+                  <a:srgbClr val="333333"/>
+                </a:solidFill>
+                <a:latin typeface="Calibri"/>
+              </a:rPr>
+              <a:t>Los dos hitos cuyo problema no está cerrado, con su ejemplo propio. Es lo que más pesa.</a:t>
+            </a:r>
+          </a:p>
+        </p:txBody>
+      </p:sp>
+      <p:sp>
+        <p:nvSpPr>
+          <p:cNvPr id="18" name="Rounded Rectangle 17"/>
+          <p:cNvSpPr/>
+          <p:nvPr/>
+        </p:nvSpPr>
+        <p:spPr>
+          <a:xfrm>
+            <a:off x="457200" y="5088636"/>
+            <a:ext cx="11277295" cy="1051560"/>
+          </a:xfrm>
+          <a:prstGeom prst="roundRect">
+            <a:avLst>
+              <a:gd name="adj" fmla="val 12000"/>
+            </a:avLst>
+          </a:prstGeom>
+          <a:solidFill>
+            <a:srgbClr val="E8F4FA"/>
+          </a:solidFill>
+          <a:ln>
+            <a:noFill/>
+          </a:ln>
+        </p:spPr>
+        <p:style>
+          <a:lnRef idx="1">
+            <a:schemeClr val="accent1"/>
+          </a:lnRef>
+          <a:fillRef idx="3">
+            <a:schemeClr val="accent1"/>
+          </a:fillRef>
+          <a:effectRef idx="2">
+            <a:schemeClr val="accent1"/>
+          </a:effectRef>
+          <a:fontRef idx="minor">
+            <a:schemeClr val="lt1"/>
+          </a:fontRef>
+        </p:style>
+        <p:txBody>
+          <a:bodyPr rtlCol="0" anchor="ctr"/>
+          <a:lstStyle/>
+          <a:p>
+            <a:pPr algn="ctr"/>
+          </a:p>
+        </p:txBody>
+      </p:sp>
+      <p:sp>
+        <p:nvSpPr>
+          <p:cNvPr id="19" name="Rounded Rectangle 18"/>
+          <p:cNvSpPr/>
+          <p:nvPr/>
+        </p:nvSpPr>
+        <p:spPr>
+          <a:xfrm>
+            <a:off x="594360" y="5394960"/>
+            <a:ext cx="438912" cy="438912"/>
+          </a:xfrm>
+          <a:prstGeom prst="roundRect">
+            <a:avLst>
+              <a:gd name="adj" fmla="val 12000"/>
+            </a:avLst>
+          </a:prstGeom>
+          <a:solidFill>
+            <a:srgbClr val="095292"/>
+          </a:solidFill>
+          <a:ln>
+            <a:noFill/>
+          </a:ln>
+        </p:spPr>
+        <p:style>
+          <a:lnRef idx="1">
+            <a:schemeClr val="accent1"/>
+          </a:lnRef>
+          <a:fillRef idx="3">
+            <a:schemeClr val="accent1"/>
+          </a:fillRef>
+          <a:effectRef idx="2">
+            <a:schemeClr val="accent1"/>
+          </a:effectRef>
+          <a:fontRef idx="minor">
+            <a:schemeClr val="lt1"/>
+          </a:fontRef>
+        </p:style>
+        <p:txBody>
+          <a:bodyPr rtlCol="0" anchor="ctr"/>
+          <a:lstStyle/>
+          <a:p>
+            <a:pPr algn="ctr"/>
+          </a:p>
+        </p:txBody>
+      </p:sp>
+      <p:sp>
+        <p:nvSpPr>
+          <p:cNvPr id="20" name="TextBox 19"/>
+          <p:cNvSpPr txBox="1"/>
+          <p:nvPr/>
+        </p:nvSpPr>
+        <p:spPr>
+          <a:xfrm>
+            <a:off x="594360" y="5394960"/>
+            <a:ext cx="438912" cy="438912"/>
+          </a:xfrm>
+          <a:prstGeom prst="rect">
+            <a:avLst/>
+          </a:prstGeom>
+          <a:noFill/>
+        </p:spPr>
+        <p:txBody>
+          <a:bodyPr wrap="square" anchor="ctr"/>
+          <a:lstStyle/>
+          <a:p>
+            <a:pPr algn="ctr"/>
+            <a:r>
+              <a:rPr sz="1600" b="1" i="0">
+                <a:solidFill>
+                  <a:srgbClr val="FFFFFF"/>
+                </a:solidFill>
+                <a:latin typeface="Calibri"/>
+              </a:rPr>
+              <a:t>4</a:t>
+            </a:r>
+          </a:p>
+        </p:txBody>
+      </p:sp>
+      <p:sp>
+        <p:nvSpPr>
+          <p:cNvPr id="21" name="TextBox 20"/>
+          <p:cNvSpPr txBox="1"/>
+          <p:nvPr/>
+        </p:nvSpPr>
+        <p:spPr>
+          <a:xfrm>
+            <a:off x="1188720" y="5180076"/>
+            <a:ext cx="10271455" cy="886968"/>
+          </a:xfrm>
+          <a:prstGeom prst="rect">
+            <a:avLst/>
+          </a:prstGeom>
+          <a:noFill/>
+        </p:spPr>
+        <p:txBody>
+          <a:bodyPr wrap="square" anchor="ctr"/>
+          <a:lstStyle/>
+          <a:p>
+            <a:r>
+              <a:rPr sz="1500" b="1" i="0">
+                <a:solidFill>
+                  <a:srgbClr val="095292"/>
+                </a:solidFill>
+                <a:latin typeface="Calibri"/>
+              </a:rPr>
+              <a:t>15 s · Las fuentes</a:t>
+            </a:r>
+          </a:p>
+          <a:p>
+            <a:pPr>
+              <a:spcBef>
+                <a:spcPts val="200"/>
+              </a:spcBef>
+            </a:pPr>
+            <a:r>
+              <a:rPr sz="1300" b="0" i="0">
+                <a:solidFill>
+                  <a:srgbClr val="333333"/>
+                </a:solidFill>
+                <a:latin typeface="Calibri"/>
+              </a:rPr>
+              <a:t>De dónde salió lo que dijeron.</a:t>
+            </a:r>
+          </a:p>
+        </p:txBody>
+      </p:sp>
+      <p:sp>
+        <p:nvSpPr>
+          <p:cNvPr id="22" name="TextBox 21"/>
+          <p:cNvSpPr txBox="1"/>
+          <p:nvPr/>
+        </p:nvSpPr>
+        <p:spPr>
+          <a:xfrm>
+            <a:off x="11185855" y="6473952"/>
+            <a:ext cx="640080" cy="274320"/>
+          </a:xfrm>
+          <a:prstGeom prst="rect">
+            <a:avLst/>
+          </a:prstGeom>
+          <a:noFill/>
+        </p:spPr>
+        <p:txBody>
+          <a:bodyPr wrap="square">
+            <a:spAutoFit/>
+          </a:bodyPr>
+          <a:lstStyle/>
+          <a:p>
+            <a:pPr algn="r"/>
+            <a:r>
+              <a:rPr sz="1100" b="0" i="0">
+                <a:solidFill>
+                  <a:srgbClr val="666666"/>
+                </a:solidFill>
+                <a:latin typeface="Calibri"/>
+              </a:rPr>
+              <a:t>22</a:t>
+            </a:r>
+          </a:p>
+        </p:txBody>
+      </p:sp>
+    </p:spTree>
+  </p:cSld>
+  <p:clrMapOvr>
+    <a:masterClrMapping/>
+  </p:clrMapOvr>
+</p:sld>
+</file>
+
+<file path=ppt/slides/slide23.xml><?xml version="1.0" encoding="utf-8"?>
+<p:sld xmlns:a="http://schemas.openxmlformats.org/drawingml/2006/main" xmlns:p="http://schemas.openxmlformats.org/presentationml/2006/main" xmlns:r="http://schemas.openxmlformats.org/officeDocument/2006/relationships">
+  <p:cSld>
+    <p:bg>
+      <p:bgPr>
+        <a:solidFill>
+          <a:srgbClr val="FFFFFF"/>
+        </a:solidFill>
+        <a:effectLst/>
+      </p:bgPr>
+    </p:bg>
+    <p:spTree>
+      <p:nvGrpSpPr>
+        <p:cNvPr id="1" name=""/>
+        <p:cNvGrpSpPr/>
+        <p:nvPr/>
+      </p:nvGrpSpPr>
+      <p:grpSpPr/>
+      <p:sp>
+        <p:nvSpPr>
+          <p:cNvPr id="2" name="Rectangle 1"/>
+          <p:cNvSpPr/>
+          <p:nvPr/>
+        </p:nvSpPr>
+        <p:spPr>
+          <a:xfrm>
+            <a:off x="0" y="0"/>
+            <a:ext cx="12191695" cy="960120"/>
+          </a:xfrm>
+          <a:prstGeom prst="rect">
+            <a:avLst/>
+          </a:prstGeom>
+          <a:solidFill>
+            <a:srgbClr val="095292"/>
+          </a:solidFill>
+          <a:ln>
+            <a:noFill/>
+          </a:ln>
+        </p:spPr>
+        <p:style>
+          <a:lnRef idx="1">
+            <a:schemeClr val="accent1"/>
+          </a:lnRef>
+          <a:fillRef idx="3">
+            <a:schemeClr val="accent1"/>
+          </a:fillRef>
+          <a:effectRef idx="2">
+            <a:schemeClr val="accent1"/>
+          </a:effectRef>
+          <a:fontRef idx="minor">
+            <a:schemeClr val="lt1"/>
+          </a:fontRef>
+        </p:style>
+        <p:txBody>
+          <a:bodyPr rtlCol="0" anchor="ctr"/>
+          <a:lstStyle/>
+          <a:p>
+            <a:pPr algn="ctr"/>
+          </a:p>
+        </p:txBody>
+      </p:sp>
+      <p:sp>
+        <p:nvSpPr>
+          <p:cNvPr id="3" name="Rectangle 2"/>
+          <p:cNvSpPr/>
+          <p:nvPr/>
+        </p:nvSpPr>
+        <p:spPr>
+          <a:xfrm>
+            <a:off x="0" y="960120"/>
+            <a:ext cx="12191695" cy="41148"/>
+          </a:xfrm>
+          <a:prstGeom prst="rect">
+            <a:avLst/>
+          </a:prstGeom>
+          <a:solidFill>
+            <a:srgbClr val="FFD000"/>
+          </a:solidFill>
+          <a:ln>
+            <a:noFill/>
+          </a:ln>
+        </p:spPr>
+        <p:style>
+          <a:lnRef idx="1">
+            <a:schemeClr val="accent1"/>
+          </a:lnRef>
+          <a:fillRef idx="3">
+            <a:schemeClr val="accent1"/>
+          </a:fillRef>
+          <a:effectRef idx="2">
+            <a:schemeClr val="accent1"/>
+          </a:effectRef>
+          <a:fontRef idx="minor">
+            <a:schemeClr val="lt1"/>
+          </a:fontRef>
+        </p:style>
+        <p:txBody>
+          <a:bodyPr rtlCol="0" anchor="ctr"/>
+          <a:lstStyle/>
+          <a:p>
+            <a:pPr algn="ctr"/>
+          </a:p>
+        </p:txBody>
+      </p:sp>
+      <p:sp>
+        <p:nvSpPr>
+          <p:cNvPr id="4" name="TextBox 3"/>
+          <p:cNvSpPr txBox="1"/>
+          <p:nvPr/>
+        </p:nvSpPr>
+        <p:spPr>
+          <a:xfrm>
+            <a:off x="457200" y="164592"/>
+            <a:ext cx="11277295" cy="502920"/>
+          </a:xfrm>
+          <a:prstGeom prst="rect">
+            <a:avLst/>
+          </a:prstGeom>
+          <a:noFill/>
+        </p:spPr>
+        <p:txBody>
+          <a:bodyPr wrap="square">
+            <a:spAutoFit/>
+          </a:bodyPr>
+          <a:lstStyle/>
+          <a:p>
+            <a:r>
+              <a:rPr sz="2600" b="1" i="0">
+                <a:solidFill>
+                  <a:srgbClr val="FFFFFF"/>
+                </a:solidFill>
+                <a:latin typeface="Calibri"/>
+              </a:rPr>
+              <a:t>Para la Clase 3</a:t>
+            </a:r>
+          </a:p>
+        </p:txBody>
+      </p:sp>
+      <p:sp>
+        <p:nvSpPr>
+          <p:cNvPr id="5" name="TextBox 4"/>
+          <p:cNvSpPr txBox="1"/>
+          <p:nvPr/>
+        </p:nvSpPr>
+        <p:spPr>
+          <a:xfrm>
+            <a:off x="457200" y="1170432"/>
+            <a:ext cx="11277295" cy="5230368"/>
+          </a:xfrm>
+          <a:prstGeom prst="rect">
+            <a:avLst/>
+          </a:prstGeom>
+          <a:noFill/>
+        </p:spPr>
+        <p:txBody>
+          <a:bodyPr wrap="square">
+            <a:spAutoFit/>
+          </a:bodyPr>
+          <a:lstStyle/>
+          <a:p>
+            <a:pPr>
+              <a:spcAft>
+                <a:spcPts val="800"/>
+              </a:spcAft>
+            </a:pPr>
+            <a:r>
+              <a:rPr sz="2000" b="0" i="0">
+                <a:solidFill>
+                  <a:srgbClr val="333333"/>
+                </a:solidFill>
+                <a:latin typeface="Calibri"/>
+              </a:rPr>
+              <a:t>–   </a:t>
+            </a:r>
+            <a:r>
+              <a:rPr sz="2000" b="1" i="0">
+                <a:solidFill>
+                  <a:srgbClr val="333333"/>
+                </a:solidFill>
+                <a:latin typeface="Calibri"/>
+              </a:rPr>
+              <a:t>Trabajo dirigido:</a:t>
+            </a:r>
+            <a:r>
+              <a:rPr sz="2000" b="0" i="0">
+                <a:solidFill>
+                  <a:srgbClr val="333333"/>
+                </a:solidFill>
+                <a:latin typeface="Calibri"/>
+              </a:rPr>
+              <a:t> Investigación sobre hitos históricos — cada equipo completa la línea de tiempo del curso juntando los cinco tramos expuestos hoy, en la carpeta del equipo.</a:t>
+            </a:r>
+          </a:p>
+          <a:p>
+            <a:pPr>
+              <a:spcAft>
+                <a:spcPts val="800"/>
+              </a:spcAft>
+            </a:pPr>
+            <a:r>
+              <a:rPr sz="2000" b="0" i="0">
+                <a:solidFill>
+                  <a:srgbClr val="333333"/>
+                </a:solidFill>
+                <a:latin typeface="Calibri"/>
+              </a:rPr>
+              <a:t>–   </a:t>
+            </a:r>
+            <a:r>
+              <a:rPr sz="2000" b="1" i="0">
+                <a:solidFill>
+                  <a:srgbClr val="333333"/>
+                </a:solidFill>
+                <a:latin typeface="Calibri"/>
+              </a:rPr>
+              <a:t>Trabajo independiente:</a:t>
+            </a:r>
+            <a:r>
+              <a:rPr sz="2000" b="0" i="0">
+                <a:solidFill>
+                  <a:srgbClr val="333333"/>
+                </a:solidFill>
+                <a:latin typeface="Calibri"/>
+              </a:rPr>
+              <a:t> Elaboración de línea de tiempo: la versión completa (los cinco periodos), con al menos un «qué sigue vivo hoy» por periodo.</a:t>
+            </a:r>
+          </a:p>
+          <a:p>
+            <a:pPr>
+              <a:spcAft>
+                <a:spcPts val="800"/>
+              </a:spcAft>
+            </a:pPr>
+            <a:r>
+              <a:rPr sz="2000" b="0" i="0">
+                <a:solidFill>
+                  <a:srgbClr val="333333"/>
+                </a:solidFill>
+                <a:latin typeface="Calibri"/>
+              </a:rPr>
+              <a:t>–   </a:t>
+            </a:r>
+            <a:r>
+              <a:rPr sz="2000" b="1" i="0">
+                <a:solidFill>
+                  <a:srgbClr val="333333"/>
+                </a:solidFill>
+                <a:latin typeface="Calibri"/>
+              </a:rPr>
+              <a:t>Clase 3 · Fundamentos básicos de la Ingeniería de Sistemas</a:t>
+            </a:r>
+            <a:r>
+              <a:rPr sz="2000" b="0" i="0">
+                <a:solidFill>
+                  <a:srgbClr val="333333"/>
+                </a:solidFill>
+                <a:latin typeface="Calibri"/>
+              </a:rPr>
+              <a:t> — qué es un sistema y por qué el software es solo una parte de él. Se trabaja con un asistente de IA, y hay que declarar el prompt usado.</a:t>
+            </a:r>
+          </a:p>
+          <a:p>
+            <a:pPr>
+              <a:spcAft>
+                <a:spcPts val="800"/>
+              </a:spcAft>
+            </a:pPr>
+            <a:r>
+              <a:rPr sz="2000" b="0" i="0">
+                <a:solidFill>
+                  <a:srgbClr val="333333"/>
+                </a:solidFill>
+                <a:latin typeface="Calibri"/>
+              </a:rPr>
+              <a:t>–   </a:t>
+            </a:r>
+            <a:r>
+              <a:rPr sz="2000" b="1" i="0">
+                <a:solidFill>
+                  <a:srgbClr val="333333"/>
+                </a:solidFill>
+                <a:latin typeface="Calibri"/>
+              </a:rPr>
+              <a:t>Aviso:</a:t>
+            </a:r>
+            <a:r>
+              <a:rPr sz="2000" b="0" i="0">
+                <a:solidFill>
+                  <a:srgbClr val="333333"/>
+                </a:solidFill>
+                <a:latin typeface="Calibri"/>
+              </a:rPr>
+              <a:t> Traigan la línea de tiempo completa en la carpeta del equipo. En la sesión 3 se descompone un sistema del entorno y la línea de tiempo es el punto de partida.</a:t>
+            </a:r>
+          </a:p>
+          <a:p>
+            <a:pPr>
+              <a:spcAft>
+                <a:spcPts val="800"/>
+              </a:spcAft>
+            </a:pPr>
+            <a:r>
+              <a:rPr sz="2000" b="0" i="0">
+                <a:solidFill>
+                  <a:srgbClr val="333333"/>
+                </a:solidFill>
+                <a:latin typeface="Calibri"/>
+              </a:rPr>
+              <a:t>–   </a:t>
+            </a:r>
+            <a:r>
+              <a:rPr sz="2000" b="1" i="0">
+                <a:solidFill>
+                  <a:srgbClr val="333333"/>
+                </a:solidFill>
+                <a:latin typeface="Calibri"/>
+              </a:rPr>
+              <a:t>Antes de salir:</a:t>
+            </a:r>
+            <a:r>
+              <a:rPr sz="2000" b="0" i="0">
+                <a:solidFill>
+                  <a:srgbClr val="333333"/>
+                </a:solidFill>
+                <a:latin typeface="Calibri"/>
+              </a:rPr>
+              <a:t> el enlace del documento del equipo en el chat, con permiso de lectura para el docente, y el nombre del vocero de hoy.</a:t>
+            </a:r>
+          </a:p>
+        </p:txBody>
+      </p:sp>
+      <p:sp>
+        <p:nvSpPr>
+          <p:cNvPr id="6" name="TextBox 5"/>
+          <p:cNvSpPr txBox="1"/>
+          <p:nvPr/>
+        </p:nvSpPr>
+        <p:spPr>
+          <a:xfrm>
+            <a:off x="11185855" y="6473952"/>
+            <a:ext cx="640080" cy="274320"/>
+          </a:xfrm>
+          <a:prstGeom prst="rect">
+            <a:avLst/>
+          </a:prstGeom>
+          <a:noFill/>
+        </p:spPr>
+        <p:txBody>
+          <a:bodyPr wrap="square">
+            <a:spAutoFit/>
+          </a:bodyPr>
+          <a:lstStyle/>
+          <a:p>
+            <a:pPr algn="r"/>
+            <a:r>
+              <a:rPr sz="1100" b="0" i="0">
+                <a:solidFill>
+                  <a:srgbClr val="666666"/>
+                </a:solidFill>
+                <a:latin typeface="Calibri"/>
+              </a:rPr>
+              <a:t>23</a:t>
+            </a:r>
+          </a:p>
+        </p:txBody>
+      </p:sp>
+    </p:spTree>
+  </p:cSld>
+  <p:clrMapOvr>
+    <a:masterClrMapping/>
+  </p:clrMapOvr>
+</p:sld>
+</file>
+
+<file path=ppt/slides/slide24.xml><?xml version="1.0" encoding="utf-8"?>
 <p:sld xmlns:a="http://schemas.openxmlformats.org/drawingml/2006/main" xmlns:p="http://schemas.openxmlformats.org/presentationml/2006/main" xmlns:r="http://schemas.openxmlformats.org/officeDocument/2006/relationships">
   <p:cSld>
     <p:bg>

--- a/Introduccion a la Ingenieria/Clases/Clase 2 - Historia y evolucion de la Ingenieria/Presentacion.pptx
+++ b/Introduccion a la Ingenieria/Clases/Clase 2 - Historia y evolucion de la Ingenieria/Presentacion.pptx
@@ -18,9 +18,6 @@
     <p:sldId id="266" r:id="rId18"/>
     <p:sldId id="267" r:id="rId19"/>
     <p:sldId id="268" r:id="rId20"/>
-    <p:sldId id="269" r:id="rId21"/>
-    <p:sldId id="270" r:id="rId22"/>
-    <p:sldId id="271" r:id="rId23"/>
   </p:sldIdLst>
   <p:sldSz cx="12191695" cy="6858000" type="screen4x3"/>
   <p:notesSz cx="6858000" cy="9144000"/>
@@ -518,182 +515,6 @@
           <a:p>
             <a:r>
               <a:t>Recorra la tabla fila por fila y pregunte en cada una si cambió algo entre 1964 y 2026. La única fila que cambia de verdad es «cuánta gente». El resto es idéntico, y esa es la idea de la clase.</a:t>
-            </a:r>
-          </a:p>
-        </p:txBody>
-      </p:sp>
-      <p:sp>
-        <p:nvSpPr>
-          <p:cNvPr id="4" name="Slide Number Placeholder 3"/>
-          <p:cNvSpPr>
-            <a:spLocks noGrp="1"/>
-          </p:cNvSpPr>
-          <p:nvPr>
-            <p:ph type="sldNum" idx="5" sz="quarter"/>
-          </p:nvPr>
-        </p:nvSpPr>
-        <p:spPr/>
-      </p:sp>
-    </p:spTree>
-  </p:cSld>
-  <p:clrMapOvr>
-    <a:masterClrMapping/>
-  </p:clrMapOvr>
-</p:notes>
-</file>
-
-<file path=ppt/notesSlides/notesSlide10.xml><?xml version="1.0" encoding="utf-8"?>
-<p:notes xmlns:a="http://schemas.openxmlformats.org/drawingml/2006/main" xmlns:p="http://schemas.openxmlformats.org/presentationml/2006/main" xmlns:r="http://schemas.openxmlformats.org/officeDocument/2006/relationships">
-  <p:cSld>
-    <p:spTree>
-      <p:nvGrpSpPr>
-        <p:cNvPr id="1" name=""/>
-        <p:cNvGrpSpPr/>
-        <p:nvPr/>
-      </p:nvGrpSpPr>
-      <p:grpSpPr>
-        <a:xfrm>
-          <a:off x="0" y="0"/>
-          <a:ext cx="0" cy="0"/>
-          <a:chOff x="0" y="0"/>
-          <a:chExt cx="0" cy="0"/>
-        </a:xfrm>
-      </p:grpSpPr>
-      <p:sp>
-        <p:nvSpPr>
-          <p:cNvPr id="2" name="Slide Image Placeholder 1"/>
-          <p:cNvSpPr>
-            <a:spLocks noGrp="1"/>
-          </p:cNvSpPr>
-          <p:nvPr>
-            <p:ph type="sldImg" idx="2"/>
-          </p:nvPr>
-        </p:nvSpPr>
-        <p:spPr/>
-      </p:sp>
-      <p:sp>
-        <p:nvSpPr>
-          <p:cNvPr id="3" name="Notes Placeholder 2"/>
-          <p:cNvSpPr>
-            <a:spLocks noGrp="1"/>
-          </p:cNvSpPr>
-          <p:nvPr>
-            <p:ph type="body" idx="3" sz="quarter"/>
-          </p:nvPr>
-        </p:nvSpPr>
-        <p:spPr/>
-        <p:txBody>
-          <a:bodyPr/>
-          <a:lstStyle/>
-          <a:p>
-            <a:r>
-              <a:t>EL TALLER, LA EXPOSICIÓN Y POR QUÉ LAS CINCO LÍNEAS DE TIEMPO SE SUMAN</a:t>
-            </a:r>
-          </a:p>
-          <a:p/>
-          <a:p>
-            <a:r>
-              <a:t>Cada equipo recibe un periodo distinto y arma su tramo de línea de tiempo. La consecuencia es que las cinco exposiciones, puestas en orden histórico, producen la línea de tiempo completa de la disciplina, que es justo el trabajo independiente de la semana. Esto hay que decírselo al grupo antes de empezar: no están haciendo cinco trabajos que compiten, están armando un solo mapa por pedazos, y el pedazo de cada uno le sirve a los otros cuatro.</a:t>
-            </a:r>
-          </a:p>
-          <a:p/>
-          <a:p>
-            <a:r>
-              <a:t>Por eso las exposiciones van en orden histórico y no por sorteo: el equipo del periodo 1945–1957 abre y el de 2006–hoy cierra. Cuesta lo mismo y el grupo se lleva una narración en vez de cinco fragmentos. El docente escribe el orden en el chat antes de que empiecen.</a:t>
-            </a:r>
-          </a:p>
-          <a:p/>
-          <a:p>
-            <a:r>
-              <a:t>El taller pide cuatro hitos por periodo, no más. La tentación del equipo será meter diez fechas para verse completo, y el resultado es una línea de tiempo que nadie puede exponer en tres minutos. Cuatro hitos bien leídos, con su «qué sigue vivo», valen mucho más y es lo que la rúbrica premia.</a:t>
-            </a:r>
-          </a:p>
-        </p:txBody>
-      </p:sp>
-      <p:sp>
-        <p:nvSpPr>
-          <p:cNvPr id="4" name="Slide Number Placeholder 3"/>
-          <p:cNvSpPr>
-            <a:spLocks noGrp="1"/>
-          </p:cNvSpPr>
-          <p:nvPr>
-            <p:ph type="sldNum" idx="5" sz="quarter"/>
-          </p:nvPr>
-        </p:nvSpPr>
-        <p:spPr/>
-      </p:sp>
-    </p:spTree>
-  </p:cSld>
-  <p:clrMapOvr>
-    <a:masterClrMapping/>
-  </p:clrMapOvr>
-</p:notes>
-</file>
-
-<file path=ppt/notesSlides/notesSlide11.xml><?xml version="1.0" encoding="utf-8"?>
-<p:notes xmlns:a="http://schemas.openxmlformats.org/drawingml/2006/main" xmlns:p="http://schemas.openxmlformats.org/presentationml/2006/main" xmlns:r="http://schemas.openxmlformats.org/officeDocument/2006/relationships">
-  <p:cSld>
-    <p:spTree>
-      <p:nvGrpSpPr>
-        <p:cNvPr id="1" name=""/>
-        <p:cNvGrpSpPr/>
-        <p:nvPr/>
-      </p:nvGrpSpPr>
-      <p:grpSpPr>
-        <a:xfrm>
-          <a:off x="0" y="0"/>
-          <a:ext cx="0" cy="0"/>
-          <a:chOff x="0" y="0"/>
-          <a:chExt cx="0" cy="0"/>
-        </a:xfrm>
-      </p:grpSpPr>
-      <p:sp>
-        <p:nvSpPr>
-          <p:cNvPr id="2" name="Slide Image Placeholder 1"/>
-          <p:cNvSpPr>
-            <a:spLocks noGrp="1"/>
-          </p:cNvSpPr>
-          <p:nvPr>
-            <p:ph type="sldImg" idx="2"/>
-          </p:nvPr>
-        </p:nvSpPr>
-        <p:spPr/>
-      </p:sp>
-      <p:sp>
-        <p:nvSpPr>
-          <p:cNvPr id="3" name="Notes Placeholder 2"/>
-          <p:cNvSpPr>
-            <a:spLocks noGrp="1"/>
-          </p:cNvSpPr>
-          <p:nvPr>
-            <p:ph type="body" idx="3" sz="quarter"/>
-          </p:nvPr>
-        </p:nvSpPr>
-        <p:spPr/>
-        <p:txBody>
-          <a:bodyPr/>
-          <a:lstStyle/>
-          <a:p>
-            <a:r>
-              <a:t>EL TALLER, LA EXPOSICIÓN Y POR QUÉ LAS CINCO LÍNEAS DE TIEMPO SE SUMAN</a:t>
-            </a:r>
-          </a:p>
-          <a:p/>
-          <a:p>
-            <a:r>
-              <a:t>Cada equipo recibe un periodo distinto y arma su tramo de línea de tiempo. La consecuencia es que las cinco exposiciones, puestas en orden histórico, producen la línea de tiempo completa de la disciplina, que es justo el trabajo independiente de la semana. Esto hay que decírselo al grupo antes de empezar: no están haciendo cinco trabajos que compiten, están armando un solo mapa por pedazos, y el pedazo de cada uno le sirve a los otros cuatro.</a:t>
-            </a:r>
-          </a:p>
-          <a:p/>
-          <a:p>
-            <a:r>
-              <a:t>Por eso las exposiciones van en orden histórico y no por sorteo: el equipo del periodo 1945–1957 abre y el de 2006–hoy cierra. Cuesta lo mismo y el grupo se lleva una narración en vez de cinco fragmentos. El docente escribe el orden en el chat antes de que empiecen.</a:t>
-            </a:r>
-          </a:p>
-          <a:p/>
-          <a:p>
-            <a:r>
-              <a:t>El taller pide cuatro hitos por periodo, no más. La tentación del equipo será meter diez fechas para verse completo, y el resultado es una línea de tiempo que nadie puede exponer en tres minutos. Cuatro hitos bien leídos, con su «qué sigue vivo», valen mucho más y es lo que la rúbrica premia.</a:t>
             </a:r>
           </a:p>
         </p:txBody>
@@ -7223,2382 +7044,6 @@
         <p:spPr>
           <a:xfrm>
             <a:off x="0" y="0"/>
-            <a:ext cx="12191695" cy="1170432"/>
-          </a:xfrm>
-          <a:prstGeom prst="rect">
-            <a:avLst/>
-          </a:prstGeom>
-          <a:solidFill>
-            <a:srgbClr val="095292"/>
-          </a:solidFill>
-          <a:ln>
-            <a:noFill/>
-          </a:ln>
-        </p:spPr>
-        <p:style>
-          <a:lnRef idx="1">
-            <a:schemeClr val="accent1"/>
-          </a:lnRef>
-          <a:fillRef idx="3">
-            <a:schemeClr val="accent1"/>
-          </a:fillRef>
-          <a:effectRef idx="2">
-            <a:schemeClr val="accent1"/>
-          </a:effectRef>
-          <a:fontRef idx="minor">
-            <a:schemeClr val="lt1"/>
-          </a:fontRef>
-        </p:style>
-        <p:txBody>
-          <a:bodyPr rtlCol="0" anchor="ctr"/>
-          <a:lstStyle/>
-          <a:p>
-            <a:pPr algn="ctr"/>
-          </a:p>
-        </p:txBody>
-      </p:sp>
-      <p:sp>
-        <p:nvSpPr>
-          <p:cNvPr id="3" name="Rectangle 2"/>
-          <p:cNvSpPr/>
-          <p:nvPr/>
-        </p:nvSpPr>
-        <p:spPr>
-          <a:xfrm>
-            <a:off x="0" y="1170432"/>
-            <a:ext cx="12191695" cy="41148"/>
-          </a:xfrm>
-          <a:prstGeom prst="rect">
-            <a:avLst/>
-          </a:prstGeom>
-          <a:solidFill>
-            <a:srgbClr val="FFD000"/>
-          </a:solidFill>
-          <a:ln>
-            <a:noFill/>
-          </a:ln>
-        </p:spPr>
-        <p:style>
-          <a:lnRef idx="1">
-            <a:schemeClr val="accent1"/>
-          </a:lnRef>
-          <a:fillRef idx="3">
-            <a:schemeClr val="accent1"/>
-          </a:fillRef>
-          <a:effectRef idx="2">
-            <a:schemeClr val="accent1"/>
-          </a:effectRef>
-          <a:fontRef idx="minor">
-            <a:schemeClr val="lt1"/>
-          </a:fontRef>
-        </p:style>
-        <p:txBody>
-          <a:bodyPr rtlCol="0" anchor="ctr"/>
-          <a:lstStyle/>
-          <a:p>
-            <a:pPr algn="ctr"/>
-          </a:p>
-        </p:txBody>
-      </p:sp>
-      <p:sp>
-        <p:nvSpPr>
-          <p:cNvPr id="4" name="TextBox 3"/>
-          <p:cNvSpPr txBox="1"/>
-          <p:nvPr/>
-        </p:nvSpPr>
-        <p:spPr>
-          <a:xfrm>
-            <a:off x="457200" y="164592"/>
-            <a:ext cx="11277295" cy="384048"/>
-          </a:xfrm>
-          <a:prstGeom prst="rect">
-            <a:avLst/>
-          </a:prstGeom>
-          <a:noFill/>
-        </p:spPr>
-        <p:txBody>
-          <a:bodyPr wrap="square">
-            <a:spAutoFit/>
-          </a:bodyPr>
-          <a:lstStyle/>
-          <a:p>
-            <a:r>
-              <a:rPr sz="2600" b="1" i="0">
-                <a:solidFill>
-                  <a:srgbClr val="FFFFFF"/>
-                </a:solidFill>
-                <a:latin typeface="Calibri"/>
-              </a:rPr>
-              <a:t>Taller de hoy: Línea de tiempo del periodo</a:t>
-            </a:r>
-          </a:p>
-        </p:txBody>
-      </p:sp>
-      <p:sp>
-        <p:nvSpPr>
-          <p:cNvPr id="5" name="TextBox 4"/>
-          <p:cNvSpPr txBox="1"/>
-          <p:nvPr/>
-        </p:nvSpPr>
-        <p:spPr>
-          <a:xfrm>
-            <a:off x="457200" y="566928"/>
-            <a:ext cx="11277295" cy="411480"/>
-          </a:xfrm>
-          <a:prstGeom prst="rect">
-            <a:avLst/>
-          </a:prstGeom>
-          <a:noFill/>
-        </p:spPr>
-        <p:txBody>
-          <a:bodyPr wrap="square">
-            <a:spAutoFit/>
-          </a:bodyPr>
-          <a:lstStyle/>
-          <a:p>
-            <a:r>
-              <a:rPr sz="1400" b="0" i="0">
-                <a:solidFill>
-                  <a:srgbClr val="B8D8EE"/>
-                </a:solidFill>
-                <a:latin typeface="Calibri"/>
-              </a:rPr>
-              <a:t>17 min en equipos · un periodo por equipo, asignado en orden histórico · línea de tiempo de 4 hitos en draw.io</a:t>
-            </a:r>
-          </a:p>
-        </p:txBody>
-      </p:sp>
-      <p:sp>
-        <p:nvSpPr>
-          <p:cNvPr id="6" name="Rounded Rectangle 5"/>
-          <p:cNvSpPr/>
-          <p:nvPr/>
-        </p:nvSpPr>
-        <p:spPr>
-          <a:xfrm>
-            <a:off x="457200" y="1472184"/>
-            <a:ext cx="11277295" cy="566928"/>
-          </a:xfrm>
-          <a:prstGeom prst="roundRect">
-            <a:avLst>
-              <a:gd name="adj" fmla="val 12000"/>
-            </a:avLst>
-          </a:prstGeom>
-          <a:solidFill>
-            <a:srgbClr val="F2F2F2"/>
-          </a:solidFill>
-          <a:ln>
-            <a:noFill/>
-          </a:ln>
-        </p:spPr>
-        <p:style>
-          <a:lnRef idx="1">
-            <a:schemeClr val="accent1"/>
-          </a:lnRef>
-          <a:fillRef idx="3">
-            <a:schemeClr val="accent1"/>
-          </a:fillRef>
-          <a:effectRef idx="2">
-            <a:schemeClr val="accent1"/>
-          </a:effectRef>
-          <a:fontRef idx="minor">
-            <a:schemeClr val="lt1"/>
-          </a:fontRef>
-        </p:style>
-        <p:txBody>
-          <a:bodyPr rtlCol="0" anchor="ctr"/>
-          <a:lstStyle/>
-          <a:p>
-            <a:pPr algn="ctr"/>
-          </a:p>
-        </p:txBody>
-      </p:sp>
-      <p:sp>
-        <p:nvSpPr>
-          <p:cNvPr id="7" name="Rectangle 6"/>
-          <p:cNvSpPr/>
-          <p:nvPr/>
-        </p:nvSpPr>
-        <p:spPr>
-          <a:xfrm>
-            <a:off x="640080" y="1618487"/>
-            <a:ext cx="274320" cy="274320"/>
-          </a:xfrm>
-          <a:prstGeom prst="rect">
-            <a:avLst/>
-          </a:prstGeom>
-          <a:solidFill>
-            <a:srgbClr val="FFFFFF"/>
-          </a:solidFill>
-          <a:ln>
-            <a:solidFill>
-              <a:srgbClr val="333333"/>
-            </a:solidFill>
-          </a:ln>
-        </p:spPr>
-        <p:style>
-          <a:lnRef idx="1">
-            <a:schemeClr val="accent1"/>
-          </a:lnRef>
-          <a:fillRef idx="3">
-            <a:schemeClr val="accent1"/>
-          </a:fillRef>
-          <a:effectRef idx="2">
-            <a:schemeClr val="accent1"/>
-          </a:effectRef>
-          <a:fontRef idx="minor">
-            <a:schemeClr val="lt1"/>
-          </a:fontRef>
-        </p:style>
-        <p:txBody>
-          <a:bodyPr rtlCol="0" anchor="ctr"/>
-          <a:lstStyle/>
-          <a:p>
-            <a:pPr algn="ctr"/>
-          </a:p>
-        </p:txBody>
-      </p:sp>
-      <p:sp>
-        <p:nvSpPr>
-          <p:cNvPr id="8" name="Rectangle 7"/>
-          <p:cNvSpPr/>
-          <p:nvPr/>
-        </p:nvSpPr>
-        <p:spPr>
-          <a:xfrm>
-            <a:off x="640080" y="1618487"/>
-            <a:ext cx="73152" cy="274320"/>
-          </a:xfrm>
-          <a:prstGeom prst="rect">
-            <a:avLst/>
-          </a:prstGeom>
-          <a:solidFill>
-            <a:srgbClr val="269CCB"/>
-          </a:solidFill>
-          <a:ln>
-            <a:noFill/>
-          </a:ln>
-        </p:spPr>
-        <p:style>
-          <a:lnRef idx="1">
-            <a:schemeClr val="accent1"/>
-          </a:lnRef>
-          <a:fillRef idx="3">
-            <a:schemeClr val="accent1"/>
-          </a:fillRef>
-          <a:effectRef idx="2">
-            <a:schemeClr val="accent1"/>
-          </a:effectRef>
-          <a:fontRef idx="minor">
-            <a:schemeClr val="lt1"/>
-          </a:fontRef>
-        </p:style>
-        <p:txBody>
-          <a:bodyPr rtlCol="0" anchor="ctr"/>
-          <a:lstStyle/>
-          <a:p>
-            <a:pPr algn="ctr"/>
-          </a:p>
-        </p:txBody>
-      </p:sp>
-      <p:sp>
-        <p:nvSpPr>
-          <p:cNvPr id="9" name="TextBox 8"/>
-          <p:cNvSpPr txBox="1"/>
-          <p:nvPr/>
-        </p:nvSpPr>
-        <p:spPr>
-          <a:xfrm>
-            <a:off x="1097280" y="1563624"/>
-            <a:ext cx="10362895" cy="402336"/>
-          </a:xfrm>
-          <a:prstGeom prst="rect">
-            <a:avLst/>
-          </a:prstGeom>
-          <a:noFill/>
-        </p:spPr>
-        <p:txBody>
-          <a:bodyPr wrap="square" anchor="ctr"/>
-          <a:lstStyle/>
-          <a:p>
-            <a:r>
-              <a:rPr sz="1500" b="1" i="0">
-                <a:solidFill>
-                  <a:srgbClr val="333333"/>
-                </a:solidFill>
-                <a:latin typeface="Calibri"/>
-              </a:rPr>
-              <a:t>LOS CUATRO HITOS</a:t>
-            </a:r>
-            <a:r>
-              <a:rPr sz="1500" b="0" i="0">
-                <a:solidFill>
-                  <a:srgbClr val="333333"/>
-                </a:solidFill>
-                <a:latin typeface="Calibri"/>
-              </a:rPr>
-              <a:t> — Cuatro hechos de su periodo, con año, puestos en orden en la línea de tiempo.</a:t>
-            </a:r>
-          </a:p>
-        </p:txBody>
-      </p:sp>
-      <p:sp>
-        <p:nvSpPr>
-          <p:cNvPr id="10" name="Rounded Rectangle 9"/>
-          <p:cNvSpPr/>
-          <p:nvPr/>
-        </p:nvSpPr>
-        <p:spPr>
-          <a:xfrm>
-            <a:off x="457200" y="2148839"/>
-            <a:ext cx="11277295" cy="566928"/>
-          </a:xfrm>
-          <a:prstGeom prst="roundRect">
-            <a:avLst>
-              <a:gd name="adj" fmla="val 12000"/>
-            </a:avLst>
-          </a:prstGeom>
-          <a:solidFill>
-            <a:srgbClr val="F2F2F2"/>
-          </a:solidFill>
-          <a:ln>
-            <a:noFill/>
-          </a:ln>
-        </p:spPr>
-        <p:style>
-          <a:lnRef idx="1">
-            <a:schemeClr val="accent1"/>
-          </a:lnRef>
-          <a:fillRef idx="3">
-            <a:schemeClr val="accent1"/>
-          </a:fillRef>
-          <a:effectRef idx="2">
-            <a:schemeClr val="accent1"/>
-          </a:effectRef>
-          <a:fontRef idx="minor">
-            <a:schemeClr val="lt1"/>
-          </a:fontRef>
-        </p:style>
-        <p:txBody>
-          <a:bodyPr rtlCol="0" anchor="ctr"/>
-          <a:lstStyle/>
-          <a:p>
-            <a:pPr algn="ctr"/>
-          </a:p>
-        </p:txBody>
-      </p:sp>
-      <p:sp>
-        <p:nvSpPr>
-          <p:cNvPr id="11" name="Rectangle 10"/>
-          <p:cNvSpPr/>
-          <p:nvPr/>
-        </p:nvSpPr>
-        <p:spPr>
-          <a:xfrm>
-            <a:off x="640080" y="2295144"/>
-            <a:ext cx="274320" cy="274320"/>
-          </a:xfrm>
-          <a:prstGeom prst="rect">
-            <a:avLst/>
-          </a:prstGeom>
-          <a:solidFill>
-            <a:srgbClr val="FFFFFF"/>
-          </a:solidFill>
-          <a:ln>
-            <a:solidFill>
-              <a:srgbClr val="333333"/>
-            </a:solidFill>
-          </a:ln>
-        </p:spPr>
-        <p:style>
-          <a:lnRef idx="1">
-            <a:schemeClr val="accent1"/>
-          </a:lnRef>
-          <a:fillRef idx="3">
-            <a:schemeClr val="accent1"/>
-          </a:fillRef>
-          <a:effectRef idx="2">
-            <a:schemeClr val="accent1"/>
-          </a:effectRef>
-          <a:fontRef idx="minor">
-            <a:schemeClr val="lt1"/>
-          </a:fontRef>
-        </p:style>
-        <p:txBody>
-          <a:bodyPr rtlCol="0" anchor="ctr"/>
-          <a:lstStyle/>
-          <a:p>
-            <a:pPr algn="ctr"/>
-          </a:p>
-        </p:txBody>
-      </p:sp>
-      <p:sp>
-        <p:nvSpPr>
-          <p:cNvPr id="12" name="Rectangle 11"/>
-          <p:cNvSpPr/>
-          <p:nvPr/>
-        </p:nvSpPr>
-        <p:spPr>
-          <a:xfrm>
-            <a:off x="640080" y="2295144"/>
-            <a:ext cx="73152" cy="274320"/>
-          </a:xfrm>
-          <a:prstGeom prst="rect">
-            <a:avLst/>
-          </a:prstGeom>
-          <a:solidFill>
-            <a:srgbClr val="269CCB"/>
-          </a:solidFill>
-          <a:ln>
-            <a:noFill/>
-          </a:ln>
-        </p:spPr>
-        <p:style>
-          <a:lnRef idx="1">
-            <a:schemeClr val="accent1"/>
-          </a:lnRef>
-          <a:fillRef idx="3">
-            <a:schemeClr val="accent1"/>
-          </a:fillRef>
-          <a:effectRef idx="2">
-            <a:schemeClr val="accent1"/>
-          </a:effectRef>
-          <a:fontRef idx="minor">
-            <a:schemeClr val="lt1"/>
-          </a:fontRef>
-        </p:style>
-        <p:txBody>
-          <a:bodyPr rtlCol="0" anchor="ctr"/>
-          <a:lstStyle/>
-          <a:p>
-            <a:pPr algn="ctr"/>
-          </a:p>
-        </p:txBody>
-      </p:sp>
-      <p:sp>
-        <p:nvSpPr>
-          <p:cNvPr id="13" name="TextBox 12"/>
-          <p:cNvSpPr txBox="1"/>
-          <p:nvPr/>
-        </p:nvSpPr>
-        <p:spPr>
-          <a:xfrm>
-            <a:off x="1097280" y="2240279"/>
-            <a:ext cx="10362895" cy="402336"/>
-          </a:xfrm>
-          <a:prstGeom prst="rect">
-            <a:avLst/>
-          </a:prstGeom>
-          <a:noFill/>
-        </p:spPr>
-        <p:txBody>
-          <a:bodyPr wrap="square" anchor="ctr"/>
-          <a:lstStyle/>
-          <a:p>
-            <a:r>
-              <a:rPr sz="1500" b="1" i="0">
-                <a:solidFill>
-                  <a:srgbClr val="333333"/>
-                </a:solidFill>
-                <a:latin typeface="Calibri"/>
-              </a:rPr>
-              <a:t>QUÉ DOLÍA ANTES</a:t>
-            </a:r>
-            <a:r>
-              <a:rPr sz="1500" b="0" i="0">
-                <a:solidFill>
-                  <a:srgbClr val="333333"/>
-                </a:solidFill>
-                <a:latin typeface="Calibri"/>
-              </a:rPr>
-              <a:t> — Para cada hito: el problema concreto que existía antes y a quién le pasaba.</a:t>
-            </a:r>
-          </a:p>
-        </p:txBody>
-      </p:sp>
-      <p:sp>
-        <p:nvSpPr>
-          <p:cNvPr id="14" name="Rounded Rectangle 13"/>
-          <p:cNvSpPr/>
-          <p:nvPr/>
-        </p:nvSpPr>
-        <p:spPr>
-          <a:xfrm>
-            <a:off x="457200" y="2825496"/>
-            <a:ext cx="11277295" cy="566928"/>
-          </a:xfrm>
-          <a:prstGeom prst="roundRect">
-            <a:avLst>
-              <a:gd name="adj" fmla="val 12000"/>
-            </a:avLst>
-          </a:prstGeom>
-          <a:solidFill>
-            <a:srgbClr val="F2F2F2"/>
-          </a:solidFill>
-          <a:ln>
-            <a:noFill/>
-          </a:ln>
-        </p:spPr>
-        <p:style>
-          <a:lnRef idx="1">
-            <a:schemeClr val="accent1"/>
-          </a:lnRef>
-          <a:fillRef idx="3">
-            <a:schemeClr val="accent1"/>
-          </a:fillRef>
-          <a:effectRef idx="2">
-            <a:schemeClr val="accent1"/>
-          </a:effectRef>
-          <a:fontRef idx="minor">
-            <a:schemeClr val="lt1"/>
-          </a:fontRef>
-        </p:style>
-        <p:txBody>
-          <a:bodyPr rtlCol="0" anchor="ctr"/>
-          <a:lstStyle/>
-          <a:p>
-            <a:pPr algn="ctr"/>
-          </a:p>
-        </p:txBody>
-      </p:sp>
-      <p:sp>
-        <p:nvSpPr>
-          <p:cNvPr id="15" name="Rectangle 14"/>
-          <p:cNvSpPr/>
-          <p:nvPr/>
-        </p:nvSpPr>
-        <p:spPr>
-          <a:xfrm>
-            <a:off x="640080" y="2971800"/>
-            <a:ext cx="274320" cy="274320"/>
-          </a:xfrm>
-          <a:prstGeom prst="rect">
-            <a:avLst/>
-          </a:prstGeom>
-          <a:solidFill>
-            <a:srgbClr val="FFFFFF"/>
-          </a:solidFill>
-          <a:ln>
-            <a:solidFill>
-              <a:srgbClr val="333333"/>
-            </a:solidFill>
-          </a:ln>
-        </p:spPr>
-        <p:style>
-          <a:lnRef idx="1">
-            <a:schemeClr val="accent1"/>
-          </a:lnRef>
-          <a:fillRef idx="3">
-            <a:schemeClr val="accent1"/>
-          </a:fillRef>
-          <a:effectRef idx="2">
-            <a:schemeClr val="accent1"/>
-          </a:effectRef>
-          <a:fontRef idx="minor">
-            <a:schemeClr val="lt1"/>
-          </a:fontRef>
-        </p:style>
-        <p:txBody>
-          <a:bodyPr rtlCol="0" anchor="ctr"/>
-          <a:lstStyle/>
-          <a:p>
-            <a:pPr algn="ctr"/>
-          </a:p>
-        </p:txBody>
-      </p:sp>
-      <p:sp>
-        <p:nvSpPr>
-          <p:cNvPr id="16" name="Rectangle 15"/>
-          <p:cNvSpPr/>
-          <p:nvPr/>
-        </p:nvSpPr>
-        <p:spPr>
-          <a:xfrm>
-            <a:off x="640080" y="2971800"/>
-            <a:ext cx="73152" cy="274320"/>
-          </a:xfrm>
-          <a:prstGeom prst="rect">
-            <a:avLst/>
-          </a:prstGeom>
-          <a:solidFill>
-            <a:srgbClr val="269CCB"/>
-          </a:solidFill>
-          <a:ln>
-            <a:noFill/>
-          </a:ln>
-        </p:spPr>
-        <p:style>
-          <a:lnRef idx="1">
-            <a:schemeClr val="accent1"/>
-          </a:lnRef>
-          <a:fillRef idx="3">
-            <a:schemeClr val="accent1"/>
-          </a:fillRef>
-          <a:effectRef idx="2">
-            <a:schemeClr val="accent1"/>
-          </a:effectRef>
-          <a:fontRef idx="minor">
-            <a:schemeClr val="lt1"/>
-          </a:fontRef>
-        </p:style>
-        <p:txBody>
-          <a:bodyPr rtlCol="0" anchor="ctr"/>
-          <a:lstStyle/>
-          <a:p>
-            <a:pPr algn="ctr"/>
-          </a:p>
-        </p:txBody>
-      </p:sp>
-      <p:sp>
-        <p:nvSpPr>
-          <p:cNvPr id="17" name="TextBox 16"/>
-          <p:cNvSpPr txBox="1"/>
-          <p:nvPr/>
-        </p:nvSpPr>
-        <p:spPr>
-          <a:xfrm>
-            <a:off x="1097280" y="2916936"/>
-            <a:ext cx="10362895" cy="402336"/>
-          </a:xfrm>
-          <a:prstGeom prst="rect">
-            <a:avLst/>
-          </a:prstGeom>
-          <a:noFill/>
-        </p:spPr>
-        <p:txBody>
-          <a:bodyPr wrap="square" anchor="ctr"/>
-          <a:lstStyle/>
-          <a:p>
-            <a:r>
-              <a:rPr sz="1500" b="1" i="0">
-                <a:solidFill>
-                  <a:srgbClr val="333333"/>
-                </a:solidFill>
-                <a:latin typeface="Calibri"/>
-              </a:rPr>
-              <a:t>QUÉ PROPUSO</a:t>
-            </a:r>
-            <a:r>
-              <a:rPr sz="1500" b="0" i="0">
-                <a:solidFill>
-                  <a:srgbClr val="333333"/>
-                </a:solidFill>
-                <a:latin typeface="Calibri"/>
-              </a:rPr>
-              <a:t> — Para cada hito: la idea, el método o la herramienta, en una frase que ustedes puedan explicar.</a:t>
-            </a:r>
-          </a:p>
-        </p:txBody>
-      </p:sp>
-      <p:sp>
-        <p:nvSpPr>
-          <p:cNvPr id="18" name="Rounded Rectangle 17"/>
-          <p:cNvSpPr/>
-          <p:nvPr/>
-        </p:nvSpPr>
-        <p:spPr>
-          <a:xfrm>
-            <a:off x="457200" y="3502152"/>
-            <a:ext cx="11277295" cy="566928"/>
-          </a:xfrm>
-          <a:prstGeom prst="roundRect">
-            <a:avLst>
-              <a:gd name="adj" fmla="val 12000"/>
-            </a:avLst>
-          </a:prstGeom>
-          <a:solidFill>
-            <a:srgbClr val="F2F2F2"/>
-          </a:solidFill>
-          <a:ln>
-            <a:noFill/>
-          </a:ln>
-        </p:spPr>
-        <p:style>
-          <a:lnRef idx="1">
-            <a:schemeClr val="accent1"/>
-          </a:lnRef>
-          <a:fillRef idx="3">
-            <a:schemeClr val="accent1"/>
-          </a:fillRef>
-          <a:effectRef idx="2">
-            <a:schemeClr val="accent1"/>
-          </a:effectRef>
-          <a:fontRef idx="minor">
-            <a:schemeClr val="lt1"/>
-          </a:fontRef>
-        </p:style>
-        <p:txBody>
-          <a:bodyPr rtlCol="0" anchor="ctr"/>
-          <a:lstStyle/>
-          <a:p>
-            <a:pPr algn="ctr"/>
-          </a:p>
-        </p:txBody>
-      </p:sp>
-      <p:sp>
-        <p:nvSpPr>
-          <p:cNvPr id="19" name="Rectangle 18"/>
-          <p:cNvSpPr/>
-          <p:nvPr/>
-        </p:nvSpPr>
-        <p:spPr>
-          <a:xfrm>
-            <a:off x="640080" y="3648456"/>
-            <a:ext cx="274320" cy="274320"/>
-          </a:xfrm>
-          <a:prstGeom prst="rect">
-            <a:avLst/>
-          </a:prstGeom>
-          <a:solidFill>
-            <a:srgbClr val="FFFFFF"/>
-          </a:solidFill>
-          <a:ln>
-            <a:solidFill>
-              <a:srgbClr val="333333"/>
-            </a:solidFill>
-          </a:ln>
-        </p:spPr>
-        <p:style>
-          <a:lnRef idx="1">
-            <a:schemeClr val="accent1"/>
-          </a:lnRef>
-          <a:fillRef idx="3">
-            <a:schemeClr val="accent1"/>
-          </a:fillRef>
-          <a:effectRef idx="2">
-            <a:schemeClr val="accent1"/>
-          </a:effectRef>
-          <a:fontRef idx="minor">
-            <a:schemeClr val="lt1"/>
-          </a:fontRef>
-        </p:style>
-        <p:txBody>
-          <a:bodyPr rtlCol="0" anchor="ctr"/>
-          <a:lstStyle/>
-          <a:p>
-            <a:pPr algn="ctr"/>
-          </a:p>
-        </p:txBody>
-      </p:sp>
-      <p:sp>
-        <p:nvSpPr>
-          <p:cNvPr id="20" name="Rectangle 19"/>
-          <p:cNvSpPr/>
-          <p:nvPr/>
-        </p:nvSpPr>
-        <p:spPr>
-          <a:xfrm>
-            <a:off x="640080" y="3648456"/>
-            <a:ext cx="73152" cy="274320"/>
-          </a:xfrm>
-          <a:prstGeom prst="rect">
-            <a:avLst/>
-          </a:prstGeom>
-          <a:solidFill>
-            <a:srgbClr val="269CCB"/>
-          </a:solidFill>
-          <a:ln>
-            <a:noFill/>
-          </a:ln>
-        </p:spPr>
-        <p:style>
-          <a:lnRef idx="1">
-            <a:schemeClr val="accent1"/>
-          </a:lnRef>
-          <a:fillRef idx="3">
-            <a:schemeClr val="accent1"/>
-          </a:fillRef>
-          <a:effectRef idx="2">
-            <a:schemeClr val="accent1"/>
-          </a:effectRef>
-          <a:fontRef idx="minor">
-            <a:schemeClr val="lt1"/>
-          </a:fontRef>
-        </p:style>
-        <p:txBody>
-          <a:bodyPr rtlCol="0" anchor="ctr"/>
-          <a:lstStyle/>
-          <a:p>
-            <a:pPr algn="ctr"/>
-          </a:p>
-        </p:txBody>
-      </p:sp>
-      <p:sp>
-        <p:nvSpPr>
-          <p:cNvPr id="21" name="TextBox 20"/>
-          <p:cNvSpPr txBox="1"/>
-          <p:nvPr/>
-        </p:nvSpPr>
-        <p:spPr>
-          <a:xfrm>
-            <a:off x="1097280" y="3593592"/>
-            <a:ext cx="10362895" cy="402336"/>
-          </a:xfrm>
-          <a:prstGeom prst="rect">
-            <a:avLst/>
-          </a:prstGeom>
-          <a:noFill/>
-        </p:spPr>
-        <p:txBody>
-          <a:bodyPr wrap="square" anchor="ctr"/>
-          <a:lstStyle/>
-          <a:p>
-            <a:r>
-              <a:rPr sz="1500" b="1" i="0">
-                <a:solidFill>
-                  <a:srgbClr val="333333"/>
-                </a:solidFill>
-                <a:latin typeface="Calibri"/>
-              </a:rPr>
-              <a:t>QUÉ SIGUE VIVO HOY</a:t>
-            </a:r>
-            <a:r>
-              <a:rPr sz="1500" b="0" i="0">
-                <a:solidFill>
-                  <a:srgbClr val="333333"/>
-                </a:solidFill>
-                <a:latin typeface="Calibri"/>
-              </a:rPr>
-              <a:t> — Para </a:t>
-            </a:r>
-            <a:r>
-              <a:rPr sz="1500" b="1" i="0">
-                <a:solidFill>
-                  <a:srgbClr val="333333"/>
-                </a:solidFill>
-                <a:latin typeface="Calibri"/>
-              </a:rPr>
-              <a:t>al menos dos</a:t>
-            </a:r>
-            <a:r>
-              <a:rPr sz="1500" b="0" i="0">
-                <a:solidFill>
-                  <a:srgbClr val="333333"/>
-                </a:solidFill>
-                <a:latin typeface="Calibri"/>
-              </a:rPr>
-              <a:t> de los cuatro hitos: qué parte de ese problema todavía no está resuelta, con un ejemplo de algo que ustedes hayan visto.</a:t>
-            </a:r>
-          </a:p>
-        </p:txBody>
-      </p:sp>
-      <p:sp>
-        <p:nvSpPr>
-          <p:cNvPr id="22" name="Rounded Rectangle 21"/>
-          <p:cNvSpPr/>
-          <p:nvPr/>
-        </p:nvSpPr>
-        <p:spPr>
-          <a:xfrm>
-            <a:off x="457200" y="4178808"/>
-            <a:ext cx="11277295" cy="566928"/>
-          </a:xfrm>
-          <a:prstGeom prst="roundRect">
-            <a:avLst>
-              <a:gd name="adj" fmla="val 12000"/>
-            </a:avLst>
-          </a:prstGeom>
-          <a:solidFill>
-            <a:srgbClr val="F2F2F2"/>
-          </a:solidFill>
-          <a:ln>
-            <a:noFill/>
-          </a:ln>
-        </p:spPr>
-        <p:style>
-          <a:lnRef idx="1">
-            <a:schemeClr val="accent1"/>
-          </a:lnRef>
-          <a:fillRef idx="3">
-            <a:schemeClr val="accent1"/>
-          </a:fillRef>
-          <a:effectRef idx="2">
-            <a:schemeClr val="accent1"/>
-          </a:effectRef>
-          <a:fontRef idx="minor">
-            <a:schemeClr val="lt1"/>
-          </a:fontRef>
-        </p:style>
-        <p:txBody>
-          <a:bodyPr rtlCol="0" anchor="ctr"/>
-          <a:lstStyle/>
-          <a:p>
-            <a:pPr algn="ctr"/>
-          </a:p>
-        </p:txBody>
-      </p:sp>
-      <p:sp>
-        <p:nvSpPr>
-          <p:cNvPr id="23" name="Rectangle 22"/>
-          <p:cNvSpPr/>
-          <p:nvPr/>
-        </p:nvSpPr>
-        <p:spPr>
-          <a:xfrm>
-            <a:off x="640080" y="4325112"/>
-            <a:ext cx="274320" cy="274320"/>
-          </a:xfrm>
-          <a:prstGeom prst="rect">
-            <a:avLst/>
-          </a:prstGeom>
-          <a:solidFill>
-            <a:srgbClr val="FFFFFF"/>
-          </a:solidFill>
-          <a:ln>
-            <a:solidFill>
-              <a:srgbClr val="333333"/>
-            </a:solidFill>
-          </a:ln>
-        </p:spPr>
-        <p:style>
-          <a:lnRef idx="1">
-            <a:schemeClr val="accent1"/>
-          </a:lnRef>
-          <a:fillRef idx="3">
-            <a:schemeClr val="accent1"/>
-          </a:fillRef>
-          <a:effectRef idx="2">
-            <a:schemeClr val="accent1"/>
-          </a:effectRef>
-          <a:fontRef idx="minor">
-            <a:schemeClr val="lt1"/>
-          </a:fontRef>
-        </p:style>
-        <p:txBody>
-          <a:bodyPr rtlCol="0" anchor="ctr"/>
-          <a:lstStyle/>
-          <a:p>
-            <a:pPr algn="ctr"/>
-          </a:p>
-        </p:txBody>
-      </p:sp>
-      <p:sp>
-        <p:nvSpPr>
-          <p:cNvPr id="24" name="Rectangle 23"/>
-          <p:cNvSpPr/>
-          <p:nvPr/>
-        </p:nvSpPr>
-        <p:spPr>
-          <a:xfrm>
-            <a:off x="640080" y="4325112"/>
-            <a:ext cx="73152" cy="274320"/>
-          </a:xfrm>
-          <a:prstGeom prst="rect">
-            <a:avLst/>
-          </a:prstGeom>
-          <a:solidFill>
-            <a:srgbClr val="269CCB"/>
-          </a:solidFill>
-          <a:ln>
-            <a:noFill/>
-          </a:ln>
-        </p:spPr>
-        <p:style>
-          <a:lnRef idx="1">
-            <a:schemeClr val="accent1"/>
-          </a:lnRef>
-          <a:fillRef idx="3">
-            <a:schemeClr val="accent1"/>
-          </a:fillRef>
-          <a:effectRef idx="2">
-            <a:schemeClr val="accent1"/>
-          </a:effectRef>
-          <a:fontRef idx="minor">
-            <a:schemeClr val="lt1"/>
-          </a:fontRef>
-        </p:style>
-        <p:txBody>
-          <a:bodyPr rtlCol="0" anchor="ctr"/>
-          <a:lstStyle/>
-          <a:p>
-            <a:pPr algn="ctr"/>
-          </a:p>
-        </p:txBody>
-      </p:sp>
-      <p:sp>
-        <p:nvSpPr>
-          <p:cNvPr id="25" name="TextBox 24"/>
-          <p:cNvSpPr txBox="1"/>
-          <p:nvPr/>
-        </p:nvSpPr>
-        <p:spPr>
-          <a:xfrm>
-            <a:off x="1097280" y="4270248"/>
-            <a:ext cx="10362895" cy="402336"/>
-          </a:xfrm>
-          <a:prstGeom prst="rect">
-            <a:avLst/>
-          </a:prstGeom>
-          <a:noFill/>
-        </p:spPr>
-        <p:txBody>
-          <a:bodyPr wrap="square" anchor="ctr"/>
-          <a:lstStyle/>
-          <a:p>
-            <a:r>
-              <a:rPr sz="1500" b="1" i="0">
-                <a:solidFill>
-                  <a:srgbClr val="333333"/>
-                </a:solidFill>
-                <a:latin typeface="Calibri"/>
-              </a:rPr>
-              <a:t>LA FUENTE</a:t>
-            </a:r>
-            <a:r>
-              <a:rPr sz="1500" b="0" i="0">
-                <a:solidFill>
-                  <a:srgbClr val="333333"/>
-                </a:solidFill>
-                <a:latin typeface="Calibri"/>
-              </a:rPr>
-              <a:t> — De dónde sacaron cada dato: autor o institución, y año. Si usaron una cifra («el 70 % de los proyectos…»), la fuente es obligatoria.</a:t>
-            </a:r>
-          </a:p>
-        </p:txBody>
-      </p:sp>
-      <p:sp>
-        <p:nvSpPr>
-          <p:cNvPr id="26" name="TextBox 25"/>
-          <p:cNvSpPr txBox="1"/>
-          <p:nvPr/>
-        </p:nvSpPr>
-        <p:spPr>
-          <a:xfrm>
-            <a:off x="11185855" y="6473952"/>
-            <a:ext cx="640080" cy="274320"/>
-          </a:xfrm>
-          <a:prstGeom prst="rect">
-            <a:avLst/>
-          </a:prstGeom>
-          <a:noFill/>
-        </p:spPr>
-        <p:txBody>
-          <a:bodyPr wrap="square">
-            <a:spAutoFit/>
-          </a:bodyPr>
-          <a:lstStyle/>
-          <a:p>
-            <a:pPr algn="r"/>
-            <a:r>
-              <a:rPr sz="1100" b="0" i="0">
-                <a:solidFill>
-                  <a:srgbClr val="666666"/>
-                </a:solidFill>
-                <a:latin typeface="Calibri"/>
-              </a:rPr>
-              <a:t>13</a:t>
-            </a:r>
-          </a:p>
-        </p:txBody>
-      </p:sp>
-    </p:spTree>
-  </p:cSld>
-  <p:clrMapOvr>
-    <a:masterClrMapping/>
-  </p:clrMapOvr>
-</p:sld>
-</file>
-
-<file path=ppt/slides/slide14.xml><?xml version="1.0" encoding="utf-8"?>
-<p:sld xmlns:a="http://schemas.openxmlformats.org/drawingml/2006/main" xmlns:p="http://schemas.openxmlformats.org/presentationml/2006/main" xmlns:r="http://schemas.openxmlformats.org/officeDocument/2006/relationships">
-  <p:cSld>
-    <p:bg>
-      <p:bgPr>
-        <a:solidFill>
-          <a:srgbClr val="FFFFFF"/>
-        </a:solidFill>
-        <a:effectLst/>
-      </p:bgPr>
-    </p:bg>
-    <p:spTree>
-      <p:nvGrpSpPr>
-        <p:cNvPr id="1" name=""/>
-        <p:cNvGrpSpPr/>
-        <p:nvPr/>
-      </p:nvGrpSpPr>
-      <p:grpSpPr/>
-      <p:sp>
-        <p:nvSpPr>
-          <p:cNvPr id="2" name="Rectangle 1"/>
-          <p:cNvSpPr/>
-          <p:nvPr/>
-        </p:nvSpPr>
-        <p:spPr>
-          <a:xfrm>
-            <a:off x="0" y="0"/>
-            <a:ext cx="12191695" cy="1170432"/>
-          </a:xfrm>
-          <a:prstGeom prst="rect">
-            <a:avLst/>
-          </a:prstGeom>
-          <a:solidFill>
-            <a:srgbClr val="095292"/>
-          </a:solidFill>
-          <a:ln>
-            <a:noFill/>
-          </a:ln>
-        </p:spPr>
-        <p:style>
-          <a:lnRef idx="1">
-            <a:schemeClr val="accent1"/>
-          </a:lnRef>
-          <a:fillRef idx="3">
-            <a:schemeClr val="accent1"/>
-          </a:fillRef>
-          <a:effectRef idx="2">
-            <a:schemeClr val="accent1"/>
-          </a:effectRef>
-          <a:fontRef idx="minor">
-            <a:schemeClr val="lt1"/>
-          </a:fontRef>
-        </p:style>
-        <p:txBody>
-          <a:bodyPr rtlCol="0" anchor="ctr"/>
-          <a:lstStyle/>
-          <a:p>
-            <a:pPr algn="ctr"/>
-          </a:p>
-        </p:txBody>
-      </p:sp>
-      <p:sp>
-        <p:nvSpPr>
-          <p:cNvPr id="3" name="Rectangle 2"/>
-          <p:cNvSpPr/>
-          <p:nvPr/>
-        </p:nvSpPr>
-        <p:spPr>
-          <a:xfrm>
-            <a:off x="0" y="1170432"/>
-            <a:ext cx="12191695" cy="41148"/>
-          </a:xfrm>
-          <a:prstGeom prst="rect">
-            <a:avLst/>
-          </a:prstGeom>
-          <a:solidFill>
-            <a:srgbClr val="FFD000"/>
-          </a:solidFill>
-          <a:ln>
-            <a:noFill/>
-          </a:ln>
-        </p:spPr>
-        <p:style>
-          <a:lnRef idx="1">
-            <a:schemeClr val="accent1"/>
-          </a:lnRef>
-          <a:fillRef idx="3">
-            <a:schemeClr val="accent1"/>
-          </a:fillRef>
-          <a:effectRef idx="2">
-            <a:schemeClr val="accent1"/>
-          </a:effectRef>
-          <a:fontRef idx="minor">
-            <a:schemeClr val="lt1"/>
-          </a:fontRef>
-        </p:style>
-        <p:txBody>
-          <a:bodyPr rtlCol="0" anchor="ctr"/>
-          <a:lstStyle/>
-          <a:p>
-            <a:pPr algn="ctr"/>
-          </a:p>
-        </p:txBody>
-      </p:sp>
-      <p:sp>
-        <p:nvSpPr>
-          <p:cNvPr id="4" name="TextBox 3"/>
-          <p:cNvSpPr txBox="1"/>
-          <p:nvPr/>
-        </p:nvSpPr>
-        <p:spPr>
-          <a:xfrm>
-            <a:off x="457200" y="164592"/>
-            <a:ext cx="11277295" cy="384048"/>
-          </a:xfrm>
-          <a:prstGeom prst="rect">
-            <a:avLst/>
-          </a:prstGeom>
-          <a:noFill/>
-        </p:spPr>
-        <p:txBody>
-          <a:bodyPr wrap="square">
-            <a:spAutoFit/>
-          </a:bodyPr>
-          <a:lstStyle/>
-          <a:p>
-            <a:r>
-              <a:rPr sz="2600" b="1" i="0">
-                <a:solidFill>
-                  <a:srgbClr val="FFFFFF"/>
-                </a:solidFill>
-                <a:latin typeface="Calibri"/>
-              </a:rPr>
-              <a:t>Cómo se expone en 3 minutos</a:t>
-            </a:r>
-          </a:p>
-        </p:txBody>
-      </p:sp>
-      <p:sp>
-        <p:nvSpPr>
-          <p:cNvPr id="5" name="TextBox 4"/>
-          <p:cNvSpPr txBox="1"/>
-          <p:nvPr/>
-        </p:nvSpPr>
-        <p:spPr>
-          <a:xfrm>
-            <a:off x="457200" y="566928"/>
-            <a:ext cx="11277295" cy="411480"/>
-          </a:xfrm>
-          <a:prstGeom prst="rect">
-            <a:avLst/>
-          </a:prstGeom>
-          <a:noFill/>
-        </p:spPr>
-        <p:txBody>
-          <a:bodyPr wrap="square">
-            <a:spAutoFit/>
-          </a:bodyPr>
-          <a:lstStyle/>
-          <a:p>
-            <a:r>
-              <a:rPr sz="1400" b="0" i="0">
-                <a:solidFill>
-                  <a:srgbClr val="B8D8EE"/>
-                </a:solidFill>
-                <a:latin typeface="Calibri"/>
-              </a:rPr>
-              <a:t>Habla el vocero con la pantalla ya compartida · cronómetro en pantalla · se corta al llegar a cero</a:t>
-            </a:r>
-          </a:p>
-        </p:txBody>
-      </p:sp>
-      <p:sp>
-        <p:nvSpPr>
-          <p:cNvPr id="6" name="Rounded Rectangle 5"/>
-          <p:cNvSpPr/>
-          <p:nvPr/>
-        </p:nvSpPr>
-        <p:spPr>
-          <a:xfrm>
-            <a:off x="457200" y="1659636"/>
-            <a:ext cx="11277295" cy="1051560"/>
-          </a:xfrm>
-          <a:prstGeom prst="roundRect">
-            <a:avLst>
-              <a:gd name="adj" fmla="val 12000"/>
-            </a:avLst>
-          </a:prstGeom>
-          <a:solidFill>
-            <a:srgbClr val="F2F2F2"/>
-          </a:solidFill>
-          <a:ln>
-            <a:noFill/>
-          </a:ln>
-        </p:spPr>
-        <p:style>
-          <a:lnRef idx="1">
-            <a:schemeClr val="accent1"/>
-          </a:lnRef>
-          <a:fillRef idx="3">
-            <a:schemeClr val="accent1"/>
-          </a:fillRef>
-          <a:effectRef idx="2">
-            <a:schemeClr val="accent1"/>
-          </a:effectRef>
-          <a:fontRef idx="minor">
-            <a:schemeClr val="lt1"/>
-          </a:fontRef>
-        </p:style>
-        <p:txBody>
-          <a:bodyPr rtlCol="0" anchor="ctr"/>
-          <a:lstStyle/>
-          <a:p>
-            <a:pPr algn="ctr"/>
-          </a:p>
-        </p:txBody>
-      </p:sp>
-      <p:sp>
-        <p:nvSpPr>
-          <p:cNvPr id="7" name="Rounded Rectangle 6"/>
-          <p:cNvSpPr/>
-          <p:nvPr/>
-        </p:nvSpPr>
-        <p:spPr>
-          <a:xfrm>
-            <a:off x="594360" y="1965960"/>
-            <a:ext cx="438912" cy="438912"/>
-          </a:xfrm>
-          <a:prstGeom prst="roundRect">
-            <a:avLst>
-              <a:gd name="adj" fmla="val 12000"/>
-            </a:avLst>
-          </a:prstGeom>
-          <a:solidFill>
-            <a:srgbClr val="095292"/>
-          </a:solidFill>
-          <a:ln>
-            <a:noFill/>
-          </a:ln>
-        </p:spPr>
-        <p:style>
-          <a:lnRef idx="1">
-            <a:schemeClr val="accent1"/>
-          </a:lnRef>
-          <a:fillRef idx="3">
-            <a:schemeClr val="accent1"/>
-          </a:fillRef>
-          <a:effectRef idx="2">
-            <a:schemeClr val="accent1"/>
-          </a:effectRef>
-          <a:fontRef idx="minor">
-            <a:schemeClr val="lt1"/>
-          </a:fontRef>
-        </p:style>
-        <p:txBody>
-          <a:bodyPr rtlCol="0" anchor="ctr"/>
-          <a:lstStyle/>
-          <a:p>
-            <a:pPr algn="ctr"/>
-          </a:p>
-        </p:txBody>
-      </p:sp>
-      <p:sp>
-        <p:nvSpPr>
-          <p:cNvPr id="8" name="TextBox 7"/>
-          <p:cNvSpPr txBox="1"/>
-          <p:nvPr/>
-        </p:nvSpPr>
-        <p:spPr>
-          <a:xfrm>
-            <a:off x="594360" y="1965960"/>
-            <a:ext cx="438912" cy="438912"/>
-          </a:xfrm>
-          <a:prstGeom prst="rect">
-            <a:avLst/>
-          </a:prstGeom>
-          <a:noFill/>
-        </p:spPr>
-        <p:txBody>
-          <a:bodyPr wrap="square" anchor="ctr"/>
-          <a:lstStyle/>
-          <a:p>
-            <a:pPr algn="ctr"/>
-            <a:r>
-              <a:rPr sz="1600" b="1" i="0">
-                <a:solidFill>
-                  <a:srgbClr val="FFFFFF"/>
-                </a:solidFill>
-                <a:latin typeface="Calibri"/>
-              </a:rPr>
-              <a:t>1</a:t>
-            </a:r>
-          </a:p>
-        </p:txBody>
-      </p:sp>
-      <p:sp>
-        <p:nvSpPr>
-          <p:cNvPr id="9" name="TextBox 8"/>
-          <p:cNvSpPr txBox="1"/>
-          <p:nvPr/>
-        </p:nvSpPr>
-        <p:spPr>
-          <a:xfrm>
-            <a:off x="1188720" y="1751076"/>
-            <a:ext cx="10271455" cy="886968"/>
-          </a:xfrm>
-          <a:prstGeom prst="rect">
-            <a:avLst/>
-          </a:prstGeom>
-          <a:noFill/>
-        </p:spPr>
-        <p:txBody>
-          <a:bodyPr wrap="square" anchor="ctr"/>
-          <a:lstStyle/>
-          <a:p>
-            <a:r>
-              <a:rPr sz="1500" b="1" i="0">
-                <a:solidFill>
-                  <a:srgbClr val="095292"/>
-                </a:solidFill>
-                <a:latin typeface="Calibri"/>
-              </a:rPr>
-              <a:t>45 s · El periodo y qué dolía</a:t>
-            </a:r>
-          </a:p>
-          <a:p>
-            <a:pPr>
-              <a:spcBef>
-                <a:spcPts val="200"/>
-              </a:spcBef>
-            </a:pPr>
-            <a:r>
-              <a:rPr sz="1300" b="0" i="0">
-                <a:solidFill>
-                  <a:srgbClr val="333333"/>
-                </a:solidFill>
-                <a:latin typeface="Calibri"/>
-              </a:rPr>
-              <a:t>Qué años les tocaron y cuál era el problema de la época.</a:t>
-            </a:r>
-          </a:p>
-        </p:txBody>
-      </p:sp>
-      <p:sp>
-        <p:nvSpPr>
-          <p:cNvPr id="10" name="Rounded Rectangle 9"/>
-          <p:cNvSpPr/>
-          <p:nvPr/>
-        </p:nvSpPr>
-        <p:spPr>
-          <a:xfrm>
-            <a:off x="457200" y="2802636"/>
-            <a:ext cx="11277295" cy="1051560"/>
-          </a:xfrm>
-          <a:prstGeom prst="roundRect">
-            <a:avLst>
-              <a:gd name="adj" fmla="val 12000"/>
-            </a:avLst>
-          </a:prstGeom>
-          <a:solidFill>
-            <a:srgbClr val="E8F4FA"/>
-          </a:solidFill>
-          <a:ln>
-            <a:noFill/>
-          </a:ln>
-        </p:spPr>
-        <p:style>
-          <a:lnRef idx="1">
-            <a:schemeClr val="accent1"/>
-          </a:lnRef>
-          <a:fillRef idx="3">
-            <a:schemeClr val="accent1"/>
-          </a:fillRef>
-          <a:effectRef idx="2">
-            <a:schemeClr val="accent1"/>
-          </a:effectRef>
-          <a:fontRef idx="minor">
-            <a:schemeClr val="lt1"/>
-          </a:fontRef>
-        </p:style>
-        <p:txBody>
-          <a:bodyPr rtlCol="0" anchor="ctr"/>
-          <a:lstStyle/>
-          <a:p>
-            <a:pPr algn="ctr"/>
-          </a:p>
-        </p:txBody>
-      </p:sp>
-      <p:sp>
-        <p:nvSpPr>
-          <p:cNvPr id="11" name="Rounded Rectangle 10"/>
-          <p:cNvSpPr/>
-          <p:nvPr/>
-        </p:nvSpPr>
-        <p:spPr>
-          <a:xfrm>
-            <a:off x="594360" y="3108960"/>
-            <a:ext cx="438912" cy="438912"/>
-          </a:xfrm>
-          <a:prstGeom prst="roundRect">
-            <a:avLst>
-              <a:gd name="adj" fmla="val 12000"/>
-            </a:avLst>
-          </a:prstGeom>
-          <a:solidFill>
-            <a:srgbClr val="095292"/>
-          </a:solidFill>
-          <a:ln>
-            <a:noFill/>
-          </a:ln>
-        </p:spPr>
-        <p:style>
-          <a:lnRef idx="1">
-            <a:schemeClr val="accent1"/>
-          </a:lnRef>
-          <a:fillRef idx="3">
-            <a:schemeClr val="accent1"/>
-          </a:fillRef>
-          <a:effectRef idx="2">
-            <a:schemeClr val="accent1"/>
-          </a:effectRef>
-          <a:fontRef idx="minor">
-            <a:schemeClr val="lt1"/>
-          </a:fontRef>
-        </p:style>
-        <p:txBody>
-          <a:bodyPr rtlCol="0" anchor="ctr"/>
-          <a:lstStyle/>
-          <a:p>
-            <a:pPr algn="ctr"/>
-          </a:p>
-        </p:txBody>
-      </p:sp>
-      <p:sp>
-        <p:nvSpPr>
-          <p:cNvPr id="12" name="TextBox 11"/>
-          <p:cNvSpPr txBox="1"/>
-          <p:nvPr/>
-        </p:nvSpPr>
-        <p:spPr>
-          <a:xfrm>
-            <a:off x="594360" y="3108960"/>
-            <a:ext cx="438912" cy="438912"/>
-          </a:xfrm>
-          <a:prstGeom prst="rect">
-            <a:avLst/>
-          </a:prstGeom>
-          <a:noFill/>
-        </p:spPr>
-        <p:txBody>
-          <a:bodyPr wrap="square" anchor="ctr"/>
-          <a:lstStyle/>
-          <a:p>
-            <a:pPr algn="ctr"/>
-            <a:r>
-              <a:rPr sz="1600" b="1" i="0">
-                <a:solidFill>
-                  <a:srgbClr val="FFFFFF"/>
-                </a:solidFill>
-                <a:latin typeface="Calibri"/>
-              </a:rPr>
-              <a:t>2</a:t>
-            </a:r>
-          </a:p>
-        </p:txBody>
-      </p:sp>
-      <p:sp>
-        <p:nvSpPr>
-          <p:cNvPr id="13" name="TextBox 12"/>
-          <p:cNvSpPr txBox="1"/>
-          <p:nvPr/>
-        </p:nvSpPr>
-        <p:spPr>
-          <a:xfrm>
-            <a:off x="1188720" y="2894076"/>
-            <a:ext cx="10271455" cy="886968"/>
-          </a:xfrm>
-          <a:prstGeom prst="rect">
-            <a:avLst/>
-          </a:prstGeom>
-          <a:noFill/>
-        </p:spPr>
-        <p:txBody>
-          <a:bodyPr wrap="square" anchor="ctr"/>
-          <a:lstStyle/>
-          <a:p>
-            <a:r>
-              <a:rPr sz="1500" b="1" i="0">
-                <a:solidFill>
-                  <a:srgbClr val="095292"/>
-                </a:solidFill>
-                <a:latin typeface="Calibri"/>
-              </a:rPr>
-              <a:t>60 s · Los cuatro hitos</a:t>
-            </a:r>
-          </a:p>
-          <a:p>
-            <a:pPr>
-              <a:spcBef>
-                <a:spcPts val="200"/>
-              </a:spcBef>
-            </a:pPr>
-            <a:r>
-              <a:rPr sz="1300" b="0" i="0">
-                <a:solidFill>
-                  <a:srgbClr val="333333"/>
-                </a:solidFill>
-                <a:latin typeface="Calibri"/>
-              </a:rPr>
-              <a:t>En orden, con año. Una frase por hito, sin leer la pantalla.</a:t>
-            </a:r>
-          </a:p>
-        </p:txBody>
-      </p:sp>
-      <p:sp>
-        <p:nvSpPr>
-          <p:cNvPr id="14" name="Rounded Rectangle 13"/>
-          <p:cNvSpPr/>
-          <p:nvPr/>
-        </p:nvSpPr>
-        <p:spPr>
-          <a:xfrm>
-            <a:off x="457200" y="3945636"/>
-            <a:ext cx="11277295" cy="1051560"/>
-          </a:xfrm>
-          <a:prstGeom prst="roundRect">
-            <a:avLst>
-              <a:gd name="adj" fmla="val 12000"/>
-            </a:avLst>
-          </a:prstGeom>
-          <a:solidFill>
-            <a:srgbClr val="F2F2F2"/>
-          </a:solidFill>
-          <a:ln>
-            <a:noFill/>
-          </a:ln>
-        </p:spPr>
-        <p:style>
-          <a:lnRef idx="1">
-            <a:schemeClr val="accent1"/>
-          </a:lnRef>
-          <a:fillRef idx="3">
-            <a:schemeClr val="accent1"/>
-          </a:fillRef>
-          <a:effectRef idx="2">
-            <a:schemeClr val="accent1"/>
-          </a:effectRef>
-          <a:fontRef idx="minor">
-            <a:schemeClr val="lt1"/>
-          </a:fontRef>
-        </p:style>
-        <p:txBody>
-          <a:bodyPr rtlCol="0" anchor="ctr"/>
-          <a:lstStyle/>
-          <a:p>
-            <a:pPr algn="ctr"/>
-          </a:p>
-        </p:txBody>
-      </p:sp>
-      <p:sp>
-        <p:nvSpPr>
-          <p:cNvPr id="15" name="Rounded Rectangle 14"/>
-          <p:cNvSpPr/>
-          <p:nvPr/>
-        </p:nvSpPr>
-        <p:spPr>
-          <a:xfrm>
-            <a:off x="594360" y="4251960"/>
-            <a:ext cx="438912" cy="438912"/>
-          </a:xfrm>
-          <a:prstGeom prst="roundRect">
-            <a:avLst>
-              <a:gd name="adj" fmla="val 12000"/>
-            </a:avLst>
-          </a:prstGeom>
-          <a:solidFill>
-            <a:srgbClr val="095292"/>
-          </a:solidFill>
-          <a:ln>
-            <a:noFill/>
-          </a:ln>
-        </p:spPr>
-        <p:style>
-          <a:lnRef idx="1">
-            <a:schemeClr val="accent1"/>
-          </a:lnRef>
-          <a:fillRef idx="3">
-            <a:schemeClr val="accent1"/>
-          </a:fillRef>
-          <a:effectRef idx="2">
-            <a:schemeClr val="accent1"/>
-          </a:effectRef>
-          <a:fontRef idx="minor">
-            <a:schemeClr val="lt1"/>
-          </a:fontRef>
-        </p:style>
-        <p:txBody>
-          <a:bodyPr rtlCol="0" anchor="ctr"/>
-          <a:lstStyle/>
-          <a:p>
-            <a:pPr algn="ctr"/>
-          </a:p>
-        </p:txBody>
-      </p:sp>
-      <p:sp>
-        <p:nvSpPr>
-          <p:cNvPr id="16" name="TextBox 15"/>
-          <p:cNvSpPr txBox="1"/>
-          <p:nvPr/>
-        </p:nvSpPr>
-        <p:spPr>
-          <a:xfrm>
-            <a:off x="594360" y="4251960"/>
-            <a:ext cx="438912" cy="438912"/>
-          </a:xfrm>
-          <a:prstGeom prst="rect">
-            <a:avLst/>
-          </a:prstGeom>
-          <a:noFill/>
-        </p:spPr>
-        <p:txBody>
-          <a:bodyPr wrap="square" anchor="ctr"/>
-          <a:lstStyle/>
-          <a:p>
-            <a:pPr algn="ctr"/>
-            <a:r>
-              <a:rPr sz="1600" b="1" i="0">
-                <a:solidFill>
-                  <a:srgbClr val="FFFFFF"/>
-                </a:solidFill>
-                <a:latin typeface="Calibri"/>
-              </a:rPr>
-              <a:t>3</a:t>
-            </a:r>
-          </a:p>
-        </p:txBody>
-      </p:sp>
-      <p:sp>
-        <p:nvSpPr>
-          <p:cNvPr id="17" name="TextBox 16"/>
-          <p:cNvSpPr txBox="1"/>
-          <p:nvPr/>
-        </p:nvSpPr>
-        <p:spPr>
-          <a:xfrm>
-            <a:off x="1188720" y="4037076"/>
-            <a:ext cx="10271455" cy="886968"/>
-          </a:xfrm>
-          <a:prstGeom prst="rect">
-            <a:avLst/>
-          </a:prstGeom>
-          <a:noFill/>
-        </p:spPr>
-        <p:txBody>
-          <a:bodyPr wrap="square" anchor="ctr"/>
-          <a:lstStyle/>
-          <a:p>
-            <a:r>
-              <a:rPr sz="1500" b="1" i="0">
-                <a:solidFill>
-                  <a:srgbClr val="095292"/>
-                </a:solidFill>
-                <a:latin typeface="Calibri"/>
-              </a:rPr>
-              <a:t>60 s · Qué sigue vivo</a:t>
-            </a:r>
-          </a:p>
-          <a:p>
-            <a:pPr>
-              <a:spcBef>
-                <a:spcPts val="200"/>
-              </a:spcBef>
-            </a:pPr>
-            <a:r>
-              <a:rPr sz="1300" b="0" i="0">
-                <a:solidFill>
-                  <a:srgbClr val="333333"/>
-                </a:solidFill>
-                <a:latin typeface="Calibri"/>
-              </a:rPr>
-              <a:t>Los dos hitos cuyo problema no está cerrado, con su ejemplo propio. Es lo que más pesa.</a:t>
-            </a:r>
-          </a:p>
-        </p:txBody>
-      </p:sp>
-      <p:sp>
-        <p:nvSpPr>
-          <p:cNvPr id="18" name="Rounded Rectangle 17"/>
-          <p:cNvSpPr/>
-          <p:nvPr/>
-        </p:nvSpPr>
-        <p:spPr>
-          <a:xfrm>
-            <a:off x="457200" y="5088636"/>
-            <a:ext cx="11277295" cy="1051560"/>
-          </a:xfrm>
-          <a:prstGeom prst="roundRect">
-            <a:avLst>
-              <a:gd name="adj" fmla="val 12000"/>
-            </a:avLst>
-          </a:prstGeom>
-          <a:solidFill>
-            <a:srgbClr val="E8F4FA"/>
-          </a:solidFill>
-          <a:ln>
-            <a:noFill/>
-          </a:ln>
-        </p:spPr>
-        <p:style>
-          <a:lnRef idx="1">
-            <a:schemeClr val="accent1"/>
-          </a:lnRef>
-          <a:fillRef idx="3">
-            <a:schemeClr val="accent1"/>
-          </a:fillRef>
-          <a:effectRef idx="2">
-            <a:schemeClr val="accent1"/>
-          </a:effectRef>
-          <a:fontRef idx="minor">
-            <a:schemeClr val="lt1"/>
-          </a:fontRef>
-        </p:style>
-        <p:txBody>
-          <a:bodyPr rtlCol="0" anchor="ctr"/>
-          <a:lstStyle/>
-          <a:p>
-            <a:pPr algn="ctr"/>
-          </a:p>
-        </p:txBody>
-      </p:sp>
-      <p:sp>
-        <p:nvSpPr>
-          <p:cNvPr id="19" name="Rounded Rectangle 18"/>
-          <p:cNvSpPr/>
-          <p:nvPr/>
-        </p:nvSpPr>
-        <p:spPr>
-          <a:xfrm>
-            <a:off x="594360" y="5394960"/>
-            <a:ext cx="438912" cy="438912"/>
-          </a:xfrm>
-          <a:prstGeom prst="roundRect">
-            <a:avLst>
-              <a:gd name="adj" fmla="val 12000"/>
-            </a:avLst>
-          </a:prstGeom>
-          <a:solidFill>
-            <a:srgbClr val="095292"/>
-          </a:solidFill>
-          <a:ln>
-            <a:noFill/>
-          </a:ln>
-        </p:spPr>
-        <p:style>
-          <a:lnRef idx="1">
-            <a:schemeClr val="accent1"/>
-          </a:lnRef>
-          <a:fillRef idx="3">
-            <a:schemeClr val="accent1"/>
-          </a:fillRef>
-          <a:effectRef idx="2">
-            <a:schemeClr val="accent1"/>
-          </a:effectRef>
-          <a:fontRef idx="minor">
-            <a:schemeClr val="lt1"/>
-          </a:fontRef>
-        </p:style>
-        <p:txBody>
-          <a:bodyPr rtlCol="0" anchor="ctr"/>
-          <a:lstStyle/>
-          <a:p>
-            <a:pPr algn="ctr"/>
-          </a:p>
-        </p:txBody>
-      </p:sp>
-      <p:sp>
-        <p:nvSpPr>
-          <p:cNvPr id="20" name="TextBox 19"/>
-          <p:cNvSpPr txBox="1"/>
-          <p:nvPr/>
-        </p:nvSpPr>
-        <p:spPr>
-          <a:xfrm>
-            <a:off x="594360" y="5394960"/>
-            <a:ext cx="438912" cy="438912"/>
-          </a:xfrm>
-          <a:prstGeom prst="rect">
-            <a:avLst/>
-          </a:prstGeom>
-          <a:noFill/>
-        </p:spPr>
-        <p:txBody>
-          <a:bodyPr wrap="square" anchor="ctr"/>
-          <a:lstStyle/>
-          <a:p>
-            <a:pPr algn="ctr"/>
-            <a:r>
-              <a:rPr sz="1600" b="1" i="0">
-                <a:solidFill>
-                  <a:srgbClr val="FFFFFF"/>
-                </a:solidFill>
-                <a:latin typeface="Calibri"/>
-              </a:rPr>
-              <a:t>4</a:t>
-            </a:r>
-          </a:p>
-        </p:txBody>
-      </p:sp>
-      <p:sp>
-        <p:nvSpPr>
-          <p:cNvPr id="21" name="TextBox 20"/>
-          <p:cNvSpPr txBox="1"/>
-          <p:nvPr/>
-        </p:nvSpPr>
-        <p:spPr>
-          <a:xfrm>
-            <a:off x="1188720" y="5180076"/>
-            <a:ext cx="10271455" cy="886968"/>
-          </a:xfrm>
-          <a:prstGeom prst="rect">
-            <a:avLst/>
-          </a:prstGeom>
-          <a:noFill/>
-        </p:spPr>
-        <p:txBody>
-          <a:bodyPr wrap="square" anchor="ctr"/>
-          <a:lstStyle/>
-          <a:p>
-            <a:r>
-              <a:rPr sz="1500" b="1" i="0">
-                <a:solidFill>
-                  <a:srgbClr val="095292"/>
-                </a:solidFill>
-                <a:latin typeface="Calibri"/>
-              </a:rPr>
-              <a:t>15 s · Las fuentes</a:t>
-            </a:r>
-          </a:p>
-          <a:p>
-            <a:pPr>
-              <a:spcBef>
-                <a:spcPts val="200"/>
-              </a:spcBef>
-            </a:pPr>
-            <a:r>
-              <a:rPr sz="1300" b="0" i="0">
-                <a:solidFill>
-                  <a:srgbClr val="333333"/>
-                </a:solidFill>
-                <a:latin typeface="Calibri"/>
-              </a:rPr>
-              <a:t>De dónde salió lo que dijeron.</a:t>
-            </a:r>
-          </a:p>
-        </p:txBody>
-      </p:sp>
-      <p:sp>
-        <p:nvSpPr>
-          <p:cNvPr id="22" name="TextBox 21"/>
-          <p:cNvSpPr txBox="1"/>
-          <p:nvPr/>
-        </p:nvSpPr>
-        <p:spPr>
-          <a:xfrm>
-            <a:off x="11185855" y="6473952"/>
-            <a:ext cx="640080" cy="274320"/>
-          </a:xfrm>
-          <a:prstGeom prst="rect">
-            <a:avLst/>
-          </a:prstGeom>
-          <a:noFill/>
-        </p:spPr>
-        <p:txBody>
-          <a:bodyPr wrap="square">
-            <a:spAutoFit/>
-          </a:bodyPr>
-          <a:lstStyle/>
-          <a:p>
-            <a:pPr algn="r"/>
-            <a:r>
-              <a:rPr sz="1100" b="0" i="0">
-                <a:solidFill>
-                  <a:srgbClr val="666666"/>
-                </a:solidFill>
-                <a:latin typeface="Calibri"/>
-              </a:rPr>
-              <a:t>14</a:t>
-            </a:r>
-          </a:p>
-        </p:txBody>
-      </p:sp>
-    </p:spTree>
-  </p:cSld>
-  <p:clrMapOvr>
-    <a:masterClrMapping/>
-  </p:clrMapOvr>
-</p:sld>
-</file>
-
-<file path=ppt/slides/slide15.xml><?xml version="1.0" encoding="utf-8"?>
-<p:sld xmlns:a="http://schemas.openxmlformats.org/drawingml/2006/main" xmlns:p="http://schemas.openxmlformats.org/presentationml/2006/main" xmlns:r="http://schemas.openxmlformats.org/officeDocument/2006/relationships">
-  <p:cSld>
-    <p:bg>
-      <p:bgPr>
-        <a:solidFill>
-          <a:srgbClr val="FFFFFF"/>
-        </a:solidFill>
-        <a:effectLst/>
-      </p:bgPr>
-    </p:bg>
-    <p:spTree>
-      <p:nvGrpSpPr>
-        <p:cNvPr id="1" name=""/>
-        <p:cNvGrpSpPr/>
-        <p:nvPr/>
-      </p:nvGrpSpPr>
-      <p:grpSpPr/>
-      <p:sp>
-        <p:nvSpPr>
-          <p:cNvPr id="2" name="Rectangle 1"/>
-          <p:cNvSpPr/>
-          <p:nvPr/>
-        </p:nvSpPr>
-        <p:spPr>
-          <a:xfrm>
-            <a:off x="0" y="0"/>
-            <a:ext cx="12191695" cy="960120"/>
-          </a:xfrm>
-          <a:prstGeom prst="rect">
-            <a:avLst/>
-          </a:prstGeom>
-          <a:solidFill>
-            <a:srgbClr val="095292"/>
-          </a:solidFill>
-          <a:ln>
-            <a:noFill/>
-          </a:ln>
-        </p:spPr>
-        <p:style>
-          <a:lnRef idx="1">
-            <a:schemeClr val="accent1"/>
-          </a:lnRef>
-          <a:fillRef idx="3">
-            <a:schemeClr val="accent1"/>
-          </a:fillRef>
-          <a:effectRef idx="2">
-            <a:schemeClr val="accent1"/>
-          </a:effectRef>
-          <a:fontRef idx="minor">
-            <a:schemeClr val="lt1"/>
-          </a:fontRef>
-        </p:style>
-        <p:txBody>
-          <a:bodyPr rtlCol="0" anchor="ctr"/>
-          <a:lstStyle/>
-          <a:p>
-            <a:pPr algn="ctr"/>
-          </a:p>
-        </p:txBody>
-      </p:sp>
-      <p:sp>
-        <p:nvSpPr>
-          <p:cNvPr id="3" name="Rectangle 2"/>
-          <p:cNvSpPr/>
-          <p:nvPr/>
-        </p:nvSpPr>
-        <p:spPr>
-          <a:xfrm>
-            <a:off x="0" y="960120"/>
-            <a:ext cx="12191695" cy="41148"/>
-          </a:xfrm>
-          <a:prstGeom prst="rect">
-            <a:avLst/>
-          </a:prstGeom>
-          <a:solidFill>
-            <a:srgbClr val="FFD000"/>
-          </a:solidFill>
-          <a:ln>
-            <a:noFill/>
-          </a:ln>
-        </p:spPr>
-        <p:style>
-          <a:lnRef idx="1">
-            <a:schemeClr val="accent1"/>
-          </a:lnRef>
-          <a:fillRef idx="3">
-            <a:schemeClr val="accent1"/>
-          </a:fillRef>
-          <a:effectRef idx="2">
-            <a:schemeClr val="accent1"/>
-          </a:effectRef>
-          <a:fontRef idx="minor">
-            <a:schemeClr val="lt1"/>
-          </a:fontRef>
-        </p:style>
-        <p:txBody>
-          <a:bodyPr rtlCol="0" anchor="ctr"/>
-          <a:lstStyle/>
-          <a:p>
-            <a:pPr algn="ctr"/>
-          </a:p>
-        </p:txBody>
-      </p:sp>
-      <p:sp>
-        <p:nvSpPr>
-          <p:cNvPr id="4" name="TextBox 3"/>
-          <p:cNvSpPr txBox="1"/>
-          <p:nvPr/>
-        </p:nvSpPr>
-        <p:spPr>
-          <a:xfrm>
-            <a:off x="457200" y="164592"/>
-            <a:ext cx="11277295" cy="502920"/>
-          </a:xfrm>
-          <a:prstGeom prst="rect">
-            <a:avLst/>
-          </a:prstGeom>
-          <a:noFill/>
-        </p:spPr>
-        <p:txBody>
-          <a:bodyPr wrap="square">
-            <a:spAutoFit/>
-          </a:bodyPr>
-          <a:lstStyle/>
-          <a:p>
-            <a:r>
-              <a:rPr sz="2600" b="1" i="0">
-                <a:solidFill>
-                  <a:srgbClr val="FFFFFF"/>
-                </a:solidFill>
-                <a:latin typeface="Calibri"/>
-              </a:rPr>
-              <a:t>Para la Clase 3</a:t>
-            </a:r>
-          </a:p>
-        </p:txBody>
-      </p:sp>
-      <p:sp>
-        <p:nvSpPr>
-          <p:cNvPr id="5" name="TextBox 4"/>
-          <p:cNvSpPr txBox="1"/>
-          <p:nvPr/>
-        </p:nvSpPr>
-        <p:spPr>
-          <a:xfrm>
-            <a:off x="457200" y="1170432"/>
-            <a:ext cx="11277295" cy="5230368"/>
-          </a:xfrm>
-          <a:prstGeom prst="rect">
-            <a:avLst/>
-          </a:prstGeom>
-          <a:noFill/>
-        </p:spPr>
-        <p:txBody>
-          <a:bodyPr wrap="square">
-            <a:spAutoFit/>
-          </a:bodyPr>
-          <a:lstStyle/>
-          <a:p>
-            <a:pPr>
-              <a:spcAft>
-                <a:spcPts val="800"/>
-              </a:spcAft>
-            </a:pPr>
-            <a:r>
-              <a:rPr sz="2000" b="0" i="0">
-                <a:solidFill>
-                  <a:srgbClr val="333333"/>
-                </a:solidFill>
-                <a:latin typeface="Calibri"/>
-              </a:rPr>
-              <a:t>–   </a:t>
-            </a:r>
-            <a:r>
-              <a:rPr sz="2000" b="1" i="0">
-                <a:solidFill>
-                  <a:srgbClr val="333333"/>
-                </a:solidFill>
-                <a:latin typeface="Calibri"/>
-              </a:rPr>
-              <a:t>Trabajo dirigido:</a:t>
-            </a:r>
-            <a:r>
-              <a:rPr sz="2000" b="0" i="0">
-                <a:solidFill>
-                  <a:srgbClr val="333333"/>
-                </a:solidFill>
-                <a:latin typeface="Calibri"/>
-              </a:rPr>
-              <a:t> Investigación sobre hitos históricos — cada equipo completa la línea de tiempo del curso juntando los cinco tramos expuestos hoy, en la carpeta del equipo.</a:t>
-            </a:r>
-          </a:p>
-          <a:p>
-            <a:pPr>
-              <a:spcAft>
-                <a:spcPts val="800"/>
-              </a:spcAft>
-            </a:pPr>
-            <a:r>
-              <a:rPr sz="2000" b="0" i="0">
-                <a:solidFill>
-                  <a:srgbClr val="333333"/>
-                </a:solidFill>
-                <a:latin typeface="Calibri"/>
-              </a:rPr>
-              <a:t>–   </a:t>
-            </a:r>
-            <a:r>
-              <a:rPr sz="2000" b="1" i="0">
-                <a:solidFill>
-                  <a:srgbClr val="333333"/>
-                </a:solidFill>
-                <a:latin typeface="Calibri"/>
-              </a:rPr>
-              <a:t>Trabajo independiente:</a:t>
-            </a:r>
-            <a:r>
-              <a:rPr sz="2000" b="0" i="0">
-                <a:solidFill>
-                  <a:srgbClr val="333333"/>
-                </a:solidFill>
-                <a:latin typeface="Calibri"/>
-              </a:rPr>
-              <a:t> Elaboración de línea de tiempo: la versión completa (los cinco periodos), con al menos un «qué sigue vivo hoy» por periodo.</a:t>
-            </a:r>
-          </a:p>
-          <a:p>
-            <a:pPr>
-              <a:spcAft>
-                <a:spcPts val="800"/>
-              </a:spcAft>
-            </a:pPr>
-            <a:r>
-              <a:rPr sz="2000" b="0" i="0">
-                <a:solidFill>
-                  <a:srgbClr val="333333"/>
-                </a:solidFill>
-                <a:latin typeface="Calibri"/>
-              </a:rPr>
-              <a:t>–   </a:t>
-            </a:r>
-            <a:r>
-              <a:rPr sz="2000" b="1" i="0">
-                <a:solidFill>
-                  <a:srgbClr val="333333"/>
-                </a:solidFill>
-                <a:latin typeface="Calibri"/>
-              </a:rPr>
-              <a:t>Clase 3 · Fundamentos básicos de la Ingeniería de Sistemas</a:t>
-            </a:r>
-            <a:r>
-              <a:rPr sz="2000" b="0" i="0">
-                <a:solidFill>
-                  <a:srgbClr val="333333"/>
-                </a:solidFill>
-                <a:latin typeface="Calibri"/>
-              </a:rPr>
-              <a:t> — qué es un sistema y por qué el software es solo una parte de él. Se trabaja con un asistente de IA, y hay que declarar el prompt usado.</a:t>
-            </a:r>
-          </a:p>
-          <a:p>
-            <a:pPr>
-              <a:spcAft>
-                <a:spcPts val="800"/>
-              </a:spcAft>
-            </a:pPr>
-            <a:r>
-              <a:rPr sz="2000" b="0" i="0">
-                <a:solidFill>
-                  <a:srgbClr val="333333"/>
-                </a:solidFill>
-                <a:latin typeface="Calibri"/>
-              </a:rPr>
-              <a:t>–   </a:t>
-            </a:r>
-            <a:r>
-              <a:rPr sz="2000" b="1" i="0">
-                <a:solidFill>
-                  <a:srgbClr val="333333"/>
-                </a:solidFill>
-                <a:latin typeface="Calibri"/>
-              </a:rPr>
-              <a:t>Aviso:</a:t>
-            </a:r>
-            <a:r>
-              <a:rPr sz="2000" b="0" i="0">
-                <a:solidFill>
-                  <a:srgbClr val="333333"/>
-                </a:solidFill>
-                <a:latin typeface="Calibri"/>
-              </a:rPr>
-              <a:t> Traigan la línea de tiempo completa en la carpeta del equipo. En la sesión 3 se descompone un sistema del entorno y la línea de tiempo es el punto de partida.</a:t>
-            </a:r>
-          </a:p>
-          <a:p>
-            <a:pPr>
-              <a:spcAft>
-                <a:spcPts val="800"/>
-              </a:spcAft>
-            </a:pPr>
-            <a:r>
-              <a:rPr sz="2000" b="0" i="0">
-                <a:solidFill>
-                  <a:srgbClr val="333333"/>
-                </a:solidFill>
-                <a:latin typeface="Calibri"/>
-              </a:rPr>
-              <a:t>–   </a:t>
-            </a:r>
-            <a:r>
-              <a:rPr sz="2000" b="1" i="0">
-                <a:solidFill>
-                  <a:srgbClr val="333333"/>
-                </a:solidFill>
-                <a:latin typeface="Calibri"/>
-              </a:rPr>
-              <a:t>Antes de salir:</a:t>
-            </a:r>
-            <a:r>
-              <a:rPr sz="2000" b="0" i="0">
-                <a:solidFill>
-                  <a:srgbClr val="333333"/>
-                </a:solidFill>
-                <a:latin typeface="Calibri"/>
-              </a:rPr>
-              <a:t> el enlace del documento del equipo en el chat, con permiso de lectura para el docente, y el nombre del vocero de hoy.</a:t>
-            </a:r>
-          </a:p>
-        </p:txBody>
-      </p:sp>
-      <p:sp>
-        <p:nvSpPr>
-          <p:cNvPr id="6" name="TextBox 5"/>
-          <p:cNvSpPr txBox="1"/>
-          <p:nvPr/>
-        </p:nvSpPr>
-        <p:spPr>
-          <a:xfrm>
-            <a:off x="11185855" y="6473952"/>
-            <a:ext cx="640080" cy="274320"/>
-          </a:xfrm>
-          <a:prstGeom prst="rect">
-            <a:avLst/>
-          </a:prstGeom>
-          <a:noFill/>
-        </p:spPr>
-        <p:txBody>
-          <a:bodyPr wrap="square">
-            <a:spAutoFit/>
-          </a:bodyPr>
-          <a:lstStyle/>
-          <a:p>
-            <a:pPr algn="r"/>
-            <a:r>
-              <a:rPr sz="1100" b="0" i="0">
-                <a:solidFill>
-                  <a:srgbClr val="666666"/>
-                </a:solidFill>
-                <a:latin typeface="Calibri"/>
-              </a:rPr>
-              <a:t>15</a:t>
-            </a:r>
-          </a:p>
-        </p:txBody>
-      </p:sp>
-    </p:spTree>
-  </p:cSld>
-  <p:clrMapOvr>
-    <a:masterClrMapping/>
-  </p:clrMapOvr>
-</p:sld>
-</file>
-
-<file path=ppt/slides/slide16.xml><?xml version="1.0" encoding="utf-8"?>
-<p:sld xmlns:a="http://schemas.openxmlformats.org/drawingml/2006/main" xmlns:p="http://schemas.openxmlformats.org/presentationml/2006/main" xmlns:r="http://schemas.openxmlformats.org/officeDocument/2006/relationships">
-  <p:cSld>
-    <p:bg>
-      <p:bgPr>
-        <a:solidFill>
-          <a:srgbClr val="FFFFFF"/>
-        </a:solidFill>
-        <a:effectLst/>
-      </p:bgPr>
-    </p:bg>
-    <p:spTree>
-      <p:nvGrpSpPr>
-        <p:cNvPr id="1" name=""/>
-        <p:cNvGrpSpPr/>
-        <p:nvPr/>
-      </p:nvGrpSpPr>
-      <p:grpSpPr/>
-      <p:sp>
-        <p:nvSpPr>
-          <p:cNvPr id="2" name="Rectangle 1"/>
-          <p:cNvSpPr/>
-          <p:nvPr/>
-        </p:nvSpPr>
-        <p:spPr>
-          <a:xfrm>
-            <a:off x="0" y="0"/>
             <a:ext cx="12191695" cy="164592"/>
           </a:xfrm>
           <a:prstGeom prst="rect">
@@ -10343,7 +7788,7 @@
                 </a:solidFill>
                 <a:latin typeface="Calibri"/>
               </a:rPr>
-              <a:t>Taller — línea de tiempo del periodo en draw.io</a:t>
+              <a:t>Práctica en equipos (opcional · la guía está en la carpeta de la clase)</a:t>
             </a:r>
           </a:p>
         </p:txBody>
@@ -10458,7 +7903,7 @@
                 </a:solidFill>
                 <a:latin typeface="Calibri"/>
               </a:rPr>
-              <a:t>5 equipos × 3 min — la línea de tiempo, en orden histórico</a:t>
+              <a:t>Socialización de la práctica, si se hizo</a:t>
             </a:r>
           </a:p>
         </p:txBody>

--- a/Introduccion a la Ingenieria/Clases/Clase 2 - Historia y evolucion de la Ingenieria/Presentacion.pptx
+++ b/Introduccion a la Ingenieria/Clases/Clase 2 - Historia y evolucion de la Ingenieria/Presentacion.pptx
@@ -584,7 +584,67 @@
           <a:lstStyle/>
           <a:p>
             <a:r>
-              <a:t>Haga la cuenta en voz alta con el grupo antes de mostrar los números: pregunte cuántas parejas hay con 5 personas y deje que la calculen. Es aritmética de bachillerato y es lo que hace que la idea se quede.</a:t>
+              <a:t>TEXTO COMPLETO DE LA LÁMINA (se proyecta resumido):</a:t>
+            </a:r>
+          </a:p>
+          <a:p/>
+          <a:p>
+            <a:r>
+              <a:t>Años 40 y 50: el cuello de botella es el hardware. Programar es escribir instrucciones para una máquina concreta, y el trabajo es de una persona o de unas pocas.</a:t>
+            </a:r>
+          </a:p>
+          <a:p/>
+          <a:p>
+            <a:r>
+              <a:t>Años 60: el hardware se abarata y crece, y aparecen sistemas que necesitan cientos de personas y años de trabajo. Ahí el cuello de botella se muda: ya no es la máquina, es coordinar el trabajo humano.</a:t>
+            </a:r>
+          </a:p>
+          <a:p/>
+          <a:p>
+            <a:r>
+              <a:t>El sistema de reservas SABRE, el software del programa Apollo y el sistema operativo OS/360 de IBM son los tres casos que hicieron visible el problema: se pasaron de plazo y de presupuesto de forma escandalosa.</a:t>
+            </a:r>
+          </a:p>
+          <a:p/>
+          <a:p>
+            <a:r>
+              <a:t>1968: la OTAN convoca una conferencia en Garmisch (Alemania) para hablar de eso y se acuña el término «ingeniería de software». El nombre es una propuesta: si construir software se parece a construir un puente, entonces necesita método, no talento individual.</a:t>
+            </a:r>
+          </a:p>
+          <a:p/>
+          <a:p>
+            <a:r>
+              <a:t>Ahí nace la disciplina: no de un invento, sino del reconocimiento público de que el trabajo se estaba haciendo mal y nadie sabía cómo hacerlo bien.</a:t>
+            </a:r>
+          </a:p>
+          <a:p/>
+          <a:p>
+            <a:r>
+              <a:t>POR QUÉ LA DISCIPLINA NACE DE UN FRACASO Y NO DE UN INVENTO</a:t>
+            </a:r>
+          </a:p>
+          <a:p/>
+          <a:p>
+            <a:r>
+              <a:t>Hay una diferencia grande entre contar la historia de la informática y contar la historia de la ingeniería de sistemas. La primera es una historia de máquinas: válvulas, transistores, circuitos integrados, microprocesadores. Es la que el estudiante espera y es la menos útil, porque sugiere que el progreso viene del hardware. La segunda es una historia de fracasos de organización, y es la que explica por qué existe la carrera que el estudiante está empezando.</a:t>
+            </a:r>
+          </a:p>
+          <a:p/>
+          <a:p>
+            <a:r>
+              <a:t>En los años cuarenta y cincuenta el cuello de botella era la máquina. Programar el ENIAC significaba reconfigurar cables físicamente; escribir en lenguaje de máquina era lento porque la máquina era lo escaso y lo caro. Fortran (1957) y COBOL (1959) atacan exactamente ese problema: permitir decirle algo a la máquina sin hablar su idioma. Hasta aquí el trabajo lo hace una persona o un puñado de personas, y el método no importa mucho porque el problema cabe en una cabeza.</a:t>
+            </a:r>
+          </a:p>
+          <a:p/>
+          <a:p>
+            <a:r>
+              <a:t>En los años sesenta pasa algo que cambia la naturaleza del problema: el hardware se abarata y se vuelve más capaz, y entonces se vuelven pensables sistemas que antes no lo eran. El sistema de reservas aéreas SABRE, el software de navegación del programa Apollo, el sistema operativo OS/360 de IBM. Son proyectos de cientos y hasta miles de personas y de varios años. Y fracasan de forma espectacular en plazo y en costo, no porque las máquinas fueran lentas, sino porque nadie sabía cómo coordinar a mil personas construyendo una sola cosa que nadie puede ver ni tocar. Fred Brooks, que dirigió el OS/360, escribió después el libro que explica por qué.</a:t>
+            </a:r>
+          </a:p>
+          <a:p/>
+          <a:p>
+            <a:r>
+              <a:t>En 1968 la OTAN convoca una conferencia en Garmisch para hablar del asunto, y ahí se populariza el término «ingeniería de software». Vale la pena detenerse en que el término era una propuesta, casi una provocación: si construir software se parece a construir un puente, entonces debería tener método, estándares, mediciones y responsabilidad profesional, en vez de depender del talento de individuos. Ese es el momento fundacional que el estudiante tiene que recordar: la disciplina no nace de una máquina nueva, nace del reconocimiento público de que se estaba trabajando mal.</a:t>
             </a:r>
           </a:p>
         </p:txBody>
@@ -654,7 +714,7 @@
           <a:lstStyle/>
           <a:p>
             <a:r>
-              <a:t>Insista en que la cuarta pregunta es la que se califica: «Brooks dijo que agregar gente atrasa» está bien pero no muestra que lo entendieron. La cuarta obliga a conectarlo con algo que les pasó a ellos.</a:t>
+              <a:t>Haga la cuenta en voz alta con el grupo antes de mostrar los números: pregunte cuántas parejas hay con 5 personas y deje que la calculen. Es aritmética de bachillerato y es lo que hace que la idea se quede.</a:t>
             </a:r>
           </a:p>
         </p:txBody>
@@ -724,19 +784,7 @@
           <a:lstStyle/>
           <a:p>
             <a:r>
-              <a:t>LA PREGUNTA DE ENTRADA Y PARA QUÉ SIRVE INCOMODAR CON UNA FECHA</a:t>
-            </a:r>
-          </a:p>
-          <a:p/>
-          <a:p>
-            <a:r>
-              <a:t>La pregunta de apertura —«un proyecto de software se pasa del plazo y del presupuesto, ¿es un problema de 2026 o de 1968?»— está formulada para producir una respuesta equivocada. Casi todo el grupo va a decir que es de 2026, porque la intuición de un estudiante de primer semestre es que la historia de la tecnología es una escalera: cada década resuelve los problemas de la anterior. Esa intuición es la que hay que romper hoy, porque de ella se deriva una creencia más dañina: que basta con aprender la herramienta nueva.</a:t>
-            </a:r>
-          </a:p>
-          <a:p/>
-          <a:p>
-            <a:r>
-              <a:t>Los primeros diez minutos, mientras se conectan, sirven para recoger esas respuestas en el muro. No hay que corregir ninguna. En el minuto 25, cuando ya esté contada la conferencia de Garmisch de 1968, se vuelve al muro y se lee en voz alta lo que escribieron. El contraste hace el trabajo solo: el problema que el grupo cree contemporáneo tiene casi sesenta años y un nombre propio.</a:t>
+              <a:t>Insista en que la cuarta pregunta es la que se califica: «Brooks dijo que agregar gente atrasa» está bien pero no muestra que lo entendieron. La cuarta obliga a conectarlo con algo que les pasó a ellos.</a:t>
             </a:r>
           </a:p>
         </p:txBody>
@@ -806,31 +854,19 @@
           <a:lstStyle/>
           <a:p>
             <a:r>
-              <a:t>POR QUÉ LA DISCIPLINA NACE DE UN FRACASO Y NO DE UN INVENTO</a:t>
+              <a:t>LA PREGUNTA DE ENTRADA Y PARA QUÉ SIRVE INCOMODAR CON UNA FECHA</a:t>
             </a:r>
           </a:p>
           <a:p/>
           <a:p>
             <a:r>
-              <a:t>Hay una diferencia grande entre contar la historia de la informática y contar la historia de la ingeniería de sistemas. La primera es una historia de máquinas: válvulas, transistores, circuitos integrados, microprocesadores. Es la que el estudiante espera y es la menos útil, porque sugiere que el progreso viene del hardware. La segunda es una historia de fracasos de organización, y es la que explica por qué existe la carrera que el estudiante está empezando.</a:t>
+              <a:t>La pregunta de apertura —«un proyecto de software se pasa del plazo y del presupuesto, ¿es un problema de 2026 o de 1968?»— está formulada para producir una respuesta equivocada. Casi todo el grupo va a decir que es de 2026, porque la intuición de un estudiante de primer semestre es que la historia de la tecnología es una escalera: cada década resuelve los problemas de la anterior. Esa intuición es la que hay que romper hoy, porque de ella se deriva una creencia más dañina: que basta con aprender la herramienta nueva.</a:t>
             </a:r>
           </a:p>
           <a:p/>
           <a:p>
             <a:r>
-              <a:t>En los años cuarenta y cincuenta el cuello de botella era la máquina. Programar el ENIAC significaba reconfigurar cables físicamente; escribir en lenguaje de máquina era lento porque la máquina era lo escaso y lo caro. Fortran (1957) y COBOL (1959) atacan exactamente ese problema: permitir decirle algo a la máquina sin hablar su idioma. Hasta aquí el trabajo lo hace una persona o un puñado de personas, y el método no importa mucho porque el problema cabe en una cabeza.</a:t>
-            </a:r>
-          </a:p>
-          <a:p/>
-          <a:p>
-            <a:r>
-              <a:t>En los años sesenta pasa algo que cambia la naturaleza del problema: el hardware se abarata y se vuelve más capaz, y entonces se vuelven pensables sistemas que antes no lo eran. El sistema de reservas aéreas SABRE, el software de navegación del programa Apollo, el sistema operativo OS/360 de IBM. Son proyectos de cientos y hasta miles de personas y de varios años. Y fracasan de forma espectacular en plazo y en costo, no porque las máquinas fueran lentas, sino porque nadie sabía cómo coordinar a mil personas construyendo una sola cosa que nadie puede ver ni tocar. Fred Brooks, que dirigió el OS/360, escribió después el libro que explica por qué.</a:t>
-            </a:r>
-          </a:p>
-          <a:p/>
-          <a:p>
-            <a:r>
-              <a:t>En 1968 la OTAN convoca una conferencia en Garmisch para hablar del asunto, y ahí se populariza el término «ingeniería de software». Vale la pena detenerse en que el término era una propuesta, casi una provocación: si construir software se parece a construir un puente, entonces debería tener método, estándares, mediciones y responsabilidad profesional, en vez de depender del talento de individuos. Ese es el momento fundacional que el estudiante tiene que recordar: la disciplina no nace de una máquina nueva, nace del reconocimiento público de que se estaba trabajando mal.</a:t>
+              <a:t>Los primeros diez minutos, mientras se conectan, sirven para recoger esas respuestas en el muro. No hay que corregir ninguna. En el minuto 25, cuando ya esté contada la conferencia de Garmisch de 1968, se vuelve al muro y se lee en voz alta lo que escribieron. El contraste hace el trabajo solo: el problema que el grupo cree contemporáneo tiene casi sesenta años y un nombre propio.</a:t>
             </a:r>
           </a:p>
         </p:txBody>
@@ -4777,16 +4813,16 @@
         </p:nvSpPr>
         <p:spPr>
           <a:xfrm>
-            <a:off x="457200" y="1659636"/>
-            <a:ext cx="11277295" cy="1051560"/>
+            <a:off x="5934611" y="1399031"/>
+            <a:ext cx="5735574" cy="4617720"/>
           </a:xfrm>
           <a:prstGeom prst="roundRect">
             <a:avLst>
-              <a:gd name="adj" fmla="val 12000"/>
+              <a:gd name="adj" fmla="val 4000"/>
             </a:avLst>
           </a:prstGeom>
           <a:solidFill>
-            <a:srgbClr val="F2F2F2"/>
+            <a:srgbClr val="E8EEF4"/>
           </a:solidFill>
           <a:ln>
             <a:noFill/>
@@ -4814,61 +4850,147 @@
           </a:p>
         </p:txBody>
       </p:sp>
-      <p:sp>
-        <p:nvSpPr>
-          <p:cNvPr id="7" name="Rounded Rectangle 6"/>
-          <p:cNvSpPr/>
-          <p:nvPr/>
-        </p:nvSpPr>
-        <p:spPr>
-          <a:xfrm>
-            <a:off x="594360" y="1965960"/>
-            <a:ext cx="438912" cy="438912"/>
-          </a:xfrm>
-          <a:prstGeom prst="roundRect">
-            <a:avLst>
-              <a:gd name="adj" fmla="val 12000"/>
-            </a:avLst>
-          </a:prstGeom>
-          <a:solidFill>
-            <a:srgbClr val="095292"/>
-          </a:solidFill>
-          <a:ln>
-            <a:noFill/>
-          </a:ln>
-        </p:spPr>
-        <p:style>
-          <a:lnRef idx="1">
-            <a:schemeClr val="accent1"/>
-          </a:lnRef>
-          <a:fillRef idx="3">
-            <a:schemeClr val="accent1"/>
-          </a:fillRef>
-          <a:effectRef idx="2">
-            <a:schemeClr val="accent1"/>
-          </a:effectRef>
-          <a:fontRef idx="minor">
-            <a:schemeClr val="lt1"/>
-          </a:fontRef>
-        </p:style>
-        <p:txBody>
-          <a:bodyPr rtlCol="0" anchor="ctr"/>
+      <p:pic>
+        <p:nvPicPr>
+          <p:cNvPr id="7" name="Picture 6" descr="hito-cuatro-preguntas-paso1.png"/>
+          <p:cNvPicPr>
+            <a:picLocks noChangeAspect="1"/>
+          </p:cNvPicPr>
+          <p:nvPr/>
+        </p:nvPicPr>
+        <p:blipFill>
+          <a:blip r:embed="rId2"/>
+          <a:stretch>
+            <a:fillRect/>
+          </a:stretch>
+        </p:blipFill>
+        <p:spPr>
+          <a:xfrm>
+            <a:off x="6007763" y="1472184"/>
+            <a:ext cx="5589270" cy="4471416"/>
+          </a:xfrm>
+          <a:prstGeom prst="rect">
+            <a:avLst/>
+          </a:prstGeom>
+        </p:spPr>
+      </p:pic>
+      <p:pic>
+        <p:nvPicPr>
+          <p:cNvPr id="8" name="Picture 7" descr="hito-cuatro-preguntas-paso2.png"/>
+          <p:cNvPicPr>
+            <a:picLocks noChangeAspect="1"/>
+          </p:cNvPicPr>
+          <p:nvPr/>
+        </p:nvPicPr>
+        <p:blipFill>
+          <a:blip r:embed="rId3"/>
+          <a:stretch>
+            <a:fillRect/>
+          </a:stretch>
+        </p:blipFill>
+        <p:spPr>
+          <a:xfrm>
+            <a:off x="6007763" y="1472184"/>
+            <a:ext cx="5589270" cy="4471416"/>
+          </a:xfrm>
+          <a:prstGeom prst="rect">
+            <a:avLst/>
+          </a:prstGeom>
+        </p:spPr>
+      </p:pic>
+      <p:pic>
+        <p:nvPicPr>
+          <p:cNvPr id="9" name="Picture 8" descr="hito-cuatro-preguntas-paso3.png"/>
+          <p:cNvPicPr>
+            <a:picLocks noChangeAspect="1"/>
+          </p:cNvPicPr>
+          <p:nvPr/>
+        </p:nvPicPr>
+        <p:blipFill>
+          <a:blip r:embed="rId4"/>
+          <a:stretch>
+            <a:fillRect/>
+          </a:stretch>
+        </p:blipFill>
+        <p:spPr>
+          <a:xfrm>
+            <a:off x="6007763" y="1472184"/>
+            <a:ext cx="5589270" cy="4471416"/>
+          </a:xfrm>
+          <a:prstGeom prst="rect">
+            <a:avLst/>
+          </a:prstGeom>
+        </p:spPr>
+      </p:pic>
+      <p:pic>
+        <p:nvPicPr>
+          <p:cNvPr id="10" name="Picture 9" descr="hito-cuatro-preguntas-paso4.png"/>
+          <p:cNvPicPr>
+            <a:picLocks noChangeAspect="1"/>
+          </p:cNvPicPr>
+          <p:nvPr/>
+        </p:nvPicPr>
+        <p:blipFill>
+          <a:blip r:embed="rId5"/>
+          <a:stretch>
+            <a:fillRect/>
+          </a:stretch>
+        </p:blipFill>
+        <p:spPr>
+          <a:xfrm>
+            <a:off x="6007763" y="1472184"/>
+            <a:ext cx="5589270" cy="4471416"/>
+          </a:xfrm>
+          <a:prstGeom prst="rect">
+            <a:avLst/>
+          </a:prstGeom>
+        </p:spPr>
+      </p:pic>
+      <p:sp>
+        <p:nvSpPr>
+          <p:cNvPr id="18" name="TextBox 17"/>
+          <p:cNvSpPr txBox="1"/>
+          <p:nvPr/>
+        </p:nvSpPr>
+        <p:spPr>
+          <a:xfrm>
+            <a:off x="5870301" y="5961888"/>
+            <a:ext cx="5864193" cy="320040"/>
+          </a:xfrm>
+          <a:prstGeom prst="rect">
+            <a:avLst/>
+          </a:prstGeom>
+          <a:noFill/>
+        </p:spPr>
+        <p:txBody>
+          <a:bodyPr wrap="square">
+            <a:spAutoFit/>
+          </a:bodyPr>
           <a:lstStyle/>
           <a:p>
             <a:pPr algn="ctr"/>
-          </a:p>
-        </p:txBody>
-      </p:sp>
-      <p:sp>
-        <p:nvSpPr>
-          <p:cNvPr id="8" name="TextBox 7"/>
+            <a:r>
+              <a:rPr sz="1100" b="0" i="1">
+                <a:solidFill>
+                  <a:srgbClr val="666666"/>
+                </a:solidFill>
+                <a:latin typeface="Calibri"/>
+              </a:rPr>
+              <a:t>Clic para avanzar la animación</a:t>
+            </a:r>
+          </a:p>
+        </p:txBody>
+      </p:sp>
+      <p:sp>
+        <p:nvSpPr>
+          <p:cNvPr id="19" name="TextBox 18"/>
           <p:cNvSpPr txBox="1"/>
           <p:nvPr/>
         </p:nvSpPr>
         <p:spPr>
           <a:xfrm>
-            <a:off x="594360" y="1965960"/>
-            <a:ext cx="438912" cy="438912"/>
+            <a:off x="457200" y="1563624"/>
+            <a:ext cx="5093061" cy="4837176"/>
           </a:xfrm>
           <a:prstGeom prst="rect">
             <a:avLst/>
@@ -4876,586 +4998,151 @@
           <a:noFill/>
         </p:spPr>
         <p:txBody>
-          <a:bodyPr wrap="square" anchor="ctr"/>
-          <a:lstStyle/>
-          <a:p>
-            <a:pPr algn="ctr"/>
-            <a:r>
-              <a:rPr sz="1600" b="1" i="0">
-                <a:solidFill>
-                  <a:srgbClr val="FFFFFF"/>
-                </a:solidFill>
-                <a:latin typeface="Calibri"/>
-              </a:rPr>
-              <a:t>1</a:t>
-            </a:r>
-          </a:p>
-        </p:txBody>
-      </p:sp>
-      <p:sp>
-        <p:nvSpPr>
-          <p:cNvPr id="9" name="TextBox 8"/>
-          <p:cNvSpPr txBox="1"/>
-          <p:nvPr/>
-        </p:nvSpPr>
-        <p:spPr>
-          <a:xfrm>
-            <a:off x="1188720" y="1751076"/>
-            <a:ext cx="10271455" cy="886968"/>
-          </a:xfrm>
-          <a:prstGeom prst="rect">
-            <a:avLst/>
-          </a:prstGeom>
-          <a:noFill/>
-        </p:spPr>
-        <p:txBody>
-          <a:bodyPr wrap="square" anchor="ctr"/>
-          <a:lstStyle/>
-          <a:p>
-            <a:r>
-              <a:rPr sz="1500" b="1" i="0">
-                <a:solidFill>
-                  <a:srgbClr val="095292"/>
-                </a:solidFill>
-                <a:latin typeface="Calibri"/>
-              </a:rPr>
-              <a:t>¿Qué dolía antes?</a:t>
-            </a:r>
-          </a:p>
+          <a:bodyPr wrap="square">
+            <a:spAutoFit/>
+          </a:bodyPr>
+          <a:lstStyle/>
           <a:p>
             <a:pPr>
-              <a:spcBef>
-                <a:spcPts val="200"/>
-              </a:spcBef>
+              <a:spcAft>
+                <a:spcPts val="800"/>
+              </a:spcAft>
             </a:pPr>
             <a:r>
-              <a:rPr sz="1300" b="0" i="0">
+              <a:rPr sz="2000" b="0" i="0">
                 <a:solidFill>
                   <a:srgbClr val="333333"/>
                 </a:solidFill>
                 <a:latin typeface="Calibri"/>
               </a:rPr>
-              <a:t>El problema concreto que existía y a quién le pasaba. Sin esto, el hito es una fecha suelta.</a:t>
-            </a:r>
-          </a:p>
-        </p:txBody>
-      </p:sp>
-      <p:sp>
-        <p:nvSpPr>
-          <p:cNvPr id="10" name="Rounded Rectangle 9"/>
-          <p:cNvSpPr/>
-          <p:nvPr/>
-        </p:nvSpPr>
-        <p:spPr>
-          <a:xfrm>
-            <a:off x="457200" y="2802636"/>
-            <a:ext cx="11277295" cy="1051560"/>
-          </a:xfrm>
-          <a:prstGeom prst="roundRect">
-            <a:avLst>
-              <a:gd name="adj" fmla="val 12000"/>
-            </a:avLst>
-          </a:prstGeom>
-          <a:solidFill>
-            <a:srgbClr val="E8F4FA"/>
-          </a:solidFill>
-          <a:ln>
-            <a:noFill/>
-          </a:ln>
-        </p:spPr>
-        <p:style>
-          <a:lnRef idx="1">
-            <a:schemeClr val="accent1"/>
-          </a:lnRef>
-          <a:fillRef idx="3">
-            <a:schemeClr val="accent1"/>
-          </a:fillRef>
-          <a:effectRef idx="2">
-            <a:schemeClr val="accent1"/>
-          </a:effectRef>
-          <a:fontRef idx="minor">
-            <a:schemeClr val="lt1"/>
-          </a:fontRef>
-        </p:style>
-        <p:txBody>
-          <a:bodyPr rtlCol="0" anchor="ctr"/>
-          <a:lstStyle/>
-          <a:p>
-            <a:pPr algn="ctr"/>
-          </a:p>
-        </p:txBody>
-      </p:sp>
-      <p:sp>
-        <p:nvSpPr>
-          <p:cNvPr id="11" name="Rounded Rectangle 10"/>
-          <p:cNvSpPr/>
-          <p:nvPr/>
-        </p:nvSpPr>
-        <p:spPr>
-          <a:xfrm>
-            <a:off x="594360" y="3108960"/>
-            <a:ext cx="438912" cy="438912"/>
-          </a:xfrm>
-          <a:prstGeom prst="roundRect">
-            <a:avLst>
-              <a:gd name="adj" fmla="val 12000"/>
-            </a:avLst>
-          </a:prstGeom>
-          <a:solidFill>
-            <a:srgbClr val="095292"/>
-          </a:solidFill>
-          <a:ln>
-            <a:noFill/>
-          </a:ln>
-        </p:spPr>
-        <p:style>
-          <a:lnRef idx="1">
-            <a:schemeClr val="accent1"/>
-          </a:lnRef>
-          <a:fillRef idx="3">
-            <a:schemeClr val="accent1"/>
-          </a:fillRef>
-          <a:effectRef idx="2">
-            <a:schemeClr val="accent1"/>
-          </a:effectRef>
-          <a:fontRef idx="minor">
-            <a:schemeClr val="lt1"/>
-          </a:fontRef>
-        </p:style>
-        <p:txBody>
-          <a:bodyPr rtlCol="0" anchor="ctr"/>
-          <a:lstStyle/>
-          <a:p>
-            <a:pPr algn="ctr"/>
-          </a:p>
-        </p:txBody>
-      </p:sp>
-      <p:sp>
-        <p:nvSpPr>
-          <p:cNvPr id="12" name="TextBox 11"/>
-          <p:cNvSpPr txBox="1"/>
-          <p:nvPr/>
-        </p:nvSpPr>
-        <p:spPr>
-          <a:xfrm>
-            <a:off x="594360" y="3108960"/>
-            <a:ext cx="438912" cy="438912"/>
-          </a:xfrm>
-          <a:prstGeom prst="rect">
-            <a:avLst/>
-          </a:prstGeom>
-          <a:noFill/>
-        </p:spPr>
-        <p:txBody>
-          <a:bodyPr wrap="square" anchor="ctr"/>
-          <a:lstStyle/>
-          <a:p>
-            <a:pPr algn="ctr"/>
-            <a:r>
-              <a:rPr sz="1600" b="1" i="0">
-                <a:solidFill>
-                  <a:srgbClr val="FFFFFF"/>
-                </a:solidFill>
-                <a:latin typeface="Calibri"/>
-              </a:rPr>
-              <a:t>2</a:t>
-            </a:r>
-          </a:p>
-        </p:txBody>
-      </p:sp>
-      <p:sp>
-        <p:nvSpPr>
-          <p:cNvPr id="13" name="TextBox 12"/>
-          <p:cNvSpPr txBox="1"/>
-          <p:nvPr/>
-        </p:nvSpPr>
-        <p:spPr>
-          <a:xfrm>
-            <a:off x="1188720" y="2894076"/>
-            <a:ext cx="10271455" cy="886968"/>
-          </a:xfrm>
-          <a:prstGeom prst="rect">
-            <a:avLst/>
-          </a:prstGeom>
-          <a:noFill/>
-        </p:spPr>
-        <p:txBody>
-          <a:bodyPr wrap="square" anchor="ctr"/>
-          <a:lstStyle/>
-          <a:p>
-            <a:r>
-              <a:rPr sz="1500" b="1" i="0">
-                <a:solidFill>
-                  <a:srgbClr val="095292"/>
-                </a:solidFill>
-                <a:latin typeface="Calibri"/>
-              </a:rPr>
-              <a:t>¿Qué propuso?</a:t>
+              <a:t>–   </a:t>
+            </a:r>
+            <a:r>
+              <a:rPr sz="2000" b="1" i="0">
+                <a:solidFill>
+                  <a:srgbClr val="333333"/>
+                </a:solidFill>
+                <a:latin typeface="Calibri"/>
+              </a:rPr>
+              <a:t>¿Qué dolía antes?:</a:t>
+            </a:r>
+            <a:r>
+              <a:rPr sz="2000" b="0" i="0">
+                <a:solidFill>
+                  <a:srgbClr val="333333"/>
+                </a:solidFill>
+                <a:latin typeface="Calibri"/>
+              </a:rPr>
+              <a:t> El problema concreto que existía y a quién le pasaba. Sin esto, el hito es una fecha suelta.</a:t>
             </a:r>
           </a:p>
           <a:p>
             <a:pPr>
-              <a:spcBef>
-                <a:spcPts val="200"/>
-              </a:spcBef>
+              <a:spcAft>
+                <a:spcPts val="800"/>
+              </a:spcAft>
             </a:pPr>
             <a:r>
-              <a:rPr sz="1300" b="0" i="0">
+              <a:rPr sz="2000" b="0" i="0">
                 <a:solidFill>
                   <a:srgbClr val="333333"/>
                 </a:solidFill>
                 <a:latin typeface="Calibri"/>
               </a:rPr>
-              <a:t>La idea, el método o la herramienta. En una frase, sin nombres técnicos que no se puedan explicar.</a:t>
-            </a:r>
-          </a:p>
-        </p:txBody>
-      </p:sp>
-      <p:sp>
-        <p:nvSpPr>
-          <p:cNvPr id="14" name="Rounded Rectangle 13"/>
-          <p:cNvSpPr/>
-          <p:nvPr/>
-        </p:nvSpPr>
-        <p:spPr>
-          <a:xfrm>
-            <a:off x="457200" y="3945636"/>
-            <a:ext cx="11277295" cy="1051560"/>
-          </a:xfrm>
-          <a:prstGeom prst="roundRect">
-            <a:avLst>
-              <a:gd name="adj" fmla="val 12000"/>
-            </a:avLst>
-          </a:prstGeom>
-          <a:solidFill>
-            <a:srgbClr val="F2F2F2"/>
-          </a:solidFill>
-          <a:ln>
-            <a:noFill/>
-          </a:ln>
-        </p:spPr>
-        <p:style>
-          <a:lnRef idx="1">
-            <a:schemeClr val="accent1"/>
-          </a:lnRef>
-          <a:fillRef idx="3">
-            <a:schemeClr val="accent1"/>
-          </a:fillRef>
-          <a:effectRef idx="2">
-            <a:schemeClr val="accent1"/>
-          </a:effectRef>
-          <a:fontRef idx="minor">
-            <a:schemeClr val="lt1"/>
-          </a:fontRef>
-        </p:style>
-        <p:txBody>
-          <a:bodyPr rtlCol="0" anchor="ctr"/>
-          <a:lstStyle/>
-          <a:p>
-            <a:pPr algn="ctr"/>
-          </a:p>
-        </p:txBody>
-      </p:sp>
-      <p:sp>
-        <p:nvSpPr>
-          <p:cNvPr id="15" name="Rounded Rectangle 14"/>
-          <p:cNvSpPr/>
-          <p:nvPr/>
-        </p:nvSpPr>
-        <p:spPr>
-          <a:xfrm>
-            <a:off x="594360" y="4251960"/>
-            <a:ext cx="438912" cy="438912"/>
-          </a:xfrm>
-          <a:prstGeom prst="roundRect">
-            <a:avLst>
-              <a:gd name="adj" fmla="val 12000"/>
-            </a:avLst>
-          </a:prstGeom>
-          <a:solidFill>
-            <a:srgbClr val="095292"/>
-          </a:solidFill>
-          <a:ln>
-            <a:noFill/>
-          </a:ln>
-        </p:spPr>
-        <p:style>
-          <a:lnRef idx="1">
-            <a:schemeClr val="accent1"/>
-          </a:lnRef>
-          <a:fillRef idx="3">
-            <a:schemeClr val="accent1"/>
-          </a:fillRef>
-          <a:effectRef idx="2">
-            <a:schemeClr val="accent1"/>
-          </a:effectRef>
-          <a:fontRef idx="minor">
-            <a:schemeClr val="lt1"/>
-          </a:fontRef>
-        </p:style>
-        <p:txBody>
-          <a:bodyPr rtlCol="0" anchor="ctr"/>
-          <a:lstStyle/>
-          <a:p>
-            <a:pPr algn="ctr"/>
-          </a:p>
-        </p:txBody>
-      </p:sp>
-      <p:sp>
-        <p:nvSpPr>
-          <p:cNvPr id="16" name="TextBox 15"/>
-          <p:cNvSpPr txBox="1"/>
-          <p:nvPr/>
-        </p:nvSpPr>
-        <p:spPr>
-          <a:xfrm>
-            <a:off x="594360" y="4251960"/>
-            <a:ext cx="438912" cy="438912"/>
-          </a:xfrm>
-          <a:prstGeom prst="rect">
-            <a:avLst/>
-          </a:prstGeom>
-          <a:noFill/>
-        </p:spPr>
-        <p:txBody>
-          <a:bodyPr wrap="square" anchor="ctr"/>
-          <a:lstStyle/>
-          <a:p>
-            <a:pPr algn="ctr"/>
-            <a:r>
-              <a:rPr sz="1600" b="1" i="0">
-                <a:solidFill>
-                  <a:srgbClr val="FFFFFF"/>
-                </a:solidFill>
-                <a:latin typeface="Calibri"/>
-              </a:rPr>
-              <a:t>3</a:t>
-            </a:r>
-          </a:p>
-        </p:txBody>
-      </p:sp>
-      <p:sp>
-        <p:nvSpPr>
-          <p:cNvPr id="17" name="TextBox 16"/>
-          <p:cNvSpPr txBox="1"/>
-          <p:nvPr/>
-        </p:nvSpPr>
-        <p:spPr>
-          <a:xfrm>
-            <a:off x="1188720" y="4037076"/>
-            <a:ext cx="10271455" cy="886968"/>
-          </a:xfrm>
-          <a:prstGeom prst="rect">
-            <a:avLst/>
-          </a:prstGeom>
-          <a:noFill/>
-        </p:spPr>
-        <p:txBody>
-          <a:bodyPr wrap="square" anchor="ctr"/>
-          <a:lstStyle/>
-          <a:p>
-            <a:r>
-              <a:rPr sz="1500" b="1" i="0">
-                <a:solidFill>
-                  <a:srgbClr val="095292"/>
-                </a:solidFill>
-                <a:latin typeface="Calibri"/>
-              </a:rPr>
-              <a:t>¿Qué resolvió de verdad?</a:t>
+              <a:t>–   </a:t>
+            </a:r>
+            <a:r>
+              <a:rPr sz="2000" b="1" i="0">
+                <a:solidFill>
+                  <a:srgbClr val="333333"/>
+                </a:solidFill>
+                <a:latin typeface="Calibri"/>
+              </a:rPr>
+              <a:t>¿Qué propuso?:</a:t>
+            </a:r>
+            <a:r>
+              <a:rPr sz="2000" b="0" i="0">
+                <a:solidFill>
+                  <a:srgbClr val="333333"/>
+                </a:solidFill>
+                <a:latin typeface="Calibri"/>
+              </a:rPr>
+              <a:t> La idea, el método o la herramienta. En una frase, sin nombres técnicos que no se puedan explicar.</a:t>
             </a:r>
           </a:p>
           <a:p>
             <a:pPr>
-              <a:spcBef>
-                <a:spcPts val="200"/>
-              </a:spcBef>
+              <a:spcAft>
+                <a:spcPts val="800"/>
+              </a:spcAft>
             </a:pPr>
             <a:r>
-              <a:rPr sz="1300" b="0" i="0">
+              <a:rPr sz="2000" b="0" i="0">
                 <a:solidFill>
                   <a:srgbClr val="333333"/>
                 </a:solidFill>
                 <a:latin typeface="Calibri"/>
               </a:rPr>
-              <a:t>Casi nunca resuelve todo. Diga qué parte sí.</a:t>
-            </a:r>
-          </a:p>
-        </p:txBody>
-      </p:sp>
-      <p:sp>
-        <p:nvSpPr>
-          <p:cNvPr id="18" name="Rounded Rectangle 17"/>
-          <p:cNvSpPr/>
-          <p:nvPr/>
-        </p:nvSpPr>
-        <p:spPr>
-          <a:xfrm>
-            <a:off x="457200" y="5088636"/>
-            <a:ext cx="11277295" cy="1051560"/>
-          </a:xfrm>
-          <a:prstGeom prst="roundRect">
-            <a:avLst>
-              <a:gd name="adj" fmla="val 12000"/>
-            </a:avLst>
-          </a:prstGeom>
-          <a:solidFill>
-            <a:srgbClr val="E8F4FA"/>
-          </a:solidFill>
-          <a:ln>
-            <a:noFill/>
-          </a:ln>
-        </p:spPr>
-        <p:style>
-          <a:lnRef idx="1">
-            <a:schemeClr val="accent1"/>
-          </a:lnRef>
-          <a:fillRef idx="3">
-            <a:schemeClr val="accent1"/>
-          </a:fillRef>
-          <a:effectRef idx="2">
-            <a:schemeClr val="accent1"/>
-          </a:effectRef>
-          <a:fontRef idx="minor">
-            <a:schemeClr val="lt1"/>
-          </a:fontRef>
-        </p:style>
-        <p:txBody>
-          <a:bodyPr rtlCol="0" anchor="ctr"/>
-          <a:lstStyle/>
-          <a:p>
-            <a:pPr algn="ctr"/>
-          </a:p>
-        </p:txBody>
-      </p:sp>
-      <p:sp>
-        <p:nvSpPr>
-          <p:cNvPr id="19" name="Rounded Rectangle 18"/>
-          <p:cNvSpPr/>
-          <p:nvPr/>
-        </p:nvSpPr>
-        <p:spPr>
-          <a:xfrm>
-            <a:off x="594360" y="5394960"/>
-            <a:ext cx="438912" cy="438912"/>
-          </a:xfrm>
-          <a:prstGeom prst="roundRect">
-            <a:avLst>
-              <a:gd name="adj" fmla="val 12000"/>
-            </a:avLst>
-          </a:prstGeom>
-          <a:solidFill>
-            <a:srgbClr val="095292"/>
-          </a:solidFill>
-          <a:ln>
-            <a:noFill/>
-          </a:ln>
-        </p:spPr>
-        <p:style>
-          <a:lnRef idx="1">
-            <a:schemeClr val="accent1"/>
-          </a:lnRef>
-          <a:fillRef idx="3">
-            <a:schemeClr val="accent1"/>
-          </a:fillRef>
-          <a:effectRef idx="2">
-            <a:schemeClr val="accent1"/>
-          </a:effectRef>
-          <a:fontRef idx="minor">
-            <a:schemeClr val="lt1"/>
-          </a:fontRef>
-        </p:style>
-        <p:txBody>
-          <a:bodyPr rtlCol="0" anchor="ctr"/>
-          <a:lstStyle/>
-          <a:p>
-            <a:pPr algn="ctr"/>
+              <a:t>–   </a:t>
+            </a:r>
+            <a:r>
+              <a:rPr sz="2000" b="1" i="0">
+                <a:solidFill>
+                  <a:srgbClr val="333333"/>
+                </a:solidFill>
+                <a:latin typeface="Calibri"/>
+              </a:rPr>
+              <a:t>¿Qué resolvió de verdad?:</a:t>
+            </a:r>
+            <a:r>
+              <a:rPr sz="2000" b="0" i="0">
+                <a:solidFill>
+                  <a:srgbClr val="333333"/>
+                </a:solidFill>
+                <a:latin typeface="Calibri"/>
+              </a:rPr>
+              <a:t> Casi nunca resuelve todo. Diga qué parte sí.</a:t>
+            </a:r>
+          </a:p>
+          <a:p>
+            <a:pPr>
+              <a:spcAft>
+                <a:spcPts val="800"/>
+              </a:spcAft>
+            </a:pPr>
+            <a:r>
+              <a:rPr sz="2000" b="0" i="0">
+                <a:solidFill>
+                  <a:srgbClr val="333333"/>
+                </a:solidFill>
+                <a:latin typeface="Calibri"/>
+              </a:rPr>
+              <a:t>–   </a:t>
+            </a:r>
+            <a:r>
+              <a:rPr sz="2000" b="1" i="0">
+                <a:solidFill>
+                  <a:srgbClr val="333333"/>
+                </a:solidFill>
+                <a:latin typeface="Calibri"/>
+              </a:rPr>
+              <a:t>¿Qué sigue vivo hoy?:</a:t>
+            </a:r>
+            <a:r>
+              <a:rPr sz="2000" b="0" i="0">
+                <a:solidFill>
+                  <a:srgbClr val="333333"/>
+                </a:solidFill>
+                <a:latin typeface="Calibri"/>
+              </a:rPr>
+              <a:t> El pedazo del problema que nadie ha cerrado. Es la parte que se evalúa en el taller.</a:t>
+            </a:r>
           </a:p>
         </p:txBody>
       </p:sp>
       <p:sp>
         <p:nvSpPr>
           <p:cNvPr id="20" name="TextBox 19"/>
-          <p:cNvSpPr txBox="1"/>
-          <p:nvPr/>
-        </p:nvSpPr>
-        <p:spPr>
-          <a:xfrm>
-            <a:off x="594360" y="5394960"/>
-            <a:ext cx="438912" cy="438912"/>
-          </a:xfrm>
-          <a:prstGeom prst="rect">
-            <a:avLst/>
-          </a:prstGeom>
-          <a:noFill/>
-        </p:spPr>
-        <p:txBody>
-          <a:bodyPr wrap="square" anchor="ctr"/>
-          <a:lstStyle/>
-          <a:p>
-            <a:pPr algn="ctr"/>
-            <a:r>
-              <a:rPr sz="1600" b="1" i="0">
-                <a:solidFill>
-                  <a:srgbClr val="FFFFFF"/>
-                </a:solidFill>
-                <a:latin typeface="Calibri"/>
-              </a:rPr>
-              <a:t>4</a:t>
-            </a:r>
-          </a:p>
-        </p:txBody>
-      </p:sp>
-      <p:sp>
-        <p:nvSpPr>
-          <p:cNvPr id="21" name="TextBox 20"/>
-          <p:cNvSpPr txBox="1"/>
-          <p:nvPr/>
-        </p:nvSpPr>
-        <p:spPr>
-          <a:xfrm>
-            <a:off x="1188720" y="5180076"/>
-            <a:ext cx="10271455" cy="886968"/>
-          </a:xfrm>
-          <a:prstGeom prst="rect">
-            <a:avLst/>
-          </a:prstGeom>
-          <a:noFill/>
-        </p:spPr>
-        <p:txBody>
-          <a:bodyPr wrap="square" anchor="ctr"/>
-          <a:lstStyle/>
-          <a:p>
-            <a:r>
-              <a:rPr sz="1500" b="1" i="0">
-                <a:solidFill>
-                  <a:srgbClr val="095292"/>
-                </a:solidFill>
-                <a:latin typeface="Calibri"/>
-              </a:rPr>
-              <a:t>¿Qué sigue vivo hoy?</a:t>
-            </a:r>
-          </a:p>
-          <a:p>
-            <a:pPr>
-              <a:spcBef>
-                <a:spcPts val="200"/>
-              </a:spcBef>
-            </a:pPr>
-            <a:r>
-              <a:rPr sz="1300" b="0" i="0">
-                <a:solidFill>
-                  <a:srgbClr val="333333"/>
-                </a:solidFill>
-                <a:latin typeface="Calibri"/>
-              </a:rPr>
-              <a:t>El pedazo del problema que nadie ha cerrado. Es la parte que se evalúa en el taller.</a:t>
-            </a:r>
-          </a:p>
-        </p:txBody>
-      </p:sp>
-      <p:sp>
-        <p:nvSpPr>
-          <p:cNvPr id="22" name="TextBox 21"/>
           <p:cNvSpPr txBox="1"/>
           <p:nvPr/>
         </p:nvSpPr>
@@ -5493,6 +5180,195 @@
   <p:clrMapOvr>
     <a:masterClrMapping/>
   </p:clrMapOvr>
+  <p:timing>
+    <p:tnLst>
+      <p:par>
+        <p:cTn id="1" dur="indefinite" restart="never" nodeType="tmRoot">
+          <p:childTnLst>
+            <p:seq concurrent="1" nextAc="seek">
+              <p:cTn id="2" dur="indefinite" nodeType="mainSeq">
+                <p:childTnLst>
+                  <p:par>
+                    <p:cTn id="3" fill="hold">
+                      <p:stCondLst>
+                        <p:cond delay="indefinite"/>
+                      </p:stCondLst>
+                      <p:childTnLst>
+                        <p:par>
+                          <p:cTn id="4" fill="hold">
+                            <p:stCondLst>
+                              <p:cond delay="0"/>
+                            </p:stCondLst>
+                            <p:childTnLst>
+                              <p:par>
+                                <p:cTn id="5" presetID="10" presetClass="entr" presetSubtype="0" fill="hold" nodeType="clickEffect">
+                                  <p:stCondLst>
+                                    <p:cond delay="0"/>
+                                  </p:stCondLst>
+                                  <p:childTnLst>
+                                    <p:set>
+                                      <p:cBhvr>
+                                        <p:cTn id="6" dur="1" fill="hold">
+                                          <p:stCondLst>
+                                            <p:cond delay="0"/>
+                                          </p:stCondLst>
+                                        </p:cTn>
+                                        <p:tgtEl>
+                                          <p:spTgt spid="8"/>
+                                        </p:tgtEl>
+                                        <p:attrNameLst>
+                                          <p:attrName>style.visibility</p:attrName>
+                                        </p:attrNameLst>
+                                      </p:cBhvr>
+                                      <p:to>
+                                        <p:strVal val="visible"/>
+                                      </p:to>
+                                    </p:set>
+                                    <p:animEffect transition="in" filter="fade">
+                                      <p:cBhvr>
+                                        <p:cTn id="7" dur="450"/>
+                                        <p:tgtEl>
+                                          <p:spTgt spid="8"/>
+                                        </p:tgtEl>
+                                      </p:cBhvr>
+                                    </p:animEffect>
+                                  </p:childTnLst>
+                                </p:cTn>
+                              </p:par>
+                            </p:childTnLst>
+                          </p:cTn>
+                        </p:par>
+                      </p:childTnLst>
+                    </p:cTn>
+                  </p:par>
+                  <p:par>
+                    <p:cTn id="8" fill="hold">
+                      <p:stCondLst>
+                        <p:cond delay="indefinite"/>
+                      </p:stCondLst>
+                      <p:childTnLst>
+                        <p:par>
+                          <p:cTn id="9" fill="hold">
+                            <p:stCondLst>
+                              <p:cond delay="0"/>
+                            </p:stCondLst>
+                            <p:childTnLst>
+                              <p:par>
+                                <p:cTn id="10" presetID="10" presetClass="entr" presetSubtype="0" fill="hold" nodeType="clickEffect">
+                                  <p:stCondLst>
+                                    <p:cond delay="0"/>
+                                  </p:stCondLst>
+                                  <p:childTnLst>
+                                    <p:set>
+                                      <p:cBhvr>
+                                        <p:cTn id="11" dur="1" fill="hold">
+                                          <p:stCondLst>
+                                            <p:cond delay="0"/>
+                                          </p:stCondLst>
+                                        </p:cTn>
+                                        <p:tgtEl>
+                                          <p:spTgt spid="9"/>
+                                        </p:tgtEl>
+                                        <p:attrNameLst>
+                                          <p:attrName>style.visibility</p:attrName>
+                                        </p:attrNameLst>
+                                      </p:cBhvr>
+                                      <p:to>
+                                        <p:strVal val="visible"/>
+                                      </p:to>
+                                    </p:set>
+                                    <p:animEffect transition="in" filter="fade">
+                                      <p:cBhvr>
+                                        <p:cTn id="12" dur="450"/>
+                                        <p:tgtEl>
+                                          <p:spTgt spid="9"/>
+                                        </p:tgtEl>
+                                      </p:cBhvr>
+                                    </p:animEffect>
+                                  </p:childTnLst>
+                                </p:cTn>
+                              </p:par>
+                            </p:childTnLst>
+                          </p:cTn>
+                        </p:par>
+                      </p:childTnLst>
+                    </p:cTn>
+                  </p:par>
+                  <p:par>
+                    <p:cTn id="13" fill="hold">
+                      <p:stCondLst>
+                        <p:cond delay="indefinite"/>
+                      </p:stCondLst>
+                      <p:childTnLst>
+                        <p:par>
+                          <p:cTn id="14" fill="hold">
+                            <p:stCondLst>
+                              <p:cond delay="0"/>
+                            </p:stCondLst>
+                            <p:childTnLst>
+                              <p:par>
+                                <p:cTn id="15" presetID="10" presetClass="entr" presetSubtype="0" fill="hold" nodeType="clickEffect">
+                                  <p:stCondLst>
+                                    <p:cond delay="0"/>
+                                  </p:stCondLst>
+                                  <p:childTnLst>
+                                    <p:set>
+                                      <p:cBhvr>
+                                        <p:cTn id="16" dur="1" fill="hold">
+                                          <p:stCondLst>
+                                            <p:cond delay="0"/>
+                                          </p:stCondLst>
+                                        </p:cTn>
+                                        <p:tgtEl>
+                                          <p:spTgt spid="10"/>
+                                        </p:tgtEl>
+                                        <p:attrNameLst>
+                                          <p:attrName>style.visibility</p:attrName>
+                                        </p:attrNameLst>
+                                      </p:cBhvr>
+                                      <p:to>
+                                        <p:strVal val="visible"/>
+                                      </p:to>
+                                    </p:set>
+                                    <p:animEffect transition="in" filter="fade">
+                                      <p:cBhvr>
+                                        <p:cTn id="17" dur="450"/>
+                                        <p:tgtEl>
+                                          <p:spTgt spid="10"/>
+                                        </p:tgtEl>
+                                      </p:cBhvr>
+                                    </p:animEffect>
+                                  </p:childTnLst>
+                                </p:cTn>
+                              </p:par>
+                            </p:childTnLst>
+                          </p:cTn>
+                        </p:par>
+                      </p:childTnLst>
+                    </p:cTn>
+                  </p:par>
+                </p:childTnLst>
+              </p:cTn>
+              <p:prevCondLst>
+                <p:cond evt="onPrev" delay="0">
+                  <p:tgtEl>
+                    <p:sldTgt/>
+                  </p:tgtEl>
+                </p:cond>
+              </p:prevCondLst>
+              <p:nextCondLst>
+                <p:cond evt="onNext" delay="0">
+                  <p:tgtEl>
+                    <p:sldTgt/>
+                  </p:tgtEl>
+                </p:cond>
+              </p:nextCondLst>
+            </p:seq>
+          </p:childTnLst>
+        </p:cTn>
+      </p:par>
+    </p:tnLst>
+  </p:timing>
 </p:sld>
 </file>
 
@@ -8259,14 +8135,118 @@
       </p:sp>
       <p:sp>
         <p:nvSpPr>
-          <p:cNvPr id="5" name="TextBox 4"/>
+          <p:cNvPr id="5" name="Rounded Rectangle 4"/>
+          <p:cNvSpPr/>
+          <p:nvPr/>
+        </p:nvSpPr>
+        <p:spPr>
+          <a:xfrm>
+            <a:off x="5797149" y="1573813"/>
+            <a:ext cx="6010497" cy="4057845"/>
+          </a:xfrm>
+          <a:prstGeom prst="roundRect">
+            <a:avLst>
+              <a:gd name="adj" fmla="val 4000"/>
+            </a:avLst>
+          </a:prstGeom>
+          <a:solidFill>
+            <a:srgbClr val="E8EEF4"/>
+          </a:solidFill>
+          <a:ln>
+            <a:noFill/>
+          </a:ln>
+        </p:spPr>
+        <p:style>
+          <a:lnRef idx="1">
+            <a:schemeClr val="accent1"/>
+          </a:lnRef>
+          <a:fillRef idx="3">
+            <a:schemeClr val="accent1"/>
+          </a:fillRef>
+          <a:effectRef idx="2">
+            <a:schemeClr val="accent1"/>
+          </a:effectRef>
+          <a:fontRef idx="minor">
+            <a:schemeClr val="lt1"/>
+          </a:fontRef>
+        </p:style>
+        <p:txBody>
+          <a:bodyPr rtlCol="0" anchor="ctr"/>
+          <a:lstStyle/>
+          <a:p>
+            <a:pPr algn="ctr"/>
+          </a:p>
+        </p:txBody>
+      </p:sp>
+      <p:pic>
+        <p:nvPicPr>
+          <p:cNvPr id="6" name="Picture 5" descr="students-learning-laptops-classroom.jpg"/>
+          <p:cNvPicPr>
+            <a:picLocks noChangeAspect="1"/>
+          </p:cNvPicPr>
+          <p:nvPr/>
+        </p:nvPicPr>
+        <p:blipFill>
+          <a:blip r:embed="rId2"/>
+          <a:stretch>
+            <a:fillRect/>
+          </a:stretch>
+        </p:blipFill>
+        <p:spPr>
+          <a:xfrm>
+            <a:off x="5870301" y="1646965"/>
+            <a:ext cx="5864193" cy="3911541"/>
+          </a:xfrm>
+          <a:prstGeom prst="rect">
+            <a:avLst/>
+          </a:prstGeom>
+        </p:spPr>
+      </p:pic>
+      <p:sp>
+        <p:nvSpPr>
+          <p:cNvPr id="7" name="TextBox 6"/>
           <p:cNvSpPr txBox="1"/>
           <p:nvPr/>
         </p:nvSpPr>
         <p:spPr>
           <a:xfrm>
-            <a:off x="457200" y="1170432"/>
-            <a:ext cx="11277295" cy="5230368"/>
+            <a:off x="5870301" y="5961888"/>
+            <a:ext cx="5864193" cy="320040"/>
+          </a:xfrm>
+          <a:prstGeom prst="rect">
+            <a:avLst/>
+          </a:prstGeom>
+          <a:noFill/>
+        </p:spPr>
+        <p:txBody>
+          <a:bodyPr wrap="square">
+            <a:spAutoFit/>
+          </a:bodyPr>
+          <a:lstStyle/>
+          <a:p>
+            <a:pPr algn="ctr"/>
+            <a:r>
+              <a:rPr sz="1100" b="0" i="1">
+                <a:solidFill>
+                  <a:srgbClr val="666666"/>
+                </a:solidFill>
+                <a:latin typeface="Calibri"/>
+              </a:rPr>
+              <a:t>Foto: Mikhail Nilov · Pexels</a:t>
+            </a:r>
+          </a:p>
+        </p:txBody>
+      </p:sp>
+      <p:sp>
+        <p:nvSpPr>
+          <p:cNvPr id="8" name="TextBox 7"/>
+          <p:cNvSpPr txBox="1"/>
+          <p:nvPr/>
+        </p:nvSpPr>
+        <p:spPr>
+          <a:xfrm>
+            <a:off x="457200" y="1353312"/>
+            <a:ext cx="5093061" cy="5047488"/>
           </a:xfrm>
           <a:prstGeom prst="rect">
             <a:avLst/>
@@ -8418,7 +8398,7 @@
       </p:sp>
       <p:sp>
         <p:nvSpPr>
-          <p:cNvPr id="6" name="TextBox 5"/>
+          <p:cNvPr id="9" name="TextBox 8"/>
           <p:cNvSpPr txBox="1"/>
           <p:nvPr/>
         </p:nvSpPr>
@@ -9429,9 +9409,57 @@
           </a:p>
         </p:txBody>
       </p:sp>
-      <p:sp>
-        <p:nvSpPr>
-          <p:cNvPr id="13" name="TextBox 12"/>
+      <p:pic>
+        <p:nvPicPr>
+          <p:cNvPr id="13" name="Picture 12" descr="sello_mal.png"/>
+          <p:cNvPicPr>
+            <a:picLocks noChangeAspect="1"/>
+          </p:cNvPicPr>
+          <p:nvPr/>
+        </p:nvPicPr>
+        <p:blipFill>
+          <a:blip r:embed="rId2"/>
+          <a:stretch>
+            <a:fillRect/>
+          </a:stretch>
+        </p:blipFill>
+        <p:spPr>
+          <a:xfrm>
+            <a:off x="566928" y="1316736"/>
+            <a:ext cx="393192" cy="393192"/>
+          </a:xfrm>
+          <a:prstGeom prst="rect">
+            <a:avLst/>
+          </a:prstGeom>
+        </p:spPr>
+      </p:pic>
+      <p:pic>
+        <p:nvPicPr>
+          <p:cNvPr id="14" name="Picture 13" descr="sello_bien.png"/>
+          <p:cNvPicPr>
+            <a:picLocks noChangeAspect="1"/>
+          </p:cNvPicPr>
+          <p:nvPr/>
+        </p:nvPicPr>
+        <p:blipFill>
+          <a:blip r:embed="rId3"/>
+          <a:stretch>
+            <a:fillRect/>
+          </a:stretch>
+        </p:blipFill>
+        <p:spPr>
+          <a:xfrm>
+            <a:off x="6365595" y="1316736"/>
+            <a:ext cx="393192" cy="393192"/>
+          </a:xfrm>
+          <a:prstGeom prst="rect">
+            <a:avLst/>
+          </a:prstGeom>
+        </p:spPr>
+      </p:pic>
+      <p:sp>
+        <p:nvSpPr>
+          <p:cNvPr id="15" name="TextBox 14"/>
           <p:cNvSpPr txBox="1"/>
           <p:nvPr/>
         </p:nvSpPr>
@@ -10262,14 +10290,118 @@
       </p:sp>
       <p:sp>
         <p:nvSpPr>
-          <p:cNvPr id="5" name="TextBox 4"/>
+          <p:cNvPr id="5" name="Rounded Rectangle 4"/>
+          <p:cNvSpPr/>
+          <p:nvPr/>
+        </p:nvSpPr>
+        <p:spPr>
+          <a:xfrm>
+            <a:off x="5797149" y="1573813"/>
+            <a:ext cx="6010497" cy="4057845"/>
+          </a:xfrm>
+          <a:prstGeom prst="roundRect">
+            <a:avLst>
+              <a:gd name="adj" fmla="val 4000"/>
+            </a:avLst>
+          </a:prstGeom>
+          <a:solidFill>
+            <a:srgbClr val="E8EEF4"/>
+          </a:solidFill>
+          <a:ln>
+            <a:noFill/>
+          </a:ln>
+        </p:spPr>
+        <p:style>
+          <a:lnRef idx="1">
+            <a:schemeClr val="accent1"/>
+          </a:lnRef>
+          <a:fillRef idx="3">
+            <a:schemeClr val="accent1"/>
+          </a:fillRef>
+          <a:effectRef idx="2">
+            <a:schemeClr val="accent1"/>
+          </a:effectRef>
+          <a:fontRef idx="minor">
+            <a:schemeClr val="lt1"/>
+          </a:fontRef>
+        </p:style>
+        <p:txBody>
+          <a:bodyPr rtlCol="0" anchor="ctr"/>
+          <a:lstStyle/>
+          <a:p>
+            <a:pPr algn="ctr"/>
+          </a:p>
+        </p:txBody>
+      </p:sp>
+      <p:pic>
+        <p:nvPicPr>
+          <p:cNvPr id="6" name="Picture 5" descr="vintage-computer-mainframe.jpg"/>
+          <p:cNvPicPr>
+            <a:picLocks noChangeAspect="1"/>
+          </p:cNvPicPr>
+          <p:nvPr/>
+        </p:nvPicPr>
+        <p:blipFill>
+          <a:blip r:embed="rId2"/>
+          <a:stretch>
+            <a:fillRect/>
+          </a:stretch>
+        </p:blipFill>
+        <p:spPr>
+          <a:xfrm>
+            <a:off x="5870301" y="1646965"/>
+            <a:ext cx="5864193" cy="3911541"/>
+          </a:xfrm>
+          <a:prstGeom prst="rect">
+            <a:avLst/>
+          </a:prstGeom>
+        </p:spPr>
+      </p:pic>
+      <p:sp>
+        <p:nvSpPr>
+          <p:cNvPr id="7" name="TextBox 6"/>
           <p:cNvSpPr txBox="1"/>
           <p:nvPr/>
         </p:nvSpPr>
         <p:spPr>
           <a:xfrm>
-            <a:off x="457200" y="1170432"/>
-            <a:ext cx="11277295" cy="5230368"/>
+            <a:off x="5870301" y="5961888"/>
+            <a:ext cx="5864193" cy="320040"/>
+          </a:xfrm>
+          <a:prstGeom prst="rect">
+            <a:avLst/>
+          </a:prstGeom>
+          <a:noFill/>
+        </p:spPr>
+        <p:txBody>
+          <a:bodyPr wrap="square">
+            <a:spAutoFit/>
+          </a:bodyPr>
+          <a:lstStyle/>
+          <a:p>
+            <a:pPr algn="ctr"/>
+            <a:r>
+              <a:rPr sz="1100" b="0" i="1">
+                <a:solidFill>
+                  <a:srgbClr val="666666"/>
+                </a:solidFill>
+                <a:latin typeface="Calibri"/>
+              </a:rPr>
+              <a:t>Foto: Nicolas  Foster · Pexels</a:t>
+            </a:r>
+          </a:p>
+        </p:txBody>
+      </p:sp>
+      <p:sp>
+        <p:nvSpPr>
+          <p:cNvPr id="8" name="TextBox 7"/>
+          <p:cNvSpPr txBox="1"/>
+          <p:nvPr/>
+        </p:nvSpPr>
+        <p:spPr>
+          <a:xfrm>
+            <a:off x="457200" y="1353312"/>
+            <a:ext cx="5093061" cy="5047488"/>
           </a:xfrm>
           <a:prstGeom prst="rect">
             <a:avLst/>
@@ -10330,7 +10462,7 @@
                 </a:solidFill>
                 <a:latin typeface="Calibri"/>
               </a:rPr>
-              <a:t>. Programar es escribir instrucciones para una máquina concreta, y el trabajo es de una persona o de unas pocas.</a:t>
+              <a:t>.</a:t>
             </a:r>
           </a:p>
           <a:p>
@@ -10382,24 +10514,6 @@
                 </a:solidFill>
                 <a:latin typeface="Calibri"/>
               </a:rPr>
-              <a:t>. Ahí el cuello de botella se muda: ya no es la máquina, es </a:t>
-            </a:r>
-            <a:r>
-              <a:rPr sz="2000" b="1" i="0">
-                <a:solidFill>
-                  <a:srgbClr val="333333"/>
-                </a:solidFill>
-                <a:latin typeface="Calibri"/>
-              </a:rPr>
-              <a:t>coordinar el trabajo humano</a:t>
-            </a:r>
-            <a:r>
-              <a:rPr sz="2000" b="0" i="0">
-                <a:solidFill>
-                  <a:srgbClr val="333333"/>
-                </a:solidFill>
-                <a:latin typeface="Calibri"/>
-              </a:rPr>
               <a:t>.</a:t>
             </a:r>
           </a:p>
@@ -10416,136 +10530,14 @@
                 </a:solidFill>
                 <a:latin typeface="Calibri"/>
               </a:rPr>
-              <a:t>–   El sistema de reservas SABRE, el software del programa Apollo y el sistema operativo OS/360 de IBM son los tres casos que hicieron visible el problema: </a:t>
-            </a:r>
-            <a:r>
-              <a:rPr sz="2000" b="1" i="0">
-                <a:solidFill>
-                  <a:srgbClr val="333333"/>
-                </a:solidFill>
-                <a:latin typeface="Calibri"/>
-              </a:rPr>
-              <a:t>se pasaron de plazo y de presupuesto de forma escandalosa</a:t>
-            </a:r>
-            <a:r>
-              <a:rPr sz="2000" b="0" i="0">
-                <a:solidFill>
-                  <a:srgbClr val="333333"/>
-                </a:solidFill>
-                <a:latin typeface="Calibri"/>
-              </a:rPr>
-              <a:t>.</a:t>
-            </a:r>
-          </a:p>
-          <a:p>
-            <a:pPr>
-              <a:spcAft>
-                <a:spcPts val="800"/>
-              </a:spcAft>
-            </a:pPr>
-            <a:r>
-              <a:rPr sz="2000" b="0" i="0">
-                <a:solidFill>
-                  <a:srgbClr val="333333"/>
-                </a:solidFill>
-                <a:latin typeface="Calibri"/>
-              </a:rPr>
-              <a:t>–   </a:t>
-            </a:r>
-            <a:r>
-              <a:rPr sz="2000" b="1" i="0">
-                <a:solidFill>
-                  <a:srgbClr val="333333"/>
-                </a:solidFill>
-                <a:latin typeface="Calibri"/>
-              </a:rPr>
-              <a:t>1968:</a:t>
-            </a:r>
-            <a:r>
-              <a:rPr sz="2000" b="0" i="0">
-                <a:solidFill>
-                  <a:srgbClr val="333333"/>
-                </a:solidFill>
-                <a:latin typeface="Calibri"/>
-              </a:rPr>
-              <a:t> la OTAN convoca una conferencia en Garmisch (Alemania) para hablar de eso y se acuña el término </a:t>
-            </a:r>
-            <a:r>
-              <a:rPr sz="2000" b="1" i="0">
-                <a:solidFill>
-                  <a:srgbClr val="333333"/>
-                </a:solidFill>
-                <a:latin typeface="Calibri"/>
-              </a:rPr>
-              <a:t>«ingeniería de software»</a:t>
-            </a:r>
-            <a:r>
-              <a:rPr sz="2000" b="0" i="0">
-                <a:solidFill>
-                  <a:srgbClr val="333333"/>
-                </a:solidFill>
-                <a:latin typeface="Calibri"/>
-              </a:rPr>
-              <a:t>. El nombre es una propuesta: si construir software se parece a construir un puente, entonces necesita </a:t>
-            </a:r>
-            <a:r>
-              <a:rPr sz="2000" b="1" i="0">
-                <a:solidFill>
-                  <a:srgbClr val="333333"/>
-                </a:solidFill>
-                <a:latin typeface="Calibri"/>
-              </a:rPr>
-              <a:t>método, no talento individual</a:t>
-            </a:r>
-            <a:r>
-              <a:rPr sz="2000" b="0" i="0">
-                <a:solidFill>
-                  <a:srgbClr val="333333"/>
-                </a:solidFill>
-                <a:latin typeface="Calibri"/>
-              </a:rPr>
-              <a:t>.</a:t>
-            </a:r>
-          </a:p>
-          <a:p>
-            <a:pPr>
-              <a:spcAft>
-                <a:spcPts val="800"/>
-              </a:spcAft>
-            </a:pPr>
-            <a:r>
-              <a:rPr sz="2000" b="0" i="0">
-                <a:solidFill>
-                  <a:srgbClr val="333333"/>
-                </a:solidFill>
-                <a:latin typeface="Calibri"/>
-              </a:rPr>
-              <a:t>–   </a:t>
-            </a:r>
-            <a:r>
-              <a:rPr sz="2000" b="1" i="0">
-                <a:solidFill>
-                  <a:srgbClr val="333333"/>
-                </a:solidFill>
-                <a:latin typeface="Calibri"/>
-              </a:rPr>
-              <a:t>Ahí nace la disciplina:</a:t>
-            </a:r>
-            <a:r>
-              <a:rPr sz="2000" b="0" i="0">
-                <a:solidFill>
-                  <a:srgbClr val="333333"/>
-                </a:solidFill>
-                <a:latin typeface="Calibri"/>
-              </a:rPr>
-              <a:t> no de un invento, sino del reconocimiento público de que el trabajo se estaba haciendo mal y nadie sabía cómo hacerlo bien.</a:t>
-            </a:r>
-          </a:p>
-        </p:txBody>
-      </p:sp>
-      <p:sp>
-        <p:nvSpPr>
-          <p:cNvPr id="6" name="TextBox 5"/>
+              <a:t>–   El sistema de reservas SABRE, el software del programa Apollo y el sistema operativo OS/360 de IBM son los tres casos que hicieron visible el…</a:t>
+            </a:r>
+          </a:p>
+        </p:txBody>
+      </p:sp>
+      <p:sp>
+        <p:nvSpPr>
+          <p:cNvPr id="9" name="TextBox 8"/>
           <p:cNvSpPr txBox="1"/>
           <p:nvPr/>
         </p:nvSpPr>
@@ -12009,16 +12001,16 @@
         </p:nvSpPr>
         <p:spPr>
           <a:xfrm>
-            <a:off x="457200" y="1444752"/>
-            <a:ext cx="11277295" cy="908913"/>
+            <a:off x="5934611" y="1399031"/>
+            <a:ext cx="5735574" cy="4617720"/>
           </a:xfrm>
           <a:prstGeom prst="roundRect">
             <a:avLst>
-              <a:gd name="adj" fmla="val 12000"/>
+              <a:gd name="adj" fmla="val 4000"/>
             </a:avLst>
           </a:prstGeom>
           <a:solidFill>
-            <a:srgbClr val="F2F2F2"/>
+            <a:srgbClr val="E8EEF4"/>
           </a:solidFill>
           <a:ln>
             <a:noFill/>
@@ -12046,61 +12038,147 @@
           </a:p>
         </p:txBody>
       </p:sp>
-      <p:sp>
-        <p:nvSpPr>
-          <p:cNvPr id="7" name="Rounded Rectangle 6"/>
-          <p:cNvSpPr/>
-          <p:nvPr/>
-        </p:nvSpPr>
-        <p:spPr>
-          <a:xfrm>
-            <a:off x="594360" y="1679752"/>
-            <a:ext cx="438912" cy="438912"/>
-          </a:xfrm>
-          <a:prstGeom prst="roundRect">
-            <a:avLst>
-              <a:gd name="adj" fmla="val 12000"/>
-            </a:avLst>
-          </a:prstGeom>
-          <a:solidFill>
-            <a:srgbClr val="095292"/>
-          </a:solidFill>
-          <a:ln>
-            <a:noFill/>
-          </a:ln>
-        </p:spPr>
-        <p:style>
-          <a:lnRef idx="1">
-            <a:schemeClr val="accent1"/>
-          </a:lnRef>
-          <a:fillRef idx="3">
-            <a:schemeClr val="accent1"/>
-          </a:fillRef>
-          <a:effectRef idx="2">
-            <a:schemeClr val="accent1"/>
-          </a:effectRef>
-          <a:fontRef idx="minor">
-            <a:schemeClr val="lt1"/>
-          </a:fontRef>
-        </p:style>
-        <p:txBody>
-          <a:bodyPr rtlCol="0" anchor="ctr"/>
+      <p:pic>
+        <p:nvPicPr>
+          <p:cNvPr id="7" name="Picture 6" descr="ley-brooks-paso1.png"/>
+          <p:cNvPicPr>
+            <a:picLocks noChangeAspect="1"/>
+          </p:cNvPicPr>
+          <p:nvPr/>
+        </p:nvPicPr>
+        <p:blipFill>
+          <a:blip r:embed="rId2"/>
+          <a:stretch>
+            <a:fillRect/>
+          </a:stretch>
+        </p:blipFill>
+        <p:spPr>
+          <a:xfrm>
+            <a:off x="6007763" y="1472184"/>
+            <a:ext cx="5589270" cy="4471416"/>
+          </a:xfrm>
+          <a:prstGeom prst="rect">
+            <a:avLst/>
+          </a:prstGeom>
+        </p:spPr>
+      </p:pic>
+      <p:pic>
+        <p:nvPicPr>
+          <p:cNvPr id="8" name="Picture 7" descr="ley-brooks-paso2.png"/>
+          <p:cNvPicPr>
+            <a:picLocks noChangeAspect="1"/>
+          </p:cNvPicPr>
+          <p:nvPr/>
+        </p:nvPicPr>
+        <p:blipFill>
+          <a:blip r:embed="rId3"/>
+          <a:stretch>
+            <a:fillRect/>
+          </a:stretch>
+        </p:blipFill>
+        <p:spPr>
+          <a:xfrm>
+            <a:off x="6007763" y="1472184"/>
+            <a:ext cx="5589270" cy="4471416"/>
+          </a:xfrm>
+          <a:prstGeom prst="rect">
+            <a:avLst/>
+          </a:prstGeom>
+        </p:spPr>
+      </p:pic>
+      <p:pic>
+        <p:nvPicPr>
+          <p:cNvPr id="9" name="Picture 8" descr="ley-brooks-paso3.png"/>
+          <p:cNvPicPr>
+            <a:picLocks noChangeAspect="1"/>
+          </p:cNvPicPr>
+          <p:nvPr/>
+        </p:nvPicPr>
+        <p:blipFill>
+          <a:blip r:embed="rId4"/>
+          <a:stretch>
+            <a:fillRect/>
+          </a:stretch>
+        </p:blipFill>
+        <p:spPr>
+          <a:xfrm>
+            <a:off x="6007763" y="1472184"/>
+            <a:ext cx="5589270" cy="4471416"/>
+          </a:xfrm>
+          <a:prstGeom prst="rect">
+            <a:avLst/>
+          </a:prstGeom>
+        </p:spPr>
+      </p:pic>
+      <p:pic>
+        <p:nvPicPr>
+          <p:cNvPr id="10" name="Picture 9" descr="ley-brooks-paso4.png"/>
+          <p:cNvPicPr>
+            <a:picLocks noChangeAspect="1"/>
+          </p:cNvPicPr>
+          <p:nvPr/>
+        </p:nvPicPr>
+        <p:blipFill>
+          <a:blip r:embed="rId5"/>
+          <a:stretch>
+            <a:fillRect/>
+          </a:stretch>
+        </p:blipFill>
+        <p:spPr>
+          <a:xfrm>
+            <a:off x="6007763" y="1472184"/>
+            <a:ext cx="5589270" cy="4471416"/>
+          </a:xfrm>
+          <a:prstGeom prst="rect">
+            <a:avLst/>
+          </a:prstGeom>
+        </p:spPr>
+      </p:pic>
+      <p:sp>
+        <p:nvSpPr>
+          <p:cNvPr id="18" name="TextBox 17"/>
+          <p:cNvSpPr txBox="1"/>
+          <p:nvPr/>
+        </p:nvSpPr>
+        <p:spPr>
+          <a:xfrm>
+            <a:off x="5870301" y="5961888"/>
+            <a:ext cx="5864193" cy="320040"/>
+          </a:xfrm>
+          <a:prstGeom prst="rect">
+            <a:avLst/>
+          </a:prstGeom>
+          <a:noFill/>
+        </p:spPr>
+        <p:txBody>
+          <a:bodyPr wrap="square">
+            <a:spAutoFit/>
+          </a:bodyPr>
           <a:lstStyle/>
           <a:p>
             <a:pPr algn="ctr"/>
-          </a:p>
-        </p:txBody>
-      </p:sp>
-      <p:sp>
-        <p:nvSpPr>
-          <p:cNvPr id="8" name="TextBox 7"/>
+            <a:r>
+              <a:rPr sz="1100" b="0" i="1">
+                <a:solidFill>
+                  <a:srgbClr val="666666"/>
+                </a:solidFill>
+                <a:latin typeface="Calibri"/>
+              </a:rPr>
+              <a:t>Clic para avanzar la animación</a:t>
+            </a:r>
+          </a:p>
+        </p:txBody>
+      </p:sp>
+      <p:sp>
+        <p:nvSpPr>
+          <p:cNvPr id="19" name="TextBox 18"/>
           <p:cNvSpPr txBox="1"/>
           <p:nvPr/>
         </p:nvSpPr>
         <p:spPr>
           <a:xfrm>
-            <a:off x="594360" y="1679752"/>
-            <a:ext cx="438912" cy="438912"/>
+            <a:off x="457200" y="1563624"/>
+            <a:ext cx="5093061" cy="4837176"/>
           </a:xfrm>
           <a:prstGeom prst="rect">
             <a:avLst/>
@@ -12108,757 +12186,151 @@
           <a:noFill/>
         </p:spPr>
         <p:txBody>
-          <a:bodyPr wrap="square" anchor="ctr"/>
-          <a:lstStyle/>
-          <a:p>
-            <a:pPr algn="ctr"/>
-            <a:r>
-              <a:rPr sz="1600" b="1" i="0">
-                <a:solidFill>
-                  <a:srgbClr val="FFFFFF"/>
-                </a:solidFill>
-                <a:latin typeface="Calibri"/>
-              </a:rPr>
-              <a:t>1</a:t>
-            </a:r>
-          </a:p>
-        </p:txBody>
-      </p:sp>
-      <p:sp>
-        <p:nvSpPr>
-          <p:cNvPr id="9" name="TextBox 8"/>
-          <p:cNvSpPr txBox="1"/>
-          <p:nvPr/>
-        </p:nvSpPr>
-        <p:spPr>
-          <a:xfrm>
-            <a:off x="1188720" y="1536192"/>
-            <a:ext cx="10271455" cy="744321"/>
-          </a:xfrm>
-          <a:prstGeom prst="rect">
-            <a:avLst/>
-          </a:prstGeom>
-          <a:noFill/>
-        </p:spPr>
-        <p:txBody>
-          <a:bodyPr wrap="square" anchor="ctr"/>
-          <a:lstStyle/>
-          <a:p>
-            <a:r>
-              <a:rPr sz="1500" b="1" i="0">
-                <a:solidFill>
-                  <a:srgbClr val="095292"/>
-                </a:solidFill>
-                <a:latin typeface="Calibri"/>
-              </a:rPr>
-              <a:t>2 personas</a:t>
-            </a:r>
-          </a:p>
+          <a:bodyPr wrap="square">
+            <a:spAutoFit/>
+          </a:bodyPr>
+          <a:lstStyle/>
           <a:p>
             <a:pPr>
-              <a:spcBef>
-                <a:spcPts val="200"/>
-              </a:spcBef>
+              <a:spcAft>
+                <a:spcPts val="800"/>
+              </a:spcAft>
             </a:pPr>
             <a:r>
-              <a:rPr sz="1300" b="0" i="0">
+              <a:rPr sz="2000" b="0" i="0">
                 <a:solidFill>
                   <a:srgbClr val="333333"/>
                 </a:solidFill>
                 <a:latin typeface="Calibri"/>
               </a:rPr>
-              <a:t>1 conversación posible: A con B.</a:t>
-            </a:r>
-          </a:p>
-        </p:txBody>
-      </p:sp>
-      <p:sp>
-        <p:nvSpPr>
-          <p:cNvPr id="10" name="Rounded Rectangle 9"/>
-          <p:cNvSpPr/>
-          <p:nvPr/>
-        </p:nvSpPr>
-        <p:spPr>
-          <a:xfrm>
-            <a:off x="457200" y="2445105"/>
-            <a:ext cx="11277295" cy="908913"/>
-          </a:xfrm>
-          <a:prstGeom prst="roundRect">
-            <a:avLst>
-              <a:gd name="adj" fmla="val 12000"/>
-            </a:avLst>
-          </a:prstGeom>
-          <a:solidFill>
-            <a:srgbClr val="E8F4FA"/>
-          </a:solidFill>
-          <a:ln>
-            <a:noFill/>
-          </a:ln>
-        </p:spPr>
-        <p:style>
-          <a:lnRef idx="1">
-            <a:schemeClr val="accent1"/>
-          </a:lnRef>
-          <a:fillRef idx="3">
-            <a:schemeClr val="accent1"/>
-          </a:fillRef>
-          <a:effectRef idx="2">
-            <a:schemeClr val="accent1"/>
-          </a:effectRef>
-          <a:fontRef idx="minor">
-            <a:schemeClr val="lt1"/>
-          </a:fontRef>
-        </p:style>
-        <p:txBody>
-          <a:bodyPr rtlCol="0" anchor="ctr"/>
-          <a:lstStyle/>
-          <a:p>
-            <a:pPr algn="ctr"/>
-          </a:p>
-        </p:txBody>
-      </p:sp>
-      <p:sp>
-        <p:nvSpPr>
-          <p:cNvPr id="11" name="Rounded Rectangle 10"/>
-          <p:cNvSpPr/>
-          <p:nvPr/>
-        </p:nvSpPr>
-        <p:spPr>
-          <a:xfrm>
-            <a:off x="594360" y="2680106"/>
-            <a:ext cx="438912" cy="438912"/>
-          </a:xfrm>
-          <a:prstGeom prst="roundRect">
-            <a:avLst>
-              <a:gd name="adj" fmla="val 12000"/>
-            </a:avLst>
-          </a:prstGeom>
-          <a:solidFill>
-            <a:srgbClr val="095292"/>
-          </a:solidFill>
-          <a:ln>
-            <a:noFill/>
-          </a:ln>
-        </p:spPr>
-        <p:style>
-          <a:lnRef idx="1">
-            <a:schemeClr val="accent1"/>
-          </a:lnRef>
-          <a:fillRef idx="3">
-            <a:schemeClr val="accent1"/>
-          </a:fillRef>
-          <a:effectRef idx="2">
-            <a:schemeClr val="accent1"/>
-          </a:effectRef>
-          <a:fontRef idx="minor">
-            <a:schemeClr val="lt1"/>
-          </a:fontRef>
-        </p:style>
-        <p:txBody>
-          <a:bodyPr rtlCol="0" anchor="ctr"/>
-          <a:lstStyle/>
-          <a:p>
-            <a:pPr algn="ctr"/>
-          </a:p>
-        </p:txBody>
-      </p:sp>
-      <p:sp>
-        <p:nvSpPr>
-          <p:cNvPr id="12" name="TextBox 11"/>
-          <p:cNvSpPr txBox="1"/>
-          <p:nvPr/>
-        </p:nvSpPr>
-        <p:spPr>
-          <a:xfrm>
-            <a:off x="594360" y="2680106"/>
-            <a:ext cx="438912" cy="438912"/>
-          </a:xfrm>
-          <a:prstGeom prst="rect">
-            <a:avLst/>
-          </a:prstGeom>
-          <a:noFill/>
-        </p:spPr>
-        <p:txBody>
-          <a:bodyPr wrap="square" anchor="ctr"/>
-          <a:lstStyle/>
-          <a:p>
-            <a:pPr algn="ctr"/>
-            <a:r>
-              <a:rPr sz="1600" b="1" i="0">
-                <a:solidFill>
-                  <a:srgbClr val="FFFFFF"/>
-                </a:solidFill>
-                <a:latin typeface="Calibri"/>
-              </a:rPr>
-              <a:t>2</a:t>
-            </a:r>
-          </a:p>
-        </p:txBody>
-      </p:sp>
-      <p:sp>
-        <p:nvSpPr>
-          <p:cNvPr id="13" name="TextBox 12"/>
-          <p:cNvSpPr txBox="1"/>
-          <p:nvPr/>
-        </p:nvSpPr>
-        <p:spPr>
-          <a:xfrm>
-            <a:off x="1188720" y="2536545"/>
-            <a:ext cx="10271455" cy="744321"/>
-          </a:xfrm>
-          <a:prstGeom prst="rect">
-            <a:avLst/>
-          </a:prstGeom>
-          <a:noFill/>
-        </p:spPr>
-        <p:txBody>
-          <a:bodyPr wrap="square" anchor="ctr"/>
-          <a:lstStyle/>
-          <a:p>
-            <a:r>
-              <a:rPr sz="1500" b="1" i="0">
-                <a:solidFill>
-                  <a:srgbClr val="095292"/>
-                </a:solidFill>
-                <a:latin typeface="Calibri"/>
-              </a:rPr>
-              <a:t>5 personas</a:t>
+              <a:t>–   </a:t>
+            </a:r>
+            <a:r>
+              <a:rPr sz="2000" b="1" i="0">
+                <a:solidFill>
+                  <a:srgbClr val="333333"/>
+                </a:solidFill>
+                <a:latin typeface="Calibri"/>
+              </a:rPr>
+              <a:t>2 personas:</a:t>
+            </a:r>
+            <a:r>
+              <a:rPr sz="2000" b="0" i="0">
+                <a:solidFill>
+                  <a:srgbClr val="333333"/>
+                </a:solidFill>
+                <a:latin typeface="Calibri"/>
+              </a:rPr>
+              <a:t> 1 conversación posible: A con B.</a:t>
             </a:r>
           </a:p>
           <a:p>
             <a:pPr>
-              <a:spcBef>
-                <a:spcPts val="200"/>
-              </a:spcBef>
+              <a:spcAft>
+                <a:spcPts val="800"/>
+              </a:spcAft>
             </a:pPr>
             <a:r>
-              <a:rPr sz="1300" b="0" i="0">
+              <a:rPr sz="2000" b="0" i="0">
                 <a:solidFill>
                   <a:srgbClr val="333333"/>
                 </a:solidFill>
                 <a:latin typeface="Calibri"/>
               </a:rPr>
-              <a:t>10 parejas que se tienen que poner de acuerdo.</a:t>
-            </a:r>
-          </a:p>
-        </p:txBody>
-      </p:sp>
-      <p:sp>
-        <p:nvSpPr>
-          <p:cNvPr id="14" name="Rounded Rectangle 13"/>
-          <p:cNvSpPr/>
-          <p:nvPr/>
-        </p:nvSpPr>
-        <p:spPr>
-          <a:xfrm>
-            <a:off x="457200" y="3445459"/>
-            <a:ext cx="11277295" cy="908913"/>
-          </a:xfrm>
-          <a:prstGeom prst="roundRect">
-            <a:avLst>
-              <a:gd name="adj" fmla="val 12000"/>
-            </a:avLst>
-          </a:prstGeom>
-          <a:solidFill>
-            <a:srgbClr val="F2F2F2"/>
-          </a:solidFill>
-          <a:ln>
-            <a:noFill/>
-          </a:ln>
-        </p:spPr>
-        <p:style>
-          <a:lnRef idx="1">
-            <a:schemeClr val="accent1"/>
-          </a:lnRef>
-          <a:fillRef idx="3">
-            <a:schemeClr val="accent1"/>
-          </a:fillRef>
-          <a:effectRef idx="2">
-            <a:schemeClr val="accent1"/>
-          </a:effectRef>
-          <a:fontRef idx="minor">
-            <a:schemeClr val="lt1"/>
-          </a:fontRef>
-        </p:style>
-        <p:txBody>
-          <a:bodyPr rtlCol="0" anchor="ctr"/>
-          <a:lstStyle/>
-          <a:p>
-            <a:pPr algn="ctr"/>
-          </a:p>
-        </p:txBody>
-      </p:sp>
-      <p:sp>
-        <p:nvSpPr>
-          <p:cNvPr id="15" name="Rounded Rectangle 14"/>
-          <p:cNvSpPr/>
-          <p:nvPr/>
-        </p:nvSpPr>
-        <p:spPr>
-          <a:xfrm>
-            <a:off x="594360" y="3680460"/>
-            <a:ext cx="438912" cy="438912"/>
-          </a:xfrm>
-          <a:prstGeom prst="roundRect">
-            <a:avLst>
-              <a:gd name="adj" fmla="val 12000"/>
-            </a:avLst>
-          </a:prstGeom>
-          <a:solidFill>
-            <a:srgbClr val="095292"/>
-          </a:solidFill>
-          <a:ln>
-            <a:noFill/>
-          </a:ln>
-        </p:spPr>
-        <p:style>
-          <a:lnRef idx="1">
-            <a:schemeClr val="accent1"/>
-          </a:lnRef>
-          <a:fillRef idx="3">
-            <a:schemeClr val="accent1"/>
-          </a:fillRef>
-          <a:effectRef idx="2">
-            <a:schemeClr val="accent1"/>
-          </a:effectRef>
-          <a:fontRef idx="minor">
-            <a:schemeClr val="lt1"/>
-          </a:fontRef>
-        </p:style>
-        <p:txBody>
-          <a:bodyPr rtlCol="0" anchor="ctr"/>
-          <a:lstStyle/>
-          <a:p>
-            <a:pPr algn="ctr"/>
-          </a:p>
-        </p:txBody>
-      </p:sp>
-      <p:sp>
-        <p:nvSpPr>
-          <p:cNvPr id="16" name="TextBox 15"/>
-          <p:cNvSpPr txBox="1"/>
-          <p:nvPr/>
-        </p:nvSpPr>
-        <p:spPr>
-          <a:xfrm>
-            <a:off x="594360" y="3680460"/>
-            <a:ext cx="438912" cy="438912"/>
-          </a:xfrm>
-          <a:prstGeom prst="rect">
-            <a:avLst/>
-          </a:prstGeom>
-          <a:noFill/>
-        </p:spPr>
-        <p:txBody>
-          <a:bodyPr wrap="square" anchor="ctr"/>
-          <a:lstStyle/>
-          <a:p>
-            <a:pPr algn="ctr"/>
-            <a:r>
-              <a:rPr sz="1600" b="1" i="0">
-                <a:solidFill>
-                  <a:srgbClr val="FFFFFF"/>
-                </a:solidFill>
-                <a:latin typeface="Calibri"/>
-              </a:rPr>
-              <a:t>3</a:t>
-            </a:r>
-          </a:p>
-        </p:txBody>
-      </p:sp>
-      <p:sp>
-        <p:nvSpPr>
-          <p:cNvPr id="17" name="TextBox 16"/>
-          <p:cNvSpPr txBox="1"/>
-          <p:nvPr/>
-        </p:nvSpPr>
-        <p:spPr>
-          <a:xfrm>
-            <a:off x="1188720" y="3536899"/>
-            <a:ext cx="10271455" cy="744321"/>
-          </a:xfrm>
-          <a:prstGeom prst="rect">
-            <a:avLst/>
-          </a:prstGeom>
-          <a:noFill/>
-        </p:spPr>
-        <p:txBody>
-          <a:bodyPr wrap="square" anchor="ctr"/>
-          <a:lstStyle/>
-          <a:p>
-            <a:r>
-              <a:rPr sz="1500" b="1" i="0">
-                <a:solidFill>
-                  <a:srgbClr val="095292"/>
-                </a:solidFill>
-                <a:latin typeface="Calibri"/>
-              </a:rPr>
-              <a:t>10 personas</a:t>
+              <a:t>–   </a:t>
+            </a:r>
+            <a:r>
+              <a:rPr sz="2000" b="1" i="0">
+                <a:solidFill>
+                  <a:srgbClr val="333333"/>
+                </a:solidFill>
+                <a:latin typeface="Calibri"/>
+              </a:rPr>
+              <a:t>5 personas:</a:t>
+            </a:r>
+            <a:r>
+              <a:rPr sz="2000" b="0" i="0">
+                <a:solidFill>
+                  <a:srgbClr val="333333"/>
+                </a:solidFill>
+                <a:latin typeface="Calibri"/>
+              </a:rPr>
+              <a:t> 10 parejas que se tienen que poner de acuerdo.</a:t>
             </a:r>
           </a:p>
           <a:p>
             <a:pPr>
-              <a:spcBef>
-                <a:spcPts val="200"/>
-              </a:spcBef>
+              <a:spcAft>
+                <a:spcPts val="800"/>
+              </a:spcAft>
             </a:pPr>
             <a:r>
-              <a:rPr sz="1300" b="0" i="0">
+              <a:rPr sz="2000" b="0" i="0">
                 <a:solidFill>
                   <a:srgbClr val="333333"/>
                 </a:solidFill>
                 <a:latin typeface="Calibri"/>
               </a:rPr>
-              <a:t>45 parejas. Se duplicó la gente y se multiplicaron por 4,5 las conversaciones.</a:t>
-            </a:r>
-          </a:p>
-        </p:txBody>
-      </p:sp>
-      <p:sp>
-        <p:nvSpPr>
-          <p:cNvPr id="18" name="Rounded Rectangle 17"/>
-          <p:cNvSpPr/>
-          <p:nvPr/>
-        </p:nvSpPr>
-        <p:spPr>
-          <a:xfrm>
-            <a:off x="457200" y="4445812"/>
-            <a:ext cx="11277295" cy="908913"/>
-          </a:xfrm>
-          <a:prstGeom prst="roundRect">
-            <a:avLst>
-              <a:gd name="adj" fmla="val 12000"/>
-            </a:avLst>
-          </a:prstGeom>
-          <a:solidFill>
-            <a:srgbClr val="E8F4FA"/>
-          </a:solidFill>
-          <a:ln>
-            <a:noFill/>
-          </a:ln>
-        </p:spPr>
-        <p:style>
-          <a:lnRef idx="1">
-            <a:schemeClr val="accent1"/>
-          </a:lnRef>
-          <a:fillRef idx="3">
-            <a:schemeClr val="accent1"/>
-          </a:fillRef>
-          <a:effectRef idx="2">
-            <a:schemeClr val="accent1"/>
-          </a:effectRef>
-          <a:fontRef idx="minor">
-            <a:schemeClr val="lt1"/>
-          </a:fontRef>
-        </p:style>
-        <p:txBody>
-          <a:bodyPr rtlCol="0" anchor="ctr"/>
-          <a:lstStyle/>
-          <a:p>
-            <a:pPr algn="ctr"/>
-          </a:p>
-        </p:txBody>
-      </p:sp>
-      <p:sp>
-        <p:nvSpPr>
-          <p:cNvPr id="19" name="Rounded Rectangle 18"/>
-          <p:cNvSpPr/>
-          <p:nvPr/>
-        </p:nvSpPr>
-        <p:spPr>
-          <a:xfrm>
-            <a:off x="594360" y="4680813"/>
-            <a:ext cx="438912" cy="438912"/>
-          </a:xfrm>
-          <a:prstGeom prst="roundRect">
-            <a:avLst>
-              <a:gd name="adj" fmla="val 12000"/>
-            </a:avLst>
-          </a:prstGeom>
-          <a:solidFill>
-            <a:srgbClr val="095292"/>
-          </a:solidFill>
-          <a:ln>
-            <a:noFill/>
-          </a:ln>
-        </p:spPr>
-        <p:style>
-          <a:lnRef idx="1">
-            <a:schemeClr val="accent1"/>
-          </a:lnRef>
-          <a:fillRef idx="3">
-            <a:schemeClr val="accent1"/>
-          </a:fillRef>
-          <a:effectRef idx="2">
-            <a:schemeClr val="accent1"/>
-          </a:effectRef>
-          <a:fontRef idx="minor">
-            <a:schemeClr val="lt1"/>
-          </a:fontRef>
-        </p:style>
-        <p:txBody>
-          <a:bodyPr rtlCol="0" anchor="ctr"/>
-          <a:lstStyle/>
-          <a:p>
-            <a:pPr algn="ctr"/>
+              <a:t>–   </a:t>
+            </a:r>
+            <a:r>
+              <a:rPr sz="2000" b="1" i="0">
+                <a:solidFill>
+                  <a:srgbClr val="333333"/>
+                </a:solidFill>
+                <a:latin typeface="Calibri"/>
+              </a:rPr>
+              <a:t>10 personas:</a:t>
+            </a:r>
+            <a:r>
+              <a:rPr sz="2000" b="0" i="0">
+                <a:solidFill>
+                  <a:srgbClr val="333333"/>
+                </a:solidFill>
+                <a:latin typeface="Calibri"/>
+              </a:rPr>
+              <a:t> 45 parejas. Se duplicó la gente y se multiplicaron por 4,5 las conversaciones.</a:t>
+            </a:r>
+          </a:p>
+          <a:p>
+            <a:pPr>
+              <a:spcAft>
+                <a:spcPts val="800"/>
+              </a:spcAft>
+            </a:pPr>
+            <a:r>
+              <a:rPr sz="2000" b="0" i="0">
+                <a:solidFill>
+                  <a:srgbClr val="333333"/>
+                </a:solidFill>
+                <a:latin typeface="Calibri"/>
+              </a:rPr>
+              <a:t>–   </a:t>
+            </a:r>
+            <a:r>
+              <a:rPr sz="2000" b="1" i="0">
+                <a:solidFill>
+                  <a:srgbClr val="333333"/>
+                </a:solidFill>
+                <a:latin typeface="Calibri"/>
+              </a:rPr>
+              <a:t>La fórmula:</a:t>
+            </a:r>
+            <a:r>
+              <a:rPr sz="2000" b="0" i="0">
+                <a:solidFill>
+                  <a:srgbClr val="333333"/>
+                </a:solidFill>
+                <a:latin typeface="Calibri"/>
+              </a:rPr>
+              <a:t> n × (n − 1) ÷ 2. Con 20 personas: 190 parejas.</a:t>
+            </a:r>
           </a:p>
         </p:txBody>
       </p:sp>
       <p:sp>
         <p:nvSpPr>
           <p:cNvPr id="20" name="TextBox 19"/>
-          <p:cNvSpPr txBox="1"/>
-          <p:nvPr/>
-        </p:nvSpPr>
-        <p:spPr>
-          <a:xfrm>
-            <a:off x="594360" y="4680813"/>
-            <a:ext cx="438912" cy="438912"/>
-          </a:xfrm>
-          <a:prstGeom prst="rect">
-            <a:avLst/>
-          </a:prstGeom>
-          <a:noFill/>
-        </p:spPr>
-        <p:txBody>
-          <a:bodyPr wrap="square" anchor="ctr"/>
-          <a:lstStyle/>
-          <a:p>
-            <a:pPr algn="ctr"/>
-            <a:r>
-              <a:rPr sz="1600" b="1" i="0">
-                <a:solidFill>
-                  <a:srgbClr val="FFFFFF"/>
-                </a:solidFill>
-                <a:latin typeface="Calibri"/>
-              </a:rPr>
-              <a:t>4</a:t>
-            </a:r>
-          </a:p>
-        </p:txBody>
-      </p:sp>
-      <p:sp>
-        <p:nvSpPr>
-          <p:cNvPr id="21" name="TextBox 20"/>
-          <p:cNvSpPr txBox="1"/>
-          <p:nvPr/>
-        </p:nvSpPr>
-        <p:spPr>
-          <a:xfrm>
-            <a:off x="1188720" y="4537252"/>
-            <a:ext cx="10271455" cy="744321"/>
-          </a:xfrm>
-          <a:prstGeom prst="rect">
-            <a:avLst/>
-          </a:prstGeom>
-          <a:noFill/>
-        </p:spPr>
-        <p:txBody>
-          <a:bodyPr wrap="square" anchor="ctr"/>
-          <a:lstStyle/>
-          <a:p>
-            <a:r>
-              <a:rPr sz="1500" b="1" i="0">
-                <a:solidFill>
-                  <a:srgbClr val="095292"/>
-                </a:solidFill>
-                <a:latin typeface="Calibri"/>
-              </a:rPr>
-              <a:t>La fórmula</a:t>
-            </a:r>
-          </a:p>
-          <a:p>
-            <a:pPr>
-              <a:spcBef>
-                <a:spcPts val="200"/>
-              </a:spcBef>
-            </a:pPr>
-            <a:r>
-              <a:rPr sz="1300" b="0" i="0">
-                <a:solidFill>
-                  <a:srgbClr val="333333"/>
-                </a:solidFill>
-                <a:latin typeface="Calibri"/>
-              </a:rPr>
-              <a:t>n × (n − 1) ÷ 2. Con 20 personas: 190 parejas.</a:t>
-            </a:r>
-          </a:p>
-        </p:txBody>
-      </p:sp>
-      <p:sp>
-        <p:nvSpPr>
-          <p:cNvPr id="22" name="Rounded Rectangle 21"/>
-          <p:cNvSpPr/>
-          <p:nvPr/>
-        </p:nvSpPr>
-        <p:spPr>
-          <a:xfrm>
-            <a:off x="457200" y="5446166"/>
-            <a:ext cx="11277295" cy="908913"/>
-          </a:xfrm>
-          <a:prstGeom prst="roundRect">
-            <a:avLst>
-              <a:gd name="adj" fmla="val 12000"/>
-            </a:avLst>
-          </a:prstGeom>
-          <a:solidFill>
-            <a:srgbClr val="F2F2F2"/>
-          </a:solidFill>
-          <a:ln>
-            <a:noFill/>
-          </a:ln>
-        </p:spPr>
-        <p:style>
-          <a:lnRef idx="1">
-            <a:schemeClr val="accent1"/>
-          </a:lnRef>
-          <a:fillRef idx="3">
-            <a:schemeClr val="accent1"/>
-          </a:fillRef>
-          <a:effectRef idx="2">
-            <a:schemeClr val="accent1"/>
-          </a:effectRef>
-          <a:fontRef idx="minor">
-            <a:schemeClr val="lt1"/>
-          </a:fontRef>
-        </p:style>
-        <p:txBody>
-          <a:bodyPr rtlCol="0" anchor="ctr"/>
-          <a:lstStyle/>
-          <a:p>
-            <a:pPr algn="ctr"/>
-          </a:p>
-        </p:txBody>
-      </p:sp>
-      <p:sp>
-        <p:nvSpPr>
-          <p:cNvPr id="23" name="Rounded Rectangle 22"/>
-          <p:cNvSpPr/>
-          <p:nvPr/>
-        </p:nvSpPr>
-        <p:spPr>
-          <a:xfrm>
-            <a:off x="594360" y="5681167"/>
-            <a:ext cx="438912" cy="438912"/>
-          </a:xfrm>
-          <a:prstGeom prst="roundRect">
-            <a:avLst>
-              <a:gd name="adj" fmla="val 12000"/>
-            </a:avLst>
-          </a:prstGeom>
-          <a:solidFill>
-            <a:srgbClr val="095292"/>
-          </a:solidFill>
-          <a:ln>
-            <a:noFill/>
-          </a:ln>
-        </p:spPr>
-        <p:style>
-          <a:lnRef idx="1">
-            <a:schemeClr val="accent1"/>
-          </a:lnRef>
-          <a:fillRef idx="3">
-            <a:schemeClr val="accent1"/>
-          </a:fillRef>
-          <a:effectRef idx="2">
-            <a:schemeClr val="accent1"/>
-          </a:effectRef>
-          <a:fontRef idx="minor">
-            <a:schemeClr val="lt1"/>
-          </a:fontRef>
-        </p:style>
-        <p:txBody>
-          <a:bodyPr rtlCol="0" anchor="ctr"/>
-          <a:lstStyle/>
-          <a:p>
-            <a:pPr algn="ctr"/>
-          </a:p>
-        </p:txBody>
-      </p:sp>
-      <p:sp>
-        <p:nvSpPr>
-          <p:cNvPr id="24" name="TextBox 23"/>
-          <p:cNvSpPr txBox="1"/>
-          <p:nvPr/>
-        </p:nvSpPr>
-        <p:spPr>
-          <a:xfrm>
-            <a:off x="594360" y="5681167"/>
-            <a:ext cx="438912" cy="438912"/>
-          </a:xfrm>
-          <a:prstGeom prst="rect">
-            <a:avLst/>
-          </a:prstGeom>
-          <a:noFill/>
-        </p:spPr>
-        <p:txBody>
-          <a:bodyPr wrap="square" anchor="ctr"/>
-          <a:lstStyle/>
-          <a:p>
-            <a:pPr algn="ctr"/>
-            <a:r>
-              <a:rPr sz="1600" b="1" i="0">
-                <a:solidFill>
-                  <a:srgbClr val="FFFFFF"/>
-                </a:solidFill>
-                <a:latin typeface="Calibri"/>
-              </a:rPr>
-              <a:t>5</a:t>
-            </a:r>
-          </a:p>
-        </p:txBody>
-      </p:sp>
-      <p:sp>
-        <p:nvSpPr>
-          <p:cNvPr id="25" name="TextBox 24"/>
-          <p:cNvSpPr txBox="1"/>
-          <p:nvPr/>
-        </p:nvSpPr>
-        <p:spPr>
-          <a:xfrm>
-            <a:off x="1188720" y="5537606"/>
-            <a:ext cx="10271455" cy="744321"/>
-          </a:xfrm>
-          <a:prstGeom prst="rect">
-            <a:avLst/>
-          </a:prstGeom>
-          <a:noFill/>
-        </p:spPr>
-        <p:txBody>
-          <a:bodyPr wrap="square" anchor="ctr"/>
-          <a:lstStyle/>
-          <a:p>
-            <a:r>
-              <a:rPr sz="1500" b="1" i="0">
-                <a:solidFill>
-                  <a:srgbClr val="095292"/>
-                </a:solidFill>
-                <a:latin typeface="Calibri"/>
-              </a:rPr>
-              <a:t>La conclusión</a:t>
-            </a:r>
-          </a:p>
-          <a:p>
-            <a:pPr>
-              <a:spcBef>
-                <a:spcPts val="200"/>
-              </a:spcBef>
-            </a:pPr>
-            <a:r>
-              <a:rPr sz="1300" b="0" i="0">
-                <a:solidFill>
-                  <a:srgbClr val="333333"/>
-                </a:solidFill>
-                <a:latin typeface="Calibri"/>
-              </a:rPr>
-              <a:t>Cada persona nueva hay que ponerla al día. Ese tiempo sale del trabajo de los que ya estaban.</a:t>
-            </a:r>
-          </a:p>
-        </p:txBody>
-      </p:sp>
-      <p:sp>
-        <p:nvSpPr>
-          <p:cNvPr id="26" name="TextBox 25"/>
           <p:cNvSpPr txBox="1"/>
           <p:nvPr/>
         </p:nvSpPr>
@@ -12896,6 +12368,195 @@
   <p:clrMapOvr>
     <a:masterClrMapping/>
   </p:clrMapOvr>
+  <p:timing>
+    <p:tnLst>
+      <p:par>
+        <p:cTn id="1" dur="indefinite" restart="never" nodeType="tmRoot">
+          <p:childTnLst>
+            <p:seq concurrent="1" nextAc="seek">
+              <p:cTn id="2" dur="indefinite" nodeType="mainSeq">
+                <p:childTnLst>
+                  <p:par>
+                    <p:cTn id="3" fill="hold">
+                      <p:stCondLst>
+                        <p:cond delay="indefinite"/>
+                      </p:stCondLst>
+                      <p:childTnLst>
+                        <p:par>
+                          <p:cTn id="4" fill="hold">
+                            <p:stCondLst>
+                              <p:cond delay="0"/>
+                            </p:stCondLst>
+                            <p:childTnLst>
+                              <p:par>
+                                <p:cTn id="5" presetID="10" presetClass="entr" presetSubtype="0" fill="hold" nodeType="clickEffect">
+                                  <p:stCondLst>
+                                    <p:cond delay="0"/>
+                                  </p:stCondLst>
+                                  <p:childTnLst>
+                                    <p:set>
+                                      <p:cBhvr>
+                                        <p:cTn id="6" dur="1" fill="hold">
+                                          <p:stCondLst>
+                                            <p:cond delay="0"/>
+                                          </p:stCondLst>
+                                        </p:cTn>
+                                        <p:tgtEl>
+                                          <p:spTgt spid="8"/>
+                                        </p:tgtEl>
+                                        <p:attrNameLst>
+                                          <p:attrName>style.visibility</p:attrName>
+                                        </p:attrNameLst>
+                                      </p:cBhvr>
+                                      <p:to>
+                                        <p:strVal val="visible"/>
+                                      </p:to>
+                                    </p:set>
+                                    <p:animEffect transition="in" filter="fade">
+                                      <p:cBhvr>
+                                        <p:cTn id="7" dur="450"/>
+                                        <p:tgtEl>
+                                          <p:spTgt spid="8"/>
+                                        </p:tgtEl>
+                                      </p:cBhvr>
+                                    </p:animEffect>
+                                  </p:childTnLst>
+                                </p:cTn>
+                              </p:par>
+                            </p:childTnLst>
+                          </p:cTn>
+                        </p:par>
+                      </p:childTnLst>
+                    </p:cTn>
+                  </p:par>
+                  <p:par>
+                    <p:cTn id="8" fill="hold">
+                      <p:stCondLst>
+                        <p:cond delay="indefinite"/>
+                      </p:stCondLst>
+                      <p:childTnLst>
+                        <p:par>
+                          <p:cTn id="9" fill="hold">
+                            <p:stCondLst>
+                              <p:cond delay="0"/>
+                            </p:stCondLst>
+                            <p:childTnLst>
+                              <p:par>
+                                <p:cTn id="10" presetID="10" presetClass="entr" presetSubtype="0" fill="hold" nodeType="clickEffect">
+                                  <p:stCondLst>
+                                    <p:cond delay="0"/>
+                                  </p:stCondLst>
+                                  <p:childTnLst>
+                                    <p:set>
+                                      <p:cBhvr>
+                                        <p:cTn id="11" dur="1" fill="hold">
+                                          <p:stCondLst>
+                                            <p:cond delay="0"/>
+                                          </p:stCondLst>
+                                        </p:cTn>
+                                        <p:tgtEl>
+                                          <p:spTgt spid="9"/>
+                                        </p:tgtEl>
+                                        <p:attrNameLst>
+                                          <p:attrName>style.visibility</p:attrName>
+                                        </p:attrNameLst>
+                                      </p:cBhvr>
+                                      <p:to>
+                                        <p:strVal val="visible"/>
+                                      </p:to>
+                                    </p:set>
+                                    <p:animEffect transition="in" filter="fade">
+                                      <p:cBhvr>
+                                        <p:cTn id="12" dur="450"/>
+                                        <p:tgtEl>
+                                          <p:spTgt spid="9"/>
+                                        </p:tgtEl>
+                                      </p:cBhvr>
+                                    </p:animEffect>
+                                  </p:childTnLst>
+                                </p:cTn>
+                              </p:par>
+                            </p:childTnLst>
+                          </p:cTn>
+                        </p:par>
+                      </p:childTnLst>
+                    </p:cTn>
+                  </p:par>
+                  <p:par>
+                    <p:cTn id="13" fill="hold">
+                      <p:stCondLst>
+                        <p:cond delay="indefinite"/>
+                      </p:stCondLst>
+                      <p:childTnLst>
+                        <p:par>
+                          <p:cTn id="14" fill="hold">
+                            <p:stCondLst>
+                              <p:cond delay="0"/>
+                            </p:stCondLst>
+                            <p:childTnLst>
+                              <p:par>
+                                <p:cTn id="15" presetID="10" presetClass="entr" presetSubtype="0" fill="hold" nodeType="clickEffect">
+                                  <p:stCondLst>
+                                    <p:cond delay="0"/>
+                                  </p:stCondLst>
+                                  <p:childTnLst>
+                                    <p:set>
+                                      <p:cBhvr>
+                                        <p:cTn id="16" dur="1" fill="hold">
+                                          <p:stCondLst>
+                                            <p:cond delay="0"/>
+                                          </p:stCondLst>
+                                        </p:cTn>
+                                        <p:tgtEl>
+                                          <p:spTgt spid="10"/>
+                                        </p:tgtEl>
+                                        <p:attrNameLst>
+                                          <p:attrName>style.visibility</p:attrName>
+                                        </p:attrNameLst>
+                                      </p:cBhvr>
+                                      <p:to>
+                                        <p:strVal val="visible"/>
+                                      </p:to>
+                                    </p:set>
+                                    <p:animEffect transition="in" filter="fade">
+                                      <p:cBhvr>
+                                        <p:cTn id="17" dur="450"/>
+                                        <p:tgtEl>
+                                          <p:spTgt spid="10"/>
+                                        </p:tgtEl>
+                                      </p:cBhvr>
+                                    </p:animEffect>
+                                  </p:childTnLst>
+                                </p:cTn>
+                              </p:par>
+                            </p:childTnLst>
+                          </p:cTn>
+                        </p:par>
+                      </p:childTnLst>
+                    </p:cTn>
+                  </p:par>
+                </p:childTnLst>
+              </p:cTn>
+              <p:prevCondLst>
+                <p:cond evt="onPrev" delay="0">
+                  <p:tgtEl>
+                    <p:sldTgt/>
+                  </p:tgtEl>
+                </p:cond>
+              </p:prevCondLst>
+              <p:nextCondLst>
+                <p:cond evt="onNext" delay="0">
+                  <p:tgtEl>
+                    <p:sldTgt/>
+                  </p:tgtEl>
+                </p:cond>
+              </p:nextCondLst>
+            </p:seq>
+          </p:childTnLst>
+        </p:cTn>
+      </p:par>
+    </p:tnLst>
+  </p:timing>
 </p:sld>
 </file>
 

--- a/Introduccion a la Ingenieria/Clases/Clase 2 - Historia y evolucion de la Ingenieria/Presentacion.pptx
+++ b/Introduccion a la Ingenieria/Clases/Clase 2 - Historia y evolucion de la Ingenieria/Presentacion.pptx
@@ -584,67 +584,7 @@
           <a:lstStyle/>
           <a:p>
             <a:r>
-              <a:t>TEXTO COMPLETO DE LA LÁMINA (se proyecta resumido):</a:t>
-            </a:r>
-          </a:p>
-          <a:p/>
-          <a:p>
-            <a:r>
-              <a:t>Años 40 y 50: el cuello de botella es el hardware. Programar es escribir instrucciones para una máquina concreta, y el trabajo es de una persona o de unas pocas.</a:t>
-            </a:r>
-          </a:p>
-          <a:p/>
-          <a:p>
-            <a:r>
-              <a:t>Años 60: el hardware se abarata y crece, y aparecen sistemas que necesitan cientos de personas y años de trabajo. Ahí el cuello de botella se muda: ya no es la máquina, es coordinar el trabajo humano.</a:t>
-            </a:r>
-          </a:p>
-          <a:p/>
-          <a:p>
-            <a:r>
-              <a:t>El sistema de reservas SABRE, el software del programa Apollo y el sistema operativo OS/360 de IBM son los tres casos que hicieron visible el problema: se pasaron de plazo y de presupuesto de forma escandalosa.</a:t>
-            </a:r>
-          </a:p>
-          <a:p/>
-          <a:p>
-            <a:r>
-              <a:t>1968: la OTAN convoca una conferencia en Garmisch (Alemania) para hablar de eso y se acuña el término «ingeniería de software». El nombre es una propuesta: si construir software se parece a construir un puente, entonces necesita método, no talento individual.</a:t>
-            </a:r>
-          </a:p>
-          <a:p/>
-          <a:p>
-            <a:r>
-              <a:t>Ahí nace la disciplina: no de un invento, sino del reconocimiento público de que el trabajo se estaba haciendo mal y nadie sabía cómo hacerlo bien.</a:t>
-            </a:r>
-          </a:p>
-          <a:p/>
-          <a:p>
-            <a:r>
-              <a:t>POR QUÉ LA DISCIPLINA NACE DE UN FRACASO Y NO DE UN INVENTO</a:t>
-            </a:r>
-          </a:p>
-          <a:p/>
-          <a:p>
-            <a:r>
-              <a:t>Hay una diferencia grande entre contar la historia de la informática y contar la historia de la ingeniería de sistemas. La primera es una historia de máquinas: válvulas, transistores, circuitos integrados, microprocesadores. Es la que el estudiante espera y es la menos útil, porque sugiere que el progreso viene del hardware. La segunda es una historia de fracasos de organización, y es la que explica por qué existe la carrera que el estudiante está empezando.</a:t>
-            </a:r>
-          </a:p>
-          <a:p/>
-          <a:p>
-            <a:r>
-              <a:t>En los años cuarenta y cincuenta el cuello de botella era la máquina. Programar el ENIAC significaba reconfigurar cables físicamente; escribir en lenguaje de máquina era lento porque la máquina era lo escaso y lo caro. Fortran (1957) y COBOL (1959) atacan exactamente ese problema: permitir decirle algo a la máquina sin hablar su idioma. Hasta aquí el trabajo lo hace una persona o un puñado de personas, y el método no importa mucho porque el problema cabe en una cabeza.</a:t>
-            </a:r>
-          </a:p>
-          <a:p/>
-          <a:p>
-            <a:r>
-              <a:t>En los años sesenta pasa algo que cambia la naturaleza del problema: el hardware se abarata y se vuelve más capaz, y entonces se vuelven pensables sistemas que antes no lo eran. El sistema de reservas aéreas SABRE, el software de navegación del programa Apollo, el sistema operativo OS/360 de IBM. Son proyectos de cientos y hasta miles de personas y de varios años. Y fracasan de forma espectacular en plazo y en costo, no porque las máquinas fueran lentas, sino porque nadie sabía cómo coordinar a mil personas construyendo una sola cosa que nadie puede ver ni tocar. Fred Brooks, que dirigió el OS/360, escribió después el libro que explica por qué.</a:t>
-            </a:r>
-          </a:p>
-          <a:p/>
-          <a:p>
-            <a:r>
-              <a:t>En 1968 la OTAN convoca una conferencia en Garmisch para hablar del asunto, y ahí se populariza el término «ingeniería de software». Vale la pena detenerse en que el término era una propuesta, casi una provocación: si construir software se parece a construir un puente, entonces debería tener método, estándares, mediciones y responsabilidad profesional, en vez de depender del talento de individuos. Ese es el momento fundacional que el estudiante tiene que recordar: la disciplina no nace de una máquina nueva, nace del reconocimiento público de que se estaba trabajando mal.</a:t>
+              <a:t>Haga la cuenta en voz alta con el grupo antes de mostrar los números: pregunte cuántas parejas hay con 5 personas y deje que la calculen. Es aritmética de bachillerato y es lo que hace que la idea se quede.</a:t>
             </a:r>
           </a:p>
         </p:txBody>
@@ -714,7 +654,7 @@
           <a:lstStyle/>
           <a:p>
             <a:r>
-              <a:t>Haga la cuenta en voz alta con el grupo antes de mostrar los números: pregunte cuántas parejas hay con 5 personas y deje que la calculen. Es aritmética de bachillerato y es lo que hace que la idea se quede.</a:t>
+              <a:t>Insista en que la cuarta pregunta es la que se califica: «Brooks dijo que agregar gente atrasa» está bien pero no muestra que lo entendieron. La cuarta obliga a conectarlo con algo que les pasó a ellos.</a:t>
             </a:r>
           </a:p>
         </p:txBody>
@@ -784,7 +724,19 @@
           <a:lstStyle/>
           <a:p>
             <a:r>
-              <a:t>Insista en que la cuarta pregunta es la que se califica: «Brooks dijo que agregar gente atrasa» está bien pero no muestra que lo entendieron. La cuarta obliga a conectarlo con algo que les pasó a ellos.</a:t>
+              <a:t>LA PREGUNTA DE ENTRADA Y PARA QUÉ SIRVE INCOMODAR CON UNA FECHA</a:t>
+            </a:r>
+          </a:p>
+          <a:p/>
+          <a:p>
+            <a:r>
+              <a:t>La pregunta de apertura —«un proyecto de software se pasa del plazo y del presupuesto, ¿es un problema de 2026 o de 1968?»— está formulada para producir una respuesta equivocada. Casi todo el grupo va a decir que es de 2026, porque la intuición de un estudiante de primer semestre es que la historia de la tecnología es una escalera: cada década resuelve los problemas de la anterior. Esa intuición es la que hay que romper hoy, porque de ella se deriva una creencia más dañina: que basta con aprender la herramienta nueva.</a:t>
+            </a:r>
+          </a:p>
+          <a:p/>
+          <a:p>
+            <a:r>
+              <a:t>Los primeros diez minutos, mientras se conectan, sirven para recoger esas respuestas en el muro. No hay que corregir ninguna. En el minuto 25, cuando ya esté contada la conferencia de Garmisch de 1968, se vuelve al muro y se lee en voz alta lo que escribieron. El contraste hace el trabajo solo: el problema que el grupo cree contemporáneo tiene casi sesenta años y un nombre propio.</a:t>
             </a:r>
           </a:p>
         </p:txBody>
@@ -854,19 +806,31 @@
           <a:lstStyle/>
           <a:p>
             <a:r>
-              <a:t>LA PREGUNTA DE ENTRADA Y PARA QUÉ SIRVE INCOMODAR CON UNA FECHA</a:t>
+              <a:t>POR QUÉ LA DISCIPLINA NACE DE UN FRACASO Y NO DE UN INVENTO</a:t>
             </a:r>
           </a:p>
           <a:p/>
           <a:p>
             <a:r>
-              <a:t>La pregunta de apertura —«un proyecto de software se pasa del plazo y del presupuesto, ¿es un problema de 2026 o de 1968?»— está formulada para producir una respuesta equivocada. Casi todo el grupo va a decir que es de 2026, porque la intuición de un estudiante de primer semestre es que la historia de la tecnología es una escalera: cada década resuelve los problemas de la anterior. Esa intuición es la que hay que romper hoy, porque de ella se deriva una creencia más dañina: que basta con aprender la herramienta nueva.</a:t>
+              <a:t>Hay una diferencia grande entre contar la historia de la informática y contar la historia de la ingeniería de sistemas. La primera es una historia de máquinas: válvulas, transistores, circuitos integrados, microprocesadores. Es la que el estudiante espera y es la menos útil, porque sugiere que el progreso viene del hardware. La segunda es una historia de fracasos de organización, y es la que explica por qué existe la carrera que el estudiante está empezando.</a:t>
             </a:r>
           </a:p>
           <a:p/>
           <a:p>
             <a:r>
-              <a:t>Los primeros diez minutos, mientras se conectan, sirven para recoger esas respuestas en el muro. No hay que corregir ninguna. En el minuto 25, cuando ya esté contada la conferencia de Garmisch de 1968, se vuelve al muro y se lee en voz alta lo que escribieron. El contraste hace el trabajo solo: el problema que el grupo cree contemporáneo tiene casi sesenta años y un nombre propio.</a:t>
+              <a:t>En los años cuarenta y cincuenta el cuello de botella era la máquina. Programar el ENIAC significaba reconfigurar cables físicamente; escribir en lenguaje de máquina era lento porque la máquina era lo escaso y lo caro. Fortran (1957) y COBOL (1959) atacan exactamente ese problema: permitir decirle algo a la máquina sin hablar su idioma. Hasta aquí el trabajo lo hace una persona o un puñado de personas, y el método no importa mucho porque el problema cabe en una cabeza.</a:t>
+            </a:r>
+          </a:p>
+          <a:p/>
+          <a:p>
+            <a:r>
+              <a:t>En los años sesenta pasa algo que cambia la naturaleza del problema: el hardware se abarata y se vuelve más capaz, y entonces se vuelven pensables sistemas que antes no lo eran. El sistema de reservas aéreas SABRE, el software de navegación del programa Apollo, el sistema operativo OS/360 de IBM. Son proyectos de cientos y hasta miles de personas y de varios años. Y fracasan de forma espectacular en plazo y en costo, no porque las máquinas fueran lentas, sino porque nadie sabía cómo coordinar a mil personas construyendo una sola cosa que nadie puede ver ni tocar. Fred Brooks, que dirigió el OS/360, escribió después el libro que explica por qué.</a:t>
+            </a:r>
+          </a:p>
+          <a:p/>
+          <a:p>
+            <a:r>
+              <a:t>En 1968 la OTAN convoca una conferencia en Garmisch para hablar del asunto, y ahí se populariza el término «ingeniería de software». Vale la pena detenerse en que el término era una propuesta, casi una provocación: si construir software se parece a construir un puente, entonces debería tener método, estándares, mediciones y responsabilidad profesional, en vez de depender del talento de individuos. Ese es el momento fundacional que el estudiante tiene que recordar: la disciplina no nace de una máquina nueva, nace del reconocimiento público de que se estaba trabajando mal.</a:t>
             </a:r>
           </a:p>
         </p:txBody>
@@ -8135,118 +8099,14 @@
       </p:sp>
       <p:sp>
         <p:nvSpPr>
-          <p:cNvPr id="5" name="Rounded Rectangle 4"/>
-          <p:cNvSpPr/>
-          <p:nvPr/>
-        </p:nvSpPr>
-        <p:spPr>
-          <a:xfrm>
-            <a:off x="5797149" y="1573813"/>
-            <a:ext cx="6010497" cy="4057845"/>
-          </a:xfrm>
-          <a:prstGeom prst="roundRect">
-            <a:avLst>
-              <a:gd name="adj" fmla="val 4000"/>
-            </a:avLst>
-          </a:prstGeom>
-          <a:solidFill>
-            <a:srgbClr val="E8EEF4"/>
-          </a:solidFill>
-          <a:ln>
-            <a:noFill/>
-          </a:ln>
-        </p:spPr>
-        <p:style>
-          <a:lnRef idx="1">
-            <a:schemeClr val="accent1"/>
-          </a:lnRef>
-          <a:fillRef idx="3">
-            <a:schemeClr val="accent1"/>
-          </a:fillRef>
-          <a:effectRef idx="2">
-            <a:schemeClr val="accent1"/>
-          </a:effectRef>
-          <a:fontRef idx="minor">
-            <a:schemeClr val="lt1"/>
-          </a:fontRef>
-        </p:style>
-        <p:txBody>
-          <a:bodyPr rtlCol="0" anchor="ctr"/>
-          <a:lstStyle/>
-          <a:p>
-            <a:pPr algn="ctr"/>
-          </a:p>
-        </p:txBody>
-      </p:sp>
-      <p:pic>
-        <p:nvPicPr>
-          <p:cNvPr id="6" name="Picture 5" descr="students-learning-laptops-classroom.jpg"/>
-          <p:cNvPicPr>
-            <a:picLocks noChangeAspect="1"/>
-          </p:cNvPicPr>
-          <p:nvPr/>
-        </p:nvPicPr>
-        <p:blipFill>
-          <a:blip r:embed="rId2"/>
-          <a:stretch>
-            <a:fillRect/>
-          </a:stretch>
-        </p:blipFill>
-        <p:spPr>
-          <a:xfrm>
-            <a:off x="5870301" y="1646965"/>
-            <a:ext cx="5864193" cy="3911541"/>
-          </a:xfrm>
-          <a:prstGeom prst="rect">
-            <a:avLst/>
-          </a:prstGeom>
-        </p:spPr>
-      </p:pic>
-      <p:sp>
-        <p:nvSpPr>
-          <p:cNvPr id="7" name="TextBox 6"/>
+          <p:cNvPr id="5" name="TextBox 4"/>
           <p:cNvSpPr txBox="1"/>
           <p:nvPr/>
         </p:nvSpPr>
         <p:spPr>
           <a:xfrm>
-            <a:off x="5870301" y="5961888"/>
-            <a:ext cx="5864193" cy="320040"/>
-          </a:xfrm>
-          <a:prstGeom prst="rect">
-            <a:avLst/>
-          </a:prstGeom>
-          <a:noFill/>
-        </p:spPr>
-        <p:txBody>
-          <a:bodyPr wrap="square">
-            <a:spAutoFit/>
-          </a:bodyPr>
-          <a:lstStyle/>
-          <a:p>
-            <a:pPr algn="ctr"/>
-            <a:r>
-              <a:rPr sz="1100" b="0" i="1">
-                <a:solidFill>
-                  <a:srgbClr val="666666"/>
-                </a:solidFill>
-                <a:latin typeface="Calibri"/>
-              </a:rPr>
-              <a:t>Foto: Mikhail Nilov · Pexels</a:t>
-            </a:r>
-          </a:p>
-        </p:txBody>
-      </p:sp>
-      <p:sp>
-        <p:nvSpPr>
-          <p:cNvPr id="8" name="TextBox 7"/>
-          <p:cNvSpPr txBox="1"/>
-          <p:nvPr/>
-        </p:nvSpPr>
-        <p:spPr>
-          <a:xfrm>
-            <a:off x="457200" y="1353312"/>
-            <a:ext cx="5093061" cy="5047488"/>
+            <a:off x="457200" y="1170432"/>
+            <a:ext cx="11277295" cy="5230368"/>
           </a:xfrm>
           <a:prstGeom prst="rect">
             <a:avLst/>
@@ -8398,7 +8258,7 @@
       </p:sp>
       <p:sp>
         <p:nvSpPr>
-          <p:cNvPr id="9" name="TextBox 8"/>
+          <p:cNvPr id="6" name="TextBox 5"/>
           <p:cNvSpPr txBox="1"/>
           <p:nvPr/>
         </p:nvSpPr>
@@ -10290,118 +10150,14 @@
       </p:sp>
       <p:sp>
         <p:nvSpPr>
-          <p:cNvPr id="5" name="Rounded Rectangle 4"/>
-          <p:cNvSpPr/>
-          <p:nvPr/>
-        </p:nvSpPr>
-        <p:spPr>
-          <a:xfrm>
-            <a:off x="5797149" y="1573813"/>
-            <a:ext cx="6010497" cy="4057845"/>
-          </a:xfrm>
-          <a:prstGeom prst="roundRect">
-            <a:avLst>
-              <a:gd name="adj" fmla="val 4000"/>
-            </a:avLst>
-          </a:prstGeom>
-          <a:solidFill>
-            <a:srgbClr val="E8EEF4"/>
-          </a:solidFill>
-          <a:ln>
-            <a:noFill/>
-          </a:ln>
-        </p:spPr>
-        <p:style>
-          <a:lnRef idx="1">
-            <a:schemeClr val="accent1"/>
-          </a:lnRef>
-          <a:fillRef idx="3">
-            <a:schemeClr val="accent1"/>
-          </a:fillRef>
-          <a:effectRef idx="2">
-            <a:schemeClr val="accent1"/>
-          </a:effectRef>
-          <a:fontRef idx="minor">
-            <a:schemeClr val="lt1"/>
-          </a:fontRef>
-        </p:style>
-        <p:txBody>
-          <a:bodyPr rtlCol="0" anchor="ctr"/>
-          <a:lstStyle/>
-          <a:p>
-            <a:pPr algn="ctr"/>
-          </a:p>
-        </p:txBody>
-      </p:sp>
-      <p:pic>
-        <p:nvPicPr>
-          <p:cNvPr id="6" name="Picture 5" descr="vintage-computer-mainframe.jpg"/>
-          <p:cNvPicPr>
-            <a:picLocks noChangeAspect="1"/>
-          </p:cNvPicPr>
-          <p:nvPr/>
-        </p:nvPicPr>
-        <p:blipFill>
-          <a:blip r:embed="rId2"/>
-          <a:stretch>
-            <a:fillRect/>
-          </a:stretch>
-        </p:blipFill>
-        <p:spPr>
-          <a:xfrm>
-            <a:off x="5870301" y="1646965"/>
-            <a:ext cx="5864193" cy="3911541"/>
-          </a:xfrm>
-          <a:prstGeom prst="rect">
-            <a:avLst/>
-          </a:prstGeom>
-        </p:spPr>
-      </p:pic>
-      <p:sp>
-        <p:nvSpPr>
-          <p:cNvPr id="7" name="TextBox 6"/>
+          <p:cNvPr id="5" name="TextBox 4"/>
           <p:cNvSpPr txBox="1"/>
           <p:nvPr/>
         </p:nvSpPr>
         <p:spPr>
           <a:xfrm>
-            <a:off x="5870301" y="5961888"/>
-            <a:ext cx="5864193" cy="320040"/>
-          </a:xfrm>
-          <a:prstGeom prst="rect">
-            <a:avLst/>
-          </a:prstGeom>
-          <a:noFill/>
-        </p:spPr>
-        <p:txBody>
-          <a:bodyPr wrap="square">
-            <a:spAutoFit/>
-          </a:bodyPr>
-          <a:lstStyle/>
-          <a:p>
-            <a:pPr algn="ctr"/>
-            <a:r>
-              <a:rPr sz="1100" b="0" i="1">
-                <a:solidFill>
-                  <a:srgbClr val="666666"/>
-                </a:solidFill>
-                <a:latin typeface="Calibri"/>
-              </a:rPr>
-              <a:t>Foto: Nicolas  Foster · Pexels</a:t>
-            </a:r>
-          </a:p>
-        </p:txBody>
-      </p:sp>
-      <p:sp>
-        <p:nvSpPr>
-          <p:cNvPr id="8" name="TextBox 7"/>
-          <p:cNvSpPr txBox="1"/>
-          <p:nvPr/>
-        </p:nvSpPr>
-        <p:spPr>
-          <a:xfrm>
-            <a:off x="457200" y="1353312"/>
-            <a:ext cx="5093061" cy="5047488"/>
+            <a:off x="457200" y="1170432"/>
+            <a:ext cx="11277295" cy="5230368"/>
           </a:xfrm>
           <a:prstGeom prst="rect">
             <a:avLst/>
@@ -10462,7 +10218,7 @@
                 </a:solidFill>
                 <a:latin typeface="Calibri"/>
               </a:rPr>
-              <a:t>.</a:t>
+              <a:t>. Programar es escribir instrucciones para una máquina concreta, y el trabajo es de una persona o de unas pocas.</a:t>
             </a:r>
           </a:p>
           <a:p>
@@ -10514,6 +10270,24 @@
                 </a:solidFill>
                 <a:latin typeface="Calibri"/>
               </a:rPr>
+              <a:t>. Ahí el cuello de botella se muda: ya no es la máquina, es </a:t>
+            </a:r>
+            <a:r>
+              <a:rPr sz="2000" b="1" i="0">
+                <a:solidFill>
+                  <a:srgbClr val="333333"/>
+                </a:solidFill>
+                <a:latin typeface="Calibri"/>
+              </a:rPr>
+              <a:t>coordinar el trabajo humano</a:t>
+            </a:r>
+            <a:r>
+              <a:rPr sz="2000" b="0" i="0">
+                <a:solidFill>
+                  <a:srgbClr val="333333"/>
+                </a:solidFill>
+                <a:latin typeface="Calibri"/>
+              </a:rPr>
               <a:t>.</a:t>
             </a:r>
           </a:p>
@@ -10530,14 +10304,136 @@
                 </a:solidFill>
                 <a:latin typeface="Calibri"/>
               </a:rPr>
-              <a:t>–   El sistema de reservas SABRE, el software del programa Apollo y el sistema operativo OS/360 de IBM son los tres casos que hicieron visible el…</a:t>
-            </a:r>
-          </a:p>
-        </p:txBody>
-      </p:sp>
-      <p:sp>
-        <p:nvSpPr>
-          <p:cNvPr id="9" name="TextBox 8"/>
+              <a:t>–   El sistema de reservas SABRE, el software del programa Apollo y el sistema operativo OS/360 de IBM son los tres casos que hicieron visible el problema: </a:t>
+            </a:r>
+            <a:r>
+              <a:rPr sz="2000" b="1" i="0">
+                <a:solidFill>
+                  <a:srgbClr val="333333"/>
+                </a:solidFill>
+                <a:latin typeface="Calibri"/>
+              </a:rPr>
+              <a:t>se pasaron de plazo y de presupuesto de forma escandalosa</a:t>
+            </a:r>
+            <a:r>
+              <a:rPr sz="2000" b="0" i="0">
+                <a:solidFill>
+                  <a:srgbClr val="333333"/>
+                </a:solidFill>
+                <a:latin typeface="Calibri"/>
+              </a:rPr>
+              <a:t>.</a:t>
+            </a:r>
+          </a:p>
+          <a:p>
+            <a:pPr>
+              <a:spcAft>
+                <a:spcPts val="800"/>
+              </a:spcAft>
+            </a:pPr>
+            <a:r>
+              <a:rPr sz="2000" b="0" i="0">
+                <a:solidFill>
+                  <a:srgbClr val="333333"/>
+                </a:solidFill>
+                <a:latin typeface="Calibri"/>
+              </a:rPr>
+              <a:t>–   </a:t>
+            </a:r>
+            <a:r>
+              <a:rPr sz="2000" b="1" i="0">
+                <a:solidFill>
+                  <a:srgbClr val="333333"/>
+                </a:solidFill>
+                <a:latin typeface="Calibri"/>
+              </a:rPr>
+              <a:t>1968:</a:t>
+            </a:r>
+            <a:r>
+              <a:rPr sz="2000" b="0" i="0">
+                <a:solidFill>
+                  <a:srgbClr val="333333"/>
+                </a:solidFill>
+                <a:latin typeface="Calibri"/>
+              </a:rPr>
+              <a:t> la OTAN convoca una conferencia en Garmisch (Alemania) para hablar de eso y se acuña el término </a:t>
+            </a:r>
+            <a:r>
+              <a:rPr sz="2000" b="1" i="0">
+                <a:solidFill>
+                  <a:srgbClr val="333333"/>
+                </a:solidFill>
+                <a:latin typeface="Calibri"/>
+              </a:rPr>
+              <a:t>«ingeniería de software»</a:t>
+            </a:r>
+            <a:r>
+              <a:rPr sz="2000" b="0" i="0">
+                <a:solidFill>
+                  <a:srgbClr val="333333"/>
+                </a:solidFill>
+                <a:latin typeface="Calibri"/>
+              </a:rPr>
+              <a:t>. El nombre es una propuesta: si construir software se parece a construir un puente, entonces necesita </a:t>
+            </a:r>
+            <a:r>
+              <a:rPr sz="2000" b="1" i="0">
+                <a:solidFill>
+                  <a:srgbClr val="333333"/>
+                </a:solidFill>
+                <a:latin typeface="Calibri"/>
+              </a:rPr>
+              <a:t>método, no talento individual</a:t>
+            </a:r>
+            <a:r>
+              <a:rPr sz="2000" b="0" i="0">
+                <a:solidFill>
+                  <a:srgbClr val="333333"/>
+                </a:solidFill>
+                <a:latin typeface="Calibri"/>
+              </a:rPr>
+              <a:t>.</a:t>
+            </a:r>
+          </a:p>
+          <a:p>
+            <a:pPr>
+              <a:spcAft>
+                <a:spcPts val="800"/>
+              </a:spcAft>
+            </a:pPr>
+            <a:r>
+              <a:rPr sz="2000" b="0" i="0">
+                <a:solidFill>
+                  <a:srgbClr val="333333"/>
+                </a:solidFill>
+                <a:latin typeface="Calibri"/>
+              </a:rPr>
+              <a:t>–   </a:t>
+            </a:r>
+            <a:r>
+              <a:rPr sz="2000" b="1" i="0">
+                <a:solidFill>
+                  <a:srgbClr val="333333"/>
+                </a:solidFill>
+                <a:latin typeface="Calibri"/>
+              </a:rPr>
+              <a:t>Ahí nace la disciplina:</a:t>
+            </a:r>
+            <a:r>
+              <a:rPr sz="2000" b="0" i="0">
+                <a:solidFill>
+                  <a:srgbClr val="333333"/>
+                </a:solidFill>
+                <a:latin typeface="Calibri"/>
+              </a:rPr>
+              <a:t> no de un invento, sino del reconocimiento público de que el trabajo se estaba haciendo mal y nadie sabía cómo hacerlo bien.</a:t>
+            </a:r>
+          </a:p>
+        </p:txBody>
+      </p:sp>
+      <p:sp>
+        <p:nvSpPr>
+          <p:cNvPr id="6" name="TextBox 5"/>
           <p:cNvSpPr txBox="1"/>
           <p:nvPr/>
         </p:nvSpPr>

--- a/Introduccion a la Ingenieria/Clases/Clase 2 - Historia y evolucion de la Ingenieria/Presentacion.pptx
+++ b/Introduccion a la Ingenieria/Clases/Clase 2 - Historia y evolucion de la Ingenieria/Presentacion.pptx
@@ -584,7 +584,67 @@
           <a:lstStyle/>
           <a:p>
             <a:r>
-              <a:t>Haga la cuenta en voz alta con el grupo antes de mostrar los números: pregunte cuántas parejas hay con 5 personas y deje que la calculen. Es aritmética de bachillerato y es lo que hace que la idea se quede.</a:t>
+              <a:t>TEXTO COMPLETO DE LA LÁMINA (se proyecta resumido):</a:t>
+            </a:r>
+          </a:p>
+          <a:p/>
+          <a:p>
+            <a:r>
+              <a:t>Años 40 y 50: el cuello de botella es el hardware. Programar es escribir instrucciones para una máquina concreta, y el trabajo es de una persona o de unas pocas.</a:t>
+            </a:r>
+          </a:p>
+          <a:p/>
+          <a:p>
+            <a:r>
+              <a:t>Años 60: el hardware se abarata y crece, y aparecen sistemas que necesitan cientos de personas y años de trabajo. Ahí el cuello de botella se muda: ya no es la máquina, es coordinar el trabajo humano.</a:t>
+            </a:r>
+          </a:p>
+          <a:p/>
+          <a:p>
+            <a:r>
+              <a:t>El sistema de reservas SABRE, el software del programa Apollo y el sistema operativo OS/360 de IBM son los tres casos que hicieron visible el problema: se pasaron de plazo y de presupuesto de forma escandalosa.</a:t>
+            </a:r>
+          </a:p>
+          <a:p/>
+          <a:p>
+            <a:r>
+              <a:t>1968: la OTAN convoca una conferencia en Garmisch (Alemania) para hablar de eso y se acuña el término «ingeniería de software». El nombre es una propuesta: si construir software se parece a construir un puente, entonces necesita método, no talento individual.</a:t>
+            </a:r>
+          </a:p>
+          <a:p/>
+          <a:p>
+            <a:r>
+              <a:t>Ahí nace la disciplina: no de un invento, sino del reconocimiento público de que el trabajo se estaba haciendo mal y nadie sabía cómo hacerlo bien.</a:t>
+            </a:r>
+          </a:p>
+          <a:p/>
+          <a:p>
+            <a:r>
+              <a:t>POR QUÉ LA DISCIPLINA NACE DE UN FRACASO Y NO DE UN INVENTO</a:t>
+            </a:r>
+          </a:p>
+          <a:p/>
+          <a:p>
+            <a:r>
+              <a:t>Hay una diferencia grande entre contar la historia de la informática y contar la historia de la ingeniería de sistemas. La primera es una historia de máquinas: válvulas, transistores, circuitos integrados, microprocesadores. Es la que el estudiante espera y es la menos útil, porque sugiere que el progreso viene del hardware. La segunda es una historia de fracasos de organización, y es la que explica por qué existe la carrera que el estudiante está empezando.</a:t>
+            </a:r>
+          </a:p>
+          <a:p/>
+          <a:p>
+            <a:r>
+              <a:t>En los años cuarenta y cincuenta el cuello de botella era la máquina. Programar el ENIAC significaba reconfigurar cables físicamente; escribir en lenguaje de máquina era lento porque la máquina era lo escaso y lo caro. Fortran (1957) y COBOL (1959) atacan exactamente ese problema: permitir decirle algo a la máquina sin hablar su idioma. Hasta aquí el trabajo lo hace una persona o un puñado de personas, y el método no importa mucho porque el problema cabe en una cabeza.</a:t>
+            </a:r>
+          </a:p>
+          <a:p/>
+          <a:p>
+            <a:r>
+              <a:t>En los años sesenta pasa algo que cambia la naturaleza del problema: el hardware se abarata y se vuelve más capaz, y entonces se vuelven pensables sistemas que antes no lo eran. El sistema de reservas aéreas SABRE, el software de navegación del programa Apollo, el sistema operativo OS/360 de IBM. Son proyectos de cientos y hasta miles de personas y de varios años. Y fracasan de forma espectacular en plazo y en costo, no porque las máquinas fueran lentas, sino porque nadie sabía cómo coordinar a mil personas construyendo una sola cosa que nadie puede ver ni tocar. Fred Brooks, que dirigió el OS/360, escribió después el libro que explica por qué.</a:t>
+            </a:r>
+          </a:p>
+          <a:p/>
+          <a:p>
+            <a:r>
+              <a:t>En 1968 la OTAN convoca una conferencia en Garmisch para hablar del asunto, y ahí se populariza el término «ingeniería de software». Vale la pena detenerse en que el término era una propuesta, casi una provocación: si construir software se parece a construir un puente, entonces debería tener método, estándares, mediciones y responsabilidad profesional, en vez de depender del talento de individuos. Ese es el momento fundacional que el estudiante tiene que recordar: la disciplina no nace de una máquina nueva, nace del reconocimiento público de que se estaba trabajando mal.</a:t>
             </a:r>
           </a:p>
         </p:txBody>
@@ -654,7 +714,7 @@
           <a:lstStyle/>
           <a:p>
             <a:r>
-              <a:t>Insista en que la cuarta pregunta es la que se califica: «Brooks dijo que agregar gente atrasa» está bien pero no muestra que lo entendieron. La cuarta obliga a conectarlo con algo que les pasó a ellos.</a:t>
+              <a:t>Haga la cuenta en voz alta con el grupo antes de mostrar los números: pregunte cuántas parejas hay con 5 personas y deje que la calculen. Es aritmética de bachillerato y es lo que hace que la idea se quede.</a:t>
             </a:r>
           </a:p>
         </p:txBody>
@@ -724,19 +784,7 @@
           <a:lstStyle/>
           <a:p>
             <a:r>
-              <a:t>LA PREGUNTA DE ENTRADA Y PARA QUÉ SIRVE INCOMODAR CON UNA FECHA</a:t>
-            </a:r>
-          </a:p>
-          <a:p/>
-          <a:p>
-            <a:r>
-              <a:t>La pregunta de apertura —«un proyecto de software se pasa del plazo y del presupuesto, ¿es un problema de 2026 o de 1968?»— está formulada para producir una respuesta equivocada. Casi todo el grupo va a decir que es de 2026, porque la intuición de un estudiante de primer semestre es que la historia de la tecnología es una escalera: cada década resuelve los problemas de la anterior. Esa intuición es la que hay que romper hoy, porque de ella se deriva una creencia más dañina: que basta con aprender la herramienta nueva.</a:t>
-            </a:r>
-          </a:p>
-          <a:p/>
-          <a:p>
-            <a:r>
-              <a:t>Los primeros diez minutos, mientras se conectan, sirven para recoger esas respuestas en el muro. No hay que corregir ninguna. En el minuto 25, cuando ya esté contada la conferencia de Garmisch de 1968, se vuelve al muro y se lee en voz alta lo que escribieron. El contraste hace el trabajo solo: el problema que el grupo cree contemporáneo tiene casi sesenta años y un nombre propio.</a:t>
+              <a:t>Insista en que la cuarta pregunta es la que se califica: «Brooks dijo que agregar gente atrasa» está bien pero no muestra que lo entendieron. La cuarta obliga a conectarlo con algo que les pasó a ellos.</a:t>
             </a:r>
           </a:p>
         </p:txBody>
@@ -806,31 +854,19 @@
           <a:lstStyle/>
           <a:p>
             <a:r>
-              <a:t>POR QUÉ LA DISCIPLINA NACE DE UN FRACASO Y NO DE UN INVENTO</a:t>
+              <a:t>LA PREGUNTA DE ENTRADA Y PARA QUÉ SIRVE INCOMODAR CON UNA FECHA</a:t>
             </a:r>
           </a:p>
           <a:p/>
           <a:p>
             <a:r>
-              <a:t>Hay una diferencia grande entre contar la historia de la informática y contar la historia de la ingeniería de sistemas. La primera es una historia de máquinas: válvulas, transistores, circuitos integrados, microprocesadores. Es la que el estudiante espera y es la menos útil, porque sugiere que el progreso viene del hardware. La segunda es una historia de fracasos de organización, y es la que explica por qué existe la carrera que el estudiante está empezando.</a:t>
+              <a:t>La pregunta de apertura —«un proyecto de software se pasa del plazo y del presupuesto, ¿es un problema de 2026 o de 1968?»— está formulada para producir una respuesta equivocada. Casi todo el grupo va a decir que es de 2026, porque la intuición de un estudiante de primer semestre es que la historia de la tecnología es una escalera: cada década resuelve los problemas de la anterior. Esa intuición es la que hay que romper hoy, porque de ella se deriva una creencia más dañina: que basta con aprender la herramienta nueva.</a:t>
             </a:r>
           </a:p>
           <a:p/>
           <a:p>
             <a:r>
-              <a:t>En los años cuarenta y cincuenta el cuello de botella era la máquina. Programar el ENIAC significaba reconfigurar cables físicamente; escribir en lenguaje de máquina era lento porque la máquina era lo escaso y lo caro. Fortran (1957) y COBOL (1959) atacan exactamente ese problema: permitir decirle algo a la máquina sin hablar su idioma. Hasta aquí el trabajo lo hace una persona o un puñado de personas, y el método no importa mucho porque el problema cabe en una cabeza.</a:t>
-            </a:r>
-          </a:p>
-          <a:p/>
-          <a:p>
-            <a:r>
-              <a:t>En los años sesenta pasa algo que cambia la naturaleza del problema: el hardware se abarata y se vuelve más capaz, y entonces se vuelven pensables sistemas que antes no lo eran. El sistema de reservas aéreas SABRE, el software de navegación del programa Apollo, el sistema operativo OS/360 de IBM. Son proyectos de cientos y hasta miles de personas y de varios años. Y fracasan de forma espectacular en plazo y en costo, no porque las máquinas fueran lentas, sino porque nadie sabía cómo coordinar a mil personas construyendo una sola cosa que nadie puede ver ni tocar. Fred Brooks, que dirigió el OS/360, escribió después el libro que explica por qué.</a:t>
-            </a:r>
-          </a:p>
-          <a:p/>
-          <a:p>
-            <a:r>
-              <a:t>En 1968 la OTAN convoca una conferencia en Garmisch para hablar del asunto, y ahí se populariza el término «ingeniería de software». Vale la pena detenerse en que el término era una propuesta, casi una provocación: si construir software se parece a construir un puente, entonces debería tener método, estándares, mediciones y responsabilidad profesional, en vez de depender del talento de individuos. Ese es el momento fundacional que el estudiante tiene que recordar: la disciplina no nace de una máquina nueva, nace del reconocimiento público de que se estaba trabajando mal.</a:t>
+              <a:t>Los primeros diez minutos, mientras se conectan, sirven para recoger esas respuestas en el muro. No hay que corregir ninguna. En el minuto 25, cuando ya esté contada la conferencia de Garmisch de 1968, se vuelve al muro y se lee en voz alta lo que escribieron. El contraste hace el trabajo solo: el problema que el grupo cree contemporáneo tiene casi sesenta años y un nombre propio.</a:t>
             </a:r>
           </a:p>
         </p:txBody>
@@ -4910,9 +4946,33 @@
           </a:prstGeom>
         </p:spPr>
       </p:pic>
-      <p:sp>
-        <p:nvSpPr>
-          <p:cNvPr id="18" name="TextBox 17"/>
+      <p:pic>
+        <p:nvPicPr>
+          <p:cNvPr id="11" name="Picture 10" descr="hito-cuatro-preguntas-paso5.png"/>
+          <p:cNvPicPr>
+            <a:picLocks noChangeAspect="1"/>
+          </p:cNvPicPr>
+          <p:nvPr/>
+        </p:nvPicPr>
+        <p:blipFill>
+          <a:blip r:embed="rId6"/>
+          <a:stretch>
+            <a:fillRect/>
+          </a:stretch>
+        </p:blipFill>
+        <p:spPr>
+          <a:xfrm>
+            <a:off x="6007763" y="1472184"/>
+            <a:ext cx="5589270" cy="4471416"/>
+          </a:xfrm>
+          <a:prstGeom prst="rect">
+            <a:avLst/>
+          </a:prstGeom>
+        </p:spPr>
+      </p:pic>
+      <p:sp>
+        <p:nvSpPr>
+          <p:cNvPr id="23" name="TextBox 22"/>
           <p:cNvSpPr txBox="1"/>
           <p:nvPr/>
         </p:nvSpPr>
@@ -4947,7 +5007,7 @@
       </p:sp>
       <p:sp>
         <p:nvSpPr>
-          <p:cNvPr id="19" name="TextBox 18"/>
+          <p:cNvPr id="24" name="TextBox 23"/>
           <p:cNvSpPr txBox="1"/>
           <p:nvPr/>
         </p:nvSpPr>
@@ -5106,7 +5166,7 @@
       </p:sp>
       <p:sp>
         <p:nvSpPr>
-          <p:cNvPr id="20" name="TextBox 19"/>
+          <p:cNvPr id="25" name="TextBox 24"/>
           <p:cNvSpPr txBox="1"/>
           <p:nvPr/>
         </p:nvSpPr>
@@ -5299,6 +5359,59 @@
                                         <p:cTn id="17" dur="450"/>
                                         <p:tgtEl>
                                           <p:spTgt spid="10"/>
+                                        </p:tgtEl>
+                                      </p:cBhvr>
+                                    </p:animEffect>
+                                  </p:childTnLst>
+                                </p:cTn>
+                              </p:par>
+                            </p:childTnLst>
+                          </p:cTn>
+                        </p:par>
+                      </p:childTnLst>
+                    </p:cTn>
+                  </p:par>
+                  <p:par>
+                    <p:cTn id="18" fill="hold">
+                      <p:stCondLst>
+                        <p:cond delay="indefinite"/>
+                      </p:stCondLst>
+                      <p:childTnLst>
+                        <p:par>
+                          <p:cTn id="19" fill="hold">
+                            <p:stCondLst>
+                              <p:cond delay="0"/>
+                            </p:stCondLst>
+                            <p:childTnLst>
+                              <p:par>
+                                <p:cTn id="20" presetID="10" presetClass="entr" presetSubtype="0" fill="hold" nodeType="clickEffect">
+                                  <p:stCondLst>
+                                    <p:cond delay="0"/>
+                                  </p:stCondLst>
+                                  <p:childTnLst>
+                                    <p:set>
+                                      <p:cBhvr>
+                                        <p:cTn id="21" dur="1" fill="hold">
+                                          <p:stCondLst>
+                                            <p:cond delay="0"/>
+                                          </p:stCondLst>
+                                        </p:cTn>
+                                        <p:tgtEl>
+                                          <p:spTgt spid="11"/>
+                                        </p:tgtEl>
+                                        <p:attrNameLst>
+                                          <p:attrName>style.visibility</p:attrName>
+                                        </p:attrNameLst>
+                                      </p:cBhvr>
+                                      <p:to>
+                                        <p:strVal val="visible"/>
+                                      </p:to>
+                                    </p:set>
+                                    <p:animEffect transition="in" filter="fade">
+                                      <p:cBhvr>
+                                        <p:cTn id="22" dur="450"/>
+                                        <p:tgtEl>
+                                          <p:spTgt spid="11"/>
                                         </p:tgtEl>
                                       </p:cBhvr>
                                     </p:animEffect>
@@ -10150,14 +10263,83 @@
       </p:sp>
       <p:sp>
         <p:nvSpPr>
-          <p:cNvPr id="5" name="TextBox 4"/>
+          <p:cNvPr id="5" name="Rounded Rectangle 4"/>
+          <p:cNvSpPr/>
+          <p:nvPr/>
+        </p:nvSpPr>
+        <p:spPr>
+          <a:xfrm>
+            <a:off x="5797149" y="1343926"/>
+            <a:ext cx="6010497" cy="4837658"/>
+          </a:xfrm>
+          <a:prstGeom prst="roundRect">
+            <a:avLst>
+              <a:gd name="adj" fmla="val 4000"/>
+            </a:avLst>
+          </a:prstGeom>
+          <a:solidFill>
+            <a:srgbClr val="E8EEF4"/>
+          </a:solidFill>
+          <a:ln>
+            <a:noFill/>
+          </a:ln>
+        </p:spPr>
+        <p:style>
+          <a:lnRef idx="1">
+            <a:schemeClr val="accent1"/>
+          </a:lnRef>
+          <a:fillRef idx="3">
+            <a:schemeClr val="accent1"/>
+          </a:fillRef>
+          <a:effectRef idx="2">
+            <a:schemeClr val="accent1"/>
+          </a:effectRef>
+          <a:fontRef idx="minor">
+            <a:schemeClr val="lt1"/>
+          </a:fontRef>
+        </p:style>
+        <p:txBody>
+          <a:bodyPr rtlCol="0" anchor="ctr"/>
+          <a:lstStyle/>
+          <a:p>
+            <a:pPr algn="ctr"/>
+          </a:p>
+        </p:txBody>
+      </p:sp>
+      <p:pic>
+        <p:nvPicPr>
+          <p:cNvPr id="6" name="Picture 5" descr="ilus-cuello-botella-paso1.png"/>
+          <p:cNvPicPr>
+            <a:picLocks noChangeAspect="1"/>
+          </p:cNvPicPr>
+          <p:nvPr/>
+        </p:nvPicPr>
+        <p:blipFill>
+          <a:blip r:embed="rId2"/>
+          <a:stretch>
+            <a:fillRect/>
+          </a:stretch>
+        </p:blipFill>
+        <p:spPr>
+          <a:xfrm>
+            <a:off x="5870301" y="1417078"/>
+            <a:ext cx="5864193" cy="4691354"/>
+          </a:xfrm>
+          <a:prstGeom prst="rect">
+            <a:avLst/>
+          </a:prstGeom>
+        </p:spPr>
+      </p:pic>
+      <p:sp>
+        <p:nvSpPr>
+          <p:cNvPr id="7" name="TextBox 6"/>
           <p:cNvSpPr txBox="1"/>
           <p:nvPr/>
         </p:nvSpPr>
         <p:spPr>
           <a:xfrm>
-            <a:off x="457200" y="1170432"/>
-            <a:ext cx="11277295" cy="5230368"/>
+            <a:off x="457200" y="1353312"/>
+            <a:ext cx="5093061" cy="5047488"/>
           </a:xfrm>
           <a:prstGeom prst="rect">
             <a:avLst/>
@@ -10218,7 +10400,7 @@
                 </a:solidFill>
                 <a:latin typeface="Calibri"/>
               </a:rPr>
-              <a:t>. Programar es escribir instrucciones para una máquina concreta, y el trabajo es de una persona o de unas pocas.</a:t>
+              <a:t>.</a:t>
             </a:r>
           </a:p>
           <a:p>
@@ -10270,24 +10452,6 @@
                 </a:solidFill>
                 <a:latin typeface="Calibri"/>
               </a:rPr>
-              <a:t>. Ahí el cuello de botella se muda: ya no es la máquina, es </a:t>
-            </a:r>
-            <a:r>
-              <a:rPr sz="2000" b="1" i="0">
-                <a:solidFill>
-                  <a:srgbClr val="333333"/>
-                </a:solidFill>
-                <a:latin typeface="Calibri"/>
-              </a:rPr>
-              <a:t>coordinar el trabajo humano</a:t>
-            </a:r>
-            <a:r>
-              <a:rPr sz="2000" b="0" i="0">
-                <a:solidFill>
-                  <a:srgbClr val="333333"/>
-                </a:solidFill>
-                <a:latin typeface="Calibri"/>
-              </a:rPr>
               <a:t>.</a:t>
             </a:r>
           </a:p>
@@ -10304,136 +10468,14 @@
                 </a:solidFill>
                 <a:latin typeface="Calibri"/>
               </a:rPr>
-              <a:t>–   El sistema de reservas SABRE, el software del programa Apollo y el sistema operativo OS/360 de IBM son los tres casos que hicieron visible el problema: </a:t>
-            </a:r>
-            <a:r>
-              <a:rPr sz="2000" b="1" i="0">
-                <a:solidFill>
-                  <a:srgbClr val="333333"/>
-                </a:solidFill>
-                <a:latin typeface="Calibri"/>
-              </a:rPr>
-              <a:t>se pasaron de plazo y de presupuesto de forma escandalosa</a:t>
-            </a:r>
-            <a:r>
-              <a:rPr sz="2000" b="0" i="0">
-                <a:solidFill>
-                  <a:srgbClr val="333333"/>
-                </a:solidFill>
-                <a:latin typeface="Calibri"/>
-              </a:rPr>
-              <a:t>.</a:t>
-            </a:r>
-          </a:p>
-          <a:p>
-            <a:pPr>
-              <a:spcAft>
-                <a:spcPts val="800"/>
-              </a:spcAft>
-            </a:pPr>
-            <a:r>
-              <a:rPr sz="2000" b="0" i="0">
-                <a:solidFill>
-                  <a:srgbClr val="333333"/>
-                </a:solidFill>
-                <a:latin typeface="Calibri"/>
-              </a:rPr>
-              <a:t>–   </a:t>
-            </a:r>
-            <a:r>
-              <a:rPr sz="2000" b="1" i="0">
-                <a:solidFill>
-                  <a:srgbClr val="333333"/>
-                </a:solidFill>
-                <a:latin typeface="Calibri"/>
-              </a:rPr>
-              <a:t>1968:</a:t>
-            </a:r>
-            <a:r>
-              <a:rPr sz="2000" b="0" i="0">
-                <a:solidFill>
-                  <a:srgbClr val="333333"/>
-                </a:solidFill>
-                <a:latin typeface="Calibri"/>
-              </a:rPr>
-              <a:t> la OTAN convoca una conferencia en Garmisch (Alemania) para hablar de eso y se acuña el término </a:t>
-            </a:r>
-            <a:r>
-              <a:rPr sz="2000" b="1" i="0">
-                <a:solidFill>
-                  <a:srgbClr val="333333"/>
-                </a:solidFill>
-                <a:latin typeface="Calibri"/>
-              </a:rPr>
-              <a:t>«ingeniería de software»</a:t>
-            </a:r>
-            <a:r>
-              <a:rPr sz="2000" b="0" i="0">
-                <a:solidFill>
-                  <a:srgbClr val="333333"/>
-                </a:solidFill>
-                <a:latin typeface="Calibri"/>
-              </a:rPr>
-              <a:t>. El nombre es una propuesta: si construir software se parece a construir un puente, entonces necesita </a:t>
-            </a:r>
-            <a:r>
-              <a:rPr sz="2000" b="1" i="0">
-                <a:solidFill>
-                  <a:srgbClr val="333333"/>
-                </a:solidFill>
-                <a:latin typeface="Calibri"/>
-              </a:rPr>
-              <a:t>método, no talento individual</a:t>
-            </a:r>
-            <a:r>
-              <a:rPr sz="2000" b="0" i="0">
-                <a:solidFill>
-                  <a:srgbClr val="333333"/>
-                </a:solidFill>
-                <a:latin typeface="Calibri"/>
-              </a:rPr>
-              <a:t>.</a:t>
-            </a:r>
-          </a:p>
-          <a:p>
-            <a:pPr>
-              <a:spcAft>
-                <a:spcPts val="800"/>
-              </a:spcAft>
-            </a:pPr>
-            <a:r>
-              <a:rPr sz="2000" b="0" i="0">
-                <a:solidFill>
-                  <a:srgbClr val="333333"/>
-                </a:solidFill>
-                <a:latin typeface="Calibri"/>
-              </a:rPr>
-              <a:t>–   </a:t>
-            </a:r>
-            <a:r>
-              <a:rPr sz="2000" b="1" i="0">
-                <a:solidFill>
-                  <a:srgbClr val="333333"/>
-                </a:solidFill>
-                <a:latin typeface="Calibri"/>
-              </a:rPr>
-              <a:t>Ahí nace la disciplina:</a:t>
-            </a:r>
-            <a:r>
-              <a:rPr sz="2000" b="0" i="0">
-                <a:solidFill>
-                  <a:srgbClr val="333333"/>
-                </a:solidFill>
-                <a:latin typeface="Calibri"/>
-              </a:rPr>
-              <a:t> no de un invento, sino del reconocimiento público de que el trabajo se estaba haciendo mal y nadie sabía cómo hacerlo bien.</a:t>
-            </a:r>
-          </a:p>
-        </p:txBody>
-      </p:sp>
-      <p:sp>
-        <p:nvSpPr>
-          <p:cNvPr id="6" name="TextBox 5"/>
+              <a:t>–   El sistema de reservas SABRE, el software del programa Apollo y el sistema operativo OS/360 de IBM son los tres casos que hicieron visible el…</a:t>
+            </a:r>
+          </a:p>
+        </p:txBody>
+      </p:sp>
+      <p:sp>
+        <p:nvSpPr>
+          <p:cNvPr id="8" name="TextBox 7"/>
           <p:cNvSpPr txBox="1"/>
           <p:nvPr/>
         </p:nvSpPr>

--- a/Introduccion a la Ingenieria/Clases/Clase 2 - Historia y evolucion de la Ingenieria/Presentacion.pptx
+++ b/Introduccion a la Ingenieria/Clases/Clase 2 - Historia y evolucion de la Ingenieria/Presentacion.pptx
@@ -1054,7 +1054,7 @@
           <a:p/>
           <a:p>
             <a:r>
-              <a:t>1975 es Brooks y «The Mythical Man-Month». La idea que hay que dejar es contraintuitiva y utilísima para un curso donde se trabaja en equipos de cinco: agregar gente a un proyecto atrasado lo atrasa más, porque los canales de comunicación crecen mucho más rápido que las personas. Con 5 personas hay 10 parejas que se tienen que entender; con 10 personas hay 45. Es un dato verificable con una fórmula de bachillerato y explica por qué en este curso los equipos son de cinco y no de diez.</a:t>
+              <a:t>1975 es Brooks y «The Mythical Man-Month». La idea que hay que dejar es sorprendente y utilísima para un curso donde se trabaja en equipos de cinco: agregar gente a un proyecto atrasado lo atrasa más, porque los canales de comunicación crecen mucho más rápido que las personas. Con 5 personas hay 10 parejas que se tienen que entender; con 10 personas hay 45. Es un dato verificable con una fórmula de bachillerato y explica por qué en este curso los equipos son de cinco y no de diez.</a:t>
             </a:r>
           </a:p>
           <a:p/>
